--- a/docs/專案介紹.pptx
+++ b/docs/專案介紹.pptx
@@ -89,9 +89,9 @@
         </a:solidFill>
         <a:effectLst/>
         <a:uFillTx/>
-        <a:latin typeface="+mn-lt"/>
-        <a:ea typeface="+mn-ea"/>
-        <a:cs typeface="+mn-cs"/>
+        <a:latin typeface="+mj-lt"/>
+        <a:ea typeface="+mj-ea"/>
+        <a:cs typeface="+mj-cs"/>
         <a:sym typeface="Calibri"/>
       </a:defRPr>
     </a:lvl1pPr>
@@ -119,9 +119,9 @@
         </a:solidFill>
         <a:effectLst/>
         <a:uFillTx/>
-        <a:latin typeface="+mn-lt"/>
-        <a:ea typeface="+mn-ea"/>
-        <a:cs typeface="+mn-cs"/>
+        <a:latin typeface="+mj-lt"/>
+        <a:ea typeface="+mj-ea"/>
+        <a:cs typeface="+mj-cs"/>
         <a:sym typeface="Calibri"/>
       </a:defRPr>
     </a:lvl2pPr>
@@ -149,9 +149,9 @@
         </a:solidFill>
         <a:effectLst/>
         <a:uFillTx/>
-        <a:latin typeface="+mn-lt"/>
-        <a:ea typeface="+mn-ea"/>
-        <a:cs typeface="+mn-cs"/>
+        <a:latin typeface="+mj-lt"/>
+        <a:ea typeface="+mj-ea"/>
+        <a:cs typeface="+mj-cs"/>
         <a:sym typeface="Calibri"/>
       </a:defRPr>
     </a:lvl3pPr>
@@ -179,9 +179,9 @@
         </a:solidFill>
         <a:effectLst/>
         <a:uFillTx/>
-        <a:latin typeface="+mn-lt"/>
-        <a:ea typeface="+mn-ea"/>
-        <a:cs typeface="+mn-cs"/>
+        <a:latin typeface="+mj-lt"/>
+        <a:ea typeface="+mj-ea"/>
+        <a:cs typeface="+mj-cs"/>
         <a:sym typeface="Calibri"/>
       </a:defRPr>
     </a:lvl4pPr>
@@ -209,9 +209,9 @@
         </a:solidFill>
         <a:effectLst/>
         <a:uFillTx/>
-        <a:latin typeface="+mn-lt"/>
-        <a:ea typeface="+mn-ea"/>
-        <a:cs typeface="+mn-cs"/>
+        <a:latin typeface="+mj-lt"/>
+        <a:ea typeface="+mj-ea"/>
+        <a:cs typeface="+mj-cs"/>
         <a:sym typeface="Calibri"/>
       </a:defRPr>
     </a:lvl5pPr>
@@ -239,9 +239,9 @@
         </a:solidFill>
         <a:effectLst/>
         <a:uFillTx/>
-        <a:latin typeface="+mn-lt"/>
-        <a:ea typeface="+mn-ea"/>
-        <a:cs typeface="+mn-cs"/>
+        <a:latin typeface="+mj-lt"/>
+        <a:ea typeface="+mj-ea"/>
+        <a:cs typeface="+mj-cs"/>
         <a:sym typeface="Calibri"/>
       </a:defRPr>
     </a:lvl6pPr>
@@ -269,9 +269,9 @@
         </a:solidFill>
         <a:effectLst/>
         <a:uFillTx/>
-        <a:latin typeface="+mn-lt"/>
-        <a:ea typeface="+mn-ea"/>
-        <a:cs typeface="+mn-cs"/>
+        <a:latin typeface="+mj-lt"/>
+        <a:ea typeface="+mj-ea"/>
+        <a:cs typeface="+mj-cs"/>
         <a:sym typeface="Calibri"/>
       </a:defRPr>
     </a:lvl7pPr>
@@ -299,9 +299,9 @@
         </a:solidFill>
         <a:effectLst/>
         <a:uFillTx/>
-        <a:latin typeface="+mn-lt"/>
-        <a:ea typeface="+mn-ea"/>
-        <a:cs typeface="+mn-cs"/>
+        <a:latin typeface="+mj-lt"/>
+        <a:ea typeface="+mj-ea"/>
+        <a:cs typeface="+mj-cs"/>
         <a:sym typeface="Calibri"/>
       </a:defRPr>
     </a:lvl8pPr>
@@ -329,9 +329,9 @@
         </a:solidFill>
         <a:effectLst/>
         <a:uFillTx/>
-        <a:latin typeface="+mn-lt"/>
-        <a:ea typeface="+mn-ea"/>
-        <a:cs typeface="+mn-cs"/>
+        <a:latin typeface="+mj-lt"/>
+        <a:ea typeface="+mj-ea"/>
+        <a:cs typeface="+mj-cs"/>
         <a:sym typeface="Calibri"/>
       </a:defRPr>
     </a:lvl9pPr>
@@ -416,73 +416,73 @@
   <p:notesStyle>
     <a:lvl1pPr defTabSz="457200" latinLnBrk="0">
       <a:defRPr sz="1200">
-        <a:latin typeface="+mn-lt"/>
-        <a:ea typeface="+mn-ea"/>
-        <a:cs typeface="+mn-cs"/>
+        <a:latin typeface="+mj-lt"/>
+        <a:ea typeface="+mj-ea"/>
+        <a:cs typeface="+mj-cs"/>
         <a:sym typeface="Calibri"/>
       </a:defRPr>
     </a:lvl1pPr>
     <a:lvl2pPr indent="228600" defTabSz="457200" latinLnBrk="0">
       <a:defRPr sz="1200">
-        <a:latin typeface="+mn-lt"/>
-        <a:ea typeface="+mn-ea"/>
-        <a:cs typeface="+mn-cs"/>
+        <a:latin typeface="+mj-lt"/>
+        <a:ea typeface="+mj-ea"/>
+        <a:cs typeface="+mj-cs"/>
         <a:sym typeface="Calibri"/>
       </a:defRPr>
     </a:lvl2pPr>
     <a:lvl3pPr indent="457200" defTabSz="457200" latinLnBrk="0">
       <a:defRPr sz="1200">
-        <a:latin typeface="+mn-lt"/>
-        <a:ea typeface="+mn-ea"/>
-        <a:cs typeface="+mn-cs"/>
+        <a:latin typeface="+mj-lt"/>
+        <a:ea typeface="+mj-ea"/>
+        <a:cs typeface="+mj-cs"/>
         <a:sym typeface="Calibri"/>
       </a:defRPr>
     </a:lvl3pPr>
     <a:lvl4pPr indent="685800" defTabSz="457200" latinLnBrk="0">
       <a:defRPr sz="1200">
-        <a:latin typeface="+mn-lt"/>
-        <a:ea typeface="+mn-ea"/>
-        <a:cs typeface="+mn-cs"/>
+        <a:latin typeface="+mj-lt"/>
+        <a:ea typeface="+mj-ea"/>
+        <a:cs typeface="+mj-cs"/>
         <a:sym typeface="Calibri"/>
       </a:defRPr>
     </a:lvl4pPr>
     <a:lvl5pPr indent="914400" defTabSz="457200" latinLnBrk="0">
       <a:defRPr sz="1200">
-        <a:latin typeface="+mn-lt"/>
-        <a:ea typeface="+mn-ea"/>
-        <a:cs typeface="+mn-cs"/>
+        <a:latin typeface="+mj-lt"/>
+        <a:ea typeface="+mj-ea"/>
+        <a:cs typeface="+mj-cs"/>
         <a:sym typeface="Calibri"/>
       </a:defRPr>
     </a:lvl5pPr>
     <a:lvl6pPr indent="1143000" defTabSz="457200" latinLnBrk="0">
       <a:defRPr sz="1200">
-        <a:latin typeface="+mn-lt"/>
-        <a:ea typeface="+mn-ea"/>
-        <a:cs typeface="+mn-cs"/>
+        <a:latin typeface="+mj-lt"/>
+        <a:ea typeface="+mj-ea"/>
+        <a:cs typeface="+mj-cs"/>
         <a:sym typeface="Calibri"/>
       </a:defRPr>
     </a:lvl6pPr>
     <a:lvl7pPr indent="1371600" defTabSz="457200" latinLnBrk="0">
       <a:defRPr sz="1200">
-        <a:latin typeface="+mn-lt"/>
-        <a:ea typeface="+mn-ea"/>
-        <a:cs typeface="+mn-cs"/>
+        <a:latin typeface="+mj-lt"/>
+        <a:ea typeface="+mj-ea"/>
+        <a:cs typeface="+mj-cs"/>
         <a:sym typeface="Calibri"/>
       </a:defRPr>
     </a:lvl7pPr>
     <a:lvl8pPr indent="1600200" defTabSz="457200" latinLnBrk="0">
       <a:defRPr sz="1200">
-        <a:latin typeface="+mn-lt"/>
-        <a:ea typeface="+mn-ea"/>
-        <a:cs typeface="+mn-cs"/>
+        <a:latin typeface="+mj-lt"/>
+        <a:ea typeface="+mj-ea"/>
+        <a:cs typeface="+mj-cs"/>
         <a:sym typeface="Calibri"/>
       </a:defRPr>
     </a:lvl8pPr>
     <a:lvl9pPr indent="1828800" defTabSz="457200" latinLnBrk="0">
       <a:defRPr sz="1200">
-        <a:latin typeface="+mn-lt"/>
-        <a:ea typeface="+mn-ea"/>
-        <a:cs typeface="+mn-cs"/>
+        <a:latin typeface="+mj-lt"/>
+        <a:ea typeface="+mj-ea"/>
+        <a:cs typeface="+mj-cs"/>
         <a:sym typeface="Calibri"/>
       </a:defRPr>
     </a:lvl9pPr>
@@ -849,7 +849,7 @@
         <p:spPr>
           <a:xfrm>
             <a:off x="722312" y="2906713"/>
-            <a:ext cx="7772401" cy="1500201"/>
+            <a:ext cx="7772401" cy="1500202"/>
           </a:xfrm>
           <a:prstGeom prst="rect">
             <a:avLst/>
@@ -1292,7 +1292,7 @@
         <p:spPr>
           <a:xfrm>
             <a:off x="4645025" y="1535111"/>
-            <a:ext cx="4041775" cy="639777"/>
+            <a:ext cx="4041775" cy="639778"/>
           </a:xfrm>
           <a:prstGeom prst="rect">
             <a:avLst/>
@@ -1701,7 +1701,7 @@
         <p:spPr>
           <a:xfrm>
             <a:off x="1792288" y="5367337"/>
-            <a:ext cx="5486404" cy="804876"/>
+            <a:ext cx="5486404" cy="804877"/>
           </a:xfrm>
           <a:prstGeom prst="rect">
             <a:avLst/>
@@ -2019,9 +2019,9 @@
             <a:srgbClr val="000000"/>
           </a:solidFill>
           <a:uFillTx/>
-          <a:latin typeface="+mn-lt"/>
-          <a:ea typeface="+mn-ea"/>
-          <a:cs typeface="+mn-cs"/>
+          <a:latin typeface="+mj-lt"/>
+          <a:ea typeface="+mj-ea"/>
+          <a:cs typeface="+mj-cs"/>
           <a:sym typeface="Calibri"/>
         </a:defRPr>
       </a:lvl1pPr>
@@ -2045,9 +2045,9 @@
             <a:srgbClr val="000000"/>
           </a:solidFill>
           <a:uFillTx/>
-          <a:latin typeface="+mn-lt"/>
-          <a:ea typeface="+mn-ea"/>
-          <a:cs typeface="+mn-cs"/>
+          <a:latin typeface="+mj-lt"/>
+          <a:ea typeface="+mj-ea"/>
+          <a:cs typeface="+mj-cs"/>
           <a:sym typeface="Calibri"/>
         </a:defRPr>
       </a:lvl2pPr>
@@ -2071,9 +2071,9 @@
             <a:srgbClr val="000000"/>
           </a:solidFill>
           <a:uFillTx/>
-          <a:latin typeface="+mn-lt"/>
-          <a:ea typeface="+mn-ea"/>
-          <a:cs typeface="+mn-cs"/>
+          <a:latin typeface="+mj-lt"/>
+          <a:ea typeface="+mj-ea"/>
+          <a:cs typeface="+mj-cs"/>
           <a:sym typeface="Calibri"/>
         </a:defRPr>
       </a:lvl3pPr>
@@ -2097,9 +2097,9 @@
             <a:srgbClr val="000000"/>
           </a:solidFill>
           <a:uFillTx/>
-          <a:latin typeface="+mn-lt"/>
-          <a:ea typeface="+mn-ea"/>
-          <a:cs typeface="+mn-cs"/>
+          <a:latin typeface="+mj-lt"/>
+          <a:ea typeface="+mj-ea"/>
+          <a:cs typeface="+mj-cs"/>
           <a:sym typeface="Calibri"/>
         </a:defRPr>
       </a:lvl4pPr>
@@ -2123,9 +2123,9 @@
             <a:srgbClr val="000000"/>
           </a:solidFill>
           <a:uFillTx/>
-          <a:latin typeface="+mn-lt"/>
-          <a:ea typeface="+mn-ea"/>
-          <a:cs typeface="+mn-cs"/>
+          <a:latin typeface="+mj-lt"/>
+          <a:ea typeface="+mj-ea"/>
+          <a:cs typeface="+mj-cs"/>
           <a:sym typeface="Calibri"/>
         </a:defRPr>
       </a:lvl5pPr>
@@ -2149,9 +2149,9 @@
             <a:srgbClr val="000000"/>
           </a:solidFill>
           <a:uFillTx/>
-          <a:latin typeface="+mn-lt"/>
-          <a:ea typeface="+mn-ea"/>
-          <a:cs typeface="+mn-cs"/>
+          <a:latin typeface="+mj-lt"/>
+          <a:ea typeface="+mj-ea"/>
+          <a:cs typeface="+mj-cs"/>
           <a:sym typeface="Calibri"/>
         </a:defRPr>
       </a:lvl6pPr>
@@ -2175,9 +2175,9 @@
             <a:srgbClr val="000000"/>
           </a:solidFill>
           <a:uFillTx/>
-          <a:latin typeface="+mn-lt"/>
-          <a:ea typeface="+mn-ea"/>
-          <a:cs typeface="+mn-cs"/>
+          <a:latin typeface="+mj-lt"/>
+          <a:ea typeface="+mj-ea"/>
+          <a:cs typeface="+mj-cs"/>
           <a:sym typeface="Calibri"/>
         </a:defRPr>
       </a:lvl7pPr>
@@ -2201,9 +2201,9 @@
             <a:srgbClr val="000000"/>
           </a:solidFill>
           <a:uFillTx/>
-          <a:latin typeface="+mn-lt"/>
-          <a:ea typeface="+mn-ea"/>
-          <a:cs typeface="+mn-cs"/>
+          <a:latin typeface="+mj-lt"/>
+          <a:ea typeface="+mj-ea"/>
+          <a:cs typeface="+mj-cs"/>
           <a:sym typeface="Calibri"/>
         </a:defRPr>
       </a:lvl8pPr>
@@ -2227,9 +2227,9 @@
             <a:srgbClr val="000000"/>
           </a:solidFill>
           <a:uFillTx/>
-          <a:latin typeface="+mn-lt"/>
-          <a:ea typeface="+mn-ea"/>
-          <a:cs typeface="+mn-cs"/>
+          <a:latin typeface="+mj-lt"/>
+          <a:ea typeface="+mj-ea"/>
+          <a:cs typeface="+mj-cs"/>
           <a:sym typeface="Calibri"/>
         </a:defRPr>
       </a:lvl9pPr>
@@ -2255,9 +2255,9 @@
             <a:srgbClr val="000000"/>
           </a:solidFill>
           <a:uFillTx/>
-          <a:latin typeface="+mn-lt"/>
-          <a:ea typeface="+mn-ea"/>
-          <a:cs typeface="+mn-cs"/>
+          <a:latin typeface="+mj-lt"/>
+          <a:ea typeface="+mj-ea"/>
+          <a:cs typeface="+mj-cs"/>
           <a:sym typeface="Calibri"/>
         </a:defRPr>
       </a:lvl1pPr>
@@ -2281,9 +2281,9 @@
             <a:srgbClr val="000000"/>
           </a:solidFill>
           <a:uFillTx/>
-          <a:latin typeface="+mn-lt"/>
-          <a:ea typeface="+mn-ea"/>
-          <a:cs typeface="+mn-cs"/>
+          <a:latin typeface="+mj-lt"/>
+          <a:ea typeface="+mj-ea"/>
+          <a:cs typeface="+mj-cs"/>
           <a:sym typeface="Calibri"/>
         </a:defRPr>
       </a:lvl2pPr>
@@ -2307,9 +2307,9 @@
             <a:srgbClr val="000000"/>
           </a:solidFill>
           <a:uFillTx/>
-          <a:latin typeface="+mn-lt"/>
-          <a:ea typeface="+mn-ea"/>
-          <a:cs typeface="+mn-cs"/>
+          <a:latin typeface="+mj-lt"/>
+          <a:ea typeface="+mj-ea"/>
+          <a:cs typeface="+mj-cs"/>
           <a:sym typeface="Calibri"/>
         </a:defRPr>
       </a:lvl3pPr>
@@ -2333,9 +2333,9 @@
             <a:srgbClr val="000000"/>
           </a:solidFill>
           <a:uFillTx/>
-          <a:latin typeface="+mn-lt"/>
-          <a:ea typeface="+mn-ea"/>
-          <a:cs typeface="+mn-cs"/>
+          <a:latin typeface="+mj-lt"/>
+          <a:ea typeface="+mj-ea"/>
+          <a:cs typeface="+mj-cs"/>
           <a:sym typeface="Calibri"/>
         </a:defRPr>
       </a:lvl4pPr>
@@ -2359,9 +2359,9 @@
             <a:srgbClr val="000000"/>
           </a:solidFill>
           <a:uFillTx/>
-          <a:latin typeface="+mn-lt"/>
-          <a:ea typeface="+mn-ea"/>
-          <a:cs typeface="+mn-cs"/>
+          <a:latin typeface="+mj-lt"/>
+          <a:ea typeface="+mj-ea"/>
+          <a:cs typeface="+mj-cs"/>
           <a:sym typeface="Calibri"/>
         </a:defRPr>
       </a:lvl5pPr>
@@ -2385,9 +2385,9 @@
             <a:srgbClr val="000000"/>
           </a:solidFill>
           <a:uFillTx/>
-          <a:latin typeface="+mn-lt"/>
-          <a:ea typeface="+mn-ea"/>
-          <a:cs typeface="+mn-cs"/>
+          <a:latin typeface="+mj-lt"/>
+          <a:ea typeface="+mj-ea"/>
+          <a:cs typeface="+mj-cs"/>
           <a:sym typeface="Calibri"/>
         </a:defRPr>
       </a:lvl6pPr>
@@ -2411,9 +2411,9 @@
             <a:srgbClr val="000000"/>
           </a:solidFill>
           <a:uFillTx/>
-          <a:latin typeface="+mn-lt"/>
-          <a:ea typeface="+mn-ea"/>
-          <a:cs typeface="+mn-cs"/>
+          <a:latin typeface="+mj-lt"/>
+          <a:ea typeface="+mj-ea"/>
+          <a:cs typeface="+mj-cs"/>
           <a:sym typeface="Calibri"/>
         </a:defRPr>
       </a:lvl7pPr>
@@ -2437,9 +2437,9 @@
             <a:srgbClr val="000000"/>
           </a:solidFill>
           <a:uFillTx/>
-          <a:latin typeface="+mn-lt"/>
-          <a:ea typeface="+mn-ea"/>
-          <a:cs typeface="+mn-cs"/>
+          <a:latin typeface="+mj-lt"/>
+          <a:ea typeface="+mj-ea"/>
+          <a:cs typeface="+mj-cs"/>
           <a:sym typeface="Calibri"/>
         </a:defRPr>
       </a:lvl8pPr>
@@ -2463,9 +2463,9 @@
             <a:srgbClr val="000000"/>
           </a:solidFill>
           <a:uFillTx/>
-          <a:latin typeface="+mn-lt"/>
-          <a:ea typeface="+mn-ea"/>
-          <a:cs typeface="+mn-cs"/>
+          <a:latin typeface="+mj-lt"/>
+          <a:ea typeface="+mj-ea"/>
+          <a:cs typeface="+mj-cs"/>
           <a:sym typeface="Calibri"/>
         </a:defRPr>
       </a:lvl9pPr>
@@ -2777,8 +2777,8 @@
         </p:nvSpPr>
         <p:spPr>
           <a:xfrm>
-            <a:off x="685800" y="914400"/>
-            <a:ext cx="2377441" cy="0"/>
+            <a:off x="685799" y="914400"/>
+            <a:ext cx="2377442" cy="0"/>
           </a:xfrm>
           <a:prstGeom prst="line">
             <a:avLst/>
@@ -2805,8 +2805,8 @@
         </p:nvSpPr>
         <p:spPr>
           <a:xfrm>
-            <a:off x="658368" y="886967"/>
-            <a:ext cx="54864" cy="54865"/>
+            <a:off x="658368" y="886966"/>
+            <a:ext cx="54864" cy="54867"/>
           </a:xfrm>
           <a:prstGeom prst="ellipse">
             <a:avLst/>
@@ -2840,8 +2840,8 @@
         </p:nvSpPr>
         <p:spPr>
           <a:xfrm>
-            <a:off x="1450847" y="886967"/>
-            <a:ext cx="54865" cy="54865"/>
+            <a:off x="1450847" y="886966"/>
+            <a:ext cx="54867" cy="54867"/>
           </a:xfrm>
           <a:prstGeom prst="ellipse">
             <a:avLst/>
@@ -2875,8 +2875,8 @@
         </p:nvSpPr>
         <p:spPr>
           <a:xfrm>
-            <a:off x="2243327" y="886967"/>
-            <a:ext cx="54865" cy="54865"/>
+            <a:off x="2243327" y="886966"/>
+            <a:ext cx="54867" cy="54867"/>
           </a:xfrm>
           <a:prstGeom prst="ellipse">
             <a:avLst/>
@@ -2910,8 +2910,8 @@
         </p:nvSpPr>
         <p:spPr>
           <a:xfrm>
-            <a:off x="3035807" y="886967"/>
-            <a:ext cx="54865" cy="54865"/>
+            <a:off x="3035806" y="886966"/>
+            <a:ext cx="54867" cy="54867"/>
           </a:xfrm>
           <a:prstGeom prst="ellipse">
             <a:avLst/>
@@ -2945,8 +2945,8 @@
         </p:nvSpPr>
         <p:spPr>
           <a:xfrm>
-            <a:off x="685799" y="1280160"/>
-            <a:ext cx="10607042" cy="266701"/>
+            <a:off x="685798" y="1280160"/>
+            <a:ext cx="10607044" cy="266701"/>
           </a:xfrm>
           <a:prstGeom prst="rect">
             <a:avLst/>
@@ -2993,8 +2993,8 @@
         </p:nvSpPr>
         <p:spPr>
           <a:xfrm>
-            <a:off x="685799" y="1828800"/>
-            <a:ext cx="10607042" cy="825501"/>
+            <a:off x="685798" y="1828800"/>
+            <a:ext cx="10607044" cy="825501"/>
           </a:xfrm>
           <a:prstGeom prst="rect">
             <a:avLst/>
@@ -3044,8 +3044,8 @@
         </p:nvSpPr>
         <p:spPr>
           <a:xfrm>
-            <a:off x="685799" y="3063239"/>
-            <a:ext cx="10607042" cy="419101"/>
+            <a:off x="685798" y="3063239"/>
+            <a:ext cx="10607044" cy="419101"/>
           </a:xfrm>
           <a:prstGeom prst="rect">
             <a:avLst/>
@@ -3092,8 +3092,8 @@
         </p:nvSpPr>
         <p:spPr>
           <a:xfrm>
-            <a:off x="685800" y="4663440"/>
-            <a:ext cx="4983481" cy="1"/>
+            <a:off x="685799" y="4663440"/>
+            <a:ext cx="4983483" cy="2"/>
           </a:xfrm>
           <a:prstGeom prst="line">
             <a:avLst/>
@@ -3168,10 +3168,10 @@
         </p:nvGrpSpPr>
         <p:grpSpPr>
           <a:xfrm>
-            <a:off x="685800" y="6126479"/>
-            <a:ext cx="2999233" cy="310897"/>
+            <a:off x="685799" y="6126479"/>
+            <a:ext cx="2999236" cy="310899"/>
             <a:chOff x="0" y="0"/>
-            <a:chExt cx="2999232" cy="310895"/>
+            <a:chExt cx="2999234" cy="310898"/>
           </a:xfrm>
         </p:grpSpPr>
         <p:sp>
@@ -3182,8 +3182,8 @@
           </p:nvSpPr>
           <p:spPr>
             <a:xfrm>
-              <a:off x="0" y="0"/>
-              <a:ext cx="2999233" cy="310896"/>
+              <a:off x="-1" y="0"/>
+              <a:ext cx="2999236" cy="310899"/>
             </a:xfrm>
             <a:prstGeom prst="roundRect">
               <a:avLst>
@@ -3224,7 +3224,7 @@
           <p:spPr>
             <a:xfrm>
               <a:off x="820414" y="72898"/>
-              <a:ext cx="1358404" cy="165101"/>
+              <a:ext cx="1358405" cy="165101"/>
             </a:xfrm>
             <a:prstGeom prst="rect">
               <a:avLst/>
@@ -3267,6 +3267,382 @@
           </p:txBody>
         </p:sp>
       </p:grpSp>
+      <p:sp>
+        <p:nvSpPr>
+          <p:cNvPr id="108" name="Rectangle 107"/>
+          <p:cNvSpPr/>
+          <p:nvPr/>
+        </p:nvSpPr>
+        <p:spPr>
+          <a:xfrm>
+            <a:off x="8778240" y="1371599"/>
+            <a:ext cx="2194561" cy="91442"/>
+          </a:xfrm>
+          <a:prstGeom prst="rect">
+            <a:avLst/>
+          </a:prstGeom>
+          <a:solidFill>
+            <a:srgbClr val="F5A524"/>
+          </a:solidFill>
+          <a:ln w="12700">
+            <a:miter lim="400000"/>
+          </a:ln>
+        </p:spPr>
+        <p:txBody>
+          <a:bodyPr lIns="45718" tIns="45718" rIns="45718" bIns="45718" anchor="ctr"/>
+          <a:lstStyle/>
+          <a:p>
+            <a:pPr algn="ctr">
+              <a:defRPr>
+                <a:solidFill>
+                  <a:srgbClr val="FFFFFF"/>
+                </a:solidFill>
+              </a:defRPr>
+            </a:pPr>
+          </a:p>
+        </p:txBody>
+      </p:sp>
+      <p:sp>
+        <p:nvSpPr>
+          <p:cNvPr id="109" name="Rectangle 108"/>
+          <p:cNvSpPr/>
+          <p:nvPr/>
+        </p:nvSpPr>
+        <p:spPr>
+          <a:xfrm>
+            <a:off x="8778240" y="4846320"/>
+            <a:ext cx="2194561" cy="91441"/>
+          </a:xfrm>
+          <a:prstGeom prst="rect">
+            <a:avLst/>
+          </a:prstGeom>
+          <a:solidFill>
+            <a:srgbClr val="F5A524"/>
+          </a:solidFill>
+          <a:ln w="12700">
+            <a:miter lim="400000"/>
+          </a:ln>
+        </p:spPr>
+        <p:txBody>
+          <a:bodyPr lIns="45718" tIns="45718" rIns="45718" bIns="45718" anchor="ctr"/>
+          <a:lstStyle/>
+          <a:p>
+            <a:pPr algn="ctr">
+              <a:defRPr>
+                <a:solidFill>
+                  <a:srgbClr val="FFFFFF"/>
+                </a:solidFill>
+              </a:defRPr>
+            </a:pPr>
+          </a:p>
+        </p:txBody>
+      </p:sp>
+      <p:sp>
+        <p:nvSpPr>
+          <p:cNvPr id="110" name="Isosceles Triangle 109"/>
+          <p:cNvSpPr/>
+          <p:nvPr/>
+        </p:nvSpPr>
+        <p:spPr>
+          <a:xfrm rot="10800000">
+            <a:off x="8961119" y="1463039"/>
+            <a:ext cx="1828801" cy="1691641"/>
+          </a:xfrm>
+          <a:prstGeom prst="triangle">
+            <a:avLst/>
+          </a:prstGeom>
+          <a:ln w="28575">
+            <a:solidFill>
+              <a:srgbClr val="22D3EE"/>
+            </a:solidFill>
+          </a:ln>
+        </p:spPr>
+        <p:txBody>
+          <a:bodyPr lIns="45718" tIns="45718" rIns="45718" bIns="45718" anchor="ctr"/>
+          <a:lstStyle/>
+          <a:p>
+            <a:pPr algn="ctr">
+              <a:defRPr>
+                <a:solidFill>
+                  <a:srgbClr val="FFFFFF"/>
+                </a:solidFill>
+              </a:defRPr>
+            </a:pPr>
+          </a:p>
+        </p:txBody>
+      </p:sp>
+      <p:sp>
+        <p:nvSpPr>
+          <p:cNvPr id="111" name="Isosceles Triangle 110"/>
+          <p:cNvSpPr/>
+          <p:nvPr/>
+        </p:nvSpPr>
+        <p:spPr>
+          <a:xfrm>
+            <a:off x="8961119" y="3154679"/>
+            <a:ext cx="1828801" cy="1691642"/>
+          </a:xfrm>
+          <a:prstGeom prst="triangle">
+            <a:avLst/>
+          </a:prstGeom>
+          <a:ln w="28575">
+            <a:solidFill>
+              <a:srgbClr val="22D3EE"/>
+            </a:solidFill>
+          </a:ln>
+        </p:spPr>
+        <p:txBody>
+          <a:bodyPr lIns="45718" tIns="45718" rIns="45718" bIns="45718" anchor="ctr"/>
+          <a:lstStyle/>
+          <a:p>
+            <a:pPr algn="ctr">
+              <a:defRPr>
+                <a:solidFill>
+                  <a:srgbClr val="FFFFFF"/>
+                </a:solidFill>
+              </a:defRPr>
+            </a:pPr>
+          </a:p>
+        </p:txBody>
+      </p:sp>
+      <p:sp>
+        <p:nvSpPr>
+          <p:cNvPr id="112" name="Oval 111"/>
+          <p:cNvSpPr/>
+          <p:nvPr/>
+        </p:nvSpPr>
+        <p:spPr>
+          <a:xfrm>
+            <a:off x="9464040" y="4462271"/>
+            <a:ext cx="822961" cy="384049"/>
+          </a:xfrm>
+          <a:prstGeom prst="ellipse">
+            <a:avLst/>
+          </a:prstGeom>
+          <a:solidFill>
+            <a:srgbClr val="F5A524"/>
+          </a:solidFill>
+          <a:ln w="12700">
+            <a:miter lim="400000"/>
+          </a:ln>
+        </p:spPr>
+        <p:txBody>
+          <a:bodyPr lIns="45718" tIns="45718" rIns="45718" bIns="45718" anchor="ctr"/>
+          <a:lstStyle/>
+          <a:p>
+            <a:pPr algn="ctr">
+              <a:defRPr>
+                <a:solidFill>
+                  <a:srgbClr val="FFFFFF"/>
+                </a:solidFill>
+              </a:defRPr>
+            </a:pPr>
+          </a:p>
+        </p:txBody>
+      </p:sp>
+      <p:sp>
+        <p:nvSpPr>
+          <p:cNvPr id="113" name="Oval 112"/>
+          <p:cNvSpPr/>
+          <p:nvPr/>
+        </p:nvSpPr>
+        <p:spPr>
+          <a:xfrm>
+            <a:off x="9674352" y="2971799"/>
+            <a:ext cx="402337" cy="146306"/>
+          </a:xfrm>
+          <a:prstGeom prst="ellipse">
+            <a:avLst/>
+          </a:prstGeom>
+          <a:solidFill>
+            <a:srgbClr val="F5A524"/>
+          </a:solidFill>
+          <a:ln w="12700">
+            <a:miter lim="400000"/>
+          </a:ln>
+        </p:spPr>
+        <p:txBody>
+          <a:bodyPr lIns="45718" tIns="45718" rIns="45718" bIns="45718" anchor="ctr"/>
+          <a:lstStyle/>
+          <a:p>
+            <a:pPr algn="ctr">
+              <a:defRPr>
+                <a:solidFill>
+                  <a:srgbClr val="FFFFFF"/>
+                </a:solidFill>
+              </a:defRPr>
+            </a:pPr>
+          </a:p>
+        </p:txBody>
+      </p:sp>
+      <p:sp>
+        <p:nvSpPr>
+          <p:cNvPr id="114" name="Rectangle 113"/>
+          <p:cNvSpPr/>
+          <p:nvPr/>
+        </p:nvSpPr>
+        <p:spPr>
+          <a:xfrm>
+            <a:off x="9861804" y="3099816"/>
+            <a:ext cx="27433" cy="109729"/>
+          </a:xfrm>
+          <a:prstGeom prst="rect">
+            <a:avLst/>
+          </a:prstGeom>
+          <a:solidFill>
+            <a:srgbClr val="F5A524"/>
+          </a:solidFill>
+          <a:ln w="12700">
+            <a:miter lim="400000"/>
+          </a:ln>
+        </p:spPr>
+        <p:txBody>
+          <a:bodyPr lIns="45718" tIns="45718" rIns="45718" bIns="45718" anchor="ctr"/>
+          <a:lstStyle/>
+          <a:p>
+            <a:pPr algn="ctr">
+              <a:defRPr>
+                <a:solidFill>
+                  <a:srgbClr val="FFFFFF"/>
+                </a:solidFill>
+              </a:defRPr>
+            </a:pPr>
+          </a:p>
+        </p:txBody>
+      </p:sp>
+      <p:sp>
+        <p:nvSpPr>
+          <p:cNvPr id="115" name="Connector 114"/>
+          <p:cNvSpPr/>
+          <p:nvPr/>
+        </p:nvSpPr>
+        <p:spPr>
+          <a:xfrm>
+            <a:off x="8503919" y="5486400"/>
+            <a:ext cx="822961" cy="0"/>
+          </a:xfrm>
+          <a:prstGeom prst="line">
+            <a:avLst/>
+          </a:prstGeom>
+          <a:ln w="19050">
+            <a:solidFill>
+              <a:srgbClr val="22D3EE"/>
+            </a:solidFill>
+          </a:ln>
+        </p:spPr>
+        <p:txBody>
+          <a:bodyPr lIns="45718" tIns="45718" rIns="45718" bIns="45718"/>
+          <a:lstStyle/>
+          <a:p>
+            <a:pPr/>
+          </a:p>
+        </p:txBody>
+      </p:sp>
+      <p:sp>
+        <p:nvSpPr>
+          <p:cNvPr id="116" name="Oval 115"/>
+          <p:cNvSpPr/>
+          <p:nvPr/>
+        </p:nvSpPr>
+        <p:spPr>
+          <a:xfrm>
+            <a:off x="8476488" y="5458967"/>
+            <a:ext cx="54865" cy="54865"/>
+          </a:xfrm>
+          <a:prstGeom prst="ellipse">
+            <a:avLst/>
+          </a:prstGeom>
+          <a:solidFill>
+            <a:srgbClr val="F5A524"/>
+          </a:solidFill>
+          <a:ln w="12700">
+            <a:miter lim="400000"/>
+          </a:ln>
+        </p:spPr>
+        <p:txBody>
+          <a:bodyPr lIns="45718" tIns="45718" rIns="45718" bIns="45718" anchor="ctr"/>
+          <a:lstStyle/>
+          <a:p>
+            <a:pPr algn="ctr">
+              <a:defRPr>
+                <a:solidFill>
+                  <a:srgbClr val="FFFFFF"/>
+                </a:solidFill>
+              </a:defRPr>
+            </a:pPr>
+          </a:p>
+        </p:txBody>
+      </p:sp>
+      <p:sp>
+        <p:nvSpPr>
+          <p:cNvPr id="117" name="Oval 116"/>
+          <p:cNvSpPr/>
+          <p:nvPr/>
+        </p:nvSpPr>
+        <p:spPr>
+          <a:xfrm>
+            <a:off x="8887968" y="5458967"/>
+            <a:ext cx="54865" cy="54865"/>
+          </a:xfrm>
+          <a:prstGeom prst="ellipse">
+            <a:avLst/>
+          </a:prstGeom>
+          <a:solidFill>
+            <a:srgbClr val="F5A524"/>
+          </a:solidFill>
+          <a:ln w="12700">
+            <a:miter lim="400000"/>
+          </a:ln>
+        </p:spPr>
+        <p:txBody>
+          <a:bodyPr lIns="45718" tIns="45718" rIns="45718" bIns="45718" anchor="ctr"/>
+          <a:lstStyle/>
+          <a:p>
+            <a:pPr algn="ctr">
+              <a:defRPr>
+                <a:solidFill>
+                  <a:srgbClr val="FFFFFF"/>
+                </a:solidFill>
+              </a:defRPr>
+            </a:pPr>
+          </a:p>
+        </p:txBody>
+      </p:sp>
+      <p:sp>
+        <p:nvSpPr>
+          <p:cNvPr id="118" name="Oval 117"/>
+          <p:cNvSpPr/>
+          <p:nvPr/>
+        </p:nvSpPr>
+        <p:spPr>
+          <a:xfrm>
+            <a:off x="9299447" y="5458967"/>
+            <a:ext cx="54865" cy="54865"/>
+          </a:xfrm>
+          <a:prstGeom prst="ellipse">
+            <a:avLst/>
+          </a:prstGeom>
+          <a:solidFill>
+            <a:srgbClr val="F5A524"/>
+          </a:solidFill>
+          <a:ln w="12700">
+            <a:miter lim="400000"/>
+          </a:ln>
+        </p:spPr>
+        <p:txBody>
+          <a:bodyPr lIns="45718" tIns="45718" rIns="45718" bIns="45718" anchor="ctr"/>
+          <a:lstStyle/>
+          <a:p>
+            <a:pPr algn="ctr">
+              <a:defRPr>
+                <a:solidFill>
+                  <a:srgbClr val="FFFFFF"/>
+                </a:solidFill>
+              </a:defRPr>
+            </a:pPr>
+          </a:p>
+        </p:txBody>
+      </p:sp>
     </p:spTree>
   </p:cSld>
   <p:clrMapOvr>
@@ -3302,7 +3678,7 @@
       </p:grpSpPr>
       <p:sp>
         <p:nvSpPr>
-          <p:cNvPr id="280" name="TextBox 1"/>
+          <p:cNvPr id="323" name="TextBox 1"/>
           <p:cNvSpPr txBox="1"/>
           <p:nvPr/>
         </p:nvSpPr>
@@ -3350,7 +3726,7 @@
       </p:sp>
       <p:sp>
         <p:nvSpPr>
-          <p:cNvPr id="281" name="TextBox 2"/>
+          <p:cNvPr id="324" name="TextBox 2"/>
           <p:cNvSpPr txBox="1"/>
           <p:nvPr/>
         </p:nvSpPr>
@@ -3398,14 +3774,14 @@
       </p:sp>
       <p:sp>
         <p:nvSpPr>
-          <p:cNvPr id="282" name="Connector 3"/>
-          <p:cNvSpPr/>
-          <p:nvPr/>
-        </p:nvSpPr>
-        <p:spPr>
-          <a:xfrm>
-            <a:off x="685797" y="1572766"/>
-            <a:ext cx="822966" cy="5"/>
+          <p:cNvPr id="325" name="Connector 3"/>
+          <p:cNvSpPr/>
+          <p:nvPr/>
+        </p:nvSpPr>
+        <p:spPr>
+          <a:xfrm>
+            <a:off x="685796" y="1572766"/>
+            <a:ext cx="822967" cy="6"/>
           </a:xfrm>
           <a:prstGeom prst="line">
             <a:avLst/>
@@ -3426,14 +3802,14 @@
       </p:sp>
       <p:sp>
         <p:nvSpPr>
-          <p:cNvPr id="283" name="Oval 4"/>
+          <p:cNvPr id="326" name="Oval 4"/>
           <p:cNvSpPr/>
           <p:nvPr/>
         </p:nvSpPr>
         <p:spPr>
           <a:xfrm>
             <a:off x="658368" y="1545336"/>
-            <a:ext cx="54864" cy="54873"/>
+            <a:ext cx="54864" cy="54875"/>
           </a:xfrm>
           <a:prstGeom prst="ellipse">
             <a:avLst/>
@@ -3461,14 +3837,14 @@
       </p:sp>
       <p:sp>
         <p:nvSpPr>
-          <p:cNvPr id="284" name="Oval 5"/>
+          <p:cNvPr id="327" name="Oval 5"/>
           <p:cNvSpPr/>
           <p:nvPr/>
         </p:nvSpPr>
         <p:spPr>
           <a:xfrm>
             <a:off x="1069847" y="1545336"/>
-            <a:ext cx="54873" cy="54873"/>
+            <a:ext cx="54875" cy="54875"/>
           </a:xfrm>
           <a:prstGeom prst="ellipse">
             <a:avLst/>
@@ -3496,14 +3872,14 @@
       </p:sp>
       <p:sp>
         <p:nvSpPr>
-          <p:cNvPr id="285" name="Oval 6"/>
+          <p:cNvPr id="328" name="Oval 6"/>
           <p:cNvSpPr/>
           <p:nvPr/>
         </p:nvSpPr>
         <p:spPr>
           <a:xfrm>
             <a:off x="1481327" y="1545336"/>
-            <a:ext cx="54873" cy="54873"/>
+            <a:ext cx="54875" cy="54875"/>
           </a:xfrm>
           <a:prstGeom prst="ellipse">
             <a:avLst/>
@@ -3531,14 +3907,14 @@
       </p:sp>
       <p:sp>
         <p:nvSpPr>
-          <p:cNvPr id="286" name="Rectangle 7"/>
-          <p:cNvSpPr/>
-          <p:nvPr/>
-        </p:nvSpPr>
-        <p:spPr>
-          <a:xfrm>
-            <a:off x="2889225" y="1975103"/>
-            <a:ext cx="6400808" cy="4041650"/>
+          <p:cNvPr id="329" name="Rectangle 7"/>
+          <p:cNvSpPr/>
+          <p:nvPr/>
+        </p:nvSpPr>
+        <p:spPr>
+          <a:xfrm>
+            <a:off x="2889224" y="1975103"/>
+            <a:ext cx="6400810" cy="4041650"/>
           </a:xfrm>
           <a:prstGeom prst="rect">
             <a:avLst/>
@@ -3568,7 +3944,7 @@
       </p:sp>
       <p:pic>
         <p:nvPicPr>
-          <p:cNvPr id="287" name="Picture 8" descr="Picture 8"/>
+          <p:cNvPr id="330" name="Picture 8" descr="Picture 8"/>
           <p:cNvPicPr>
             <a:picLocks noChangeAspect="1"/>
           </p:cNvPicPr>
@@ -3597,14 +3973,14 @@
       </p:pic>
       <p:sp>
         <p:nvSpPr>
-          <p:cNvPr id="288" name="Rectangle 9"/>
+          <p:cNvPr id="331" name="Rectangle 9"/>
           <p:cNvSpPr/>
           <p:nvPr/>
         </p:nvSpPr>
         <p:spPr>
           <a:xfrm>
             <a:off x="2889229" y="1975103"/>
-            <a:ext cx="310901" cy="54869"/>
+            <a:ext cx="310902" cy="54870"/>
           </a:xfrm>
           <a:prstGeom prst="rect">
             <a:avLst/>
@@ -3632,14 +4008,14 @@
       </p:sp>
       <p:sp>
         <p:nvSpPr>
-          <p:cNvPr id="289" name="Rectangle 10"/>
+          <p:cNvPr id="332" name="Rectangle 10"/>
           <p:cNvSpPr/>
           <p:nvPr/>
         </p:nvSpPr>
         <p:spPr>
           <a:xfrm>
             <a:off x="2889229" y="1975103"/>
-            <a:ext cx="54869" cy="310901"/>
+            <a:ext cx="54870" cy="310902"/>
           </a:xfrm>
           <a:prstGeom prst="rect">
             <a:avLst/>
@@ -3667,28 +4043,28 @@
       </p:sp>
       <p:grpSp>
         <p:nvGrpSpPr>
-          <p:cNvPr id="292" name="Rounded Rectangle 11"/>
+          <p:cNvPr id="335" name="Rounded Rectangle 11"/>
           <p:cNvGrpSpPr/>
           <p:nvPr/>
         </p:nvGrpSpPr>
         <p:grpSpPr>
           <a:xfrm>
-            <a:off x="2944086" y="6126476"/>
-            <a:ext cx="3986797" cy="310907"/>
+            <a:off x="2944085" y="6126475"/>
+            <a:ext cx="3986798" cy="310910"/>
             <a:chOff x="0" y="0"/>
-            <a:chExt cx="3986795" cy="310905"/>
+            <a:chExt cx="3986797" cy="310908"/>
           </a:xfrm>
         </p:grpSpPr>
         <p:sp>
           <p:nvSpPr>
-            <p:cNvPr id="290" name="圓角矩形"/>
+            <p:cNvPr id="333" name="圓角矩形"/>
             <p:cNvSpPr/>
             <p:nvPr/>
           </p:nvSpPr>
           <p:spPr>
             <a:xfrm>
               <a:off x="-1" y="-1"/>
-              <a:ext cx="3986796" cy="310907"/>
+              <a:ext cx="3986798" cy="310909"/>
             </a:xfrm>
             <a:prstGeom prst="roundRect">
               <a:avLst>
@@ -3722,7 +4098,7 @@
         </p:sp>
         <p:sp>
           <p:nvSpPr>
-            <p:cNvPr id="291" name="打開瀏覽器就是一支完整的工具，不用裝任何東西"/>
+            <p:cNvPr id="334" name="打開瀏覽器就是一支完整的工具，不用裝任何東西"/>
             <p:cNvSpPr txBox="1"/>
             <p:nvPr/>
           </p:nvSpPr>
@@ -3807,7 +4183,7 @@
       </p:grpSpPr>
       <p:sp>
         <p:nvSpPr>
-          <p:cNvPr id="294" name="TextBox 1"/>
+          <p:cNvPr id="337" name="TextBox 1"/>
           <p:cNvSpPr txBox="1"/>
           <p:nvPr/>
         </p:nvSpPr>
@@ -3855,7 +4231,7 @@
       </p:sp>
       <p:sp>
         <p:nvSpPr>
-          <p:cNvPr id="295" name="TextBox 2"/>
+          <p:cNvPr id="338" name="TextBox 2"/>
           <p:cNvSpPr txBox="1"/>
           <p:nvPr/>
         </p:nvSpPr>
@@ -3903,7 +4279,7 @@
       </p:sp>
       <p:sp>
         <p:nvSpPr>
-          <p:cNvPr id="296" name="TextBox 3"/>
+          <p:cNvPr id="339" name="TextBox 3"/>
           <p:cNvSpPr txBox="1"/>
           <p:nvPr/>
         </p:nvSpPr>
@@ -3951,14 +4327,14 @@
       </p:sp>
       <p:sp>
         <p:nvSpPr>
-          <p:cNvPr id="297" name="Connector 4"/>
-          <p:cNvSpPr/>
-          <p:nvPr/>
-        </p:nvSpPr>
-        <p:spPr>
-          <a:xfrm>
-            <a:off x="685797" y="2048255"/>
-            <a:ext cx="822966" cy="5"/>
+          <p:cNvPr id="340" name="Connector 4"/>
+          <p:cNvSpPr/>
+          <p:nvPr/>
+        </p:nvSpPr>
+        <p:spPr>
+          <a:xfrm>
+            <a:off x="685796" y="2048255"/>
+            <a:ext cx="822967" cy="6"/>
           </a:xfrm>
           <a:prstGeom prst="line">
             <a:avLst/>
@@ -3979,7 +4355,7 @@
       </p:sp>
       <p:sp>
         <p:nvSpPr>
-          <p:cNvPr id="298" name="Oval 5"/>
+          <p:cNvPr id="341" name="Oval 5"/>
           <p:cNvSpPr/>
           <p:nvPr/>
         </p:nvSpPr>
@@ -4014,14 +4390,14 @@
       </p:sp>
       <p:sp>
         <p:nvSpPr>
-          <p:cNvPr id="299" name="Oval 6"/>
+          <p:cNvPr id="342" name="Oval 6"/>
           <p:cNvSpPr/>
           <p:nvPr/>
         </p:nvSpPr>
         <p:spPr>
           <a:xfrm>
             <a:off x="1069847" y="2020822"/>
-            <a:ext cx="54873" cy="54868"/>
+            <a:ext cx="54875" cy="54868"/>
           </a:xfrm>
           <a:prstGeom prst="ellipse">
             <a:avLst/>
@@ -4049,14 +4425,14 @@
       </p:sp>
       <p:sp>
         <p:nvSpPr>
-          <p:cNvPr id="300" name="Oval 7"/>
+          <p:cNvPr id="343" name="Oval 7"/>
           <p:cNvSpPr/>
           <p:nvPr/>
         </p:nvSpPr>
         <p:spPr>
           <a:xfrm>
             <a:off x="1481327" y="2020822"/>
-            <a:ext cx="54873" cy="54868"/>
+            <a:ext cx="54875" cy="54868"/>
           </a:xfrm>
           <a:prstGeom prst="ellipse">
             <a:avLst/>
@@ -4084,14 +4460,14 @@
       </p:sp>
       <p:sp>
         <p:nvSpPr>
-          <p:cNvPr id="301" name="Rectangle 8"/>
+          <p:cNvPr id="344" name="Rectangle 8"/>
           <p:cNvSpPr/>
           <p:nvPr/>
         </p:nvSpPr>
         <p:spPr>
           <a:xfrm>
             <a:off x="685798" y="2596894"/>
-            <a:ext cx="100590" cy="100589"/>
+            <a:ext cx="100591" cy="100590"/>
           </a:xfrm>
           <a:prstGeom prst="rect">
             <a:avLst/>
@@ -4119,7 +4495,7 @@
       </p:sp>
       <p:sp>
         <p:nvSpPr>
-          <p:cNvPr id="302" name="TextBox 9"/>
+          <p:cNvPr id="345" name="TextBox 9"/>
           <p:cNvSpPr txBox="1"/>
           <p:nvPr/>
         </p:nvSpPr>
@@ -4170,14 +4546,14 @@
       </p:sp>
       <p:sp>
         <p:nvSpPr>
-          <p:cNvPr id="303" name="Rectangle 10"/>
+          <p:cNvPr id="346" name="Rectangle 10"/>
           <p:cNvSpPr/>
           <p:nvPr/>
         </p:nvSpPr>
         <p:spPr>
           <a:xfrm>
             <a:off x="685798" y="3049777"/>
-            <a:ext cx="100590" cy="100589"/>
+            <a:ext cx="100591" cy="100590"/>
           </a:xfrm>
           <a:prstGeom prst="rect">
             <a:avLst/>
@@ -4205,7 +4581,7 @@
       </p:sp>
       <p:sp>
         <p:nvSpPr>
-          <p:cNvPr id="304" name="TextBox 11"/>
+          <p:cNvPr id="347" name="TextBox 11"/>
           <p:cNvSpPr txBox="1"/>
           <p:nvPr/>
         </p:nvSpPr>
@@ -4256,14 +4632,14 @@
       </p:sp>
       <p:sp>
         <p:nvSpPr>
-          <p:cNvPr id="305" name="Rectangle 12"/>
+          <p:cNvPr id="348" name="Rectangle 12"/>
           <p:cNvSpPr/>
           <p:nvPr/>
         </p:nvSpPr>
         <p:spPr>
           <a:xfrm>
             <a:off x="685798" y="3502659"/>
-            <a:ext cx="100590" cy="100589"/>
+            <a:ext cx="100591" cy="100590"/>
           </a:xfrm>
           <a:prstGeom prst="rect">
             <a:avLst/>
@@ -4291,7 +4667,7 @@
       </p:sp>
       <p:sp>
         <p:nvSpPr>
-          <p:cNvPr id="306" name="TextBox 13"/>
+          <p:cNvPr id="349" name="TextBox 13"/>
           <p:cNvSpPr txBox="1"/>
           <p:nvPr/>
         </p:nvSpPr>
@@ -4342,14 +4718,14 @@
       </p:sp>
       <p:sp>
         <p:nvSpPr>
-          <p:cNvPr id="307" name="Rectangle 14"/>
+          <p:cNvPr id="350" name="Rectangle 14"/>
           <p:cNvSpPr/>
           <p:nvPr/>
         </p:nvSpPr>
         <p:spPr>
           <a:xfrm>
             <a:off x="685798" y="3955541"/>
-            <a:ext cx="100590" cy="100589"/>
+            <a:ext cx="100591" cy="100590"/>
           </a:xfrm>
           <a:prstGeom prst="rect">
             <a:avLst/>
@@ -4377,7 +4753,7 @@
       </p:sp>
       <p:sp>
         <p:nvSpPr>
-          <p:cNvPr id="308" name="TextBox 15"/>
+          <p:cNvPr id="351" name="TextBox 15"/>
           <p:cNvSpPr txBox="1"/>
           <p:nvPr/>
         </p:nvSpPr>
@@ -4461,7 +4837,7 @@
       </p:grpSpPr>
       <p:sp>
         <p:nvSpPr>
-          <p:cNvPr id="310" name="TextBox 1"/>
+          <p:cNvPr id="353" name="TextBox 1"/>
           <p:cNvSpPr txBox="1"/>
           <p:nvPr/>
         </p:nvSpPr>
@@ -4509,7 +4885,7 @@
       </p:sp>
       <p:sp>
         <p:nvSpPr>
-          <p:cNvPr id="311" name="TextBox 2"/>
+          <p:cNvPr id="354" name="TextBox 2"/>
           <p:cNvSpPr txBox="1"/>
           <p:nvPr/>
         </p:nvSpPr>
@@ -4557,14 +4933,14 @@
       </p:sp>
       <p:sp>
         <p:nvSpPr>
-          <p:cNvPr id="312" name="Connector 3"/>
-          <p:cNvSpPr/>
-          <p:nvPr/>
-        </p:nvSpPr>
-        <p:spPr>
-          <a:xfrm>
-            <a:off x="685797" y="1572766"/>
-            <a:ext cx="822966" cy="5"/>
+          <p:cNvPr id="355" name="Connector 3"/>
+          <p:cNvSpPr/>
+          <p:nvPr/>
+        </p:nvSpPr>
+        <p:spPr>
+          <a:xfrm>
+            <a:off x="685796" y="1572766"/>
+            <a:ext cx="822967" cy="6"/>
           </a:xfrm>
           <a:prstGeom prst="line">
             <a:avLst/>
@@ -4585,14 +4961,14 @@
       </p:sp>
       <p:sp>
         <p:nvSpPr>
-          <p:cNvPr id="313" name="Oval 4"/>
+          <p:cNvPr id="356" name="Oval 4"/>
           <p:cNvSpPr/>
           <p:nvPr/>
         </p:nvSpPr>
         <p:spPr>
           <a:xfrm>
             <a:off x="658368" y="1545336"/>
-            <a:ext cx="54864" cy="54873"/>
+            <a:ext cx="54864" cy="54875"/>
           </a:xfrm>
           <a:prstGeom prst="ellipse">
             <a:avLst/>
@@ -4620,14 +4996,14 @@
       </p:sp>
       <p:sp>
         <p:nvSpPr>
-          <p:cNvPr id="314" name="Oval 5"/>
+          <p:cNvPr id="357" name="Oval 5"/>
           <p:cNvSpPr/>
           <p:nvPr/>
         </p:nvSpPr>
         <p:spPr>
           <a:xfrm>
             <a:off x="1069847" y="1545336"/>
-            <a:ext cx="54873" cy="54873"/>
+            <a:ext cx="54875" cy="54875"/>
           </a:xfrm>
           <a:prstGeom prst="ellipse">
             <a:avLst/>
@@ -4655,14 +5031,14 @@
       </p:sp>
       <p:sp>
         <p:nvSpPr>
-          <p:cNvPr id="315" name="Oval 6"/>
+          <p:cNvPr id="358" name="Oval 6"/>
           <p:cNvSpPr/>
           <p:nvPr/>
         </p:nvSpPr>
         <p:spPr>
           <a:xfrm>
             <a:off x="1481327" y="1545336"/>
-            <a:ext cx="54873" cy="54873"/>
+            <a:ext cx="54875" cy="54875"/>
           </a:xfrm>
           <a:prstGeom prst="ellipse">
             <a:avLst/>
@@ -4690,14 +5066,14 @@
       </p:sp>
       <p:sp>
         <p:nvSpPr>
-          <p:cNvPr id="316" name="Rectangle 7"/>
+          <p:cNvPr id="359" name="Rectangle 7"/>
           <p:cNvSpPr/>
           <p:nvPr/>
         </p:nvSpPr>
         <p:spPr>
           <a:xfrm>
             <a:off x="4899228" y="1975103"/>
-            <a:ext cx="2380806" cy="4041650"/>
+            <a:ext cx="2380807" cy="4041650"/>
           </a:xfrm>
           <a:prstGeom prst="rect">
             <a:avLst/>
@@ -4727,7 +5103,7 @@
       </p:sp>
       <p:pic>
         <p:nvPicPr>
-          <p:cNvPr id="317" name="Picture 8" descr="Picture 8"/>
+          <p:cNvPr id="360" name="Picture 8" descr="Picture 8"/>
           <p:cNvPicPr>
             <a:picLocks noChangeAspect="1"/>
           </p:cNvPicPr>
@@ -4744,7 +5120,7 @@
         <p:spPr>
           <a:xfrm>
             <a:off x="4954092" y="2029966"/>
-            <a:ext cx="2271078" cy="3931924"/>
+            <a:ext cx="2271079" cy="3931924"/>
           </a:xfrm>
           <a:prstGeom prst="rect">
             <a:avLst/>
@@ -4756,14 +5132,14 @@
       </p:pic>
       <p:sp>
         <p:nvSpPr>
-          <p:cNvPr id="318" name="Rectangle 9"/>
+          <p:cNvPr id="361" name="Rectangle 9"/>
           <p:cNvSpPr/>
           <p:nvPr/>
         </p:nvSpPr>
         <p:spPr>
           <a:xfrm>
             <a:off x="4899228" y="1975103"/>
-            <a:ext cx="310901" cy="54869"/>
+            <a:ext cx="310902" cy="54870"/>
           </a:xfrm>
           <a:prstGeom prst="rect">
             <a:avLst/>
@@ -4791,14 +5167,14 @@
       </p:sp>
       <p:sp>
         <p:nvSpPr>
-          <p:cNvPr id="319" name="Rectangle 10"/>
+          <p:cNvPr id="362" name="Rectangle 10"/>
           <p:cNvSpPr/>
           <p:nvPr/>
         </p:nvSpPr>
         <p:spPr>
           <a:xfrm>
             <a:off x="4899228" y="1975103"/>
-            <a:ext cx="54869" cy="310901"/>
+            <a:ext cx="54870" cy="310902"/>
           </a:xfrm>
           <a:prstGeom prst="rect">
             <a:avLst/>
@@ -4826,28 +5202,28 @@
       </p:sp>
       <p:grpSp>
         <p:nvGrpSpPr>
-          <p:cNvPr id="322" name="Rounded Rectangle 11"/>
+          <p:cNvPr id="365" name="Rounded Rectangle 11"/>
           <p:cNvGrpSpPr/>
           <p:nvPr/>
         </p:nvGrpSpPr>
         <p:grpSpPr>
           <a:xfrm>
-            <a:off x="4954090" y="6126476"/>
-            <a:ext cx="4809754" cy="310907"/>
-            <a:chOff x="0" y="0"/>
-            <a:chExt cx="4809752" cy="310905"/>
+            <a:off x="4954088" y="6126475"/>
+            <a:ext cx="4809758" cy="310910"/>
+            <a:chOff x="-1" y="0"/>
+            <a:chExt cx="4809756" cy="310908"/>
           </a:xfrm>
         </p:grpSpPr>
         <p:sp>
           <p:nvSpPr>
-            <p:cNvPr id="320" name="圓角矩形"/>
+            <p:cNvPr id="363" name="圓角矩形"/>
             <p:cNvSpPr/>
             <p:nvPr/>
           </p:nvSpPr>
           <p:spPr>
             <a:xfrm>
-              <a:off x="-1" y="-1"/>
-              <a:ext cx="4809754" cy="310907"/>
+              <a:off x="-2" y="-1"/>
+              <a:ext cx="4809758" cy="310909"/>
             </a:xfrm>
             <a:prstGeom prst="roundRect">
               <a:avLst>
@@ -4881,13 +5257,13 @@
         </p:sp>
         <p:sp>
           <p:nvSpPr>
-            <p:cNvPr id="321" name="節點內容更貼近真實場景：主機申請、防火牆開通、資安檢核"/>
+            <p:cNvPr id="364" name="節點內容更貼近真實場景：主機申請、防火牆開通、資安檢核"/>
             <p:cNvSpPr txBox="1"/>
             <p:nvPr/>
           </p:nvSpPr>
           <p:spPr>
             <a:xfrm>
-              <a:off x="341120" y="47498"/>
+              <a:off x="341119" y="47498"/>
               <a:ext cx="4127501" cy="215901"/>
             </a:xfrm>
             <a:prstGeom prst="rect">
@@ -4966,7 +5342,7 @@
       </p:grpSpPr>
       <p:sp>
         <p:nvSpPr>
-          <p:cNvPr id="324" name="TextBox 1"/>
+          <p:cNvPr id="367" name="TextBox 1"/>
           <p:cNvSpPr txBox="1"/>
           <p:nvPr/>
         </p:nvSpPr>
@@ -5014,7 +5390,7 @@
       </p:sp>
       <p:sp>
         <p:nvSpPr>
-          <p:cNvPr id="325" name="TextBox 2"/>
+          <p:cNvPr id="368" name="TextBox 2"/>
           <p:cNvSpPr txBox="1"/>
           <p:nvPr/>
         </p:nvSpPr>
@@ -5062,7 +5438,7 @@
       </p:sp>
       <p:sp>
         <p:nvSpPr>
-          <p:cNvPr id="326" name="TextBox 3"/>
+          <p:cNvPr id="369" name="TextBox 3"/>
           <p:cNvSpPr txBox="1"/>
           <p:nvPr/>
         </p:nvSpPr>
@@ -5110,14 +5486,14 @@
       </p:sp>
       <p:sp>
         <p:nvSpPr>
-          <p:cNvPr id="327" name="Connector 4"/>
-          <p:cNvSpPr/>
-          <p:nvPr/>
-        </p:nvSpPr>
-        <p:spPr>
-          <a:xfrm>
-            <a:off x="685797" y="2048255"/>
-            <a:ext cx="822966" cy="5"/>
+          <p:cNvPr id="370" name="Connector 4"/>
+          <p:cNvSpPr/>
+          <p:nvPr/>
+        </p:nvSpPr>
+        <p:spPr>
+          <a:xfrm>
+            <a:off x="685796" y="2048255"/>
+            <a:ext cx="822967" cy="6"/>
           </a:xfrm>
           <a:prstGeom prst="line">
             <a:avLst/>
@@ -5138,7 +5514,7 @@
       </p:sp>
       <p:sp>
         <p:nvSpPr>
-          <p:cNvPr id="328" name="Oval 5"/>
+          <p:cNvPr id="371" name="Oval 5"/>
           <p:cNvSpPr/>
           <p:nvPr/>
         </p:nvSpPr>
@@ -5173,14 +5549,14 @@
       </p:sp>
       <p:sp>
         <p:nvSpPr>
-          <p:cNvPr id="329" name="Oval 6"/>
+          <p:cNvPr id="372" name="Oval 6"/>
           <p:cNvSpPr/>
           <p:nvPr/>
         </p:nvSpPr>
         <p:spPr>
           <a:xfrm>
             <a:off x="1069847" y="2020822"/>
-            <a:ext cx="54873" cy="54868"/>
+            <a:ext cx="54875" cy="54868"/>
           </a:xfrm>
           <a:prstGeom prst="ellipse">
             <a:avLst/>
@@ -5208,14 +5584,14 @@
       </p:sp>
       <p:sp>
         <p:nvSpPr>
-          <p:cNvPr id="330" name="Oval 7"/>
+          <p:cNvPr id="373" name="Oval 7"/>
           <p:cNvSpPr/>
           <p:nvPr/>
         </p:nvSpPr>
         <p:spPr>
           <a:xfrm>
             <a:off x="1481327" y="2020822"/>
-            <a:ext cx="54873" cy="54868"/>
+            <a:ext cx="54875" cy="54868"/>
           </a:xfrm>
           <a:prstGeom prst="ellipse">
             <a:avLst/>
@@ -5243,14 +5619,14 @@
       </p:sp>
       <p:sp>
         <p:nvSpPr>
-          <p:cNvPr id="331" name="Rectangle 8"/>
+          <p:cNvPr id="374" name="Rectangle 8"/>
           <p:cNvSpPr/>
           <p:nvPr/>
         </p:nvSpPr>
         <p:spPr>
           <a:xfrm>
             <a:off x="685798" y="2596894"/>
-            <a:ext cx="100590" cy="100589"/>
+            <a:ext cx="100591" cy="100590"/>
           </a:xfrm>
           <a:prstGeom prst="rect">
             <a:avLst/>
@@ -5278,7 +5654,7 @@
       </p:sp>
       <p:sp>
         <p:nvSpPr>
-          <p:cNvPr id="332" name="TextBox 9"/>
+          <p:cNvPr id="375" name="TextBox 9"/>
           <p:cNvSpPr txBox="1"/>
           <p:nvPr/>
         </p:nvSpPr>
@@ -5329,14 +5705,14 @@
       </p:sp>
       <p:sp>
         <p:nvSpPr>
-          <p:cNvPr id="333" name="Rectangle 10"/>
+          <p:cNvPr id="376" name="Rectangle 10"/>
           <p:cNvSpPr/>
           <p:nvPr/>
         </p:nvSpPr>
         <p:spPr>
           <a:xfrm>
             <a:off x="685798" y="3049777"/>
-            <a:ext cx="100590" cy="100589"/>
+            <a:ext cx="100591" cy="100590"/>
           </a:xfrm>
           <a:prstGeom prst="rect">
             <a:avLst/>
@@ -5364,7 +5740,7 @@
       </p:sp>
       <p:sp>
         <p:nvSpPr>
-          <p:cNvPr id="334" name="TextBox 11"/>
+          <p:cNvPr id="377" name="TextBox 11"/>
           <p:cNvSpPr txBox="1"/>
           <p:nvPr/>
         </p:nvSpPr>
@@ -5415,14 +5791,14 @@
       </p:sp>
       <p:sp>
         <p:nvSpPr>
-          <p:cNvPr id="335" name="Rectangle 12"/>
+          <p:cNvPr id="378" name="Rectangle 12"/>
           <p:cNvSpPr/>
           <p:nvPr/>
         </p:nvSpPr>
         <p:spPr>
           <a:xfrm>
             <a:off x="685798" y="3502659"/>
-            <a:ext cx="100590" cy="100589"/>
+            <a:ext cx="100591" cy="100590"/>
           </a:xfrm>
           <a:prstGeom prst="rect">
             <a:avLst/>
@@ -5450,7 +5826,7 @@
       </p:sp>
       <p:sp>
         <p:nvSpPr>
-          <p:cNvPr id="336" name="TextBox 13"/>
+          <p:cNvPr id="379" name="TextBox 13"/>
           <p:cNvSpPr txBox="1"/>
           <p:nvPr/>
         </p:nvSpPr>
@@ -5501,14 +5877,14 @@
       </p:sp>
       <p:sp>
         <p:nvSpPr>
-          <p:cNvPr id="337" name="Rectangle 14"/>
+          <p:cNvPr id="380" name="Rectangle 14"/>
           <p:cNvSpPr/>
           <p:nvPr/>
         </p:nvSpPr>
         <p:spPr>
           <a:xfrm>
             <a:off x="685798" y="3955541"/>
-            <a:ext cx="100590" cy="100589"/>
+            <a:ext cx="100591" cy="100590"/>
           </a:xfrm>
           <a:prstGeom prst="rect">
             <a:avLst/>
@@ -5536,7 +5912,7 @@
       </p:sp>
       <p:sp>
         <p:nvSpPr>
-          <p:cNvPr id="338" name="TextBox 15"/>
+          <p:cNvPr id="381" name="TextBox 15"/>
           <p:cNvSpPr txBox="1"/>
           <p:nvPr/>
         </p:nvSpPr>
@@ -5620,7 +5996,7 @@
       </p:grpSpPr>
       <p:sp>
         <p:nvSpPr>
-          <p:cNvPr id="340" name="TextBox 1"/>
+          <p:cNvPr id="383" name="TextBox 1"/>
           <p:cNvSpPr txBox="1"/>
           <p:nvPr/>
         </p:nvSpPr>
@@ -5668,7 +6044,7 @@
       </p:sp>
       <p:sp>
         <p:nvSpPr>
-          <p:cNvPr id="341" name="TextBox 2"/>
+          <p:cNvPr id="384" name="TextBox 2"/>
           <p:cNvSpPr txBox="1"/>
           <p:nvPr/>
         </p:nvSpPr>
@@ -5716,14 +6092,14 @@
       </p:sp>
       <p:sp>
         <p:nvSpPr>
-          <p:cNvPr id="342" name="Connector 3"/>
-          <p:cNvSpPr/>
-          <p:nvPr/>
-        </p:nvSpPr>
-        <p:spPr>
-          <a:xfrm>
-            <a:off x="685797" y="1572766"/>
-            <a:ext cx="822966" cy="5"/>
+          <p:cNvPr id="385" name="Connector 3"/>
+          <p:cNvSpPr/>
+          <p:nvPr/>
+        </p:nvSpPr>
+        <p:spPr>
+          <a:xfrm>
+            <a:off x="685796" y="1572766"/>
+            <a:ext cx="822967" cy="6"/>
           </a:xfrm>
           <a:prstGeom prst="line">
             <a:avLst/>
@@ -5744,14 +6120,14 @@
       </p:sp>
       <p:sp>
         <p:nvSpPr>
-          <p:cNvPr id="343" name="Oval 4"/>
+          <p:cNvPr id="386" name="Oval 4"/>
           <p:cNvSpPr/>
           <p:nvPr/>
         </p:nvSpPr>
         <p:spPr>
           <a:xfrm>
             <a:off x="658368" y="1545336"/>
-            <a:ext cx="54864" cy="54873"/>
+            <a:ext cx="54864" cy="54875"/>
           </a:xfrm>
           <a:prstGeom prst="ellipse">
             <a:avLst/>
@@ -5779,14 +6155,14 @@
       </p:sp>
       <p:sp>
         <p:nvSpPr>
-          <p:cNvPr id="344" name="Oval 5"/>
+          <p:cNvPr id="387" name="Oval 5"/>
           <p:cNvSpPr/>
           <p:nvPr/>
         </p:nvSpPr>
         <p:spPr>
           <a:xfrm>
             <a:off x="1069847" y="1545336"/>
-            <a:ext cx="54873" cy="54873"/>
+            <a:ext cx="54875" cy="54875"/>
           </a:xfrm>
           <a:prstGeom prst="ellipse">
             <a:avLst/>
@@ -5814,14 +6190,14 @@
       </p:sp>
       <p:sp>
         <p:nvSpPr>
-          <p:cNvPr id="345" name="Oval 6"/>
+          <p:cNvPr id="388" name="Oval 6"/>
           <p:cNvSpPr/>
           <p:nvPr/>
         </p:nvSpPr>
         <p:spPr>
           <a:xfrm>
             <a:off x="1481327" y="1545336"/>
-            <a:ext cx="54873" cy="54873"/>
+            <a:ext cx="54875" cy="54875"/>
           </a:xfrm>
           <a:prstGeom prst="ellipse">
             <a:avLst/>
@@ -5849,7 +6225,7 @@
       </p:sp>
       <p:sp>
         <p:nvSpPr>
-          <p:cNvPr id="346" name="Rectangle 7"/>
+          <p:cNvPr id="389" name="Rectangle 7"/>
           <p:cNvSpPr/>
           <p:nvPr/>
         </p:nvSpPr>
@@ -5886,7 +6262,7 @@
       </p:sp>
       <p:pic>
         <p:nvPicPr>
-          <p:cNvPr id="347" name="Picture 8" descr="Picture 8"/>
+          <p:cNvPr id="390" name="Picture 8" descr="Picture 8"/>
           <p:cNvPicPr>
             <a:picLocks noChangeAspect="1"/>
           </p:cNvPicPr>
@@ -5915,14 +6291,14 @@
       </p:pic>
       <p:sp>
         <p:nvSpPr>
-          <p:cNvPr id="348" name="Rectangle 9"/>
+          <p:cNvPr id="391" name="Rectangle 9"/>
           <p:cNvSpPr/>
           <p:nvPr/>
         </p:nvSpPr>
         <p:spPr>
           <a:xfrm>
             <a:off x="3176540" y="1975103"/>
-            <a:ext cx="310901" cy="54869"/>
+            <a:ext cx="310902" cy="54870"/>
           </a:xfrm>
           <a:prstGeom prst="rect">
             <a:avLst/>
@@ -5950,14 +6326,14 @@
       </p:sp>
       <p:sp>
         <p:nvSpPr>
-          <p:cNvPr id="349" name="Rectangle 10"/>
+          <p:cNvPr id="392" name="Rectangle 10"/>
           <p:cNvSpPr/>
           <p:nvPr/>
         </p:nvSpPr>
         <p:spPr>
           <a:xfrm>
             <a:off x="3176540" y="1975103"/>
-            <a:ext cx="54869" cy="310901"/>
+            <a:ext cx="54870" cy="310902"/>
           </a:xfrm>
           <a:prstGeom prst="rect">
             <a:avLst/>
@@ -5985,28 +6361,28 @@
       </p:sp>
       <p:grpSp>
         <p:nvGrpSpPr>
-          <p:cNvPr id="352" name="Rounded Rectangle 11"/>
+          <p:cNvPr id="395" name="Rounded Rectangle 11"/>
           <p:cNvGrpSpPr/>
           <p:nvPr/>
         </p:nvGrpSpPr>
         <p:grpSpPr>
           <a:xfrm>
-            <a:off x="3231401" y="6126476"/>
-            <a:ext cx="5138940" cy="310907"/>
-            <a:chOff x="0" y="0"/>
-            <a:chExt cx="5138939" cy="310905"/>
+            <a:off x="3231399" y="6126475"/>
+            <a:ext cx="5138942" cy="310910"/>
+            <a:chOff x="-1" y="0"/>
+            <a:chExt cx="5138940" cy="310908"/>
           </a:xfrm>
         </p:grpSpPr>
         <p:sp>
           <p:nvSpPr>
-            <p:cNvPr id="350" name="圓角矩形"/>
+            <p:cNvPr id="393" name="圓角矩形"/>
             <p:cNvSpPr/>
             <p:nvPr/>
           </p:nvSpPr>
           <p:spPr>
             <a:xfrm>
-              <a:off x="-1" y="-1"/>
-              <a:ext cx="5138940" cy="310907"/>
+              <a:off x="-2" y="-1"/>
+              <a:ext cx="5138942" cy="310909"/>
             </a:xfrm>
             <a:prstGeom prst="roundRect">
               <a:avLst>
@@ -6040,13 +6416,13 @@
         </p:sp>
         <p:sp>
           <p:nvSpPr>
-            <p:cNvPr id="351" name="從「一棵樹」變成「三個欄位＋卡片」，成為最終系統的核心體驗"/>
+            <p:cNvPr id="394" name="從「一棵樹」變成「三個欄位＋卡片」，成為最終系統的核心體驗"/>
             <p:cNvSpPr txBox="1"/>
             <p:nvPr/>
           </p:nvSpPr>
           <p:spPr>
             <a:xfrm>
-              <a:off x="353314" y="47498"/>
+              <a:off x="353313" y="47498"/>
               <a:ext cx="4432301" cy="215901"/>
             </a:xfrm>
             <a:prstGeom prst="rect">
@@ -6125,7 +6501,7 @@
       </p:grpSpPr>
       <p:sp>
         <p:nvSpPr>
-          <p:cNvPr id="354" name="TextBox 1"/>
+          <p:cNvPr id="397" name="TextBox 1"/>
           <p:cNvSpPr txBox="1"/>
           <p:nvPr/>
         </p:nvSpPr>
@@ -6173,7 +6549,7 @@
       </p:sp>
       <p:sp>
         <p:nvSpPr>
-          <p:cNvPr id="355" name="TextBox 2"/>
+          <p:cNvPr id="398" name="TextBox 2"/>
           <p:cNvSpPr txBox="1"/>
           <p:nvPr/>
         </p:nvSpPr>
@@ -6221,7 +6597,7 @@
       </p:sp>
       <p:sp>
         <p:nvSpPr>
-          <p:cNvPr id="356" name="TextBox 3"/>
+          <p:cNvPr id="399" name="TextBox 3"/>
           <p:cNvSpPr txBox="1"/>
           <p:nvPr/>
         </p:nvSpPr>
@@ -6269,14 +6645,14 @@
       </p:sp>
       <p:sp>
         <p:nvSpPr>
-          <p:cNvPr id="357" name="Connector 4"/>
-          <p:cNvSpPr/>
-          <p:nvPr/>
-        </p:nvSpPr>
-        <p:spPr>
-          <a:xfrm>
-            <a:off x="685797" y="1911094"/>
-            <a:ext cx="822966" cy="5"/>
+          <p:cNvPr id="400" name="Connector 4"/>
+          <p:cNvSpPr/>
+          <p:nvPr/>
+        </p:nvSpPr>
+        <p:spPr>
+          <a:xfrm>
+            <a:off x="685796" y="1911094"/>
+            <a:ext cx="822967" cy="6"/>
           </a:xfrm>
           <a:prstGeom prst="line">
             <a:avLst/>
@@ -6297,14 +6673,14 @@
       </p:sp>
       <p:sp>
         <p:nvSpPr>
-          <p:cNvPr id="358" name="Oval 5"/>
+          <p:cNvPr id="401" name="Oval 5"/>
           <p:cNvSpPr/>
           <p:nvPr/>
         </p:nvSpPr>
         <p:spPr>
           <a:xfrm>
             <a:off x="658368" y="1883664"/>
-            <a:ext cx="54864" cy="54873"/>
+            <a:ext cx="54864" cy="54875"/>
           </a:xfrm>
           <a:prstGeom prst="ellipse">
             <a:avLst/>
@@ -6332,14 +6708,14 @@
       </p:sp>
       <p:sp>
         <p:nvSpPr>
-          <p:cNvPr id="359" name="Oval 6"/>
+          <p:cNvPr id="402" name="Oval 6"/>
           <p:cNvSpPr/>
           <p:nvPr/>
         </p:nvSpPr>
         <p:spPr>
           <a:xfrm>
             <a:off x="1069847" y="1883664"/>
-            <a:ext cx="54873" cy="54873"/>
+            <a:ext cx="54875" cy="54875"/>
           </a:xfrm>
           <a:prstGeom prst="ellipse">
             <a:avLst/>
@@ -6367,14 +6743,14 @@
       </p:sp>
       <p:sp>
         <p:nvSpPr>
-          <p:cNvPr id="360" name="Oval 7"/>
+          <p:cNvPr id="403" name="Oval 7"/>
           <p:cNvSpPr/>
           <p:nvPr/>
         </p:nvSpPr>
         <p:spPr>
           <a:xfrm>
             <a:off x="1481327" y="1883664"/>
-            <a:ext cx="54873" cy="54873"/>
+            <a:ext cx="54875" cy="54875"/>
           </a:xfrm>
           <a:prstGeom prst="ellipse">
             <a:avLst/>
@@ -6402,14 +6778,14 @@
       </p:sp>
       <p:sp>
         <p:nvSpPr>
-          <p:cNvPr id="361" name="Rectangle 8"/>
+          <p:cNvPr id="404" name="Rectangle 8"/>
           <p:cNvSpPr/>
           <p:nvPr/>
         </p:nvSpPr>
         <p:spPr>
           <a:xfrm>
             <a:off x="685798" y="2414016"/>
-            <a:ext cx="100590" cy="100589"/>
+            <a:ext cx="100591" cy="100590"/>
           </a:xfrm>
           <a:prstGeom prst="rect">
             <a:avLst/>
@@ -6437,7 +6813,7 @@
       </p:sp>
       <p:sp>
         <p:nvSpPr>
-          <p:cNvPr id="362" name="TextBox 9"/>
+          <p:cNvPr id="405" name="TextBox 9"/>
           <p:cNvSpPr txBox="1"/>
           <p:nvPr/>
         </p:nvSpPr>
@@ -6488,14 +6864,14 @@
       </p:sp>
       <p:sp>
         <p:nvSpPr>
-          <p:cNvPr id="363" name="Rectangle 10"/>
+          <p:cNvPr id="406" name="Rectangle 10"/>
           <p:cNvSpPr/>
           <p:nvPr/>
         </p:nvSpPr>
         <p:spPr>
           <a:xfrm>
             <a:off x="685795" y="3408045"/>
-            <a:ext cx="4946638" cy="3038480"/>
+            <a:ext cx="4946639" cy="3038481"/>
           </a:xfrm>
           <a:prstGeom prst="rect">
             <a:avLst/>
@@ -6525,14 +6901,14 @@
       </p:sp>
       <p:sp>
         <p:nvSpPr>
-          <p:cNvPr id="364" name="Rectangle 11"/>
+          <p:cNvPr id="407" name="Rectangle 11"/>
           <p:cNvSpPr/>
           <p:nvPr/>
         </p:nvSpPr>
         <p:spPr>
           <a:xfrm>
             <a:off x="685795" y="3408045"/>
-            <a:ext cx="4946638" cy="384053"/>
+            <a:ext cx="4946639" cy="384054"/>
           </a:xfrm>
           <a:prstGeom prst="rect">
             <a:avLst/>
@@ -6560,14 +6936,14 @@
       </p:sp>
       <p:sp>
         <p:nvSpPr>
-          <p:cNvPr id="365" name="TextBox 12"/>
+          <p:cNvPr id="408" name="TextBox 12"/>
           <p:cNvSpPr txBox="1"/>
           <p:nvPr/>
         </p:nvSpPr>
         <p:spPr>
           <a:xfrm>
             <a:off x="685795" y="3485769"/>
-            <a:ext cx="4946638" cy="228601"/>
+            <a:ext cx="4946639" cy="228601"/>
           </a:xfrm>
           <a:prstGeom prst="rect">
             <a:avLst/>
@@ -6608,14 +6984,14 @@
       </p:sp>
       <p:sp>
         <p:nvSpPr>
-          <p:cNvPr id="366" name="Rectangle 13"/>
+          <p:cNvPr id="409" name="Rectangle 13"/>
           <p:cNvSpPr/>
           <p:nvPr/>
         </p:nvSpPr>
         <p:spPr>
           <a:xfrm>
             <a:off x="6546828" y="3408045"/>
-            <a:ext cx="4946635" cy="3038480"/>
+            <a:ext cx="4946636" cy="3038481"/>
           </a:xfrm>
           <a:prstGeom prst="rect">
             <a:avLst/>
@@ -6645,14 +7021,14 @@
       </p:sp>
       <p:sp>
         <p:nvSpPr>
-          <p:cNvPr id="367" name="Rectangle 14"/>
+          <p:cNvPr id="410" name="Rectangle 14"/>
           <p:cNvSpPr/>
           <p:nvPr/>
         </p:nvSpPr>
         <p:spPr>
           <a:xfrm>
             <a:off x="6546828" y="3408045"/>
-            <a:ext cx="4946635" cy="384053"/>
+            <a:ext cx="4946636" cy="384054"/>
           </a:xfrm>
           <a:prstGeom prst="rect">
             <a:avLst/>
@@ -6680,14 +7056,14 @@
       </p:sp>
       <p:sp>
         <p:nvSpPr>
-          <p:cNvPr id="368" name="TextBox 15"/>
+          <p:cNvPr id="411" name="TextBox 15"/>
           <p:cNvSpPr txBox="1"/>
           <p:nvPr/>
         </p:nvSpPr>
         <p:spPr>
           <a:xfrm>
             <a:off x="6546828" y="3485769"/>
-            <a:ext cx="4946635" cy="228601"/>
+            <a:ext cx="4946636" cy="228601"/>
           </a:xfrm>
           <a:prstGeom prst="rect">
             <a:avLst/>
@@ -6728,14 +7104,14 @@
       </p:sp>
       <p:sp>
         <p:nvSpPr>
-          <p:cNvPr id="369" name="Connector 16"/>
+          <p:cNvPr id="412" name="Connector 16"/>
           <p:cNvSpPr/>
           <p:nvPr/>
         </p:nvSpPr>
         <p:spPr>
           <a:xfrm>
             <a:off x="5742156" y="4927282"/>
-            <a:ext cx="694949" cy="5"/>
+            <a:ext cx="694950" cy="6"/>
           </a:xfrm>
           <a:prstGeom prst="line">
             <a:avLst/>
@@ -6756,14 +7132,14 @@
       </p:sp>
       <p:sp>
         <p:nvSpPr>
-          <p:cNvPr id="370" name="Isosceles Triangle 17"/>
+          <p:cNvPr id="413" name="Isosceles Triangle 17"/>
           <p:cNvSpPr/>
           <p:nvPr/>
         </p:nvSpPr>
         <p:spPr>
           <a:xfrm rot="5400000">
             <a:off x="6290795" y="4835840"/>
-            <a:ext cx="182885" cy="182885"/>
+            <a:ext cx="182886" cy="182886"/>
           </a:xfrm>
           <a:prstGeom prst="triangle">
             <a:avLst/>
@@ -6791,7 +7167,7 @@
       </p:sp>
       <p:pic>
         <p:nvPicPr>
-          <p:cNvPr id="371" name="Picture 18" descr="Picture 18"/>
+          <p:cNvPr id="414" name="Picture 18" descr="Picture 18"/>
           <p:cNvPicPr>
             <a:picLocks noChangeAspect="1"/>
           </p:cNvPicPr>
@@ -6820,7 +7196,7 @@
       </p:pic>
       <p:pic>
         <p:nvPicPr>
-          <p:cNvPr id="372" name="Picture 19" descr="Picture 19"/>
+          <p:cNvPr id="415" name="Picture 19" descr="Picture 19"/>
           <p:cNvPicPr>
             <a:picLocks noChangeAspect="1"/>
           </p:cNvPicPr>
@@ -6882,7 +7258,7 @@
       </p:grpSpPr>
       <p:sp>
         <p:nvSpPr>
-          <p:cNvPr id="374" name="TextBox 1"/>
+          <p:cNvPr id="417" name="TextBox 1"/>
           <p:cNvSpPr txBox="1"/>
           <p:nvPr/>
         </p:nvSpPr>
@@ -6930,7 +7306,7 @@
       </p:sp>
       <p:sp>
         <p:nvSpPr>
-          <p:cNvPr id="375" name="TextBox 2"/>
+          <p:cNvPr id="418" name="TextBox 2"/>
           <p:cNvSpPr txBox="1"/>
           <p:nvPr/>
         </p:nvSpPr>
@@ -6978,14 +7354,14 @@
       </p:sp>
       <p:sp>
         <p:nvSpPr>
-          <p:cNvPr id="376" name="Connector 3"/>
-          <p:cNvSpPr/>
-          <p:nvPr/>
-        </p:nvSpPr>
-        <p:spPr>
-          <a:xfrm>
-            <a:off x="685797" y="1572766"/>
-            <a:ext cx="822966" cy="5"/>
+          <p:cNvPr id="419" name="Connector 3"/>
+          <p:cNvSpPr/>
+          <p:nvPr/>
+        </p:nvSpPr>
+        <p:spPr>
+          <a:xfrm>
+            <a:off x="685796" y="1572766"/>
+            <a:ext cx="822967" cy="6"/>
           </a:xfrm>
           <a:prstGeom prst="line">
             <a:avLst/>
@@ -7006,14 +7382,14 @@
       </p:sp>
       <p:sp>
         <p:nvSpPr>
-          <p:cNvPr id="377" name="Oval 4"/>
+          <p:cNvPr id="420" name="Oval 4"/>
           <p:cNvSpPr/>
           <p:nvPr/>
         </p:nvSpPr>
         <p:spPr>
           <a:xfrm>
             <a:off x="658368" y="1545336"/>
-            <a:ext cx="54864" cy="54873"/>
+            <a:ext cx="54864" cy="54875"/>
           </a:xfrm>
           <a:prstGeom prst="ellipse">
             <a:avLst/>
@@ -7041,14 +7417,14 @@
       </p:sp>
       <p:sp>
         <p:nvSpPr>
-          <p:cNvPr id="378" name="Oval 5"/>
+          <p:cNvPr id="421" name="Oval 5"/>
           <p:cNvSpPr/>
           <p:nvPr/>
         </p:nvSpPr>
         <p:spPr>
           <a:xfrm>
             <a:off x="1069847" y="1545336"/>
-            <a:ext cx="54873" cy="54873"/>
+            <a:ext cx="54875" cy="54875"/>
           </a:xfrm>
           <a:prstGeom prst="ellipse">
             <a:avLst/>
@@ -7076,14 +7452,14 @@
       </p:sp>
       <p:sp>
         <p:nvSpPr>
-          <p:cNvPr id="379" name="Oval 6"/>
+          <p:cNvPr id="422" name="Oval 6"/>
           <p:cNvSpPr/>
           <p:nvPr/>
         </p:nvSpPr>
         <p:spPr>
           <a:xfrm>
             <a:off x="1481327" y="1545336"/>
-            <a:ext cx="54873" cy="54873"/>
+            <a:ext cx="54875" cy="54875"/>
           </a:xfrm>
           <a:prstGeom prst="ellipse">
             <a:avLst/>
@@ -7111,14 +7487,14 @@
       </p:sp>
       <p:sp>
         <p:nvSpPr>
-          <p:cNvPr id="380" name="Rectangle 7"/>
+          <p:cNvPr id="423" name="Rectangle 7"/>
           <p:cNvSpPr/>
           <p:nvPr/>
         </p:nvSpPr>
         <p:spPr>
           <a:xfrm>
             <a:off x="685798" y="2075688"/>
-            <a:ext cx="100590" cy="100589"/>
+            <a:ext cx="100591" cy="100590"/>
           </a:xfrm>
           <a:prstGeom prst="rect">
             <a:avLst/>
@@ -7146,7 +7522,7 @@
       </p:sp>
       <p:sp>
         <p:nvSpPr>
-          <p:cNvPr id="381" name="TextBox 8"/>
+          <p:cNvPr id="424" name="TextBox 8"/>
           <p:cNvSpPr txBox="1"/>
           <p:nvPr/>
         </p:nvSpPr>
@@ -7197,14 +7573,14 @@
       </p:sp>
       <p:sp>
         <p:nvSpPr>
-          <p:cNvPr id="382" name="Rectangle 9"/>
+          <p:cNvPr id="425" name="Rectangle 9"/>
           <p:cNvSpPr/>
           <p:nvPr/>
         </p:nvSpPr>
         <p:spPr>
           <a:xfrm>
             <a:off x="685798" y="2428619"/>
-            <a:ext cx="100590" cy="100589"/>
+            <a:ext cx="100591" cy="100590"/>
           </a:xfrm>
           <a:prstGeom prst="rect">
             <a:avLst/>
@@ -7232,7 +7608,7 @@
       </p:sp>
       <p:sp>
         <p:nvSpPr>
-          <p:cNvPr id="383" name="TextBox 10"/>
+          <p:cNvPr id="426" name="TextBox 10"/>
           <p:cNvSpPr txBox="1"/>
           <p:nvPr/>
         </p:nvSpPr>
@@ -7283,14 +7659,14 @@
       </p:sp>
       <p:sp>
         <p:nvSpPr>
-          <p:cNvPr id="384" name="Rectangle 11"/>
+          <p:cNvPr id="427" name="Rectangle 11"/>
           <p:cNvSpPr/>
           <p:nvPr/>
         </p:nvSpPr>
         <p:spPr>
           <a:xfrm>
             <a:off x="685798" y="2781554"/>
-            <a:ext cx="100590" cy="100589"/>
+            <a:ext cx="100591" cy="100590"/>
           </a:xfrm>
           <a:prstGeom prst="rect">
             <a:avLst/>
@@ -7318,7 +7694,7 @@
       </p:sp>
       <p:sp>
         <p:nvSpPr>
-          <p:cNvPr id="385" name="TextBox 12"/>
+          <p:cNvPr id="428" name="TextBox 12"/>
           <p:cNvSpPr txBox="1"/>
           <p:nvPr/>
         </p:nvSpPr>
@@ -7369,14 +7745,14 @@
       </p:sp>
       <p:sp>
         <p:nvSpPr>
-          <p:cNvPr id="386" name="Rectangle 13"/>
+          <p:cNvPr id="429" name="Rectangle 13"/>
           <p:cNvSpPr/>
           <p:nvPr/>
         </p:nvSpPr>
         <p:spPr>
           <a:xfrm>
             <a:off x="685798" y="3134485"/>
-            <a:ext cx="100590" cy="100590"/>
+            <a:ext cx="100591" cy="100591"/>
           </a:xfrm>
           <a:prstGeom prst="rect">
             <a:avLst/>
@@ -7404,7 +7780,7 @@
       </p:sp>
       <p:sp>
         <p:nvSpPr>
-          <p:cNvPr id="387" name="TextBox 14"/>
+          <p:cNvPr id="430" name="TextBox 14"/>
           <p:cNvSpPr txBox="1"/>
           <p:nvPr/>
         </p:nvSpPr>
@@ -7455,14 +7831,14 @@
       </p:sp>
       <p:sp>
         <p:nvSpPr>
-          <p:cNvPr id="388" name="Rectangle 15"/>
+          <p:cNvPr id="431" name="Rectangle 15"/>
           <p:cNvSpPr/>
           <p:nvPr/>
         </p:nvSpPr>
         <p:spPr>
           <a:xfrm>
             <a:off x="685798" y="3487420"/>
-            <a:ext cx="100590" cy="100589"/>
+            <a:ext cx="100591" cy="100590"/>
           </a:xfrm>
           <a:prstGeom prst="rect">
             <a:avLst/>
@@ -7490,7 +7866,7 @@
       </p:sp>
       <p:sp>
         <p:nvSpPr>
-          <p:cNvPr id="389" name="TextBox 16"/>
+          <p:cNvPr id="432" name="TextBox 16"/>
           <p:cNvSpPr txBox="1"/>
           <p:nvPr/>
         </p:nvSpPr>
@@ -7541,14 +7917,14 @@
       </p:sp>
       <p:sp>
         <p:nvSpPr>
-          <p:cNvPr id="390" name="Rectangle 17"/>
+          <p:cNvPr id="433" name="Rectangle 17"/>
           <p:cNvSpPr/>
           <p:nvPr/>
         </p:nvSpPr>
         <p:spPr>
           <a:xfrm>
             <a:off x="685800" y="3794633"/>
-            <a:ext cx="10807659" cy="566933"/>
+            <a:ext cx="10807659" cy="566934"/>
           </a:xfrm>
           <a:prstGeom prst="rect">
             <a:avLst/>
@@ -7576,14 +7952,14 @@
       </p:sp>
       <p:sp>
         <p:nvSpPr>
-          <p:cNvPr id="391" name="Rectangle 18"/>
+          <p:cNvPr id="434" name="Rectangle 18"/>
           <p:cNvSpPr/>
           <p:nvPr/>
         </p:nvSpPr>
         <p:spPr>
           <a:xfrm>
             <a:off x="685798" y="3794633"/>
-            <a:ext cx="73158" cy="566933"/>
+            <a:ext cx="73159" cy="566934"/>
           </a:xfrm>
           <a:prstGeom prst="rect">
             <a:avLst/>
@@ -7611,7 +7987,7 @@
       </p:sp>
       <p:sp>
         <p:nvSpPr>
-          <p:cNvPr id="392" name="TextBox 19"/>
+          <p:cNvPr id="435" name="TextBox 19"/>
           <p:cNvSpPr txBox="1"/>
           <p:nvPr/>
         </p:nvSpPr>
@@ -7692,7 +8068,7 @@
       </p:grpSpPr>
       <p:sp>
         <p:nvSpPr>
-          <p:cNvPr id="394" name="TextBox 1"/>
+          <p:cNvPr id="437" name="TextBox 1"/>
           <p:cNvSpPr txBox="1"/>
           <p:nvPr/>
         </p:nvSpPr>
@@ -7740,7 +8116,7 @@
       </p:sp>
       <p:sp>
         <p:nvSpPr>
-          <p:cNvPr id="395" name="TextBox 2"/>
+          <p:cNvPr id="438" name="TextBox 2"/>
           <p:cNvSpPr txBox="1"/>
           <p:nvPr/>
         </p:nvSpPr>
@@ -7788,14 +8164,14 @@
       </p:sp>
       <p:sp>
         <p:nvSpPr>
-          <p:cNvPr id="396" name="Connector 3"/>
-          <p:cNvSpPr/>
-          <p:nvPr/>
-        </p:nvSpPr>
-        <p:spPr>
-          <a:xfrm>
-            <a:off x="685797" y="1664205"/>
-            <a:ext cx="822966" cy="5"/>
+          <p:cNvPr id="439" name="Connector 3"/>
+          <p:cNvSpPr/>
+          <p:nvPr/>
+        </p:nvSpPr>
+        <p:spPr>
+          <a:xfrm>
+            <a:off x="685796" y="1664205"/>
+            <a:ext cx="822967" cy="6"/>
           </a:xfrm>
           <a:prstGeom prst="line">
             <a:avLst/>
@@ -7816,14 +8192,14 @@
       </p:sp>
       <p:sp>
         <p:nvSpPr>
-          <p:cNvPr id="397" name="Oval 4"/>
+          <p:cNvPr id="440" name="Oval 4"/>
           <p:cNvSpPr/>
           <p:nvPr/>
         </p:nvSpPr>
         <p:spPr>
           <a:xfrm>
             <a:off x="658368" y="1636776"/>
-            <a:ext cx="54864" cy="54873"/>
+            <a:ext cx="54864" cy="54875"/>
           </a:xfrm>
           <a:prstGeom prst="ellipse">
             <a:avLst/>
@@ -7851,14 +8227,14 @@
       </p:sp>
       <p:sp>
         <p:nvSpPr>
-          <p:cNvPr id="398" name="Oval 5"/>
+          <p:cNvPr id="441" name="Oval 5"/>
           <p:cNvSpPr/>
           <p:nvPr/>
         </p:nvSpPr>
         <p:spPr>
           <a:xfrm>
             <a:off x="1069847" y="1636776"/>
-            <a:ext cx="54873" cy="54873"/>
+            <a:ext cx="54875" cy="54875"/>
           </a:xfrm>
           <a:prstGeom prst="ellipse">
             <a:avLst/>
@@ -7886,14 +8262,14 @@
       </p:sp>
       <p:sp>
         <p:nvSpPr>
-          <p:cNvPr id="399" name="Oval 6"/>
+          <p:cNvPr id="442" name="Oval 6"/>
           <p:cNvSpPr/>
           <p:nvPr/>
         </p:nvSpPr>
         <p:spPr>
           <a:xfrm>
             <a:off x="1481327" y="1636776"/>
-            <a:ext cx="54873" cy="54873"/>
+            <a:ext cx="54875" cy="54875"/>
           </a:xfrm>
           <a:prstGeom prst="ellipse">
             <a:avLst/>
@@ -7921,14 +8297,14 @@
       </p:sp>
       <p:sp>
         <p:nvSpPr>
-          <p:cNvPr id="400" name="Rectangle 7"/>
+          <p:cNvPr id="443" name="Rectangle 7"/>
           <p:cNvSpPr/>
           <p:nvPr/>
         </p:nvSpPr>
         <p:spPr>
           <a:xfrm>
             <a:off x="685798" y="2212848"/>
-            <a:ext cx="100590" cy="100589"/>
+            <a:ext cx="100591" cy="100590"/>
           </a:xfrm>
           <a:prstGeom prst="rect">
             <a:avLst/>
@@ -7956,7 +8332,7 @@
       </p:sp>
       <p:sp>
         <p:nvSpPr>
-          <p:cNvPr id="401" name="TextBox 8"/>
+          <p:cNvPr id="444" name="TextBox 8"/>
           <p:cNvSpPr txBox="1"/>
           <p:nvPr/>
         </p:nvSpPr>
@@ -8007,14 +8383,14 @@
       </p:sp>
       <p:sp>
         <p:nvSpPr>
-          <p:cNvPr id="402" name="Rectangle 9"/>
+          <p:cNvPr id="445" name="Rectangle 9"/>
           <p:cNvSpPr/>
           <p:nvPr/>
         </p:nvSpPr>
         <p:spPr>
           <a:xfrm>
             <a:off x="685798" y="2665727"/>
-            <a:ext cx="100590" cy="100589"/>
+            <a:ext cx="100591" cy="100590"/>
           </a:xfrm>
           <a:prstGeom prst="rect">
             <a:avLst/>
@@ -8042,7 +8418,7 @@
       </p:sp>
       <p:sp>
         <p:nvSpPr>
-          <p:cNvPr id="403" name="TextBox 10"/>
+          <p:cNvPr id="446" name="TextBox 10"/>
           <p:cNvSpPr txBox="1"/>
           <p:nvPr/>
         </p:nvSpPr>
@@ -8126,7 +8502,7 @@
       </p:grpSpPr>
       <p:sp>
         <p:nvSpPr>
-          <p:cNvPr id="405" name="TextBox 1"/>
+          <p:cNvPr id="448" name="TextBox 1"/>
           <p:cNvSpPr txBox="1"/>
           <p:nvPr/>
         </p:nvSpPr>
@@ -8174,7 +8550,7 @@
       </p:sp>
       <p:sp>
         <p:nvSpPr>
-          <p:cNvPr id="406" name="TextBox 2"/>
+          <p:cNvPr id="449" name="TextBox 2"/>
           <p:cNvSpPr txBox="1"/>
           <p:nvPr/>
         </p:nvSpPr>
@@ -8222,7 +8598,7 @@
       </p:sp>
       <p:sp>
         <p:nvSpPr>
-          <p:cNvPr id="407" name="TextBox 3"/>
+          <p:cNvPr id="450" name="TextBox 3"/>
           <p:cNvSpPr txBox="1"/>
           <p:nvPr/>
         </p:nvSpPr>
@@ -8270,14 +8646,14 @@
       </p:sp>
       <p:sp>
         <p:nvSpPr>
-          <p:cNvPr id="408" name="Connector 4"/>
-          <p:cNvSpPr/>
-          <p:nvPr/>
-        </p:nvSpPr>
-        <p:spPr>
-          <a:xfrm>
-            <a:off x="685797" y="1911094"/>
-            <a:ext cx="822966" cy="5"/>
+          <p:cNvPr id="451" name="Connector 4"/>
+          <p:cNvSpPr/>
+          <p:nvPr/>
+        </p:nvSpPr>
+        <p:spPr>
+          <a:xfrm>
+            <a:off x="685796" y="1911094"/>
+            <a:ext cx="822967" cy="6"/>
           </a:xfrm>
           <a:prstGeom prst="line">
             <a:avLst/>
@@ -8298,14 +8674,14 @@
       </p:sp>
       <p:sp>
         <p:nvSpPr>
-          <p:cNvPr id="409" name="Oval 5"/>
+          <p:cNvPr id="452" name="Oval 5"/>
           <p:cNvSpPr/>
           <p:nvPr/>
         </p:nvSpPr>
         <p:spPr>
           <a:xfrm>
             <a:off x="658368" y="1883664"/>
-            <a:ext cx="54864" cy="54873"/>
+            <a:ext cx="54864" cy="54875"/>
           </a:xfrm>
           <a:prstGeom prst="ellipse">
             <a:avLst/>
@@ -8333,14 +8709,14 @@
       </p:sp>
       <p:sp>
         <p:nvSpPr>
-          <p:cNvPr id="410" name="Oval 6"/>
+          <p:cNvPr id="453" name="Oval 6"/>
           <p:cNvSpPr/>
           <p:nvPr/>
         </p:nvSpPr>
         <p:spPr>
           <a:xfrm>
             <a:off x="1069847" y="1883664"/>
-            <a:ext cx="54873" cy="54873"/>
+            <a:ext cx="54875" cy="54875"/>
           </a:xfrm>
           <a:prstGeom prst="ellipse">
             <a:avLst/>
@@ -8368,14 +8744,14 @@
       </p:sp>
       <p:sp>
         <p:nvSpPr>
-          <p:cNvPr id="411" name="Oval 7"/>
+          <p:cNvPr id="454" name="Oval 7"/>
           <p:cNvSpPr/>
           <p:nvPr/>
         </p:nvSpPr>
         <p:spPr>
           <a:xfrm>
             <a:off x="1481327" y="1883664"/>
-            <a:ext cx="54873" cy="54873"/>
+            <a:ext cx="54875" cy="54875"/>
           </a:xfrm>
           <a:prstGeom prst="ellipse">
             <a:avLst/>
@@ -8403,14 +8779,14 @@
       </p:sp>
       <p:sp>
         <p:nvSpPr>
-          <p:cNvPr id="412" name="Rectangle 8"/>
+          <p:cNvPr id="455" name="Rectangle 8"/>
           <p:cNvSpPr/>
           <p:nvPr/>
         </p:nvSpPr>
         <p:spPr>
           <a:xfrm>
             <a:off x="685800" y="2276855"/>
-            <a:ext cx="10807659" cy="685805"/>
+            <a:ext cx="10807659" cy="685806"/>
           </a:xfrm>
           <a:prstGeom prst="rect">
             <a:avLst/>
@@ -8440,14 +8816,14 @@
       </p:sp>
       <p:sp>
         <p:nvSpPr>
-          <p:cNvPr id="413" name="Rectangle 9"/>
+          <p:cNvPr id="456" name="Rectangle 9"/>
           <p:cNvSpPr/>
           <p:nvPr/>
         </p:nvSpPr>
         <p:spPr>
           <a:xfrm>
             <a:off x="685800" y="2276855"/>
-            <a:ext cx="54864" cy="685805"/>
+            <a:ext cx="54864" cy="685806"/>
           </a:xfrm>
           <a:prstGeom prst="rect">
             <a:avLst/>
@@ -8475,7 +8851,7 @@
       </p:sp>
       <p:sp>
         <p:nvSpPr>
-          <p:cNvPr id="414" name="TextBox 10"/>
+          <p:cNvPr id="457" name="TextBox 10"/>
           <p:cNvSpPr txBox="1"/>
           <p:nvPr/>
         </p:nvSpPr>
@@ -8523,7 +8899,7 @@
       </p:sp>
       <p:sp>
         <p:nvSpPr>
-          <p:cNvPr id="415" name="TextBox 11"/>
+          <p:cNvPr id="458" name="TextBox 11"/>
           <p:cNvSpPr txBox="1"/>
           <p:nvPr/>
         </p:nvSpPr>
@@ -8574,7 +8950,7 @@
       </p:sp>
       <p:sp>
         <p:nvSpPr>
-          <p:cNvPr id="416" name="Rectangle 12"/>
+          <p:cNvPr id="459" name="Rectangle 12"/>
           <p:cNvSpPr/>
           <p:nvPr/>
         </p:nvSpPr>
@@ -8611,7 +8987,7 @@
       </p:sp>
       <p:sp>
         <p:nvSpPr>
-          <p:cNvPr id="417" name="Rectangle 13"/>
+          <p:cNvPr id="460" name="Rectangle 13"/>
           <p:cNvSpPr/>
           <p:nvPr/>
         </p:nvSpPr>
@@ -8646,7 +9022,7 @@
       </p:sp>
       <p:sp>
         <p:nvSpPr>
-          <p:cNvPr id="418" name="TextBox 14"/>
+          <p:cNvPr id="461" name="TextBox 14"/>
           <p:cNvSpPr txBox="1"/>
           <p:nvPr/>
         </p:nvSpPr>
@@ -8694,7 +9070,7 @@
       </p:sp>
       <p:sp>
         <p:nvSpPr>
-          <p:cNvPr id="419" name="TextBox 15"/>
+          <p:cNvPr id="462" name="TextBox 15"/>
           <p:cNvSpPr txBox="1"/>
           <p:nvPr/>
         </p:nvSpPr>
@@ -8781,14 +9157,14 @@
       </p:sp>
       <p:sp>
         <p:nvSpPr>
-          <p:cNvPr id="420" name="Rectangle 16"/>
+          <p:cNvPr id="463" name="Rectangle 16"/>
           <p:cNvSpPr/>
           <p:nvPr/>
         </p:nvSpPr>
         <p:spPr>
           <a:xfrm>
             <a:off x="685800" y="4983479"/>
-            <a:ext cx="10807659" cy="594365"/>
+            <a:ext cx="10807659" cy="594366"/>
           </a:xfrm>
           <a:prstGeom prst="rect">
             <a:avLst/>
@@ -8818,7 +9194,7 @@
       </p:sp>
       <p:sp>
         <p:nvSpPr>
-          <p:cNvPr id="421" name="TextBox 17"/>
+          <p:cNvPr id="464" name="TextBox 17"/>
           <p:cNvSpPr txBox="1"/>
           <p:nvPr/>
         </p:nvSpPr>
@@ -8866,7 +9242,7 @@
       </p:sp>
       <p:sp>
         <p:nvSpPr>
-          <p:cNvPr id="422" name="TextBox 18"/>
+          <p:cNvPr id="465" name="TextBox 18"/>
           <p:cNvSpPr txBox="1"/>
           <p:nvPr/>
         </p:nvSpPr>
@@ -8950,7 +9326,7 @@
       </p:grpSpPr>
       <p:sp>
         <p:nvSpPr>
-          <p:cNvPr id="424" name="TextBox 1"/>
+          <p:cNvPr id="467" name="TextBox 1"/>
           <p:cNvSpPr txBox="1"/>
           <p:nvPr/>
         </p:nvSpPr>
@@ -8998,7 +9374,7 @@
       </p:sp>
       <p:sp>
         <p:nvSpPr>
-          <p:cNvPr id="425" name="TextBox 2"/>
+          <p:cNvPr id="468" name="TextBox 2"/>
           <p:cNvSpPr txBox="1"/>
           <p:nvPr/>
         </p:nvSpPr>
@@ -9046,7 +9422,7 @@
       </p:sp>
       <p:sp>
         <p:nvSpPr>
-          <p:cNvPr id="426" name="TextBox 3"/>
+          <p:cNvPr id="469" name="TextBox 3"/>
           <p:cNvSpPr txBox="1"/>
           <p:nvPr/>
         </p:nvSpPr>
@@ -9094,14 +9470,14 @@
       </p:sp>
       <p:sp>
         <p:nvSpPr>
-          <p:cNvPr id="427" name="Connector 4"/>
-          <p:cNvSpPr/>
-          <p:nvPr/>
-        </p:nvSpPr>
-        <p:spPr>
-          <a:xfrm>
-            <a:off x="685797" y="1911094"/>
-            <a:ext cx="822966" cy="5"/>
+          <p:cNvPr id="470" name="Connector 4"/>
+          <p:cNvSpPr/>
+          <p:nvPr/>
+        </p:nvSpPr>
+        <p:spPr>
+          <a:xfrm>
+            <a:off x="685796" y="1911094"/>
+            <a:ext cx="822967" cy="6"/>
           </a:xfrm>
           <a:prstGeom prst="line">
             <a:avLst/>
@@ -9122,14 +9498,14 @@
       </p:sp>
       <p:sp>
         <p:nvSpPr>
-          <p:cNvPr id="428" name="Oval 5"/>
+          <p:cNvPr id="471" name="Oval 5"/>
           <p:cNvSpPr/>
           <p:nvPr/>
         </p:nvSpPr>
         <p:spPr>
           <a:xfrm>
             <a:off x="658368" y="1883664"/>
-            <a:ext cx="54864" cy="54873"/>
+            <a:ext cx="54864" cy="54875"/>
           </a:xfrm>
           <a:prstGeom prst="ellipse">
             <a:avLst/>
@@ -9157,14 +9533,14 @@
       </p:sp>
       <p:sp>
         <p:nvSpPr>
-          <p:cNvPr id="429" name="Oval 6"/>
+          <p:cNvPr id="472" name="Oval 6"/>
           <p:cNvSpPr/>
           <p:nvPr/>
         </p:nvSpPr>
         <p:spPr>
           <a:xfrm>
             <a:off x="1069847" y="1883664"/>
-            <a:ext cx="54873" cy="54873"/>
+            <a:ext cx="54875" cy="54875"/>
           </a:xfrm>
           <a:prstGeom prst="ellipse">
             <a:avLst/>
@@ -9192,14 +9568,14 @@
       </p:sp>
       <p:sp>
         <p:nvSpPr>
-          <p:cNvPr id="430" name="Oval 7"/>
+          <p:cNvPr id="473" name="Oval 7"/>
           <p:cNvSpPr/>
           <p:nvPr/>
         </p:nvSpPr>
         <p:spPr>
           <a:xfrm>
             <a:off x="1481327" y="1883664"/>
-            <a:ext cx="54873" cy="54873"/>
+            <a:ext cx="54875" cy="54875"/>
           </a:xfrm>
           <a:prstGeom prst="ellipse">
             <a:avLst/>
@@ -9227,14 +9603,14 @@
       </p:sp>
       <p:sp>
         <p:nvSpPr>
-          <p:cNvPr id="431" name="Rectangle 8"/>
+          <p:cNvPr id="474" name="Rectangle 8"/>
           <p:cNvSpPr/>
           <p:nvPr/>
         </p:nvSpPr>
         <p:spPr>
           <a:xfrm>
             <a:off x="685800" y="2276855"/>
-            <a:ext cx="10807659" cy="685805"/>
+            <a:ext cx="10807659" cy="685806"/>
           </a:xfrm>
           <a:prstGeom prst="rect">
             <a:avLst/>
@@ -9264,14 +9640,14 @@
       </p:sp>
       <p:sp>
         <p:nvSpPr>
-          <p:cNvPr id="432" name="Rectangle 9"/>
+          <p:cNvPr id="475" name="Rectangle 9"/>
           <p:cNvSpPr/>
           <p:nvPr/>
         </p:nvSpPr>
         <p:spPr>
           <a:xfrm>
             <a:off x="685800" y="2276855"/>
-            <a:ext cx="54864" cy="685805"/>
+            <a:ext cx="54864" cy="685806"/>
           </a:xfrm>
           <a:prstGeom prst="rect">
             <a:avLst/>
@@ -9299,7 +9675,7 @@
       </p:sp>
       <p:sp>
         <p:nvSpPr>
-          <p:cNvPr id="433" name="TextBox 10"/>
+          <p:cNvPr id="476" name="TextBox 10"/>
           <p:cNvSpPr txBox="1"/>
           <p:nvPr/>
         </p:nvSpPr>
@@ -9347,7 +9723,7 @@
       </p:sp>
       <p:sp>
         <p:nvSpPr>
-          <p:cNvPr id="434" name="TextBox 11"/>
+          <p:cNvPr id="477" name="TextBox 11"/>
           <p:cNvSpPr txBox="1"/>
           <p:nvPr/>
         </p:nvSpPr>
@@ -9398,7 +9774,7 @@
       </p:sp>
       <p:sp>
         <p:nvSpPr>
-          <p:cNvPr id="435" name="Rectangle 12"/>
+          <p:cNvPr id="478" name="Rectangle 12"/>
           <p:cNvSpPr/>
           <p:nvPr/>
         </p:nvSpPr>
@@ -9435,7 +9811,7 @@
       </p:sp>
       <p:sp>
         <p:nvSpPr>
-          <p:cNvPr id="436" name="Rectangle 13"/>
+          <p:cNvPr id="479" name="Rectangle 13"/>
           <p:cNvSpPr/>
           <p:nvPr/>
         </p:nvSpPr>
@@ -9470,7 +9846,7 @@
       </p:sp>
       <p:sp>
         <p:nvSpPr>
-          <p:cNvPr id="437" name="TextBox 14"/>
+          <p:cNvPr id="480" name="TextBox 14"/>
           <p:cNvSpPr txBox="1"/>
           <p:nvPr/>
         </p:nvSpPr>
@@ -9518,7 +9894,7 @@
       </p:sp>
       <p:sp>
         <p:nvSpPr>
-          <p:cNvPr id="438" name="TextBox 15"/>
+          <p:cNvPr id="481" name="TextBox 15"/>
           <p:cNvSpPr txBox="1"/>
           <p:nvPr/>
         </p:nvSpPr>
@@ -9605,7 +9981,7 @@
       </p:sp>
       <p:sp>
         <p:nvSpPr>
-          <p:cNvPr id="439" name="Rectangle 16"/>
+          <p:cNvPr id="482" name="Rectangle 16"/>
           <p:cNvSpPr/>
           <p:nvPr/>
         </p:nvSpPr>
@@ -9642,7 +10018,7 @@
       </p:sp>
       <p:sp>
         <p:nvSpPr>
-          <p:cNvPr id="440" name="TextBox 17"/>
+          <p:cNvPr id="483" name="TextBox 17"/>
           <p:cNvSpPr txBox="1"/>
           <p:nvPr/>
         </p:nvSpPr>
@@ -9690,7 +10066,7 @@
       </p:sp>
       <p:sp>
         <p:nvSpPr>
-          <p:cNvPr id="441" name="TextBox 18"/>
+          <p:cNvPr id="484" name="TextBox 18"/>
           <p:cNvSpPr txBox="1"/>
           <p:nvPr/>
         </p:nvSpPr>
@@ -9774,7 +10150,7 @@
       </p:grpSpPr>
       <p:sp>
         <p:nvSpPr>
-          <p:cNvPr id="109" name="TextBox 1"/>
+          <p:cNvPr id="120" name="TextBox 1"/>
           <p:cNvSpPr txBox="1"/>
           <p:nvPr/>
         </p:nvSpPr>
@@ -9822,7 +10198,7 @@
       </p:sp>
       <p:sp>
         <p:nvSpPr>
-          <p:cNvPr id="110" name="TextBox 2"/>
+          <p:cNvPr id="121" name="TextBox 2"/>
           <p:cNvSpPr txBox="1"/>
           <p:nvPr/>
         </p:nvSpPr>
@@ -9870,14 +10246,14 @@
       </p:sp>
       <p:sp>
         <p:nvSpPr>
-          <p:cNvPr id="111" name="Connector 3"/>
-          <p:cNvSpPr/>
-          <p:nvPr/>
-        </p:nvSpPr>
-        <p:spPr>
-          <a:xfrm>
-            <a:off x="685797" y="1664205"/>
-            <a:ext cx="822966" cy="5"/>
+          <p:cNvPr id="122" name="Connector 3"/>
+          <p:cNvSpPr/>
+          <p:nvPr/>
+        </p:nvSpPr>
+        <p:spPr>
+          <a:xfrm>
+            <a:off x="685796" y="1664205"/>
+            <a:ext cx="822967" cy="6"/>
           </a:xfrm>
           <a:prstGeom prst="line">
             <a:avLst/>
@@ -9898,14 +10274,14 @@
       </p:sp>
       <p:sp>
         <p:nvSpPr>
-          <p:cNvPr id="112" name="Oval 4"/>
+          <p:cNvPr id="123" name="Oval 4"/>
           <p:cNvSpPr/>
           <p:nvPr/>
         </p:nvSpPr>
         <p:spPr>
           <a:xfrm>
             <a:off x="658368" y="1636776"/>
-            <a:ext cx="54864" cy="54873"/>
+            <a:ext cx="54864" cy="54875"/>
           </a:xfrm>
           <a:prstGeom prst="ellipse">
             <a:avLst/>
@@ -9933,14 +10309,14 @@
       </p:sp>
       <p:sp>
         <p:nvSpPr>
-          <p:cNvPr id="113" name="Oval 5"/>
+          <p:cNvPr id="124" name="Oval 5"/>
           <p:cNvSpPr/>
           <p:nvPr/>
         </p:nvSpPr>
         <p:spPr>
           <a:xfrm>
             <a:off x="1069847" y="1636776"/>
-            <a:ext cx="54873" cy="54873"/>
+            <a:ext cx="54875" cy="54875"/>
           </a:xfrm>
           <a:prstGeom prst="ellipse">
             <a:avLst/>
@@ -9968,14 +10344,14 @@
       </p:sp>
       <p:sp>
         <p:nvSpPr>
-          <p:cNvPr id="114" name="Oval 6"/>
+          <p:cNvPr id="125" name="Oval 6"/>
           <p:cNvSpPr/>
           <p:nvPr/>
         </p:nvSpPr>
         <p:spPr>
           <a:xfrm>
             <a:off x="1481327" y="1636776"/>
-            <a:ext cx="54873" cy="54873"/>
+            <a:ext cx="54875" cy="54875"/>
           </a:xfrm>
           <a:prstGeom prst="ellipse">
             <a:avLst/>
@@ -10003,14 +10379,14 @@
       </p:sp>
       <p:sp>
         <p:nvSpPr>
-          <p:cNvPr id="115" name="Oval 7"/>
+          <p:cNvPr id="126" name="Oval 7"/>
           <p:cNvSpPr/>
           <p:nvPr/>
         </p:nvSpPr>
         <p:spPr>
           <a:xfrm>
             <a:off x="685800" y="2121405"/>
-            <a:ext cx="310896" cy="310905"/>
+            <a:ext cx="310896" cy="310907"/>
           </a:xfrm>
           <a:prstGeom prst="ellipse">
             <a:avLst/>
@@ -10038,7 +10414,7 @@
       </p:sp>
       <p:sp>
         <p:nvSpPr>
-          <p:cNvPr id="116" name="TextBox 8"/>
+          <p:cNvPr id="127" name="TextBox 8"/>
           <p:cNvSpPr txBox="1"/>
           <p:nvPr/>
         </p:nvSpPr>
@@ -10086,7 +10462,7 @@
       </p:sp>
       <p:sp>
         <p:nvSpPr>
-          <p:cNvPr id="117" name="TextBox 9"/>
+          <p:cNvPr id="128" name="TextBox 9"/>
           <p:cNvSpPr txBox="1"/>
           <p:nvPr/>
         </p:nvSpPr>
@@ -10137,14 +10513,14 @@
       </p:sp>
       <p:sp>
         <p:nvSpPr>
-          <p:cNvPr id="118" name="Oval 10"/>
+          <p:cNvPr id="129" name="Oval 10"/>
           <p:cNvSpPr/>
           <p:nvPr/>
         </p:nvSpPr>
         <p:spPr>
           <a:xfrm>
             <a:off x="685800" y="2834638"/>
-            <a:ext cx="310896" cy="310905"/>
+            <a:ext cx="310896" cy="310907"/>
           </a:xfrm>
           <a:prstGeom prst="ellipse">
             <a:avLst/>
@@ -10172,7 +10548,7 @@
       </p:sp>
       <p:sp>
         <p:nvSpPr>
-          <p:cNvPr id="119" name="TextBox 11"/>
+          <p:cNvPr id="130" name="TextBox 11"/>
           <p:cNvSpPr txBox="1"/>
           <p:nvPr/>
         </p:nvSpPr>
@@ -10220,7 +10596,7 @@
       </p:sp>
       <p:sp>
         <p:nvSpPr>
-          <p:cNvPr id="120" name="TextBox 12"/>
+          <p:cNvPr id="131" name="TextBox 12"/>
           <p:cNvSpPr txBox="1"/>
           <p:nvPr/>
         </p:nvSpPr>
@@ -10271,14 +10647,14 @@
       </p:sp>
       <p:sp>
         <p:nvSpPr>
-          <p:cNvPr id="121" name="Oval 13"/>
+          <p:cNvPr id="132" name="Oval 13"/>
           <p:cNvSpPr/>
           <p:nvPr/>
         </p:nvSpPr>
         <p:spPr>
           <a:xfrm>
             <a:off x="685800" y="3547871"/>
-            <a:ext cx="310896" cy="310905"/>
+            <a:ext cx="310896" cy="310907"/>
           </a:xfrm>
           <a:prstGeom prst="ellipse">
             <a:avLst/>
@@ -10306,7 +10682,7 @@
       </p:sp>
       <p:sp>
         <p:nvSpPr>
-          <p:cNvPr id="122" name="TextBox 14"/>
+          <p:cNvPr id="133" name="TextBox 14"/>
           <p:cNvSpPr txBox="1"/>
           <p:nvPr/>
         </p:nvSpPr>
@@ -10354,7 +10730,7 @@
       </p:sp>
       <p:sp>
         <p:nvSpPr>
-          <p:cNvPr id="123" name="TextBox 15"/>
+          <p:cNvPr id="134" name="TextBox 15"/>
           <p:cNvSpPr txBox="1"/>
           <p:nvPr/>
         </p:nvSpPr>
@@ -10405,14 +10781,14 @@
       </p:sp>
       <p:sp>
         <p:nvSpPr>
-          <p:cNvPr id="124" name="Oval 16"/>
+          <p:cNvPr id="135" name="Oval 16"/>
           <p:cNvSpPr/>
           <p:nvPr/>
         </p:nvSpPr>
         <p:spPr>
           <a:xfrm>
             <a:off x="685800" y="4261103"/>
-            <a:ext cx="310896" cy="310905"/>
+            <a:ext cx="310896" cy="310907"/>
           </a:xfrm>
           <a:prstGeom prst="ellipse">
             <a:avLst/>
@@ -10440,7 +10816,7 @@
       </p:sp>
       <p:sp>
         <p:nvSpPr>
-          <p:cNvPr id="125" name="TextBox 17"/>
+          <p:cNvPr id="136" name="TextBox 17"/>
           <p:cNvSpPr txBox="1"/>
           <p:nvPr/>
         </p:nvSpPr>
@@ -10488,7 +10864,7 @@
       </p:sp>
       <p:sp>
         <p:nvSpPr>
-          <p:cNvPr id="126" name="TextBox 18"/>
+          <p:cNvPr id="137" name="TextBox 18"/>
           <p:cNvSpPr txBox="1"/>
           <p:nvPr/>
         </p:nvSpPr>
@@ -10539,14 +10915,14 @@
       </p:sp>
       <p:sp>
         <p:nvSpPr>
-          <p:cNvPr id="127" name="Oval 19"/>
+          <p:cNvPr id="138" name="Oval 19"/>
           <p:cNvSpPr/>
           <p:nvPr/>
         </p:nvSpPr>
         <p:spPr>
           <a:xfrm>
             <a:off x="685800" y="4974335"/>
-            <a:ext cx="310896" cy="310905"/>
+            <a:ext cx="310896" cy="310907"/>
           </a:xfrm>
           <a:prstGeom prst="ellipse">
             <a:avLst/>
@@ -10574,7 +10950,7 @@
       </p:sp>
       <p:sp>
         <p:nvSpPr>
-          <p:cNvPr id="128" name="TextBox 20"/>
+          <p:cNvPr id="139" name="TextBox 20"/>
           <p:cNvSpPr txBox="1"/>
           <p:nvPr/>
         </p:nvSpPr>
@@ -10622,7 +10998,7 @@
       </p:sp>
       <p:sp>
         <p:nvSpPr>
-          <p:cNvPr id="129" name="TextBox 21"/>
+          <p:cNvPr id="140" name="TextBox 21"/>
           <p:cNvSpPr txBox="1"/>
           <p:nvPr/>
         </p:nvSpPr>
@@ -10671,6 +11047,368 @@
           </a:p>
         </p:txBody>
       </p:sp>
+      <p:sp>
+        <p:nvSpPr>
+          <p:cNvPr id="141" name="Hexagon 129"/>
+          <p:cNvSpPr/>
+          <p:nvPr/>
+        </p:nvSpPr>
+        <p:spPr>
+          <a:xfrm>
+            <a:off x="9052559" y="5486400"/>
+            <a:ext cx="1188721" cy="1188721"/>
+          </a:xfrm>
+          <a:custGeom>
+            <a:avLst/>
+            <a:gdLst/>
+            <a:ahLst/>
+            <a:cxnLst>
+              <a:cxn ang="0">
+                <a:pos x="wd2" y="hd2"/>
+              </a:cxn>
+              <a:cxn ang="5400000">
+                <a:pos x="wd2" y="hd2"/>
+              </a:cxn>
+              <a:cxn ang="10800000">
+                <a:pos x="wd2" y="hd2"/>
+              </a:cxn>
+              <a:cxn ang="16200000">
+                <a:pos x="wd2" y="hd2"/>
+              </a:cxn>
+            </a:cxnLst>
+            <a:rect l="0" t="0" r="r" b="b"/>
+            <a:pathLst>
+              <a:path w="21600" h="21600" fill="norm" stroke="1" extrusionOk="0">
+                <a:moveTo>
+                  <a:pt x="0" y="10800"/>
+                </a:moveTo>
+                <a:lnTo>
+                  <a:pt x="5400" y="0"/>
+                </a:lnTo>
+                <a:lnTo>
+                  <a:pt x="16200" y="0"/>
+                </a:lnTo>
+                <a:lnTo>
+                  <a:pt x="21600" y="10800"/>
+                </a:lnTo>
+                <a:lnTo>
+                  <a:pt x="16200" y="21600"/>
+                </a:lnTo>
+                <a:lnTo>
+                  <a:pt x="5400" y="21600"/>
+                </a:lnTo>
+                <a:close/>
+              </a:path>
+            </a:pathLst>
+          </a:custGeom>
+          <a:ln w="22225">
+            <a:solidFill>
+              <a:srgbClr val="22D3EE"/>
+            </a:solidFill>
+          </a:ln>
+        </p:spPr>
+        <p:txBody>
+          <a:bodyPr lIns="45718" tIns="45718" rIns="45718" bIns="45718" anchor="ctr"/>
+          <a:lstStyle/>
+          <a:p>
+            <a:pPr algn="ctr">
+              <a:defRPr>
+                <a:solidFill>
+                  <a:srgbClr val="FFFFFF"/>
+                </a:solidFill>
+              </a:defRPr>
+            </a:pPr>
+          </a:p>
+        </p:txBody>
+      </p:sp>
+      <p:sp>
+        <p:nvSpPr>
+          <p:cNvPr id="142" name="Moon 130"/>
+          <p:cNvSpPr/>
+          <p:nvPr/>
+        </p:nvSpPr>
+        <p:spPr>
+          <a:xfrm>
+            <a:off x="9395459" y="5801866"/>
+            <a:ext cx="502920" cy="502921"/>
+          </a:xfrm>
+          <a:custGeom>
+            <a:avLst/>
+            <a:gdLst/>
+            <a:ahLst/>
+            <a:cxnLst>
+              <a:cxn ang="0">
+                <a:pos x="wd2" y="hd2"/>
+              </a:cxn>
+              <a:cxn ang="5400000">
+                <a:pos x="wd2" y="hd2"/>
+              </a:cxn>
+              <a:cxn ang="10800000">
+                <a:pos x="wd2" y="hd2"/>
+              </a:cxn>
+              <a:cxn ang="16200000">
+                <a:pos x="wd2" y="hd2"/>
+              </a:cxn>
+            </a:cxnLst>
+            <a:rect l="0" t="0" r="r" b="b"/>
+            <a:pathLst>
+              <a:path w="21600" h="21600" fill="norm" stroke="1" extrusionOk="0">
+                <a:moveTo>
+                  <a:pt x="21600" y="21600"/>
+                </a:moveTo>
+                <a:cubicBezTo>
+                  <a:pt x="9671" y="21600"/>
+                  <a:pt x="0" y="16765"/>
+                  <a:pt x="0" y="10800"/>
+                </a:cubicBezTo>
+                <a:cubicBezTo>
+                  <a:pt x="0" y="4835"/>
+                  <a:pt x="9671" y="0"/>
+                  <a:pt x="21600" y="0"/>
+                </a:cubicBezTo>
+                <a:lnTo>
+                  <a:pt x="21600" y="0"/>
+                </a:lnTo>
+                <a:cubicBezTo>
+                  <a:pt x="9671" y="4473"/>
+                  <a:pt x="7253" y="12935"/>
+                  <a:pt x="16200" y="18900"/>
+                </a:cubicBezTo>
+                <a:cubicBezTo>
+                  <a:pt x="17735" y="19923"/>
+                  <a:pt x="19553" y="20832"/>
+                  <a:pt x="21600" y="21600"/>
+                </a:cubicBezTo>
+                <a:close/>
+              </a:path>
+            </a:pathLst>
+          </a:custGeom>
+          <a:solidFill>
+            <a:srgbClr val="F5A524"/>
+          </a:solidFill>
+          <a:ln w="12700">
+            <a:miter lim="400000"/>
+          </a:ln>
+        </p:spPr>
+        <p:txBody>
+          <a:bodyPr lIns="45718" tIns="45718" rIns="45718" bIns="45718" anchor="ctr"/>
+          <a:lstStyle/>
+          <a:p>
+            <a:pPr algn="ctr">
+              <a:defRPr>
+                <a:solidFill>
+                  <a:srgbClr val="FFFFFF"/>
+                </a:solidFill>
+              </a:defRPr>
+            </a:pPr>
+          </a:p>
+        </p:txBody>
+      </p:sp>
+      <p:sp>
+        <p:nvSpPr>
+          <p:cNvPr id="143" name="Connector 131"/>
+          <p:cNvSpPr/>
+          <p:nvPr/>
+        </p:nvSpPr>
+        <p:spPr>
+          <a:xfrm>
+            <a:off x="9006840" y="6812280"/>
+            <a:ext cx="1280161" cy="1"/>
+          </a:xfrm>
+          <a:prstGeom prst="line">
+            <a:avLst/>
+          </a:prstGeom>
+          <a:ln w="19050">
+            <a:solidFill>
+              <a:srgbClr val="22D3EE"/>
+            </a:solidFill>
+          </a:ln>
+        </p:spPr>
+        <p:txBody>
+          <a:bodyPr lIns="45718" tIns="45718" rIns="45718" bIns="45718"/>
+          <a:lstStyle/>
+          <a:p>
+            <a:pPr/>
+          </a:p>
+        </p:txBody>
+      </p:sp>
+      <p:sp>
+        <p:nvSpPr>
+          <p:cNvPr id="144" name="Oval 132"/>
+          <p:cNvSpPr/>
+          <p:nvPr/>
+        </p:nvSpPr>
+        <p:spPr>
+          <a:xfrm>
+            <a:off x="8979407" y="6784847"/>
+            <a:ext cx="54865" cy="54865"/>
+          </a:xfrm>
+          <a:prstGeom prst="ellipse">
+            <a:avLst/>
+          </a:prstGeom>
+          <a:solidFill>
+            <a:srgbClr val="F5A524"/>
+          </a:solidFill>
+          <a:ln w="12700">
+            <a:miter lim="400000"/>
+          </a:ln>
+        </p:spPr>
+        <p:txBody>
+          <a:bodyPr lIns="45718" tIns="45718" rIns="45718" bIns="45718" anchor="ctr"/>
+          <a:lstStyle/>
+          <a:p>
+            <a:pPr algn="ctr">
+              <a:defRPr>
+                <a:solidFill>
+                  <a:srgbClr val="FFFFFF"/>
+                </a:solidFill>
+              </a:defRPr>
+            </a:pPr>
+          </a:p>
+        </p:txBody>
+      </p:sp>
+      <p:sp>
+        <p:nvSpPr>
+          <p:cNvPr id="145" name="Oval 133"/>
+          <p:cNvSpPr/>
+          <p:nvPr/>
+        </p:nvSpPr>
+        <p:spPr>
+          <a:xfrm>
+            <a:off x="10259568" y="6784847"/>
+            <a:ext cx="54865" cy="54865"/>
+          </a:xfrm>
+          <a:prstGeom prst="ellipse">
+            <a:avLst/>
+          </a:prstGeom>
+          <a:solidFill>
+            <a:srgbClr val="F5A524"/>
+          </a:solidFill>
+          <a:ln w="12700">
+            <a:miter lim="400000"/>
+          </a:ln>
+        </p:spPr>
+        <p:txBody>
+          <a:bodyPr lIns="45718" tIns="45718" rIns="45718" bIns="45718" anchor="ctr"/>
+          <a:lstStyle/>
+          <a:p>
+            <a:pPr algn="ctr">
+              <a:defRPr>
+                <a:solidFill>
+                  <a:srgbClr val="FFFFFF"/>
+                </a:solidFill>
+              </a:defRPr>
+            </a:pPr>
+          </a:p>
+        </p:txBody>
+      </p:sp>
+      <p:grpSp>
+        <p:nvGrpSpPr>
+          <p:cNvPr id="148" name="Rounded Rectangle 134"/>
+          <p:cNvGrpSpPr/>
+          <p:nvPr/>
+        </p:nvGrpSpPr>
+        <p:grpSpPr>
+          <a:xfrm>
+            <a:off x="8549640" y="6995159"/>
+            <a:ext cx="2194561" cy="310897"/>
+            <a:chOff x="0" y="0"/>
+            <a:chExt cx="2194560" cy="310895"/>
+          </a:xfrm>
+        </p:grpSpPr>
+        <p:sp>
+          <p:nvSpPr>
+            <p:cNvPr id="146" name="圓角矩形"/>
+            <p:cNvSpPr/>
+            <p:nvPr/>
+          </p:nvSpPr>
+          <p:spPr>
+            <a:xfrm>
+              <a:off x="0" y="0"/>
+              <a:ext cx="2194561" cy="310896"/>
+            </a:xfrm>
+            <a:prstGeom prst="roundRect">
+              <a:avLst>
+                <a:gd name="adj" fmla="val 50000"/>
+              </a:avLst>
+            </a:prstGeom>
+            <a:solidFill>
+              <a:srgbClr val="1B2A6B"/>
+            </a:solidFill>
+            <a:ln w="12700" cap="flat">
+              <a:noFill/>
+              <a:miter lim="400000"/>
+            </a:ln>
+            <a:effectLst/>
+          </p:spPr>
+          <p:txBody>
+            <a:bodyPr wrap="square" lIns="45718" tIns="45718" rIns="45718" bIns="45718" numCol="1" anchor="ctr">
+              <a:noAutofit/>
+            </a:bodyPr>
+            <a:lstStyle/>
+            <a:p>
+              <a:pPr algn="ctr">
+                <a:defRPr>
+                  <a:solidFill>
+                    <a:srgbClr val="FFFFFF"/>
+                  </a:solidFill>
+                </a:defRPr>
+              </a:pPr>
+            </a:p>
+          </p:txBody>
+        </p:sp>
+        <p:sp>
+          <p:nvSpPr>
+            <p:cNvPr id="147" name="OFF DUTY · PERSONAL"/>
+            <p:cNvSpPr txBox="1"/>
+            <p:nvPr/>
+          </p:nvSpPr>
+          <p:spPr>
+            <a:xfrm>
+              <a:off x="364555" y="85598"/>
+              <a:ext cx="1465450" cy="139701"/>
+            </a:xfrm>
+            <a:prstGeom prst="rect">
+              <a:avLst/>
+            </a:prstGeom>
+            <a:noFill/>
+            <a:ln w="12700" cap="flat">
+              <a:noFill/>
+              <a:miter lim="400000"/>
+            </a:ln>
+            <a:effectLst/>
+            <a:extLst>
+              <a:ext uri="{C572A759-6A51-4108-AA02-DFA0A04FC94B}">
+                <ma14:wrappingTextBoxFlag xmlns:ma14="http://schemas.microsoft.com/office/mac/drawingml/2011/main" val="1"/>
+              </a:ext>
+            </a:extLst>
+          </p:spPr>
+          <p:txBody>
+            <a:bodyPr wrap="none" lIns="0" tIns="0" rIns="0" bIns="0" numCol="1" anchor="ctr">
+              <a:spAutoFit/>
+            </a:bodyPr>
+            <a:lstStyle>
+              <a:lvl1pPr algn="ctr">
+                <a:defRPr b="1" sz="1000">
+                  <a:solidFill>
+                    <a:srgbClr val="FFFFFF"/>
+                  </a:solidFill>
+                  <a:latin typeface="Menlo Regular"/>
+                  <a:ea typeface="Menlo Regular"/>
+                  <a:cs typeface="Menlo Regular"/>
+                  <a:sym typeface="Menlo Regular"/>
+                </a:defRPr>
+              </a:lvl1pPr>
+            </a:lstStyle>
+            <a:p>
+              <a:pPr/>
+              <a:r>
+                <a:t>OFF DUTY · PERSONAL</a:t>
+              </a:r>
+            </a:p>
+          </p:txBody>
+        </p:sp>
+      </p:grpSp>
     </p:spTree>
   </p:cSld>
   <p:clrMapOvr>
@@ -10706,7 +11444,7 @@
       </p:grpSpPr>
       <p:sp>
         <p:nvSpPr>
-          <p:cNvPr id="443" name="TextBox 1"/>
+          <p:cNvPr id="486" name="TextBox 1"/>
           <p:cNvSpPr txBox="1"/>
           <p:nvPr/>
         </p:nvSpPr>
@@ -10754,7 +11492,7 @@
       </p:sp>
       <p:sp>
         <p:nvSpPr>
-          <p:cNvPr id="444" name="TextBox 2"/>
+          <p:cNvPr id="487" name="TextBox 2"/>
           <p:cNvSpPr txBox="1"/>
           <p:nvPr/>
         </p:nvSpPr>
@@ -10802,14 +11540,14 @@
       </p:sp>
       <p:sp>
         <p:nvSpPr>
-          <p:cNvPr id="445" name="Connector 3"/>
-          <p:cNvSpPr/>
-          <p:nvPr/>
-        </p:nvSpPr>
-        <p:spPr>
-          <a:xfrm>
-            <a:off x="685797" y="1664205"/>
-            <a:ext cx="822966" cy="5"/>
+          <p:cNvPr id="488" name="Connector 3"/>
+          <p:cNvSpPr/>
+          <p:nvPr/>
+        </p:nvSpPr>
+        <p:spPr>
+          <a:xfrm>
+            <a:off x="685796" y="1664205"/>
+            <a:ext cx="822967" cy="6"/>
           </a:xfrm>
           <a:prstGeom prst="line">
             <a:avLst/>
@@ -10830,14 +11568,14 @@
       </p:sp>
       <p:sp>
         <p:nvSpPr>
-          <p:cNvPr id="446" name="Oval 4"/>
+          <p:cNvPr id="489" name="Oval 4"/>
           <p:cNvSpPr/>
           <p:nvPr/>
         </p:nvSpPr>
         <p:spPr>
           <a:xfrm>
             <a:off x="658368" y="1636776"/>
-            <a:ext cx="54864" cy="54873"/>
+            <a:ext cx="54864" cy="54875"/>
           </a:xfrm>
           <a:prstGeom prst="ellipse">
             <a:avLst/>
@@ -10865,14 +11603,14 @@
       </p:sp>
       <p:sp>
         <p:nvSpPr>
-          <p:cNvPr id="447" name="Oval 5"/>
+          <p:cNvPr id="490" name="Oval 5"/>
           <p:cNvSpPr/>
           <p:nvPr/>
         </p:nvSpPr>
         <p:spPr>
           <a:xfrm>
             <a:off x="1069847" y="1636776"/>
-            <a:ext cx="54873" cy="54873"/>
+            <a:ext cx="54875" cy="54875"/>
           </a:xfrm>
           <a:prstGeom prst="ellipse">
             <a:avLst/>
@@ -10900,14 +11638,14 @@
       </p:sp>
       <p:sp>
         <p:nvSpPr>
-          <p:cNvPr id="448" name="Oval 6"/>
+          <p:cNvPr id="491" name="Oval 6"/>
           <p:cNvSpPr/>
           <p:nvPr/>
         </p:nvSpPr>
         <p:spPr>
           <a:xfrm>
             <a:off x="1481327" y="1636776"/>
-            <a:ext cx="54873" cy="54873"/>
+            <a:ext cx="54875" cy="54875"/>
           </a:xfrm>
           <a:prstGeom prst="ellipse">
             <a:avLst/>
@@ -10935,14 +11673,14 @@
       </p:sp>
       <p:sp>
         <p:nvSpPr>
-          <p:cNvPr id="449" name="Rectangle 7"/>
+          <p:cNvPr id="492" name="Rectangle 7"/>
           <p:cNvSpPr/>
           <p:nvPr/>
         </p:nvSpPr>
         <p:spPr>
           <a:xfrm>
             <a:off x="685798" y="2212848"/>
-            <a:ext cx="100590" cy="100589"/>
+            <a:ext cx="100591" cy="100590"/>
           </a:xfrm>
           <a:prstGeom prst="rect">
             <a:avLst/>
@@ -10970,7 +11708,7 @@
       </p:sp>
       <p:sp>
         <p:nvSpPr>
-          <p:cNvPr id="450" name="TextBox 8"/>
+          <p:cNvPr id="493" name="TextBox 8"/>
           <p:cNvSpPr txBox="1"/>
           <p:nvPr/>
         </p:nvSpPr>
@@ -11021,14 +11759,14 @@
       </p:sp>
       <p:sp>
         <p:nvSpPr>
-          <p:cNvPr id="451" name="Rectangle 9"/>
+          <p:cNvPr id="494" name="Rectangle 9"/>
           <p:cNvSpPr/>
           <p:nvPr/>
         </p:nvSpPr>
         <p:spPr>
           <a:xfrm>
             <a:off x="685798" y="2665727"/>
-            <a:ext cx="100590" cy="100589"/>
+            <a:ext cx="100591" cy="100590"/>
           </a:xfrm>
           <a:prstGeom prst="rect">
             <a:avLst/>
@@ -11056,7 +11794,7 @@
       </p:sp>
       <p:sp>
         <p:nvSpPr>
-          <p:cNvPr id="452" name="TextBox 10"/>
+          <p:cNvPr id="495" name="TextBox 10"/>
           <p:cNvSpPr txBox="1"/>
           <p:nvPr/>
         </p:nvSpPr>
@@ -11107,14 +11845,14 @@
       </p:sp>
       <p:sp>
         <p:nvSpPr>
-          <p:cNvPr id="453" name="Rectangle 11"/>
+          <p:cNvPr id="496" name="Rectangle 11"/>
           <p:cNvSpPr/>
           <p:nvPr/>
         </p:nvSpPr>
         <p:spPr>
           <a:xfrm>
             <a:off x="685798" y="3118610"/>
-            <a:ext cx="100590" cy="100590"/>
+            <a:ext cx="100591" cy="100591"/>
           </a:xfrm>
           <a:prstGeom prst="rect">
             <a:avLst/>
@@ -11142,7 +11880,7 @@
       </p:sp>
       <p:sp>
         <p:nvSpPr>
-          <p:cNvPr id="454" name="TextBox 12"/>
+          <p:cNvPr id="497" name="TextBox 12"/>
           <p:cNvSpPr txBox="1"/>
           <p:nvPr/>
         </p:nvSpPr>
@@ -11226,7 +11964,7 @@
       </p:grpSpPr>
       <p:sp>
         <p:nvSpPr>
-          <p:cNvPr id="456" name="TextBox 1"/>
+          <p:cNvPr id="499" name="TextBox 1"/>
           <p:cNvSpPr txBox="1"/>
           <p:nvPr/>
         </p:nvSpPr>
@@ -11274,7 +12012,7 @@
       </p:sp>
       <p:sp>
         <p:nvSpPr>
-          <p:cNvPr id="457" name="TextBox 2"/>
+          <p:cNvPr id="500" name="TextBox 2"/>
           <p:cNvSpPr txBox="1"/>
           <p:nvPr/>
         </p:nvSpPr>
@@ -11322,7 +12060,7 @@
       </p:sp>
       <p:sp>
         <p:nvSpPr>
-          <p:cNvPr id="458" name="TextBox 3"/>
+          <p:cNvPr id="501" name="TextBox 3"/>
           <p:cNvSpPr txBox="1"/>
           <p:nvPr/>
         </p:nvSpPr>
@@ -11370,14 +12108,14 @@
       </p:sp>
       <p:sp>
         <p:nvSpPr>
-          <p:cNvPr id="459" name="Connector 4"/>
-          <p:cNvSpPr/>
-          <p:nvPr/>
-        </p:nvSpPr>
-        <p:spPr>
-          <a:xfrm>
-            <a:off x="685798" y="1911094"/>
-            <a:ext cx="822963" cy="3"/>
+          <p:cNvPr id="502" name="Connector 4"/>
+          <p:cNvSpPr/>
+          <p:nvPr/>
+        </p:nvSpPr>
+        <p:spPr>
+          <a:xfrm>
+            <a:off x="685797" y="1911094"/>
+            <a:ext cx="822965" cy="4"/>
           </a:xfrm>
           <a:prstGeom prst="line">
             <a:avLst/>
@@ -11398,14 +12136,14 @@
       </p:sp>
       <p:sp>
         <p:nvSpPr>
-          <p:cNvPr id="460" name="Oval 5"/>
+          <p:cNvPr id="503" name="Oval 5"/>
           <p:cNvSpPr/>
           <p:nvPr/>
         </p:nvSpPr>
         <p:spPr>
           <a:xfrm>
             <a:off x="658368" y="1883664"/>
-            <a:ext cx="54864" cy="54869"/>
+            <a:ext cx="54864" cy="54871"/>
           </a:xfrm>
           <a:prstGeom prst="ellipse">
             <a:avLst/>
@@ -11426,9 +12164,9 @@
                 <a:solidFill>
                   <a:srgbClr val="FFFFFF"/>
                 </a:solidFill>
-                <a:latin typeface="+mj-lt"/>
-                <a:ea typeface="+mj-ea"/>
-                <a:cs typeface="+mj-cs"/>
+                <a:latin typeface="+mn-lt"/>
+                <a:ea typeface="+mn-ea"/>
+                <a:cs typeface="+mn-cs"/>
                 <a:sym typeface="Helvetica"/>
               </a:defRPr>
             </a:pPr>
@@ -11437,14 +12175,14 @@
       </p:sp>
       <p:sp>
         <p:nvSpPr>
-          <p:cNvPr id="461" name="Oval 6"/>
+          <p:cNvPr id="504" name="Oval 6"/>
           <p:cNvSpPr/>
           <p:nvPr/>
         </p:nvSpPr>
         <p:spPr>
           <a:xfrm>
             <a:off x="1069847" y="1883664"/>
-            <a:ext cx="54869" cy="54869"/>
+            <a:ext cx="54871" cy="54871"/>
           </a:xfrm>
           <a:prstGeom prst="ellipse">
             <a:avLst/>
@@ -11465,9 +12203,9 @@
                 <a:solidFill>
                   <a:srgbClr val="FFFFFF"/>
                 </a:solidFill>
-                <a:latin typeface="+mj-lt"/>
-                <a:ea typeface="+mj-ea"/>
-                <a:cs typeface="+mj-cs"/>
+                <a:latin typeface="+mn-lt"/>
+                <a:ea typeface="+mn-ea"/>
+                <a:cs typeface="+mn-cs"/>
                 <a:sym typeface="Helvetica"/>
               </a:defRPr>
             </a:pPr>
@@ -11476,14 +12214,14 @@
       </p:sp>
       <p:sp>
         <p:nvSpPr>
-          <p:cNvPr id="462" name="Oval 7"/>
+          <p:cNvPr id="505" name="Oval 7"/>
           <p:cNvSpPr/>
           <p:nvPr/>
         </p:nvSpPr>
         <p:spPr>
           <a:xfrm>
             <a:off x="1481327" y="1883664"/>
-            <a:ext cx="54869" cy="54869"/>
+            <a:ext cx="54871" cy="54871"/>
           </a:xfrm>
           <a:prstGeom prst="ellipse">
             <a:avLst/>
@@ -11504,9 +12242,9 @@
                 <a:solidFill>
                   <a:srgbClr val="FFFFFF"/>
                 </a:solidFill>
-                <a:latin typeface="+mj-lt"/>
-                <a:ea typeface="+mj-ea"/>
-                <a:cs typeface="+mj-cs"/>
+                <a:latin typeface="+mn-lt"/>
+                <a:ea typeface="+mn-ea"/>
+                <a:cs typeface="+mn-cs"/>
                 <a:sym typeface="Helvetica"/>
               </a:defRPr>
             </a:pPr>
@@ -11515,14 +12253,14 @@
       </p:sp>
       <p:sp>
         <p:nvSpPr>
-          <p:cNvPr id="463" name="Rectangle 8"/>
+          <p:cNvPr id="506" name="Rectangle 8"/>
           <p:cNvSpPr/>
           <p:nvPr/>
         </p:nvSpPr>
         <p:spPr>
           <a:xfrm>
             <a:off x="685800" y="2304288"/>
-            <a:ext cx="10807659" cy="1417323"/>
+            <a:ext cx="10807659" cy="1417324"/>
           </a:xfrm>
           <a:prstGeom prst="rect">
             <a:avLst/>
@@ -11545,9 +12283,9 @@
                 <a:solidFill>
                   <a:srgbClr val="FFFFFF"/>
                 </a:solidFill>
-                <a:latin typeface="+mj-lt"/>
-                <a:ea typeface="+mj-ea"/>
-                <a:cs typeface="+mj-cs"/>
+                <a:latin typeface="+mn-lt"/>
+                <a:ea typeface="+mn-ea"/>
+                <a:cs typeface="+mn-cs"/>
                 <a:sym typeface="Helvetica"/>
               </a:defRPr>
             </a:pPr>
@@ -11556,14 +12294,14 @@
       </p:sp>
       <p:sp>
         <p:nvSpPr>
-          <p:cNvPr id="464" name="Rectangle 9"/>
+          <p:cNvPr id="507" name="Rectangle 9"/>
           <p:cNvSpPr/>
           <p:nvPr/>
         </p:nvSpPr>
         <p:spPr>
           <a:xfrm>
             <a:off x="685798" y="2304288"/>
-            <a:ext cx="73156" cy="1417323"/>
+            <a:ext cx="73157" cy="1417324"/>
           </a:xfrm>
           <a:prstGeom prst="rect">
             <a:avLst/>
@@ -11584,9 +12322,9 @@
                 <a:solidFill>
                   <a:srgbClr val="FFFFFF"/>
                 </a:solidFill>
-                <a:latin typeface="+mj-lt"/>
-                <a:ea typeface="+mj-ea"/>
-                <a:cs typeface="+mj-cs"/>
+                <a:latin typeface="+mn-lt"/>
+                <a:ea typeface="+mn-ea"/>
+                <a:cs typeface="+mn-cs"/>
                 <a:sym typeface="Helvetica"/>
               </a:defRPr>
             </a:pPr>
@@ -11595,28 +12333,28 @@
       </p:sp>
       <p:grpSp>
         <p:nvGrpSpPr>
-          <p:cNvPr id="467" name="Rounded Rectangle 10"/>
+          <p:cNvPr id="510" name="Rounded Rectangle 10"/>
           <p:cNvGrpSpPr/>
           <p:nvPr/>
         </p:nvGrpSpPr>
         <p:grpSpPr>
           <a:xfrm>
-            <a:off x="941832" y="2468877"/>
-            <a:ext cx="1051565" cy="310901"/>
-            <a:chOff x="0" y="0"/>
-            <a:chExt cx="1051564" cy="310900"/>
+            <a:off x="941832" y="2468876"/>
+            <a:ext cx="1051567" cy="310904"/>
+            <a:chOff x="0" y="-1"/>
+            <a:chExt cx="1051565" cy="310903"/>
           </a:xfrm>
         </p:grpSpPr>
         <p:sp>
           <p:nvSpPr>
-            <p:cNvPr id="465" name="圓角矩形"/>
+            <p:cNvPr id="508" name="圓角矩形"/>
             <p:cNvSpPr/>
             <p:nvPr/>
           </p:nvSpPr>
           <p:spPr>
             <a:xfrm>
-              <a:off x="0" y="-1"/>
-              <a:ext cx="1051565" cy="310902"/>
+              <a:off x="0" y="-2"/>
+              <a:ext cx="1051566" cy="310905"/>
             </a:xfrm>
             <a:prstGeom prst="roundRect">
               <a:avLst>
@@ -11643,9 +12381,9 @@
                   <a:solidFill>
                     <a:srgbClr val="FFFFFF"/>
                   </a:solidFill>
-                  <a:latin typeface="+mj-lt"/>
-                  <a:ea typeface="+mj-ea"/>
-                  <a:cs typeface="+mj-cs"/>
+                  <a:latin typeface="+mn-lt"/>
+                  <a:ea typeface="+mn-ea"/>
+                  <a:cs typeface="+mn-cs"/>
                   <a:sym typeface="Helvetica"/>
                 </a:defRPr>
               </a:pPr>
@@ -11654,7 +12392,7 @@
         </p:sp>
         <p:sp>
           <p:nvSpPr>
-            <p:cNvPr id="466" name="cc-new"/>
+            <p:cNvPr id="509" name="cc-new"/>
             <p:cNvSpPr txBox="1"/>
             <p:nvPr/>
           </p:nvSpPr>
@@ -11706,7 +12444,7 @@
       </p:grpSp>
       <p:sp>
         <p:nvSpPr>
-          <p:cNvPr id="468" name="TextBox 11"/>
+          <p:cNvPr id="511" name="TextBox 11"/>
           <p:cNvSpPr txBox="1"/>
           <p:nvPr/>
         </p:nvSpPr>
@@ -11754,14 +12492,14 @@
       </p:sp>
       <p:sp>
         <p:nvSpPr>
-          <p:cNvPr id="469" name="Rectangle 12"/>
+          <p:cNvPr id="512" name="Rectangle 12"/>
           <p:cNvSpPr/>
           <p:nvPr/>
         </p:nvSpPr>
         <p:spPr>
           <a:xfrm>
             <a:off x="941832" y="2953511"/>
-            <a:ext cx="82299" cy="82297"/>
+            <a:ext cx="82300" cy="82297"/>
           </a:xfrm>
           <a:prstGeom prst="rect">
             <a:avLst/>
@@ -11782,9 +12520,9 @@
                 <a:solidFill>
                   <a:srgbClr val="FFFFFF"/>
                 </a:solidFill>
-                <a:latin typeface="+mj-lt"/>
-                <a:ea typeface="+mj-ea"/>
-                <a:cs typeface="+mj-cs"/>
+                <a:latin typeface="+mn-lt"/>
+                <a:ea typeface="+mn-ea"/>
+                <a:cs typeface="+mn-cs"/>
                 <a:sym typeface="Helvetica"/>
               </a:defRPr>
             </a:pPr>
@@ -11793,7 +12531,7 @@
       </p:sp>
       <p:sp>
         <p:nvSpPr>
-          <p:cNvPr id="470" name="TextBox 13"/>
+          <p:cNvPr id="513" name="TextBox 13"/>
           <p:cNvSpPr txBox="1"/>
           <p:nvPr/>
         </p:nvSpPr>
@@ -11841,14 +12579,14 @@
       </p:sp>
       <p:sp>
         <p:nvSpPr>
-          <p:cNvPr id="471" name="Rectangle 14"/>
+          <p:cNvPr id="514" name="Rectangle 14"/>
           <p:cNvSpPr/>
           <p:nvPr/>
         </p:nvSpPr>
         <p:spPr>
           <a:xfrm>
             <a:off x="941832" y="3227832"/>
-            <a:ext cx="82299" cy="82299"/>
+            <a:ext cx="82300" cy="82300"/>
           </a:xfrm>
           <a:prstGeom prst="rect">
             <a:avLst/>
@@ -11869,9 +12607,9 @@
                 <a:solidFill>
                   <a:srgbClr val="FFFFFF"/>
                 </a:solidFill>
-                <a:latin typeface="+mj-lt"/>
-                <a:ea typeface="+mj-ea"/>
-                <a:cs typeface="+mj-cs"/>
+                <a:latin typeface="+mn-lt"/>
+                <a:ea typeface="+mn-ea"/>
+                <a:cs typeface="+mn-cs"/>
                 <a:sym typeface="Helvetica"/>
               </a:defRPr>
             </a:pPr>
@@ -11880,7 +12618,7 @@
       </p:sp>
       <p:sp>
         <p:nvSpPr>
-          <p:cNvPr id="472" name="TextBox 15"/>
+          <p:cNvPr id="515" name="TextBox 15"/>
           <p:cNvSpPr txBox="1"/>
           <p:nvPr/>
         </p:nvSpPr>
@@ -11928,14 +12666,14 @@
       </p:sp>
       <p:sp>
         <p:nvSpPr>
-          <p:cNvPr id="473" name="Rectangle 16"/>
+          <p:cNvPr id="516" name="Rectangle 16"/>
           <p:cNvSpPr/>
           <p:nvPr/>
         </p:nvSpPr>
         <p:spPr>
           <a:xfrm>
             <a:off x="941832" y="3502152"/>
-            <a:ext cx="82299" cy="82299"/>
+            <a:ext cx="82300" cy="82300"/>
           </a:xfrm>
           <a:prstGeom prst="rect">
             <a:avLst/>
@@ -11956,9 +12694,9 @@
                 <a:solidFill>
                   <a:srgbClr val="FFFFFF"/>
                 </a:solidFill>
-                <a:latin typeface="+mj-lt"/>
-                <a:ea typeface="+mj-ea"/>
-                <a:cs typeface="+mj-cs"/>
+                <a:latin typeface="+mn-lt"/>
+                <a:ea typeface="+mn-ea"/>
+                <a:cs typeface="+mn-cs"/>
                 <a:sym typeface="Helvetica"/>
               </a:defRPr>
             </a:pPr>
@@ -11967,7 +12705,7 @@
       </p:sp>
       <p:sp>
         <p:nvSpPr>
-          <p:cNvPr id="474" name="TextBox 17"/>
+          <p:cNvPr id="517" name="TextBox 17"/>
           <p:cNvSpPr txBox="1"/>
           <p:nvPr/>
         </p:nvSpPr>
@@ -12015,14 +12753,14 @@
       </p:sp>
       <p:sp>
         <p:nvSpPr>
-          <p:cNvPr id="475" name="Oval 18"/>
+          <p:cNvPr id="518" name="Oval 18"/>
           <p:cNvSpPr/>
           <p:nvPr/>
         </p:nvSpPr>
         <p:spPr>
           <a:xfrm>
             <a:off x="2729208" y="4041647"/>
-            <a:ext cx="1371605" cy="1371605"/>
+            <a:ext cx="1371607" cy="1371607"/>
           </a:xfrm>
           <a:prstGeom prst="ellipse">
             <a:avLst/>
@@ -12043,9 +12781,9 @@
                 <a:solidFill>
                   <a:srgbClr val="FFFFFF"/>
                 </a:solidFill>
-                <a:latin typeface="+mj-lt"/>
-                <a:ea typeface="+mj-ea"/>
-                <a:cs typeface="+mj-cs"/>
+                <a:latin typeface="+mn-lt"/>
+                <a:ea typeface="+mn-ea"/>
+                <a:cs typeface="+mn-cs"/>
                 <a:sym typeface="Helvetica"/>
               </a:defRPr>
             </a:pPr>
@@ -12054,14 +12792,14 @@
       </p:sp>
       <p:sp>
         <p:nvSpPr>
-          <p:cNvPr id="476" name="TextBox 19"/>
+          <p:cNvPr id="519" name="TextBox 19"/>
           <p:cNvSpPr txBox="1"/>
           <p:nvPr/>
         </p:nvSpPr>
         <p:spPr>
           <a:xfrm>
             <a:off x="2729207" y="4169664"/>
-            <a:ext cx="1371604" cy="177801"/>
+            <a:ext cx="1371605" cy="177801"/>
           </a:xfrm>
           <a:prstGeom prst="rect">
             <a:avLst/>
@@ -12102,14 +12840,14 @@
       </p:sp>
       <p:sp>
         <p:nvSpPr>
-          <p:cNvPr id="477" name="TextBox 20"/>
+          <p:cNvPr id="520" name="TextBox 20"/>
           <p:cNvSpPr txBox="1"/>
           <p:nvPr/>
         </p:nvSpPr>
         <p:spPr>
           <a:xfrm>
             <a:off x="2729207" y="4575047"/>
-            <a:ext cx="1371604" cy="304801"/>
+            <a:ext cx="1371605" cy="304801"/>
           </a:xfrm>
           <a:prstGeom prst="rect">
             <a:avLst/>
@@ -12150,14 +12888,14 @@
       </p:sp>
       <p:sp>
         <p:nvSpPr>
-          <p:cNvPr id="478" name="Connector 21"/>
+          <p:cNvPr id="521" name="Connector 21"/>
           <p:cNvSpPr/>
           <p:nvPr/>
         </p:nvSpPr>
         <p:spPr>
           <a:xfrm>
             <a:off x="4100807" y="4727447"/>
-            <a:ext cx="411483" cy="3"/>
+            <a:ext cx="411484" cy="4"/>
           </a:xfrm>
           <a:prstGeom prst="line">
             <a:avLst/>
@@ -12178,14 +12916,14 @@
       </p:sp>
       <p:sp>
         <p:nvSpPr>
-          <p:cNvPr id="479" name="Oval 22"/>
+          <p:cNvPr id="522" name="Oval 22"/>
           <p:cNvSpPr/>
           <p:nvPr/>
         </p:nvSpPr>
         <p:spPr>
           <a:xfrm>
             <a:off x="4512288" y="4041647"/>
-            <a:ext cx="1371605" cy="1371605"/>
+            <a:ext cx="1371607" cy="1371607"/>
           </a:xfrm>
           <a:prstGeom prst="ellipse">
             <a:avLst/>
@@ -12206,9 +12944,9 @@
                 <a:solidFill>
                   <a:srgbClr val="FFFFFF"/>
                 </a:solidFill>
-                <a:latin typeface="+mj-lt"/>
-                <a:ea typeface="+mj-ea"/>
-                <a:cs typeface="+mj-cs"/>
+                <a:latin typeface="+mn-lt"/>
+                <a:ea typeface="+mn-ea"/>
+                <a:cs typeface="+mn-cs"/>
                 <a:sym typeface="Helvetica"/>
               </a:defRPr>
             </a:pPr>
@@ -12217,14 +12955,14 @@
       </p:sp>
       <p:sp>
         <p:nvSpPr>
-          <p:cNvPr id="480" name="TextBox 23"/>
+          <p:cNvPr id="523" name="TextBox 23"/>
           <p:cNvSpPr txBox="1"/>
           <p:nvPr/>
         </p:nvSpPr>
         <p:spPr>
           <a:xfrm>
             <a:off x="4512288" y="4169664"/>
-            <a:ext cx="1371603" cy="177801"/>
+            <a:ext cx="1371604" cy="177801"/>
           </a:xfrm>
           <a:prstGeom prst="rect">
             <a:avLst/>
@@ -12265,14 +13003,14 @@
       </p:sp>
       <p:sp>
         <p:nvSpPr>
-          <p:cNvPr id="481" name="TextBox 24"/>
+          <p:cNvPr id="524" name="TextBox 24"/>
           <p:cNvSpPr txBox="1"/>
           <p:nvPr/>
         </p:nvSpPr>
         <p:spPr>
           <a:xfrm>
             <a:off x="4512288" y="4575047"/>
-            <a:ext cx="1371603" cy="304801"/>
+            <a:ext cx="1371604" cy="304801"/>
           </a:xfrm>
           <a:prstGeom prst="rect">
             <a:avLst/>
@@ -12313,14 +13051,14 @@
       </p:sp>
       <p:sp>
         <p:nvSpPr>
-          <p:cNvPr id="482" name="Connector 25"/>
+          <p:cNvPr id="525" name="Connector 25"/>
           <p:cNvSpPr/>
           <p:nvPr/>
         </p:nvSpPr>
         <p:spPr>
           <a:xfrm>
             <a:off x="5883888" y="4727447"/>
-            <a:ext cx="411483" cy="3"/>
+            <a:ext cx="411484" cy="4"/>
           </a:xfrm>
           <a:prstGeom prst="line">
             <a:avLst/>
@@ -12341,14 +13079,14 @@
       </p:sp>
       <p:sp>
         <p:nvSpPr>
-          <p:cNvPr id="483" name="Oval 26"/>
+          <p:cNvPr id="526" name="Oval 26"/>
           <p:cNvSpPr/>
           <p:nvPr/>
         </p:nvSpPr>
         <p:spPr>
           <a:xfrm>
             <a:off x="6295368" y="4041647"/>
-            <a:ext cx="1371605" cy="1371605"/>
+            <a:ext cx="1371607" cy="1371607"/>
           </a:xfrm>
           <a:prstGeom prst="ellipse">
             <a:avLst/>
@@ -12369,9 +13107,9 @@
                 <a:solidFill>
                   <a:srgbClr val="FFFFFF"/>
                 </a:solidFill>
-                <a:latin typeface="+mj-lt"/>
-                <a:ea typeface="+mj-ea"/>
-                <a:cs typeface="+mj-cs"/>
+                <a:latin typeface="+mn-lt"/>
+                <a:ea typeface="+mn-ea"/>
+                <a:cs typeface="+mn-cs"/>
                 <a:sym typeface="Helvetica"/>
               </a:defRPr>
             </a:pPr>
@@ -12380,14 +13118,14 @@
       </p:sp>
       <p:sp>
         <p:nvSpPr>
-          <p:cNvPr id="484" name="TextBox 27"/>
+          <p:cNvPr id="527" name="TextBox 27"/>
           <p:cNvSpPr txBox="1"/>
           <p:nvPr/>
         </p:nvSpPr>
         <p:spPr>
           <a:xfrm>
             <a:off x="6295368" y="4169664"/>
-            <a:ext cx="1371603" cy="177801"/>
+            <a:ext cx="1371604" cy="177801"/>
           </a:xfrm>
           <a:prstGeom prst="rect">
             <a:avLst/>
@@ -12428,14 +13166,14 @@
       </p:sp>
       <p:sp>
         <p:nvSpPr>
-          <p:cNvPr id="485" name="TextBox 28"/>
+          <p:cNvPr id="528" name="TextBox 28"/>
           <p:cNvSpPr txBox="1"/>
           <p:nvPr/>
         </p:nvSpPr>
         <p:spPr>
           <a:xfrm>
             <a:off x="6295368" y="4575047"/>
-            <a:ext cx="1371603" cy="304801"/>
+            <a:ext cx="1371604" cy="304801"/>
           </a:xfrm>
           <a:prstGeom prst="rect">
             <a:avLst/>
@@ -12476,14 +13214,14 @@
       </p:sp>
       <p:sp>
         <p:nvSpPr>
-          <p:cNvPr id="486" name="Connector 29"/>
+          <p:cNvPr id="529" name="Connector 29"/>
           <p:cNvSpPr/>
           <p:nvPr/>
         </p:nvSpPr>
         <p:spPr>
           <a:xfrm>
             <a:off x="7666969" y="4727447"/>
-            <a:ext cx="411483" cy="3"/>
+            <a:ext cx="411484" cy="4"/>
           </a:xfrm>
           <a:prstGeom prst="line">
             <a:avLst/>
@@ -12504,14 +13242,14 @@
       </p:sp>
       <p:sp>
         <p:nvSpPr>
-          <p:cNvPr id="487" name="Oval 30"/>
+          <p:cNvPr id="530" name="Oval 30"/>
           <p:cNvSpPr/>
           <p:nvPr/>
         </p:nvSpPr>
         <p:spPr>
           <a:xfrm>
             <a:off x="8078447" y="4041647"/>
-            <a:ext cx="1371605" cy="1371605"/>
+            <a:ext cx="1371607" cy="1371607"/>
           </a:xfrm>
           <a:prstGeom prst="ellipse">
             <a:avLst/>
@@ -12532,9 +13270,9 @@
                 <a:solidFill>
                   <a:srgbClr val="FFFFFF"/>
                 </a:solidFill>
-                <a:latin typeface="+mj-lt"/>
-                <a:ea typeface="+mj-ea"/>
-                <a:cs typeface="+mj-cs"/>
+                <a:latin typeface="+mn-lt"/>
+                <a:ea typeface="+mn-ea"/>
+                <a:cs typeface="+mn-cs"/>
                 <a:sym typeface="Helvetica"/>
               </a:defRPr>
             </a:pPr>
@@ -12543,14 +13281,14 @@
       </p:sp>
       <p:sp>
         <p:nvSpPr>
-          <p:cNvPr id="488" name="TextBox 31"/>
+          <p:cNvPr id="531" name="TextBox 31"/>
           <p:cNvSpPr txBox="1"/>
           <p:nvPr/>
         </p:nvSpPr>
         <p:spPr>
           <a:xfrm>
             <a:off x="8078447" y="4169664"/>
-            <a:ext cx="1371604" cy="177801"/>
+            <a:ext cx="1371605" cy="177801"/>
           </a:xfrm>
           <a:prstGeom prst="rect">
             <a:avLst/>
@@ -12591,14 +13329,14 @@
       </p:sp>
       <p:sp>
         <p:nvSpPr>
-          <p:cNvPr id="489" name="TextBox 32"/>
+          <p:cNvPr id="532" name="TextBox 32"/>
           <p:cNvSpPr txBox="1"/>
           <p:nvPr/>
         </p:nvSpPr>
         <p:spPr>
           <a:xfrm>
             <a:off x="8078447" y="4575047"/>
-            <a:ext cx="1371604" cy="304801"/>
+            <a:ext cx="1371605" cy="304801"/>
           </a:xfrm>
           <a:prstGeom prst="rect">
             <a:avLst/>
@@ -12639,7 +13377,7 @@
       </p:sp>
       <p:sp>
         <p:nvSpPr>
-          <p:cNvPr id="490" name="TextBox 33"/>
+          <p:cNvPr id="533" name="TextBox 33"/>
           <p:cNvSpPr txBox="1"/>
           <p:nvPr/>
         </p:nvSpPr>
@@ -12720,7 +13458,7 @@
       </p:grpSpPr>
       <p:sp>
         <p:nvSpPr>
-          <p:cNvPr id="492" name="TextBox 1"/>
+          <p:cNvPr id="535" name="TextBox 1"/>
           <p:cNvSpPr txBox="1"/>
           <p:nvPr/>
         </p:nvSpPr>
@@ -12768,7 +13506,7 @@
       </p:sp>
       <p:sp>
         <p:nvSpPr>
-          <p:cNvPr id="493" name="TextBox 2"/>
+          <p:cNvPr id="536" name="TextBox 2"/>
           <p:cNvSpPr txBox="1"/>
           <p:nvPr/>
         </p:nvSpPr>
@@ -12816,14 +13554,14 @@
       </p:sp>
       <p:sp>
         <p:nvSpPr>
-          <p:cNvPr id="494" name="Connector 3"/>
-          <p:cNvSpPr/>
-          <p:nvPr/>
-        </p:nvSpPr>
-        <p:spPr>
-          <a:xfrm>
-            <a:off x="685797" y="1664205"/>
-            <a:ext cx="822966" cy="5"/>
+          <p:cNvPr id="537" name="Connector 3"/>
+          <p:cNvSpPr/>
+          <p:nvPr/>
+        </p:nvSpPr>
+        <p:spPr>
+          <a:xfrm>
+            <a:off x="685796" y="1664205"/>
+            <a:ext cx="822967" cy="6"/>
           </a:xfrm>
           <a:prstGeom prst="line">
             <a:avLst/>
@@ -12844,14 +13582,14 @@
       </p:sp>
       <p:sp>
         <p:nvSpPr>
-          <p:cNvPr id="495" name="Oval 4"/>
+          <p:cNvPr id="538" name="Oval 4"/>
           <p:cNvSpPr/>
           <p:nvPr/>
         </p:nvSpPr>
         <p:spPr>
           <a:xfrm>
             <a:off x="658368" y="1636776"/>
-            <a:ext cx="54864" cy="54873"/>
+            <a:ext cx="54864" cy="54875"/>
           </a:xfrm>
           <a:prstGeom prst="ellipse">
             <a:avLst/>
@@ -12879,14 +13617,14 @@
       </p:sp>
       <p:sp>
         <p:nvSpPr>
-          <p:cNvPr id="496" name="Oval 5"/>
+          <p:cNvPr id="539" name="Oval 5"/>
           <p:cNvSpPr/>
           <p:nvPr/>
         </p:nvSpPr>
         <p:spPr>
           <a:xfrm>
             <a:off x="1069847" y="1636776"/>
-            <a:ext cx="54873" cy="54873"/>
+            <a:ext cx="54875" cy="54875"/>
           </a:xfrm>
           <a:prstGeom prst="ellipse">
             <a:avLst/>
@@ -12914,14 +13652,14 @@
       </p:sp>
       <p:sp>
         <p:nvSpPr>
-          <p:cNvPr id="497" name="Oval 6"/>
+          <p:cNvPr id="540" name="Oval 6"/>
           <p:cNvSpPr/>
           <p:nvPr/>
         </p:nvSpPr>
         <p:spPr>
           <a:xfrm>
             <a:off x="1481327" y="1636776"/>
-            <a:ext cx="54873" cy="54873"/>
+            <a:ext cx="54875" cy="54875"/>
           </a:xfrm>
           <a:prstGeom prst="ellipse">
             <a:avLst/>
@@ -12949,14 +13687,14 @@
       </p:sp>
       <p:sp>
         <p:nvSpPr>
-          <p:cNvPr id="498" name="Rectangle 7"/>
+          <p:cNvPr id="541" name="Rectangle 7"/>
           <p:cNvSpPr/>
           <p:nvPr/>
         </p:nvSpPr>
         <p:spPr>
           <a:xfrm>
             <a:off x="685798" y="2212848"/>
-            <a:ext cx="100590" cy="100589"/>
+            <a:ext cx="100591" cy="100590"/>
           </a:xfrm>
           <a:prstGeom prst="rect">
             <a:avLst/>
@@ -12984,7 +13722,7 @@
       </p:sp>
       <p:sp>
         <p:nvSpPr>
-          <p:cNvPr id="499" name="TextBox 8"/>
+          <p:cNvPr id="542" name="TextBox 8"/>
           <p:cNvSpPr txBox="1"/>
           <p:nvPr/>
         </p:nvSpPr>
@@ -13035,14 +13773,14 @@
       </p:sp>
       <p:sp>
         <p:nvSpPr>
-          <p:cNvPr id="500" name="Rectangle 9"/>
+          <p:cNvPr id="543" name="Rectangle 9"/>
           <p:cNvSpPr/>
           <p:nvPr/>
         </p:nvSpPr>
         <p:spPr>
           <a:xfrm>
             <a:off x="685798" y="2972305"/>
-            <a:ext cx="100590" cy="100589"/>
+            <a:ext cx="100591" cy="100590"/>
           </a:xfrm>
           <a:prstGeom prst="rect">
             <a:avLst/>
@@ -13070,7 +13808,7 @@
       </p:sp>
       <p:sp>
         <p:nvSpPr>
-          <p:cNvPr id="501" name="TextBox 10"/>
+          <p:cNvPr id="544" name="TextBox 10"/>
           <p:cNvSpPr txBox="1"/>
           <p:nvPr/>
         </p:nvSpPr>
@@ -13121,14 +13859,14 @@
       </p:sp>
       <p:sp>
         <p:nvSpPr>
-          <p:cNvPr id="502" name="Rectangle 11"/>
+          <p:cNvPr id="545" name="Rectangle 11"/>
           <p:cNvSpPr/>
           <p:nvPr/>
         </p:nvSpPr>
         <p:spPr>
           <a:xfrm>
             <a:off x="685798" y="3731767"/>
-            <a:ext cx="100590" cy="100589"/>
+            <a:ext cx="100591" cy="100590"/>
           </a:xfrm>
           <a:prstGeom prst="rect">
             <a:avLst/>
@@ -13156,7 +13894,7 @@
       </p:sp>
       <p:sp>
         <p:nvSpPr>
-          <p:cNvPr id="503" name="TextBox 12"/>
+          <p:cNvPr id="546" name="TextBox 12"/>
           <p:cNvSpPr txBox="1"/>
           <p:nvPr/>
         </p:nvSpPr>
@@ -13207,14 +13945,14 @@
       </p:sp>
       <p:sp>
         <p:nvSpPr>
-          <p:cNvPr id="504" name="Rectangle 13"/>
+          <p:cNvPr id="547" name="Rectangle 13"/>
           <p:cNvSpPr/>
           <p:nvPr/>
         </p:nvSpPr>
         <p:spPr>
           <a:xfrm>
             <a:off x="685798" y="4184648"/>
-            <a:ext cx="100590" cy="100589"/>
+            <a:ext cx="100591" cy="100590"/>
           </a:xfrm>
           <a:prstGeom prst="rect">
             <a:avLst/>
@@ -13242,7 +13980,7 @@
       </p:sp>
       <p:sp>
         <p:nvSpPr>
-          <p:cNvPr id="505" name="TextBox 14"/>
+          <p:cNvPr id="548" name="TextBox 14"/>
           <p:cNvSpPr txBox="1"/>
           <p:nvPr/>
         </p:nvSpPr>
@@ -13326,7 +14064,7 @@
       </p:grpSpPr>
       <p:sp>
         <p:nvSpPr>
-          <p:cNvPr id="507" name="Rectangle 1"/>
+          <p:cNvPr id="550" name="Rectangle 1"/>
           <p:cNvSpPr/>
           <p:nvPr/>
         </p:nvSpPr>
@@ -13354,9 +14092,9 @@
                 <a:solidFill>
                   <a:srgbClr val="FFFFFF"/>
                 </a:solidFill>
-                <a:latin typeface="+mj-lt"/>
-                <a:ea typeface="+mj-ea"/>
-                <a:cs typeface="+mj-cs"/>
+                <a:latin typeface="+mn-lt"/>
+                <a:ea typeface="+mn-ea"/>
+                <a:cs typeface="+mn-cs"/>
                 <a:sym typeface="Helvetica"/>
               </a:defRPr>
             </a:pPr>
@@ -13365,7 +14103,7 @@
       </p:sp>
       <p:sp>
         <p:nvSpPr>
-          <p:cNvPr id="508" name="TextBox 2"/>
+          <p:cNvPr id="551" name="TextBox 2"/>
           <p:cNvSpPr txBox="1"/>
           <p:nvPr/>
         </p:nvSpPr>
@@ -13413,7 +14151,7 @@
       </p:sp>
       <p:sp>
         <p:nvSpPr>
-          <p:cNvPr id="509" name="TextBox 3"/>
+          <p:cNvPr id="552" name="TextBox 3"/>
           <p:cNvSpPr txBox="1"/>
           <p:nvPr/>
         </p:nvSpPr>
@@ -13461,14 +14199,14 @@
       </p:sp>
       <p:sp>
         <p:nvSpPr>
-          <p:cNvPr id="510" name="Connector 4"/>
+          <p:cNvPr id="553" name="Connector 4"/>
           <p:cNvSpPr/>
           <p:nvPr/>
         </p:nvSpPr>
         <p:spPr>
           <a:xfrm>
             <a:off x="685798" y="1572766"/>
-            <a:ext cx="822962" cy="2"/>
+            <a:ext cx="822963" cy="3"/>
           </a:xfrm>
           <a:prstGeom prst="line">
             <a:avLst/>
@@ -13489,14 +14227,14 @@
       </p:sp>
       <p:sp>
         <p:nvSpPr>
-          <p:cNvPr id="511" name="Oval 5"/>
+          <p:cNvPr id="554" name="Oval 5"/>
           <p:cNvSpPr/>
           <p:nvPr/>
         </p:nvSpPr>
         <p:spPr>
           <a:xfrm>
             <a:off x="658368" y="1545336"/>
-            <a:ext cx="54864" cy="54867"/>
+            <a:ext cx="54864" cy="54869"/>
           </a:xfrm>
           <a:prstGeom prst="ellipse">
             <a:avLst/>
@@ -13517,9 +14255,9 @@
                 <a:solidFill>
                   <a:srgbClr val="FFFFFF"/>
                 </a:solidFill>
-                <a:latin typeface="+mj-lt"/>
-                <a:ea typeface="+mj-ea"/>
-                <a:cs typeface="+mj-cs"/>
+                <a:latin typeface="+mn-lt"/>
+                <a:ea typeface="+mn-ea"/>
+                <a:cs typeface="+mn-cs"/>
                 <a:sym typeface="Helvetica"/>
               </a:defRPr>
             </a:pPr>
@@ -13528,14 +14266,14 @@
       </p:sp>
       <p:sp>
         <p:nvSpPr>
-          <p:cNvPr id="512" name="Oval 6"/>
+          <p:cNvPr id="555" name="Oval 6"/>
           <p:cNvSpPr/>
           <p:nvPr/>
         </p:nvSpPr>
         <p:spPr>
           <a:xfrm>
             <a:off x="1069847" y="1545336"/>
-            <a:ext cx="54867" cy="54867"/>
+            <a:ext cx="54869" cy="54869"/>
           </a:xfrm>
           <a:prstGeom prst="ellipse">
             <a:avLst/>
@@ -13556,9 +14294,9 @@
                 <a:solidFill>
                   <a:srgbClr val="FFFFFF"/>
                 </a:solidFill>
-                <a:latin typeface="+mj-lt"/>
-                <a:ea typeface="+mj-ea"/>
-                <a:cs typeface="+mj-cs"/>
+                <a:latin typeface="+mn-lt"/>
+                <a:ea typeface="+mn-ea"/>
+                <a:cs typeface="+mn-cs"/>
                 <a:sym typeface="Helvetica"/>
               </a:defRPr>
             </a:pPr>
@@ -13567,14 +14305,14 @@
       </p:sp>
       <p:sp>
         <p:nvSpPr>
-          <p:cNvPr id="513" name="Oval 7"/>
+          <p:cNvPr id="556" name="Oval 7"/>
           <p:cNvSpPr/>
           <p:nvPr/>
         </p:nvSpPr>
         <p:spPr>
           <a:xfrm>
             <a:off x="1481327" y="1545336"/>
-            <a:ext cx="54867" cy="54867"/>
+            <a:ext cx="54869" cy="54869"/>
           </a:xfrm>
           <a:prstGeom prst="ellipse">
             <a:avLst/>
@@ -13595,9 +14333,9 @@
                 <a:solidFill>
                   <a:srgbClr val="FFFFFF"/>
                 </a:solidFill>
-                <a:latin typeface="+mj-lt"/>
-                <a:ea typeface="+mj-ea"/>
-                <a:cs typeface="+mj-cs"/>
+                <a:latin typeface="+mn-lt"/>
+                <a:ea typeface="+mn-ea"/>
+                <a:cs typeface="+mn-cs"/>
                 <a:sym typeface="Helvetica"/>
               </a:defRPr>
             </a:pPr>
@@ -13606,13 +14344,13 @@
       </p:sp>
       <p:sp>
         <p:nvSpPr>
-          <p:cNvPr id="514" name="TextBox 8"/>
+          <p:cNvPr id="557" name="TextBox 8"/>
           <p:cNvSpPr txBox="1"/>
           <p:nvPr/>
         </p:nvSpPr>
         <p:spPr>
           <a:xfrm>
-            <a:off x="960119" y="2468878"/>
+            <a:off x="960119" y="2468877"/>
             <a:ext cx="3053915" cy="558801"/>
           </a:xfrm>
           <a:prstGeom prst="rect">
@@ -13654,7 +14392,7 @@
       </p:sp>
       <p:sp>
         <p:nvSpPr>
-          <p:cNvPr id="515" name="TextBox 9"/>
+          <p:cNvPr id="558" name="TextBox 9"/>
           <p:cNvSpPr txBox="1"/>
           <p:nvPr/>
         </p:nvSpPr>
@@ -13705,14 +14443,14 @@
       </p:sp>
       <p:sp>
         <p:nvSpPr>
-          <p:cNvPr id="516" name="Connector 10"/>
+          <p:cNvPr id="559" name="Connector 10"/>
           <p:cNvSpPr/>
           <p:nvPr/>
         </p:nvSpPr>
         <p:spPr>
           <a:xfrm>
             <a:off x="4288351" y="2606038"/>
-            <a:ext cx="2" cy="1325883"/>
+            <a:ext cx="3" cy="1325884"/>
           </a:xfrm>
           <a:prstGeom prst="line">
             <a:avLst/>
@@ -13733,14 +14471,14 @@
       </p:sp>
       <p:sp>
         <p:nvSpPr>
-          <p:cNvPr id="517" name="TextBox 11"/>
+          <p:cNvPr id="560" name="TextBox 11"/>
           <p:cNvSpPr txBox="1"/>
           <p:nvPr/>
         </p:nvSpPr>
         <p:spPr>
           <a:xfrm>
-            <a:off x="4562673" y="2468878"/>
-            <a:ext cx="3053915" cy="558801"/>
+            <a:off x="4562673" y="2468877"/>
+            <a:ext cx="3053916" cy="558801"/>
           </a:xfrm>
           <a:prstGeom prst="rect">
             <a:avLst/>
@@ -13781,14 +14519,14 @@
       </p:sp>
       <p:sp>
         <p:nvSpPr>
-          <p:cNvPr id="518" name="TextBox 12"/>
+          <p:cNvPr id="561" name="TextBox 12"/>
           <p:cNvSpPr txBox="1"/>
           <p:nvPr/>
         </p:nvSpPr>
         <p:spPr>
           <a:xfrm>
             <a:off x="4562673" y="3337559"/>
-            <a:ext cx="3053915" cy="215901"/>
+            <a:ext cx="3053916" cy="215901"/>
           </a:xfrm>
           <a:prstGeom prst="rect">
             <a:avLst/>
@@ -13832,14 +14570,14 @@
       </p:sp>
       <p:sp>
         <p:nvSpPr>
-          <p:cNvPr id="519" name="Connector 13"/>
+          <p:cNvPr id="562" name="Connector 13"/>
           <p:cNvSpPr/>
           <p:nvPr/>
         </p:nvSpPr>
         <p:spPr>
           <a:xfrm>
             <a:off x="7890905" y="2606038"/>
-            <a:ext cx="2" cy="1325883"/>
+            <a:ext cx="3" cy="1325884"/>
           </a:xfrm>
           <a:prstGeom prst="line">
             <a:avLst/>
@@ -13860,14 +14598,14 @@
       </p:sp>
       <p:sp>
         <p:nvSpPr>
-          <p:cNvPr id="520" name="TextBox 14"/>
+          <p:cNvPr id="563" name="TextBox 14"/>
           <p:cNvSpPr txBox="1"/>
           <p:nvPr/>
         </p:nvSpPr>
         <p:spPr>
           <a:xfrm>
-            <a:off x="8165224" y="2468878"/>
-            <a:ext cx="3053915" cy="558801"/>
+            <a:off x="8165224" y="2468877"/>
+            <a:ext cx="3053916" cy="558801"/>
           </a:xfrm>
           <a:prstGeom prst="rect">
             <a:avLst/>
@@ -13908,14 +14646,14 @@
       </p:sp>
       <p:sp>
         <p:nvSpPr>
-          <p:cNvPr id="521" name="TextBox 15"/>
+          <p:cNvPr id="564" name="TextBox 15"/>
           <p:cNvSpPr txBox="1"/>
           <p:nvPr/>
         </p:nvSpPr>
         <p:spPr>
           <a:xfrm>
             <a:off x="8165224" y="3337559"/>
-            <a:ext cx="3053915" cy="215901"/>
+            <a:ext cx="3053916" cy="215901"/>
           </a:xfrm>
           <a:prstGeom prst="rect">
             <a:avLst/>
@@ -13959,7 +14697,7 @@
       </p:sp>
       <p:sp>
         <p:nvSpPr>
-          <p:cNvPr id="522" name="TextBox 16"/>
+          <p:cNvPr id="565" name="TextBox 16"/>
           <p:cNvSpPr txBox="1"/>
           <p:nvPr/>
         </p:nvSpPr>
@@ -14007,7 +14745,7 @@
       </p:sp>
       <p:sp>
         <p:nvSpPr>
-          <p:cNvPr id="523" name="TextBox 17"/>
+          <p:cNvPr id="566" name="TextBox 17"/>
           <p:cNvSpPr txBox="1"/>
           <p:nvPr/>
         </p:nvSpPr>
@@ -14058,14 +14796,14 @@
       </p:sp>
       <p:sp>
         <p:nvSpPr>
-          <p:cNvPr id="524" name="Connector 18"/>
+          <p:cNvPr id="567" name="Connector 18"/>
           <p:cNvSpPr/>
           <p:nvPr/>
         </p:nvSpPr>
         <p:spPr>
           <a:xfrm>
             <a:off x="4288351" y="4343398"/>
-            <a:ext cx="2" cy="1325883"/>
+            <a:ext cx="3" cy="1325884"/>
           </a:xfrm>
           <a:prstGeom prst="line">
             <a:avLst/>
@@ -14086,14 +14824,14 @@
       </p:sp>
       <p:sp>
         <p:nvSpPr>
-          <p:cNvPr id="525" name="TextBox 19"/>
+          <p:cNvPr id="568" name="TextBox 19"/>
           <p:cNvSpPr txBox="1"/>
           <p:nvPr/>
         </p:nvSpPr>
         <p:spPr>
           <a:xfrm>
             <a:off x="4562673" y="4206240"/>
-            <a:ext cx="3053915" cy="558801"/>
+            <a:ext cx="3053916" cy="558801"/>
           </a:xfrm>
           <a:prstGeom prst="rect">
             <a:avLst/>
@@ -14134,14 +14872,14 @@
       </p:sp>
       <p:sp>
         <p:nvSpPr>
-          <p:cNvPr id="526" name="TextBox 20"/>
+          <p:cNvPr id="569" name="TextBox 20"/>
           <p:cNvSpPr txBox="1"/>
           <p:nvPr/>
         </p:nvSpPr>
         <p:spPr>
           <a:xfrm>
             <a:off x="4562673" y="5074920"/>
-            <a:ext cx="3053915" cy="464186"/>
+            <a:ext cx="3053916" cy="464186"/>
           </a:xfrm>
           <a:prstGeom prst="rect">
             <a:avLst/>
@@ -14185,14 +14923,14 @@
       </p:sp>
       <p:sp>
         <p:nvSpPr>
-          <p:cNvPr id="527" name="Connector 21"/>
+          <p:cNvPr id="570" name="Connector 21"/>
           <p:cNvSpPr/>
           <p:nvPr/>
         </p:nvSpPr>
         <p:spPr>
           <a:xfrm>
             <a:off x="7890905" y="4343398"/>
-            <a:ext cx="2" cy="1325883"/>
+            <a:ext cx="3" cy="1325884"/>
           </a:xfrm>
           <a:prstGeom prst="line">
             <a:avLst/>
@@ -14213,14 +14951,14 @@
       </p:sp>
       <p:sp>
         <p:nvSpPr>
-          <p:cNvPr id="528" name="TextBox 22"/>
+          <p:cNvPr id="571" name="TextBox 22"/>
           <p:cNvSpPr txBox="1"/>
           <p:nvPr/>
         </p:nvSpPr>
         <p:spPr>
           <a:xfrm>
             <a:off x="8165224" y="4206240"/>
-            <a:ext cx="3053915" cy="558801"/>
+            <a:ext cx="3053916" cy="558801"/>
           </a:xfrm>
           <a:prstGeom prst="rect">
             <a:avLst/>
@@ -14261,14 +14999,14 @@
       </p:sp>
       <p:sp>
         <p:nvSpPr>
-          <p:cNvPr id="529" name="TextBox 23"/>
+          <p:cNvPr id="572" name="TextBox 23"/>
           <p:cNvSpPr txBox="1"/>
           <p:nvPr/>
         </p:nvSpPr>
         <p:spPr>
           <a:xfrm>
             <a:off x="8165224" y="5074920"/>
-            <a:ext cx="3053915" cy="215901"/>
+            <a:ext cx="3053916" cy="215901"/>
           </a:xfrm>
           <a:prstGeom prst="rect">
             <a:avLst/>
@@ -14345,7 +15083,7 @@
       </p:grpSpPr>
       <p:sp>
         <p:nvSpPr>
-          <p:cNvPr id="531" name="TextBox 1"/>
+          <p:cNvPr id="574" name="TextBox 1"/>
           <p:cNvSpPr txBox="1"/>
           <p:nvPr/>
         </p:nvSpPr>
@@ -14393,7 +15131,7 @@
       </p:sp>
       <p:sp>
         <p:nvSpPr>
-          <p:cNvPr id="532" name="TextBox 2"/>
+          <p:cNvPr id="575" name="TextBox 2"/>
           <p:cNvSpPr txBox="1"/>
           <p:nvPr/>
         </p:nvSpPr>
@@ -14441,14 +15179,14 @@
       </p:sp>
       <p:sp>
         <p:nvSpPr>
-          <p:cNvPr id="533" name="Connector 3"/>
-          <p:cNvSpPr/>
-          <p:nvPr/>
-        </p:nvSpPr>
-        <p:spPr>
-          <a:xfrm>
-            <a:off x="685797" y="1664205"/>
-            <a:ext cx="822966" cy="5"/>
+          <p:cNvPr id="576" name="Connector 3"/>
+          <p:cNvSpPr/>
+          <p:nvPr/>
+        </p:nvSpPr>
+        <p:spPr>
+          <a:xfrm>
+            <a:off x="685796" y="1664205"/>
+            <a:ext cx="822967" cy="6"/>
           </a:xfrm>
           <a:prstGeom prst="line">
             <a:avLst/>
@@ -14469,14 +15207,14 @@
       </p:sp>
       <p:sp>
         <p:nvSpPr>
-          <p:cNvPr id="534" name="Oval 4"/>
+          <p:cNvPr id="577" name="Oval 4"/>
           <p:cNvSpPr/>
           <p:nvPr/>
         </p:nvSpPr>
         <p:spPr>
           <a:xfrm>
             <a:off x="658368" y="1636776"/>
-            <a:ext cx="54864" cy="54873"/>
+            <a:ext cx="54864" cy="54875"/>
           </a:xfrm>
           <a:prstGeom prst="ellipse">
             <a:avLst/>
@@ -14504,14 +15242,14 @@
       </p:sp>
       <p:sp>
         <p:nvSpPr>
-          <p:cNvPr id="535" name="Oval 5"/>
+          <p:cNvPr id="578" name="Oval 5"/>
           <p:cNvSpPr/>
           <p:nvPr/>
         </p:nvSpPr>
         <p:spPr>
           <a:xfrm>
             <a:off x="1069847" y="1636776"/>
-            <a:ext cx="54873" cy="54873"/>
+            <a:ext cx="54875" cy="54875"/>
           </a:xfrm>
           <a:prstGeom prst="ellipse">
             <a:avLst/>
@@ -14539,14 +15277,14 @@
       </p:sp>
       <p:sp>
         <p:nvSpPr>
-          <p:cNvPr id="536" name="Oval 6"/>
+          <p:cNvPr id="579" name="Oval 6"/>
           <p:cNvSpPr/>
           <p:nvPr/>
         </p:nvSpPr>
         <p:spPr>
           <a:xfrm>
             <a:off x="1481327" y="1636776"/>
-            <a:ext cx="54873" cy="54873"/>
+            <a:ext cx="54875" cy="54875"/>
           </a:xfrm>
           <a:prstGeom prst="ellipse">
             <a:avLst/>
@@ -14574,14 +15312,14 @@
       </p:sp>
       <p:sp>
         <p:nvSpPr>
-          <p:cNvPr id="537" name="Rectangle 7"/>
+          <p:cNvPr id="580" name="Rectangle 7"/>
           <p:cNvSpPr/>
           <p:nvPr/>
         </p:nvSpPr>
         <p:spPr>
           <a:xfrm>
             <a:off x="685798" y="2212848"/>
-            <a:ext cx="100590" cy="100589"/>
+            <a:ext cx="100591" cy="100590"/>
           </a:xfrm>
           <a:prstGeom prst="rect">
             <a:avLst/>
@@ -14609,7 +15347,7 @@
       </p:sp>
       <p:sp>
         <p:nvSpPr>
-          <p:cNvPr id="538" name="TextBox 8"/>
+          <p:cNvPr id="581" name="TextBox 8"/>
           <p:cNvSpPr txBox="1"/>
           <p:nvPr/>
         </p:nvSpPr>
@@ -14660,14 +15398,14 @@
       </p:sp>
       <p:sp>
         <p:nvSpPr>
-          <p:cNvPr id="539" name="Rectangle 9"/>
+          <p:cNvPr id="582" name="Rectangle 9"/>
           <p:cNvSpPr/>
           <p:nvPr/>
         </p:nvSpPr>
         <p:spPr>
           <a:xfrm>
             <a:off x="685798" y="2638679"/>
-            <a:ext cx="100590" cy="100589"/>
+            <a:ext cx="100591" cy="100590"/>
           </a:xfrm>
           <a:prstGeom prst="rect">
             <a:avLst/>
@@ -14695,7 +15433,7 @@
       </p:sp>
       <p:sp>
         <p:nvSpPr>
-          <p:cNvPr id="540" name="TextBox 10"/>
+          <p:cNvPr id="583" name="TextBox 10"/>
           <p:cNvSpPr txBox="1"/>
           <p:nvPr/>
         </p:nvSpPr>
@@ -14746,14 +15484,14 @@
       </p:sp>
       <p:sp>
         <p:nvSpPr>
-          <p:cNvPr id="541" name="Rectangle 11"/>
+          <p:cNvPr id="584" name="Rectangle 11"/>
           <p:cNvSpPr/>
           <p:nvPr/>
         </p:nvSpPr>
         <p:spPr>
           <a:xfrm>
             <a:off x="685798" y="3064510"/>
-            <a:ext cx="100590" cy="100589"/>
+            <a:ext cx="100591" cy="100590"/>
           </a:xfrm>
           <a:prstGeom prst="rect">
             <a:avLst/>
@@ -14781,7 +15519,7 @@
       </p:sp>
       <p:sp>
         <p:nvSpPr>
-          <p:cNvPr id="542" name="TextBox 12"/>
+          <p:cNvPr id="585" name="TextBox 12"/>
           <p:cNvSpPr txBox="1"/>
           <p:nvPr/>
         </p:nvSpPr>
@@ -14832,14 +15570,14 @@
       </p:sp>
       <p:sp>
         <p:nvSpPr>
-          <p:cNvPr id="543" name="Rectangle 13"/>
+          <p:cNvPr id="586" name="Rectangle 13"/>
           <p:cNvSpPr/>
           <p:nvPr/>
         </p:nvSpPr>
         <p:spPr>
           <a:xfrm>
             <a:off x="685798" y="3490340"/>
-            <a:ext cx="100590" cy="100589"/>
+            <a:ext cx="100591" cy="100590"/>
           </a:xfrm>
           <a:prstGeom prst="rect">
             <a:avLst/>
@@ -14867,7 +15605,7 @@
       </p:sp>
       <p:sp>
         <p:nvSpPr>
-          <p:cNvPr id="544" name="TextBox 14"/>
+          <p:cNvPr id="587" name="TextBox 14"/>
           <p:cNvSpPr txBox="1"/>
           <p:nvPr/>
         </p:nvSpPr>
@@ -14951,7 +15689,7 @@
       </p:grpSpPr>
       <p:sp>
         <p:nvSpPr>
-          <p:cNvPr id="546" name="TextBox 1"/>
+          <p:cNvPr id="589" name="TextBox 1"/>
           <p:cNvSpPr txBox="1"/>
           <p:nvPr/>
         </p:nvSpPr>
@@ -14999,7 +15737,7 @@
       </p:sp>
       <p:sp>
         <p:nvSpPr>
-          <p:cNvPr id="547" name="TextBox 2"/>
+          <p:cNvPr id="590" name="TextBox 2"/>
           <p:cNvSpPr txBox="1"/>
           <p:nvPr/>
         </p:nvSpPr>
@@ -15047,14 +15785,14 @@
       </p:sp>
       <p:sp>
         <p:nvSpPr>
-          <p:cNvPr id="548" name="Connector 3"/>
-          <p:cNvSpPr/>
-          <p:nvPr/>
-        </p:nvSpPr>
-        <p:spPr>
-          <a:xfrm>
-            <a:off x="685797" y="1572766"/>
-            <a:ext cx="822966" cy="5"/>
+          <p:cNvPr id="591" name="Connector 3"/>
+          <p:cNvSpPr/>
+          <p:nvPr/>
+        </p:nvSpPr>
+        <p:spPr>
+          <a:xfrm>
+            <a:off x="685796" y="1572766"/>
+            <a:ext cx="822967" cy="6"/>
           </a:xfrm>
           <a:prstGeom prst="line">
             <a:avLst/>
@@ -15075,14 +15813,14 @@
       </p:sp>
       <p:sp>
         <p:nvSpPr>
-          <p:cNvPr id="549" name="Oval 4"/>
+          <p:cNvPr id="592" name="Oval 4"/>
           <p:cNvSpPr/>
           <p:nvPr/>
         </p:nvSpPr>
         <p:spPr>
           <a:xfrm>
             <a:off x="658368" y="1545336"/>
-            <a:ext cx="54864" cy="54873"/>
+            <a:ext cx="54864" cy="54875"/>
           </a:xfrm>
           <a:prstGeom prst="ellipse">
             <a:avLst/>
@@ -15110,14 +15848,14 @@
       </p:sp>
       <p:sp>
         <p:nvSpPr>
-          <p:cNvPr id="550" name="Oval 5"/>
+          <p:cNvPr id="593" name="Oval 5"/>
           <p:cNvSpPr/>
           <p:nvPr/>
         </p:nvSpPr>
         <p:spPr>
           <a:xfrm>
             <a:off x="1069847" y="1545336"/>
-            <a:ext cx="54873" cy="54873"/>
+            <a:ext cx="54875" cy="54875"/>
           </a:xfrm>
           <a:prstGeom prst="ellipse">
             <a:avLst/>
@@ -15145,14 +15883,14 @@
       </p:sp>
       <p:sp>
         <p:nvSpPr>
-          <p:cNvPr id="551" name="Oval 6"/>
+          <p:cNvPr id="594" name="Oval 6"/>
           <p:cNvSpPr/>
           <p:nvPr/>
         </p:nvSpPr>
         <p:spPr>
           <a:xfrm>
             <a:off x="1481327" y="1545336"/>
-            <a:ext cx="54873" cy="54873"/>
+            <a:ext cx="54875" cy="54875"/>
           </a:xfrm>
           <a:prstGeom prst="ellipse">
             <a:avLst/>
@@ -15180,14 +15918,14 @@
       </p:sp>
       <p:sp>
         <p:nvSpPr>
-          <p:cNvPr id="552" name="Rectangle 7"/>
+          <p:cNvPr id="595" name="Rectangle 7"/>
           <p:cNvSpPr/>
           <p:nvPr/>
         </p:nvSpPr>
         <p:spPr>
           <a:xfrm>
             <a:off x="630936" y="1975103"/>
-            <a:ext cx="5330677" cy="2756101"/>
+            <a:ext cx="5330677" cy="2756102"/>
           </a:xfrm>
           <a:prstGeom prst="rect">
             <a:avLst/>
@@ -15217,7 +15955,7 @@
       </p:sp>
       <p:pic>
         <p:nvPicPr>
-          <p:cNvPr id="553" name="Picture 8" descr="Picture 8"/>
+          <p:cNvPr id="596" name="Picture 8" descr="Picture 8"/>
           <p:cNvPicPr>
             <a:picLocks noChangeAspect="1"/>
           </p:cNvPicPr>
@@ -15246,14 +15984,14 @@
       </p:pic>
       <p:sp>
         <p:nvSpPr>
-          <p:cNvPr id="554" name="Rectangle 9"/>
+          <p:cNvPr id="597" name="Rectangle 9"/>
           <p:cNvSpPr/>
           <p:nvPr/>
         </p:nvSpPr>
         <p:spPr>
           <a:xfrm>
             <a:off x="630934" y="1975103"/>
-            <a:ext cx="310902" cy="54869"/>
+            <a:ext cx="310903" cy="54870"/>
           </a:xfrm>
           <a:prstGeom prst="rect">
             <a:avLst/>
@@ -15281,14 +16019,14 @@
       </p:sp>
       <p:sp>
         <p:nvSpPr>
-          <p:cNvPr id="555" name="Rectangle 10"/>
+          <p:cNvPr id="598" name="Rectangle 10"/>
           <p:cNvSpPr/>
           <p:nvPr/>
         </p:nvSpPr>
         <p:spPr>
           <a:xfrm>
             <a:off x="630936" y="1975103"/>
-            <a:ext cx="54869" cy="310901"/>
+            <a:ext cx="54870" cy="310902"/>
           </a:xfrm>
           <a:prstGeom prst="rect">
             <a:avLst/>
@@ -15316,28 +16054,28 @@
       </p:sp>
       <p:grpSp>
         <p:nvGrpSpPr>
-          <p:cNvPr id="558" name="Rounded Rectangle 11"/>
+          <p:cNvPr id="601" name="Rounded Rectangle 11"/>
           <p:cNvGrpSpPr/>
           <p:nvPr/>
         </p:nvGrpSpPr>
         <p:grpSpPr>
           <a:xfrm>
-            <a:off x="685800" y="4840926"/>
-            <a:ext cx="1682500" cy="310907"/>
+            <a:off x="685800" y="4840924"/>
+            <a:ext cx="1682501" cy="310910"/>
             <a:chOff x="0" y="0"/>
-            <a:chExt cx="1682499" cy="310905"/>
+            <a:chExt cx="1682500" cy="310908"/>
           </a:xfrm>
         </p:grpSpPr>
         <p:sp>
           <p:nvSpPr>
-            <p:cNvPr id="556" name="圓角矩形"/>
+            <p:cNvPr id="599" name="圓角矩形"/>
             <p:cNvSpPr/>
             <p:nvPr/>
           </p:nvSpPr>
           <p:spPr>
             <a:xfrm>
               <a:off x="0" y="-1"/>
-              <a:ext cx="1682500" cy="310907"/>
+              <a:ext cx="1682501" cy="310909"/>
             </a:xfrm>
             <a:prstGeom prst="roundRect">
               <a:avLst>
@@ -15371,7 +16109,7 @@
         </p:sp>
         <p:sp>
           <p:nvSpPr>
-            <p:cNvPr id="557" name="看板＋側邊欄導覽"/>
+            <p:cNvPr id="600" name="看板＋側邊欄導覽"/>
             <p:cNvSpPr txBox="1"/>
             <p:nvPr/>
           </p:nvSpPr>
@@ -15423,14 +16161,14 @@
       </p:grpSp>
       <p:sp>
         <p:nvSpPr>
-          <p:cNvPr id="559" name="Rectangle 12"/>
+          <p:cNvPr id="602" name="Rectangle 12"/>
           <p:cNvSpPr/>
           <p:nvPr/>
         </p:nvSpPr>
         <p:spPr>
           <a:xfrm>
             <a:off x="6217644" y="1975103"/>
-            <a:ext cx="5330681" cy="2756101"/>
+            <a:ext cx="5330681" cy="2756102"/>
           </a:xfrm>
           <a:prstGeom prst="rect">
             <a:avLst/>
@@ -15460,7 +16198,7 @@
       </p:sp>
       <p:pic>
         <p:nvPicPr>
-          <p:cNvPr id="560" name="Picture 13" descr="Picture 13"/>
+          <p:cNvPr id="603" name="Picture 13" descr="Picture 13"/>
           <p:cNvPicPr>
             <a:picLocks noChangeAspect="1"/>
           </p:cNvPicPr>
@@ -15489,14 +16227,14 @@
       </p:pic>
       <p:sp>
         <p:nvSpPr>
-          <p:cNvPr id="561" name="Rectangle 14"/>
+          <p:cNvPr id="604" name="Rectangle 14"/>
           <p:cNvSpPr/>
           <p:nvPr/>
         </p:nvSpPr>
         <p:spPr>
           <a:xfrm>
             <a:off x="6217644" y="1975103"/>
-            <a:ext cx="310901" cy="54869"/>
+            <a:ext cx="310902" cy="54870"/>
           </a:xfrm>
           <a:prstGeom prst="rect">
             <a:avLst/>
@@ -15524,14 +16262,14 @@
       </p:sp>
       <p:sp>
         <p:nvSpPr>
-          <p:cNvPr id="562" name="Rectangle 15"/>
+          <p:cNvPr id="605" name="Rectangle 15"/>
           <p:cNvSpPr/>
           <p:nvPr/>
         </p:nvSpPr>
         <p:spPr>
           <a:xfrm>
             <a:off x="6217644" y="1975103"/>
-            <a:ext cx="54869" cy="310901"/>
+            <a:ext cx="54870" cy="310902"/>
           </a:xfrm>
           <a:prstGeom prst="rect">
             <a:avLst/>
@@ -15559,28 +16297,28 @@
       </p:sp>
       <p:grpSp>
         <p:nvGrpSpPr>
-          <p:cNvPr id="565" name="Rounded Rectangle 16"/>
+          <p:cNvPr id="608" name="Rounded Rectangle 16"/>
           <p:cNvGrpSpPr/>
           <p:nvPr/>
         </p:nvGrpSpPr>
         <p:grpSpPr>
           <a:xfrm>
-            <a:off x="6272502" y="4840926"/>
-            <a:ext cx="2176283" cy="310907"/>
+            <a:off x="6272501" y="4840924"/>
+            <a:ext cx="2176285" cy="310910"/>
             <a:chOff x="0" y="0"/>
-            <a:chExt cx="2176281" cy="310905"/>
+            <a:chExt cx="2176284" cy="310908"/>
           </a:xfrm>
         </p:grpSpPr>
         <p:sp>
           <p:nvSpPr>
-            <p:cNvPr id="563" name="圓角矩形"/>
+            <p:cNvPr id="606" name="圓角矩形"/>
             <p:cNvSpPr/>
             <p:nvPr/>
           </p:nvSpPr>
           <p:spPr>
             <a:xfrm>
               <a:off x="-1" y="-1"/>
-              <a:ext cx="2176282" cy="310907"/>
+              <a:ext cx="2176285" cy="310909"/>
             </a:xfrm>
             <a:prstGeom prst="roundRect">
               <a:avLst>
@@ -15614,7 +16352,7 @@
         </p:sp>
         <p:sp>
           <p:nvSpPr>
-            <p:cNvPr id="564" name="WBS 檢視＋新增大項"/>
+            <p:cNvPr id="607" name="WBS 檢視＋新增大項"/>
             <p:cNvSpPr txBox="1"/>
             <p:nvPr/>
           </p:nvSpPr>
@@ -15699,7 +16437,7 @@
       </p:grpSpPr>
       <p:sp>
         <p:nvSpPr>
-          <p:cNvPr id="567" name="TextBox 1"/>
+          <p:cNvPr id="610" name="TextBox 1"/>
           <p:cNvSpPr txBox="1"/>
           <p:nvPr/>
         </p:nvSpPr>
@@ -15747,7 +16485,7 @@
       </p:sp>
       <p:sp>
         <p:nvSpPr>
-          <p:cNvPr id="568" name="TextBox 2"/>
+          <p:cNvPr id="611" name="TextBox 2"/>
           <p:cNvSpPr txBox="1"/>
           <p:nvPr/>
         </p:nvSpPr>
@@ -15795,14 +16533,14 @@
       </p:sp>
       <p:sp>
         <p:nvSpPr>
-          <p:cNvPr id="569" name="Connector 3"/>
-          <p:cNvSpPr/>
-          <p:nvPr/>
-        </p:nvSpPr>
-        <p:spPr>
-          <a:xfrm>
-            <a:off x="685797" y="1572766"/>
-            <a:ext cx="822966" cy="5"/>
+          <p:cNvPr id="612" name="Connector 3"/>
+          <p:cNvSpPr/>
+          <p:nvPr/>
+        </p:nvSpPr>
+        <p:spPr>
+          <a:xfrm>
+            <a:off x="685796" y="1572766"/>
+            <a:ext cx="822967" cy="6"/>
           </a:xfrm>
           <a:prstGeom prst="line">
             <a:avLst/>
@@ -15823,14 +16561,14 @@
       </p:sp>
       <p:sp>
         <p:nvSpPr>
-          <p:cNvPr id="570" name="Oval 4"/>
+          <p:cNvPr id="613" name="Oval 4"/>
           <p:cNvSpPr/>
           <p:nvPr/>
         </p:nvSpPr>
         <p:spPr>
           <a:xfrm>
             <a:off x="658368" y="1545336"/>
-            <a:ext cx="54864" cy="54873"/>
+            <a:ext cx="54864" cy="54875"/>
           </a:xfrm>
           <a:prstGeom prst="ellipse">
             <a:avLst/>
@@ -15858,14 +16596,14 @@
       </p:sp>
       <p:sp>
         <p:nvSpPr>
-          <p:cNvPr id="571" name="Oval 5"/>
+          <p:cNvPr id="614" name="Oval 5"/>
           <p:cNvSpPr/>
           <p:nvPr/>
         </p:nvSpPr>
         <p:spPr>
           <a:xfrm>
             <a:off x="1069847" y="1545336"/>
-            <a:ext cx="54873" cy="54873"/>
+            <a:ext cx="54875" cy="54875"/>
           </a:xfrm>
           <a:prstGeom prst="ellipse">
             <a:avLst/>
@@ -15893,14 +16631,14 @@
       </p:sp>
       <p:sp>
         <p:nvSpPr>
-          <p:cNvPr id="572" name="Oval 6"/>
+          <p:cNvPr id="615" name="Oval 6"/>
           <p:cNvSpPr/>
           <p:nvPr/>
         </p:nvSpPr>
         <p:spPr>
           <a:xfrm>
             <a:off x="1481327" y="1545336"/>
-            <a:ext cx="54873" cy="54873"/>
+            <a:ext cx="54875" cy="54875"/>
           </a:xfrm>
           <a:prstGeom prst="ellipse">
             <a:avLst/>
@@ -15928,7 +16666,7 @@
       </p:sp>
       <p:sp>
         <p:nvSpPr>
-          <p:cNvPr id="573" name="Rectangle 7"/>
+          <p:cNvPr id="616" name="Rectangle 7"/>
           <p:cNvSpPr/>
           <p:nvPr/>
         </p:nvSpPr>
@@ -15965,7 +16703,7 @@
       </p:sp>
       <p:pic>
         <p:nvPicPr>
-          <p:cNvPr id="574" name="Picture 8" descr="Picture 8"/>
+          <p:cNvPr id="617" name="Picture 8" descr="Picture 8"/>
           <p:cNvPicPr>
             <a:picLocks noChangeAspect="1"/>
           </p:cNvPicPr>
@@ -15994,14 +16732,14 @@
       </p:pic>
       <p:sp>
         <p:nvSpPr>
-          <p:cNvPr id="575" name="Rectangle 9"/>
+          <p:cNvPr id="618" name="Rectangle 9"/>
           <p:cNvSpPr/>
           <p:nvPr/>
         </p:nvSpPr>
         <p:spPr>
           <a:xfrm>
             <a:off x="2156174" y="1975103"/>
-            <a:ext cx="310901" cy="54869"/>
+            <a:ext cx="310902" cy="54870"/>
           </a:xfrm>
           <a:prstGeom prst="rect">
             <a:avLst/>
@@ -16029,14 +16767,14 @@
       </p:sp>
       <p:sp>
         <p:nvSpPr>
-          <p:cNvPr id="576" name="Rectangle 10"/>
+          <p:cNvPr id="619" name="Rectangle 10"/>
           <p:cNvSpPr/>
           <p:nvPr/>
         </p:nvSpPr>
         <p:spPr>
           <a:xfrm>
             <a:off x="2156174" y="1975103"/>
-            <a:ext cx="54869" cy="310901"/>
+            <a:ext cx="54870" cy="310902"/>
           </a:xfrm>
           <a:prstGeom prst="rect">
             <a:avLst/>
@@ -16064,28 +16802,28 @@
       </p:sp>
       <p:grpSp>
         <p:nvGrpSpPr>
-          <p:cNvPr id="579" name="Rounded Rectangle 11"/>
+          <p:cNvPr id="622" name="Rounded Rectangle 11"/>
           <p:cNvGrpSpPr/>
           <p:nvPr/>
         </p:nvGrpSpPr>
         <p:grpSpPr>
           <a:xfrm>
-            <a:off x="2211035" y="6126476"/>
-            <a:ext cx="5468123" cy="310907"/>
-            <a:chOff x="-1" y="0"/>
-            <a:chExt cx="5468121" cy="310905"/>
+            <a:off x="2211034" y="6126475"/>
+            <a:ext cx="5468125" cy="310910"/>
+            <a:chOff x="0" y="0"/>
+            <a:chExt cx="5468124" cy="310908"/>
           </a:xfrm>
         </p:grpSpPr>
         <p:sp>
           <p:nvSpPr>
-            <p:cNvPr id="577" name="圓角矩形"/>
+            <p:cNvPr id="620" name="圓角矩形"/>
             <p:cNvSpPr/>
             <p:nvPr/>
           </p:nvSpPr>
           <p:spPr>
             <a:xfrm>
-              <a:off x="-2" y="-1"/>
-              <a:ext cx="5468123" cy="310907"/>
+              <a:off x="-1" y="-1"/>
+              <a:ext cx="5468125" cy="310909"/>
             </a:xfrm>
             <a:prstGeom prst="roundRect">
               <a:avLst>
@@ -16119,14 +16857,14 @@
         </p:sp>
         <p:sp>
           <p:nvSpPr>
-            <p:cNvPr id="578" name="leader 個人視角：進行中的專案＋指派給我的任務，逾期標紅"/>
+            <p:cNvPr id="621" name="leader 個人視角：進行中的專案＋指派給我的任務，逾期標紅"/>
             <p:cNvSpPr txBox="1"/>
             <p:nvPr/>
           </p:nvSpPr>
           <p:spPr>
             <a:xfrm>
-              <a:off x="577772" y="47498"/>
-              <a:ext cx="4312568" cy="215901"/>
+              <a:off x="577773" y="47498"/>
+              <a:ext cx="4312569" cy="215901"/>
             </a:xfrm>
             <a:prstGeom prst="rect">
               <a:avLst/>
@@ -16204,7 +16942,7 @@
       </p:grpSpPr>
       <p:sp>
         <p:nvSpPr>
-          <p:cNvPr id="581" name="Rectangle 1"/>
+          <p:cNvPr id="624" name="Rectangle 1"/>
           <p:cNvSpPr/>
           <p:nvPr/>
         </p:nvSpPr>
@@ -16239,7 +16977,7 @@
       </p:sp>
       <p:sp>
         <p:nvSpPr>
-          <p:cNvPr id="582" name="Connector 2"/>
+          <p:cNvPr id="625" name="Connector 2"/>
           <p:cNvSpPr/>
           <p:nvPr/>
         </p:nvSpPr>
@@ -16267,7 +17005,7 @@
       </p:sp>
       <p:sp>
         <p:nvSpPr>
-          <p:cNvPr id="583" name="Oval 3"/>
+          <p:cNvPr id="626" name="Oval 3"/>
           <p:cNvSpPr/>
           <p:nvPr/>
         </p:nvSpPr>
@@ -16302,14 +17040,14 @@
       </p:sp>
       <p:sp>
         <p:nvSpPr>
-          <p:cNvPr id="584" name="Oval 4"/>
+          <p:cNvPr id="627" name="Oval 4"/>
           <p:cNvSpPr/>
           <p:nvPr/>
         </p:nvSpPr>
         <p:spPr>
           <a:xfrm>
             <a:off x="1664205" y="658368"/>
-            <a:ext cx="54873" cy="54864"/>
+            <a:ext cx="54875" cy="54864"/>
           </a:xfrm>
           <a:prstGeom prst="ellipse">
             <a:avLst/>
@@ -16337,14 +17075,14 @@
       </p:sp>
       <p:sp>
         <p:nvSpPr>
-          <p:cNvPr id="585" name="Oval 5"/>
+          <p:cNvPr id="628" name="Oval 5"/>
           <p:cNvSpPr/>
           <p:nvPr/>
         </p:nvSpPr>
         <p:spPr>
           <a:xfrm>
             <a:off x="2670048" y="658368"/>
-            <a:ext cx="54873" cy="54864"/>
+            <a:ext cx="54875" cy="54864"/>
           </a:xfrm>
           <a:prstGeom prst="ellipse">
             <a:avLst/>
@@ -16372,7 +17110,7 @@
       </p:sp>
       <p:sp>
         <p:nvSpPr>
-          <p:cNvPr id="586" name="TextBox 6"/>
+          <p:cNvPr id="629" name="TextBox 6"/>
           <p:cNvSpPr txBox="1"/>
           <p:nvPr/>
         </p:nvSpPr>
@@ -16420,7 +17158,7 @@
       </p:sp>
       <p:sp>
         <p:nvSpPr>
-          <p:cNvPr id="587" name="TextBox 7"/>
+          <p:cNvPr id="630" name="TextBox 7"/>
           <p:cNvSpPr txBox="1"/>
           <p:nvPr/>
         </p:nvSpPr>
@@ -16468,14 +17206,14 @@
       </p:sp>
       <p:sp>
         <p:nvSpPr>
-          <p:cNvPr id="588" name="Rectangle 8"/>
+          <p:cNvPr id="631" name="Rectangle 8"/>
           <p:cNvSpPr/>
           <p:nvPr/>
         </p:nvSpPr>
         <p:spPr>
           <a:xfrm>
             <a:off x="685798" y="2706622"/>
-            <a:ext cx="100590" cy="100586"/>
+            <a:ext cx="100591" cy="100586"/>
           </a:xfrm>
           <a:prstGeom prst="rect">
             <a:avLst/>
@@ -16503,7 +17241,7 @@
       </p:sp>
       <p:sp>
         <p:nvSpPr>
-          <p:cNvPr id="589" name="TextBox 9"/>
+          <p:cNvPr id="632" name="TextBox 9"/>
           <p:cNvSpPr txBox="1"/>
           <p:nvPr/>
         </p:nvSpPr>
@@ -16554,14 +17292,14 @@
       </p:sp>
       <p:sp>
         <p:nvSpPr>
-          <p:cNvPr id="590" name="Rectangle 10"/>
+          <p:cNvPr id="633" name="Rectangle 10"/>
           <p:cNvSpPr/>
           <p:nvPr/>
         </p:nvSpPr>
         <p:spPr>
           <a:xfrm>
             <a:off x="685798" y="3218688"/>
-            <a:ext cx="100590" cy="100589"/>
+            <a:ext cx="100591" cy="100590"/>
           </a:xfrm>
           <a:prstGeom prst="rect">
             <a:avLst/>
@@ -16589,7 +17327,7 @@
       </p:sp>
       <p:sp>
         <p:nvSpPr>
-          <p:cNvPr id="591" name="TextBox 11"/>
+          <p:cNvPr id="634" name="TextBox 11"/>
           <p:cNvSpPr txBox="1"/>
           <p:nvPr/>
         </p:nvSpPr>
@@ -16640,14 +17378,14 @@
       </p:sp>
       <p:sp>
         <p:nvSpPr>
-          <p:cNvPr id="592" name="Rectangle 12"/>
+          <p:cNvPr id="635" name="Rectangle 12"/>
           <p:cNvSpPr/>
           <p:nvPr/>
         </p:nvSpPr>
         <p:spPr>
           <a:xfrm>
             <a:off x="685798" y="3730752"/>
-            <a:ext cx="100590" cy="100589"/>
+            <a:ext cx="100591" cy="100590"/>
           </a:xfrm>
           <a:prstGeom prst="rect">
             <a:avLst/>
@@ -16675,7 +17413,7 @@
       </p:sp>
       <p:sp>
         <p:nvSpPr>
-          <p:cNvPr id="593" name="TextBox 13"/>
+          <p:cNvPr id="636" name="TextBox 13"/>
           <p:cNvSpPr txBox="1"/>
           <p:nvPr/>
         </p:nvSpPr>
@@ -16726,14 +17464,14 @@
       </p:sp>
       <p:sp>
         <p:nvSpPr>
-          <p:cNvPr id="594" name="Rectangle 14"/>
+          <p:cNvPr id="637" name="Rectangle 14"/>
           <p:cNvSpPr/>
           <p:nvPr/>
         </p:nvSpPr>
         <p:spPr>
           <a:xfrm>
             <a:off x="685798" y="4242815"/>
-            <a:ext cx="100590" cy="100589"/>
+            <a:ext cx="100591" cy="100590"/>
           </a:xfrm>
           <a:prstGeom prst="rect">
             <a:avLst/>
@@ -16761,7 +17499,7 @@
       </p:sp>
       <p:sp>
         <p:nvSpPr>
-          <p:cNvPr id="595" name="TextBox 15"/>
+          <p:cNvPr id="638" name="TextBox 15"/>
           <p:cNvSpPr txBox="1"/>
           <p:nvPr/>
         </p:nvSpPr>
@@ -16812,14 +17550,14 @@
       </p:sp>
       <p:sp>
         <p:nvSpPr>
-          <p:cNvPr id="596" name="Connector 16"/>
-          <p:cNvSpPr/>
-          <p:nvPr/>
-        </p:nvSpPr>
-        <p:spPr>
-          <a:xfrm>
-            <a:off x="685797" y="4791454"/>
-            <a:ext cx="4983488" cy="5"/>
+          <p:cNvPr id="639" name="Connector 16"/>
+          <p:cNvSpPr/>
+          <p:nvPr/>
+        </p:nvSpPr>
+        <p:spPr>
+          <a:xfrm>
+            <a:off x="685796" y="4791454"/>
+            <a:ext cx="4983490" cy="6"/>
           </a:xfrm>
           <a:prstGeom prst="line">
             <a:avLst/>
@@ -16840,7 +17578,7 @@
       </p:sp>
       <p:sp>
         <p:nvSpPr>
-          <p:cNvPr id="597" name="TextBox 17"/>
+          <p:cNvPr id="640" name="TextBox 17"/>
           <p:cNvSpPr txBox="1"/>
           <p:nvPr/>
         </p:nvSpPr>
@@ -16921,7 +17659,7 @@
       </p:grpSpPr>
       <p:sp>
         <p:nvSpPr>
-          <p:cNvPr id="131" name="TextBox 1"/>
+          <p:cNvPr id="150" name="TextBox 1"/>
           <p:cNvSpPr txBox="1"/>
           <p:nvPr/>
         </p:nvSpPr>
@@ -16969,13 +17707,13 @@
       </p:sp>
       <p:sp>
         <p:nvSpPr>
-          <p:cNvPr id="132" name="TextBox 2"/>
+          <p:cNvPr id="151" name="TextBox 2"/>
           <p:cNvSpPr txBox="1"/>
           <p:nvPr/>
         </p:nvSpPr>
         <p:spPr>
           <a:xfrm>
-            <a:off x="685800" y="1005839"/>
+            <a:off x="685800" y="1005838"/>
             <a:ext cx="10807659" cy="533401"/>
           </a:xfrm>
           <a:prstGeom prst="rect">
@@ -17017,14 +17755,14 @@
       </p:sp>
       <p:sp>
         <p:nvSpPr>
-          <p:cNvPr id="133" name="Connector 3"/>
-          <p:cNvSpPr/>
-          <p:nvPr/>
-        </p:nvSpPr>
-        <p:spPr>
-          <a:xfrm>
-            <a:off x="685799" y="1664207"/>
-            <a:ext cx="822961" cy="1"/>
+          <p:cNvPr id="152" name="Connector 3"/>
+          <p:cNvSpPr/>
+          <p:nvPr/>
+        </p:nvSpPr>
+        <p:spPr>
+          <a:xfrm>
+            <a:off x="685798" y="1664206"/>
+            <a:ext cx="822962" cy="2"/>
           </a:xfrm>
           <a:prstGeom prst="line">
             <a:avLst/>
@@ -17045,14 +17783,14 @@
       </p:sp>
       <p:sp>
         <p:nvSpPr>
-          <p:cNvPr id="134" name="Oval 4"/>
+          <p:cNvPr id="153" name="Oval 4"/>
           <p:cNvSpPr/>
           <p:nvPr/>
         </p:nvSpPr>
         <p:spPr>
           <a:xfrm>
             <a:off x="658368" y="1636776"/>
-            <a:ext cx="54864" cy="54865"/>
+            <a:ext cx="54864" cy="54867"/>
           </a:xfrm>
           <a:prstGeom prst="ellipse">
             <a:avLst/>
@@ -17080,14 +17818,14 @@
       </p:sp>
       <p:sp>
         <p:nvSpPr>
-          <p:cNvPr id="135" name="Oval 5"/>
+          <p:cNvPr id="154" name="Oval 5"/>
           <p:cNvSpPr/>
           <p:nvPr/>
         </p:nvSpPr>
         <p:spPr>
           <a:xfrm>
             <a:off x="1069847" y="1636776"/>
-            <a:ext cx="54865" cy="54865"/>
+            <a:ext cx="54867" cy="54867"/>
           </a:xfrm>
           <a:prstGeom prst="ellipse">
             <a:avLst/>
@@ -17115,14 +17853,14 @@
       </p:sp>
       <p:sp>
         <p:nvSpPr>
-          <p:cNvPr id="136" name="Oval 6"/>
+          <p:cNvPr id="155" name="Oval 6"/>
           <p:cNvSpPr/>
           <p:nvPr/>
         </p:nvSpPr>
         <p:spPr>
           <a:xfrm>
             <a:off x="1481327" y="1636776"/>
-            <a:ext cx="54865" cy="54865"/>
+            <a:ext cx="54867" cy="54867"/>
           </a:xfrm>
           <a:prstGeom prst="ellipse">
             <a:avLst/>
@@ -17150,14 +17888,14 @@
       </p:sp>
       <p:sp>
         <p:nvSpPr>
-          <p:cNvPr id="137" name="Rectangle 7"/>
-          <p:cNvSpPr/>
-          <p:nvPr/>
-        </p:nvSpPr>
-        <p:spPr>
-          <a:xfrm>
-            <a:off x="685799" y="2212848"/>
-            <a:ext cx="100586" cy="100585"/>
+          <p:cNvPr id="156" name="Rectangle 7"/>
+          <p:cNvSpPr/>
+          <p:nvPr/>
+        </p:nvSpPr>
+        <p:spPr>
+          <a:xfrm>
+            <a:off x="685798" y="2212848"/>
+            <a:ext cx="100587" cy="100586"/>
           </a:xfrm>
           <a:prstGeom prst="rect">
             <a:avLst/>
@@ -17185,14 +17923,14 @@
       </p:sp>
       <p:sp>
         <p:nvSpPr>
-          <p:cNvPr id="138" name="TextBox 8"/>
+          <p:cNvPr id="157" name="TextBox 8"/>
           <p:cNvSpPr txBox="1"/>
           <p:nvPr/>
         </p:nvSpPr>
         <p:spPr>
           <a:xfrm>
-            <a:off x="978407" y="2121407"/>
-            <a:ext cx="10515053" cy="266701"/>
+            <a:off x="978406" y="2121406"/>
+            <a:ext cx="10515055" cy="266701"/>
           </a:xfrm>
           <a:prstGeom prst="rect">
             <a:avLst/>
@@ -17236,14 +17974,14 @@
       </p:sp>
       <p:sp>
         <p:nvSpPr>
-          <p:cNvPr id="139" name="Rectangle 9"/>
-          <p:cNvSpPr/>
-          <p:nvPr/>
-        </p:nvSpPr>
-        <p:spPr>
-          <a:xfrm>
-            <a:off x="685799" y="2638679"/>
-            <a:ext cx="100586" cy="100585"/>
+          <p:cNvPr id="158" name="Rectangle 9"/>
+          <p:cNvSpPr/>
+          <p:nvPr/>
+        </p:nvSpPr>
+        <p:spPr>
+          <a:xfrm>
+            <a:off x="685798" y="2638679"/>
+            <a:ext cx="100587" cy="100586"/>
           </a:xfrm>
           <a:prstGeom prst="rect">
             <a:avLst/>
@@ -17271,14 +18009,14 @@
       </p:sp>
       <p:sp>
         <p:nvSpPr>
-          <p:cNvPr id="140" name="TextBox 10"/>
+          <p:cNvPr id="159" name="TextBox 10"/>
           <p:cNvSpPr txBox="1"/>
           <p:nvPr/>
         </p:nvSpPr>
         <p:spPr>
           <a:xfrm>
-            <a:off x="978407" y="2547239"/>
-            <a:ext cx="10515053" cy="581407"/>
+            <a:off x="978406" y="2547239"/>
+            <a:ext cx="10515055" cy="581404"/>
           </a:xfrm>
           <a:prstGeom prst="rect">
             <a:avLst/>
@@ -17322,14 +18060,14 @@
       </p:sp>
       <p:sp>
         <p:nvSpPr>
-          <p:cNvPr id="141" name="Rectangle 11"/>
-          <p:cNvSpPr/>
-          <p:nvPr/>
-        </p:nvSpPr>
-        <p:spPr>
-          <a:xfrm>
-            <a:off x="685799" y="3344035"/>
-            <a:ext cx="100586" cy="100585"/>
+          <p:cNvPr id="160" name="Rectangle 11"/>
+          <p:cNvSpPr/>
+          <p:nvPr/>
+        </p:nvSpPr>
+        <p:spPr>
+          <a:xfrm>
+            <a:off x="685798" y="3344035"/>
+            <a:ext cx="100587" cy="100586"/>
           </a:xfrm>
           <a:prstGeom prst="rect">
             <a:avLst/>
@@ -17357,14 +18095,14 @@
       </p:sp>
       <p:sp>
         <p:nvSpPr>
-          <p:cNvPr id="142" name="TextBox 12"/>
+          <p:cNvPr id="161" name="TextBox 12"/>
           <p:cNvSpPr txBox="1"/>
           <p:nvPr/>
         </p:nvSpPr>
         <p:spPr>
           <a:xfrm>
-            <a:off x="978407" y="3252596"/>
-            <a:ext cx="10515053" cy="266701"/>
+            <a:off x="978406" y="3252596"/>
+            <a:ext cx="10515055" cy="266701"/>
           </a:xfrm>
           <a:prstGeom prst="rect">
             <a:avLst/>
@@ -17408,14 +18146,14 @@
       </p:sp>
       <p:sp>
         <p:nvSpPr>
-          <p:cNvPr id="143" name="Rectangle 13"/>
-          <p:cNvSpPr/>
-          <p:nvPr/>
-        </p:nvSpPr>
-        <p:spPr>
-          <a:xfrm>
-            <a:off x="685799" y="4049393"/>
-            <a:ext cx="100586" cy="100585"/>
+          <p:cNvPr id="162" name="Rectangle 13"/>
+          <p:cNvSpPr/>
+          <p:nvPr/>
+        </p:nvSpPr>
+        <p:spPr>
+          <a:xfrm>
+            <a:off x="685798" y="4049393"/>
+            <a:ext cx="100587" cy="100586"/>
           </a:xfrm>
           <a:prstGeom prst="rect">
             <a:avLst/>
@@ -17443,14 +18181,14 @@
       </p:sp>
       <p:sp>
         <p:nvSpPr>
-          <p:cNvPr id="144" name="TextBox 14"/>
+          <p:cNvPr id="163" name="TextBox 14"/>
           <p:cNvSpPr txBox="1"/>
           <p:nvPr/>
         </p:nvSpPr>
         <p:spPr>
           <a:xfrm>
-            <a:off x="978407" y="3957954"/>
-            <a:ext cx="10515053" cy="266701"/>
+            <a:off x="978406" y="3957954"/>
+            <a:ext cx="10515055" cy="266701"/>
           </a:xfrm>
           <a:prstGeom prst="rect">
             <a:avLst/>
@@ -17494,14 +18232,14 @@
       </p:sp>
       <p:sp>
         <p:nvSpPr>
-          <p:cNvPr id="145" name="Rectangle 15"/>
-          <p:cNvSpPr/>
-          <p:nvPr/>
-        </p:nvSpPr>
-        <p:spPr>
-          <a:xfrm>
-            <a:off x="685799" y="4475224"/>
-            <a:ext cx="100586" cy="100585"/>
+          <p:cNvPr id="164" name="Rectangle 15"/>
+          <p:cNvSpPr/>
+          <p:nvPr/>
+        </p:nvSpPr>
+        <p:spPr>
+          <a:xfrm>
+            <a:off x="685798" y="4475224"/>
+            <a:ext cx="100587" cy="100586"/>
           </a:xfrm>
           <a:prstGeom prst="rect">
             <a:avLst/>
@@ -17529,14 +18267,14 @@
       </p:sp>
       <p:sp>
         <p:nvSpPr>
-          <p:cNvPr id="146" name="TextBox 16"/>
+          <p:cNvPr id="165" name="TextBox 16"/>
           <p:cNvSpPr txBox="1"/>
           <p:nvPr/>
         </p:nvSpPr>
         <p:spPr>
           <a:xfrm>
-            <a:off x="978407" y="4383785"/>
-            <a:ext cx="10515053" cy="266701"/>
+            <a:off x="978406" y="4383785"/>
+            <a:ext cx="10515055" cy="266701"/>
           </a:xfrm>
           <a:prstGeom prst="rect">
             <a:avLst/>
@@ -17574,6 +18312,1133 @@
             <a:pPr/>
             <a:r>
               <a:t>所以就動手做了 Spring-MissionBoard</a:t>
+            </a:r>
+          </a:p>
+        </p:txBody>
+      </p:sp>
+      <p:sp>
+        <p:nvSpPr>
+          <p:cNvPr id="166" name="Rounded Rectangle 146"/>
+          <p:cNvSpPr/>
+          <p:nvPr/>
+        </p:nvSpPr>
+        <p:spPr>
+          <a:xfrm rot="21120000">
+            <a:off x="822960" y="5303520"/>
+            <a:ext cx="566929" cy="731521"/>
+          </a:xfrm>
+          <a:prstGeom prst="roundRect">
+            <a:avLst>
+              <a:gd name="adj" fmla="val 12000"/>
+            </a:avLst>
+          </a:prstGeom>
+          <a:solidFill>
+            <a:srgbClr val="F7F8FC"/>
+          </a:solidFill>
+          <a:ln w="15875">
+            <a:solidFill>
+              <a:srgbClr val="1B2A6B"/>
+            </a:solidFill>
+          </a:ln>
+        </p:spPr>
+        <p:txBody>
+          <a:bodyPr lIns="45718" tIns="45718" rIns="45718" bIns="45718" anchor="ctr"/>
+          <a:lstStyle/>
+          <a:p>
+            <a:pPr algn="ctr">
+              <a:defRPr>
+                <a:solidFill>
+                  <a:srgbClr val="FFFFFF"/>
+                </a:solidFill>
+              </a:defRPr>
+            </a:pPr>
+          </a:p>
+        </p:txBody>
+      </p:sp>
+      <p:sp>
+        <p:nvSpPr>
+          <p:cNvPr id="167" name="Rectangle 147"/>
+          <p:cNvSpPr/>
+          <p:nvPr/>
+        </p:nvSpPr>
+        <p:spPr>
+          <a:xfrm>
+            <a:off x="914400" y="5449823"/>
+            <a:ext cx="384048" cy="41149"/>
+          </a:xfrm>
+          <a:prstGeom prst="rect">
+            <a:avLst/>
+          </a:prstGeom>
+          <a:solidFill>
+            <a:srgbClr val="E2E5F0"/>
+          </a:solidFill>
+          <a:ln w="12700">
+            <a:miter lim="400000"/>
+          </a:ln>
+        </p:spPr>
+        <p:txBody>
+          <a:bodyPr lIns="45718" tIns="45718" rIns="45718" bIns="45718" anchor="ctr"/>
+          <a:lstStyle/>
+          <a:p>
+            <a:pPr algn="ctr">
+              <a:defRPr>
+                <a:solidFill>
+                  <a:srgbClr val="FFFFFF"/>
+                </a:solidFill>
+              </a:defRPr>
+            </a:pPr>
+          </a:p>
+        </p:txBody>
+      </p:sp>
+      <p:sp>
+        <p:nvSpPr>
+          <p:cNvPr id="168" name="Rectangle 148"/>
+          <p:cNvSpPr/>
+          <p:nvPr/>
+        </p:nvSpPr>
+        <p:spPr>
+          <a:xfrm>
+            <a:off x="914400" y="5596128"/>
+            <a:ext cx="384048" cy="41149"/>
+          </a:xfrm>
+          <a:prstGeom prst="rect">
+            <a:avLst/>
+          </a:prstGeom>
+          <a:solidFill>
+            <a:srgbClr val="E2E5F0"/>
+          </a:solidFill>
+          <a:ln w="12700">
+            <a:miter lim="400000"/>
+          </a:ln>
+        </p:spPr>
+        <p:txBody>
+          <a:bodyPr lIns="45718" tIns="45718" rIns="45718" bIns="45718" anchor="ctr"/>
+          <a:lstStyle/>
+          <a:p>
+            <a:pPr algn="ctr">
+              <a:defRPr>
+                <a:solidFill>
+                  <a:srgbClr val="FFFFFF"/>
+                </a:solidFill>
+              </a:defRPr>
+            </a:pPr>
+          </a:p>
+        </p:txBody>
+      </p:sp>
+      <p:sp>
+        <p:nvSpPr>
+          <p:cNvPr id="169" name="Rectangle 149"/>
+          <p:cNvSpPr/>
+          <p:nvPr/>
+        </p:nvSpPr>
+        <p:spPr>
+          <a:xfrm>
+            <a:off x="914400" y="5742432"/>
+            <a:ext cx="384048" cy="41149"/>
+          </a:xfrm>
+          <a:prstGeom prst="rect">
+            <a:avLst/>
+          </a:prstGeom>
+          <a:solidFill>
+            <a:srgbClr val="E2E5F0"/>
+          </a:solidFill>
+          <a:ln w="12700">
+            <a:miter lim="400000"/>
+          </a:ln>
+        </p:spPr>
+        <p:txBody>
+          <a:bodyPr lIns="45718" tIns="45718" rIns="45718" bIns="45718" anchor="ctr"/>
+          <a:lstStyle/>
+          <a:p>
+            <a:pPr algn="ctr">
+              <a:defRPr>
+                <a:solidFill>
+                  <a:srgbClr val="FFFFFF"/>
+                </a:solidFill>
+              </a:defRPr>
+            </a:pPr>
+          </a:p>
+        </p:txBody>
+      </p:sp>
+      <p:sp>
+        <p:nvSpPr>
+          <p:cNvPr id="170" name="Rounded Rectangle 150"/>
+          <p:cNvSpPr/>
+          <p:nvPr/>
+        </p:nvSpPr>
+        <p:spPr>
+          <a:xfrm rot="300000">
+            <a:off x="1600200" y="5120640"/>
+            <a:ext cx="566928" cy="731521"/>
+          </a:xfrm>
+          <a:prstGeom prst="roundRect">
+            <a:avLst>
+              <a:gd name="adj" fmla="val 12000"/>
+            </a:avLst>
+          </a:prstGeom>
+          <a:solidFill>
+            <a:srgbClr val="F7F8FC"/>
+          </a:solidFill>
+          <a:ln w="15875">
+            <a:solidFill>
+              <a:srgbClr val="1B2A6B"/>
+            </a:solidFill>
+          </a:ln>
+        </p:spPr>
+        <p:txBody>
+          <a:bodyPr lIns="45718" tIns="45718" rIns="45718" bIns="45718" anchor="ctr"/>
+          <a:lstStyle/>
+          <a:p>
+            <a:pPr algn="ctr">
+              <a:defRPr>
+                <a:solidFill>
+                  <a:srgbClr val="FFFFFF"/>
+                </a:solidFill>
+              </a:defRPr>
+            </a:pPr>
+          </a:p>
+        </p:txBody>
+      </p:sp>
+      <p:sp>
+        <p:nvSpPr>
+          <p:cNvPr id="171" name="Rectangle 151"/>
+          <p:cNvSpPr/>
+          <p:nvPr/>
+        </p:nvSpPr>
+        <p:spPr>
+          <a:xfrm>
+            <a:off x="1691639" y="5266944"/>
+            <a:ext cx="384049" cy="41149"/>
+          </a:xfrm>
+          <a:prstGeom prst="rect">
+            <a:avLst/>
+          </a:prstGeom>
+          <a:solidFill>
+            <a:srgbClr val="E2E5F0"/>
+          </a:solidFill>
+          <a:ln w="12700">
+            <a:miter lim="400000"/>
+          </a:ln>
+        </p:spPr>
+        <p:txBody>
+          <a:bodyPr lIns="45718" tIns="45718" rIns="45718" bIns="45718" anchor="ctr"/>
+          <a:lstStyle/>
+          <a:p>
+            <a:pPr algn="ctr">
+              <a:defRPr>
+                <a:solidFill>
+                  <a:srgbClr val="FFFFFF"/>
+                </a:solidFill>
+              </a:defRPr>
+            </a:pPr>
+          </a:p>
+        </p:txBody>
+      </p:sp>
+      <p:sp>
+        <p:nvSpPr>
+          <p:cNvPr id="172" name="Rectangle 152"/>
+          <p:cNvSpPr/>
+          <p:nvPr/>
+        </p:nvSpPr>
+        <p:spPr>
+          <a:xfrm>
+            <a:off x="1691639" y="5413247"/>
+            <a:ext cx="384049" cy="41149"/>
+          </a:xfrm>
+          <a:prstGeom prst="rect">
+            <a:avLst/>
+          </a:prstGeom>
+          <a:solidFill>
+            <a:srgbClr val="E2E5F0"/>
+          </a:solidFill>
+          <a:ln w="12700">
+            <a:miter lim="400000"/>
+          </a:ln>
+        </p:spPr>
+        <p:txBody>
+          <a:bodyPr lIns="45718" tIns="45718" rIns="45718" bIns="45718" anchor="ctr"/>
+          <a:lstStyle/>
+          <a:p>
+            <a:pPr algn="ctr">
+              <a:defRPr>
+                <a:solidFill>
+                  <a:srgbClr val="FFFFFF"/>
+                </a:solidFill>
+              </a:defRPr>
+            </a:pPr>
+          </a:p>
+        </p:txBody>
+      </p:sp>
+      <p:sp>
+        <p:nvSpPr>
+          <p:cNvPr id="173" name="Rectangle 153"/>
+          <p:cNvSpPr/>
+          <p:nvPr/>
+        </p:nvSpPr>
+        <p:spPr>
+          <a:xfrm>
+            <a:off x="1691639" y="5559552"/>
+            <a:ext cx="384049" cy="41149"/>
+          </a:xfrm>
+          <a:prstGeom prst="rect">
+            <a:avLst/>
+          </a:prstGeom>
+          <a:solidFill>
+            <a:srgbClr val="E2E5F0"/>
+          </a:solidFill>
+          <a:ln w="12700">
+            <a:miter lim="400000"/>
+          </a:ln>
+        </p:spPr>
+        <p:txBody>
+          <a:bodyPr lIns="45718" tIns="45718" rIns="45718" bIns="45718" anchor="ctr"/>
+          <a:lstStyle/>
+          <a:p>
+            <a:pPr algn="ctr">
+              <a:defRPr>
+                <a:solidFill>
+                  <a:srgbClr val="FFFFFF"/>
+                </a:solidFill>
+              </a:defRPr>
+            </a:pPr>
+          </a:p>
+        </p:txBody>
+      </p:sp>
+      <p:sp>
+        <p:nvSpPr>
+          <p:cNvPr id="174" name="Rounded Rectangle 154"/>
+          <p:cNvSpPr/>
+          <p:nvPr/>
+        </p:nvSpPr>
+        <p:spPr>
+          <a:xfrm rot="21360000">
+            <a:off x="2331720" y="5349240"/>
+            <a:ext cx="566929" cy="731521"/>
+          </a:xfrm>
+          <a:prstGeom prst="roundRect">
+            <a:avLst>
+              <a:gd name="adj" fmla="val 12000"/>
+            </a:avLst>
+          </a:prstGeom>
+          <a:solidFill>
+            <a:srgbClr val="F7F8FC"/>
+          </a:solidFill>
+          <a:ln w="15875">
+            <a:solidFill>
+              <a:srgbClr val="1B2A6B"/>
+            </a:solidFill>
+          </a:ln>
+        </p:spPr>
+        <p:txBody>
+          <a:bodyPr lIns="45718" tIns="45718" rIns="45718" bIns="45718" anchor="ctr"/>
+          <a:lstStyle/>
+          <a:p>
+            <a:pPr algn="ctr">
+              <a:defRPr>
+                <a:solidFill>
+                  <a:srgbClr val="FFFFFF"/>
+                </a:solidFill>
+              </a:defRPr>
+            </a:pPr>
+          </a:p>
+        </p:txBody>
+      </p:sp>
+      <p:sp>
+        <p:nvSpPr>
+          <p:cNvPr id="175" name="Rectangle 155"/>
+          <p:cNvSpPr/>
+          <p:nvPr/>
+        </p:nvSpPr>
+        <p:spPr>
+          <a:xfrm>
+            <a:off x="2423160" y="5495544"/>
+            <a:ext cx="384049" cy="41149"/>
+          </a:xfrm>
+          <a:prstGeom prst="rect">
+            <a:avLst/>
+          </a:prstGeom>
+          <a:solidFill>
+            <a:srgbClr val="E2E5F0"/>
+          </a:solidFill>
+          <a:ln w="12700">
+            <a:miter lim="400000"/>
+          </a:ln>
+        </p:spPr>
+        <p:txBody>
+          <a:bodyPr lIns="45718" tIns="45718" rIns="45718" bIns="45718" anchor="ctr"/>
+          <a:lstStyle/>
+          <a:p>
+            <a:pPr algn="ctr">
+              <a:defRPr>
+                <a:solidFill>
+                  <a:srgbClr val="FFFFFF"/>
+                </a:solidFill>
+              </a:defRPr>
+            </a:pPr>
+          </a:p>
+        </p:txBody>
+      </p:sp>
+      <p:sp>
+        <p:nvSpPr>
+          <p:cNvPr id="176" name="Rectangle 156"/>
+          <p:cNvSpPr/>
+          <p:nvPr/>
+        </p:nvSpPr>
+        <p:spPr>
+          <a:xfrm>
+            <a:off x="2423160" y="5641847"/>
+            <a:ext cx="384049" cy="41149"/>
+          </a:xfrm>
+          <a:prstGeom prst="rect">
+            <a:avLst/>
+          </a:prstGeom>
+          <a:solidFill>
+            <a:srgbClr val="E2E5F0"/>
+          </a:solidFill>
+          <a:ln w="12700">
+            <a:miter lim="400000"/>
+          </a:ln>
+        </p:spPr>
+        <p:txBody>
+          <a:bodyPr lIns="45718" tIns="45718" rIns="45718" bIns="45718" anchor="ctr"/>
+          <a:lstStyle/>
+          <a:p>
+            <a:pPr algn="ctr">
+              <a:defRPr>
+                <a:solidFill>
+                  <a:srgbClr val="FFFFFF"/>
+                </a:solidFill>
+              </a:defRPr>
+            </a:pPr>
+          </a:p>
+        </p:txBody>
+      </p:sp>
+      <p:sp>
+        <p:nvSpPr>
+          <p:cNvPr id="177" name="Rectangle 157"/>
+          <p:cNvSpPr/>
+          <p:nvPr/>
+        </p:nvSpPr>
+        <p:spPr>
+          <a:xfrm>
+            <a:off x="2423160" y="5788152"/>
+            <a:ext cx="384049" cy="41149"/>
+          </a:xfrm>
+          <a:prstGeom prst="rect">
+            <a:avLst/>
+          </a:prstGeom>
+          <a:solidFill>
+            <a:srgbClr val="E2E5F0"/>
+          </a:solidFill>
+          <a:ln w="12700">
+            <a:miter lim="400000"/>
+          </a:ln>
+        </p:spPr>
+        <p:txBody>
+          <a:bodyPr lIns="45718" tIns="45718" rIns="45718" bIns="45718" anchor="ctr"/>
+          <a:lstStyle/>
+          <a:p>
+            <a:pPr algn="ctr">
+              <a:defRPr>
+                <a:solidFill>
+                  <a:srgbClr val="FFFFFF"/>
+                </a:solidFill>
+              </a:defRPr>
+            </a:pPr>
+          </a:p>
+        </p:txBody>
+      </p:sp>
+      <p:sp>
+        <p:nvSpPr>
+          <p:cNvPr id="178" name="Rounded Rectangle 158"/>
+          <p:cNvSpPr/>
+          <p:nvPr/>
+        </p:nvSpPr>
+        <p:spPr>
+          <a:xfrm rot="420000">
+            <a:off x="3108960" y="5074920"/>
+            <a:ext cx="566929" cy="731521"/>
+          </a:xfrm>
+          <a:prstGeom prst="roundRect">
+            <a:avLst>
+              <a:gd name="adj" fmla="val 12000"/>
+            </a:avLst>
+          </a:prstGeom>
+          <a:solidFill>
+            <a:srgbClr val="F7F8FC"/>
+          </a:solidFill>
+          <a:ln w="15875">
+            <a:solidFill>
+              <a:srgbClr val="1B2A6B"/>
+            </a:solidFill>
+          </a:ln>
+        </p:spPr>
+        <p:txBody>
+          <a:bodyPr lIns="45718" tIns="45718" rIns="45718" bIns="45718" anchor="ctr"/>
+          <a:lstStyle/>
+          <a:p>
+            <a:pPr algn="ctr">
+              <a:defRPr>
+                <a:solidFill>
+                  <a:srgbClr val="FFFFFF"/>
+                </a:solidFill>
+              </a:defRPr>
+            </a:pPr>
+          </a:p>
+        </p:txBody>
+      </p:sp>
+      <p:sp>
+        <p:nvSpPr>
+          <p:cNvPr id="179" name="Rectangle 159"/>
+          <p:cNvSpPr/>
+          <p:nvPr/>
+        </p:nvSpPr>
+        <p:spPr>
+          <a:xfrm>
+            <a:off x="3200400" y="5221223"/>
+            <a:ext cx="384048" cy="41149"/>
+          </a:xfrm>
+          <a:prstGeom prst="rect">
+            <a:avLst/>
+          </a:prstGeom>
+          <a:solidFill>
+            <a:srgbClr val="E2E5F0"/>
+          </a:solidFill>
+          <a:ln w="12700">
+            <a:miter lim="400000"/>
+          </a:ln>
+        </p:spPr>
+        <p:txBody>
+          <a:bodyPr lIns="45718" tIns="45718" rIns="45718" bIns="45718" anchor="ctr"/>
+          <a:lstStyle/>
+          <a:p>
+            <a:pPr algn="ctr">
+              <a:defRPr>
+                <a:solidFill>
+                  <a:srgbClr val="FFFFFF"/>
+                </a:solidFill>
+              </a:defRPr>
+            </a:pPr>
+          </a:p>
+        </p:txBody>
+      </p:sp>
+      <p:sp>
+        <p:nvSpPr>
+          <p:cNvPr id="180" name="Rectangle 160"/>
+          <p:cNvSpPr/>
+          <p:nvPr/>
+        </p:nvSpPr>
+        <p:spPr>
+          <a:xfrm>
+            <a:off x="3200400" y="5367528"/>
+            <a:ext cx="384048" cy="41149"/>
+          </a:xfrm>
+          <a:prstGeom prst="rect">
+            <a:avLst/>
+          </a:prstGeom>
+          <a:solidFill>
+            <a:srgbClr val="E2E5F0"/>
+          </a:solidFill>
+          <a:ln w="12700">
+            <a:miter lim="400000"/>
+          </a:ln>
+        </p:spPr>
+        <p:txBody>
+          <a:bodyPr lIns="45718" tIns="45718" rIns="45718" bIns="45718" anchor="ctr"/>
+          <a:lstStyle/>
+          <a:p>
+            <a:pPr algn="ctr">
+              <a:defRPr>
+                <a:solidFill>
+                  <a:srgbClr val="FFFFFF"/>
+                </a:solidFill>
+              </a:defRPr>
+            </a:pPr>
+          </a:p>
+        </p:txBody>
+      </p:sp>
+      <p:sp>
+        <p:nvSpPr>
+          <p:cNvPr id="181" name="Rectangle 161"/>
+          <p:cNvSpPr/>
+          <p:nvPr/>
+        </p:nvSpPr>
+        <p:spPr>
+          <a:xfrm>
+            <a:off x="3200400" y="5513832"/>
+            <a:ext cx="384048" cy="41149"/>
+          </a:xfrm>
+          <a:prstGeom prst="rect">
+            <a:avLst/>
+          </a:prstGeom>
+          <a:solidFill>
+            <a:srgbClr val="E2E5F0"/>
+          </a:solidFill>
+          <a:ln w="12700">
+            <a:miter lim="400000"/>
+          </a:ln>
+        </p:spPr>
+        <p:txBody>
+          <a:bodyPr lIns="45718" tIns="45718" rIns="45718" bIns="45718" anchor="ctr"/>
+          <a:lstStyle/>
+          <a:p>
+            <a:pPr algn="ctr">
+              <a:defRPr>
+                <a:solidFill>
+                  <a:srgbClr val="FFFFFF"/>
+                </a:solidFill>
+              </a:defRPr>
+            </a:pPr>
+          </a:p>
+        </p:txBody>
+      </p:sp>
+      <p:sp>
+        <p:nvSpPr>
+          <p:cNvPr id="182" name="Chevron 162"/>
+          <p:cNvSpPr/>
+          <p:nvPr/>
+        </p:nvSpPr>
+        <p:spPr>
+          <a:xfrm>
+            <a:off x="4206240" y="5349240"/>
+            <a:ext cx="502921" cy="365761"/>
+          </a:xfrm>
+          <a:prstGeom prst="chevron">
+            <a:avLst>
+              <a:gd name="adj" fmla="val 50000"/>
+            </a:avLst>
+          </a:prstGeom>
+          <a:solidFill>
+            <a:srgbClr val="7DE3F0"/>
+          </a:solidFill>
+          <a:ln w="12700">
+            <a:miter lim="400000"/>
+          </a:ln>
+        </p:spPr>
+        <p:txBody>
+          <a:bodyPr lIns="45718" tIns="45718" rIns="45718" bIns="45718" anchor="ctr"/>
+          <a:lstStyle/>
+          <a:p>
+            <a:pPr algn="ctr">
+              <a:defRPr>
+                <a:solidFill>
+                  <a:srgbClr val="FFFFFF"/>
+                </a:solidFill>
+              </a:defRPr>
+            </a:pPr>
+          </a:p>
+        </p:txBody>
+      </p:sp>
+      <p:sp>
+        <p:nvSpPr>
+          <p:cNvPr id="183" name="Chevron 163"/>
+          <p:cNvSpPr/>
+          <p:nvPr/>
+        </p:nvSpPr>
+        <p:spPr>
+          <a:xfrm>
+            <a:off x="4892040" y="5349240"/>
+            <a:ext cx="502921" cy="365761"/>
+          </a:xfrm>
+          <a:prstGeom prst="chevron">
+            <a:avLst>
+              <a:gd name="adj" fmla="val 50000"/>
+            </a:avLst>
+          </a:prstGeom>
+          <a:solidFill>
+            <a:srgbClr val="7DE3F0"/>
+          </a:solidFill>
+          <a:ln w="12700">
+            <a:miter lim="400000"/>
+          </a:ln>
+        </p:spPr>
+        <p:txBody>
+          <a:bodyPr lIns="45718" tIns="45718" rIns="45718" bIns="45718" anchor="ctr"/>
+          <a:lstStyle/>
+          <a:p>
+            <a:pPr algn="ctr">
+              <a:defRPr>
+                <a:solidFill>
+                  <a:srgbClr val="FFFFFF"/>
+                </a:solidFill>
+              </a:defRPr>
+            </a:pPr>
+          </a:p>
+        </p:txBody>
+      </p:sp>
+      <p:sp>
+        <p:nvSpPr>
+          <p:cNvPr id="184" name="Chevron 164"/>
+          <p:cNvSpPr/>
+          <p:nvPr/>
+        </p:nvSpPr>
+        <p:spPr>
+          <a:xfrm>
+            <a:off x="5577840" y="5349240"/>
+            <a:ext cx="502921" cy="365761"/>
+          </a:xfrm>
+          <a:prstGeom prst="chevron">
+            <a:avLst>
+              <a:gd name="adj" fmla="val 50000"/>
+            </a:avLst>
+          </a:prstGeom>
+          <a:solidFill>
+            <a:srgbClr val="7DE3F0"/>
+          </a:solidFill>
+          <a:ln w="12700">
+            <a:miter lim="400000"/>
+          </a:ln>
+        </p:spPr>
+        <p:txBody>
+          <a:bodyPr lIns="45718" tIns="45718" rIns="45718" bIns="45718" anchor="ctr"/>
+          <a:lstStyle/>
+          <a:p>
+            <a:pPr algn="ctr">
+              <a:defRPr>
+                <a:solidFill>
+                  <a:srgbClr val="FFFFFF"/>
+                </a:solidFill>
+              </a:defRPr>
+            </a:pPr>
+          </a:p>
+        </p:txBody>
+      </p:sp>
+      <p:grpSp>
+        <p:nvGrpSpPr>
+          <p:cNvPr id="187" name="Cloud 165"/>
+          <p:cNvGrpSpPr/>
+          <p:nvPr/>
+        </p:nvGrpSpPr>
+        <p:grpSpPr>
+          <a:xfrm>
+            <a:off x="6398784" y="5033629"/>
+            <a:ext cx="2380594" cy="1374266"/>
+            <a:chOff x="0" y="0"/>
+            <a:chExt cx="2380592" cy="1374265"/>
+          </a:xfrm>
+        </p:grpSpPr>
+        <p:sp>
+          <p:nvSpPr>
+            <p:cNvPr id="185" name="形狀"/>
+            <p:cNvSpPr/>
+            <p:nvPr/>
+          </p:nvSpPr>
+          <p:spPr>
+            <a:xfrm>
+              <a:off x="0" y="0"/>
+              <a:ext cx="2380593" cy="1374266"/>
+            </a:xfrm>
+            <a:custGeom>
+              <a:avLst/>
+              <a:gdLst/>
+              <a:ahLst/>
+              <a:cxnLst>
+                <a:cxn ang="0">
+                  <a:pos x="wd2" y="hd2"/>
+                </a:cxn>
+                <a:cxn ang="5400000">
+                  <a:pos x="wd2" y="hd2"/>
+                </a:cxn>
+                <a:cxn ang="10800000">
+                  <a:pos x="wd2" y="hd2"/>
+                </a:cxn>
+                <a:cxn ang="16200000">
+                  <a:pos x="wd2" y="hd2"/>
+                </a:cxn>
+              </a:cxnLst>
+              <a:rect l="0" t="0" r="r" b="b"/>
+              <a:pathLst>
+                <a:path w="20879" h="20684" fill="norm" stroke="1" extrusionOk="0">
+                  <a:moveTo>
+                    <a:pt x="1901" y="6800"/>
+                  </a:moveTo>
+                  <a:cubicBezTo>
+                    <a:pt x="1658" y="4397"/>
+                    <a:pt x="2907" y="2184"/>
+                    <a:pt x="4691" y="1857"/>
+                  </a:cubicBezTo>
+                  <a:cubicBezTo>
+                    <a:pt x="5414" y="1724"/>
+                    <a:pt x="6149" y="1922"/>
+                    <a:pt x="6778" y="2419"/>
+                  </a:cubicBezTo>
+                  <a:cubicBezTo>
+                    <a:pt x="7445" y="725"/>
+                    <a:pt x="9003" y="82"/>
+                    <a:pt x="10259" y="981"/>
+                  </a:cubicBezTo>
+                  <a:cubicBezTo>
+                    <a:pt x="10478" y="1139"/>
+                    <a:pt x="10680" y="1338"/>
+                    <a:pt x="10857" y="1573"/>
+                  </a:cubicBezTo>
+                  <a:lnTo>
+                    <a:pt x="10857" y="1573"/>
+                  </a:lnTo>
+                  <a:cubicBezTo>
+                    <a:pt x="11377" y="169"/>
+                    <a:pt x="12642" y="-401"/>
+                    <a:pt x="13683" y="299"/>
+                  </a:cubicBezTo>
+                  <a:cubicBezTo>
+                    <a:pt x="13971" y="493"/>
+                    <a:pt x="14223" y="774"/>
+                    <a:pt x="14418" y="1119"/>
+                  </a:cubicBezTo>
+                  <a:cubicBezTo>
+                    <a:pt x="15255" y="-209"/>
+                    <a:pt x="16734" y="-373"/>
+                    <a:pt x="17722" y="753"/>
+                  </a:cubicBezTo>
+                  <a:cubicBezTo>
+                    <a:pt x="18137" y="1226"/>
+                    <a:pt x="18417" y="1878"/>
+                    <a:pt x="18513" y="2598"/>
+                  </a:cubicBezTo>
+                  <a:lnTo>
+                    <a:pt x="18513" y="2598"/>
+                  </a:lnTo>
+                  <a:cubicBezTo>
+                    <a:pt x="19885" y="3102"/>
+                    <a:pt x="20694" y="5013"/>
+                    <a:pt x="20321" y="6865"/>
+                  </a:cubicBezTo>
+                  <a:cubicBezTo>
+                    <a:pt x="20289" y="7020"/>
+                    <a:pt x="20250" y="7173"/>
+                    <a:pt x="20203" y="7321"/>
+                  </a:cubicBezTo>
+                  <a:cubicBezTo>
+                    <a:pt x="21303" y="9251"/>
+                    <a:pt x="21034" y="12017"/>
+                    <a:pt x="19601" y="13499"/>
+                  </a:cubicBezTo>
+                  <a:cubicBezTo>
+                    <a:pt x="19156" y="13961"/>
+                    <a:pt x="18629" y="14259"/>
+                    <a:pt x="18072" y="14367"/>
+                  </a:cubicBezTo>
+                  <a:cubicBezTo>
+                    <a:pt x="18072" y="16443"/>
+                    <a:pt x="16822" y="18126"/>
+                    <a:pt x="15280" y="18126"/>
+                  </a:cubicBezTo>
+                  <a:cubicBezTo>
+                    <a:pt x="14757" y="18126"/>
+                    <a:pt x="14245" y="17928"/>
+                    <a:pt x="13801" y="17556"/>
+                  </a:cubicBezTo>
+                  <a:cubicBezTo>
+                    <a:pt x="13280" y="19883"/>
+                    <a:pt x="11460" y="21199"/>
+                    <a:pt x="9738" y="20494"/>
+                  </a:cubicBezTo>
+                  <a:cubicBezTo>
+                    <a:pt x="9016" y="20199"/>
+                    <a:pt x="8392" y="19574"/>
+                    <a:pt x="7973" y="18727"/>
+                  </a:cubicBezTo>
+                  <a:cubicBezTo>
+                    <a:pt x="6209" y="20160"/>
+                    <a:pt x="3920" y="19389"/>
+                    <a:pt x="2859" y="17004"/>
+                  </a:cubicBezTo>
+                  <a:cubicBezTo>
+                    <a:pt x="2846" y="16974"/>
+                    <a:pt x="2833" y="16944"/>
+                    <a:pt x="2820" y="16914"/>
+                  </a:cubicBezTo>
+                  <a:lnTo>
+                    <a:pt x="2820" y="16914"/>
+                  </a:lnTo>
+                  <a:cubicBezTo>
+                    <a:pt x="1666" y="17096"/>
+                    <a:pt x="620" y="15986"/>
+                    <a:pt x="485" y="14435"/>
+                  </a:cubicBezTo>
+                  <a:cubicBezTo>
+                    <a:pt x="412" y="13608"/>
+                    <a:pt x="615" y="12780"/>
+                    <a:pt x="1038" y="12172"/>
+                  </a:cubicBezTo>
+                  <a:lnTo>
+                    <a:pt x="1038" y="12172"/>
+                  </a:lnTo>
+                  <a:cubicBezTo>
+                    <a:pt x="39" y="11379"/>
+                    <a:pt x="-297" y="9639"/>
+                    <a:pt x="288" y="8285"/>
+                  </a:cubicBezTo>
+                  <a:cubicBezTo>
+                    <a:pt x="626" y="7504"/>
+                    <a:pt x="1218" y="6988"/>
+                    <a:pt x="1883" y="6895"/>
+                  </a:cubicBezTo>
+                  <a:close/>
+                </a:path>
+              </a:pathLst>
+            </a:custGeom>
+            <a:noFill/>
+            <a:ln w="28575" cap="flat">
+              <a:solidFill>
+                <a:srgbClr val="22D3EE"/>
+              </a:solidFill>
+              <a:prstDash val="solid"/>
+              <a:round/>
+            </a:ln>
+            <a:effectLst/>
+          </p:spPr>
+          <p:txBody>
+            <a:bodyPr wrap="square" lIns="45718" tIns="45718" rIns="45718" bIns="45718" numCol="1" anchor="ctr">
+              <a:noAutofit/>
+            </a:bodyPr>
+            <a:lstStyle/>
+            <a:p>
+              <a:pPr algn="ctr">
+                <a:defRPr>
+                  <a:solidFill>
+                    <a:srgbClr val="FFFFFF"/>
+                  </a:solidFill>
+                </a:defRPr>
+              </a:pPr>
+            </a:p>
+          </p:txBody>
+        </p:sp>
+        <p:sp>
+          <p:nvSpPr>
+            <p:cNvPr id="186" name="形狀"/>
+            <p:cNvSpPr/>
+            <p:nvPr/>
+          </p:nvSpPr>
+          <p:spPr>
+            <a:xfrm>
+              <a:off x="120881" y="69880"/>
+              <a:ext cx="2181418" cy="1166799"/>
+            </a:xfrm>
+            <a:custGeom>
+              <a:avLst/>
+              <a:gdLst/>
+              <a:ahLst/>
+              <a:cxnLst>
+                <a:cxn ang="0">
+                  <a:pos x="wd2" y="hd2"/>
+                </a:cxn>
+                <a:cxn ang="5400000">
+                  <a:pos x="wd2" y="hd2"/>
+                </a:cxn>
+                <a:cxn ang="10800000">
+                  <a:pos x="wd2" y="hd2"/>
+                </a:cxn>
+                <a:cxn ang="16200000">
+                  <a:pos x="wd2" y="hd2"/>
+                </a:cxn>
+              </a:cxnLst>
+              <a:rect l="0" t="0" r="r" b="b"/>
+              <a:pathLst>
+                <a:path w="21600" h="21600" fill="norm" stroke="1" extrusionOk="0">
+                  <a:moveTo>
+                    <a:pt x="1380" y="14010"/>
+                  </a:moveTo>
+                  <a:cubicBezTo>
+                    <a:pt x="899" y="14066"/>
+                    <a:pt x="417" y="13902"/>
+                    <a:pt x="0" y="13542"/>
+                  </a:cubicBezTo>
+                  <a:moveTo>
+                    <a:pt x="2598" y="19137"/>
+                  </a:moveTo>
+                  <a:cubicBezTo>
+                    <a:pt x="2405" y="19250"/>
+                    <a:pt x="2202" y="19325"/>
+                    <a:pt x="1994" y="19361"/>
+                  </a:cubicBezTo>
+                  <a:moveTo>
+                    <a:pt x="7802" y="21600"/>
+                  </a:moveTo>
+                  <a:lnTo>
+                    <a:pt x="7802" y="21600"/>
+                  </a:lnTo>
+                  <a:cubicBezTo>
+                    <a:pt x="7657" y="21279"/>
+                    <a:pt x="7535" y="20936"/>
+                    <a:pt x="7438" y="20577"/>
+                  </a:cubicBezTo>
+                  <a:moveTo>
+                    <a:pt x="14532" y="19050"/>
+                  </a:moveTo>
+                  <a:cubicBezTo>
+                    <a:pt x="14510" y="19430"/>
+                    <a:pt x="14462" y="19806"/>
+                    <a:pt x="14386" y="20172"/>
+                  </a:cubicBezTo>
+                  <a:moveTo>
+                    <a:pt x="17421" y="12116"/>
+                  </a:moveTo>
+                  <a:cubicBezTo>
+                    <a:pt x="18505" y="12890"/>
+                    <a:pt x="19193" y="14504"/>
+                    <a:pt x="19193" y="16273"/>
+                  </a:cubicBezTo>
+                  <a:moveTo>
+                    <a:pt x="21600" y="7649"/>
+                  </a:moveTo>
+                  <a:cubicBezTo>
+                    <a:pt x="21423" y="8256"/>
+                    <a:pt x="21153" y="8794"/>
+                    <a:pt x="20811" y="9222"/>
+                  </a:cubicBezTo>
+                  <a:moveTo>
+                    <a:pt x="19707" y="1814"/>
+                  </a:moveTo>
+                  <a:cubicBezTo>
+                    <a:pt x="19737" y="2059"/>
+                    <a:pt x="19751" y="2307"/>
+                    <a:pt x="19749" y="2556"/>
+                  </a:cubicBezTo>
+                  <a:moveTo>
+                    <a:pt x="14668" y="947"/>
+                  </a:moveTo>
+                  <a:cubicBezTo>
+                    <a:pt x="14771" y="605"/>
+                    <a:pt x="14907" y="286"/>
+                    <a:pt x="15073" y="0"/>
+                  </a:cubicBezTo>
+                  <a:moveTo>
+                    <a:pt x="10888" y="1399"/>
+                  </a:moveTo>
+                  <a:cubicBezTo>
+                    <a:pt x="10930" y="1115"/>
+                    <a:pt x="10996" y="841"/>
+                    <a:pt x="11084" y="582"/>
+                  </a:cubicBezTo>
+                  <a:moveTo>
+                    <a:pt x="6452" y="1676"/>
+                  </a:moveTo>
+                  <a:cubicBezTo>
+                    <a:pt x="6709" y="1897"/>
+                    <a:pt x="6947" y="2163"/>
+                    <a:pt x="7160" y="2469"/>
+                  </a:cubicBezTo>
+                  <a:moveTo>
+                    <a:pt x="1072" y="7905"/>
+                  </a:moveTo>
+                  <a:lnTo>
+                    <a:pt x="1072" y="7905"/>
+                  </a:lnTo>
+                  <a:cubicBezTo>
+                    <a:pt x="1016" y="7632"/>
+                    <a:pt x="974" y="7353"/>
+                    <a:pt x="948" y="7071"/>
+                  </a:cubicBezTo>
+                </a:path>
+              </a:pathLst>
+            </a:custGeom>
+            <a:noFill/>
+            <a:ln w="28575" cap="flat">
+              <a:solidFill>
+                <a:srgbClr val="22D3EE"/>
+              </a:solidFill>
+              <a:prstDash val="solid"/>
+              <a:round/>
+            </a:ln>
+            <a:effectLst/>
+          </p:spPr>
+          <p:txBody>
+            <a:bodyPr wrap="square" lIns="45718" tIns="45718" rIns="45718" bIns="45718" numCol="1" anchor="ctr">
+              <a:noAutofit/>
+            </a:bodyPr>
+            <a:lstStyle/>
+            <a:p>
+              <a:pPr algn="ctr">
+                <a:defRPr>
+                  <a:solidFill>
+                    <a:srgbClr val="FFFFFF"/>
+                  </a:solidFill>
+                </a:defRPr>
+              </a:pPr>
+            </a:p>
+          </p:txBody>
+        </p:sp>
+      </p:grpSp>
+      <p:sp>
+        <p:nvSpPr>
+          <p:cNvPr id="188" name="Oval 166"/>
+          <p:cNvSpPr/>
+          <p:nvPr/>
+        </p:nvSpPr>
+        <p:spPr>
+          <a:xfrm>
+            <a:off x="7525511" y="5650991"/>
+            <a:ext cx="128017" cy="128017"/>
+          </a:xfrm>
+          <a:prstGeom prst="ellipse">
+            <a:avLst/>
+          </a:prstGeom>
+          <a:solidFill>
+            <a:srgbClr val="F5A524"/>
+          </a:solidFill>
+          <a:ln w="12700">
+            <a:miter lim="400000"/>
+          </a:ln>
+        </p:spPr>
+        <p:txBody>
+          <a:bodyPr lIns="45718" tIns="45718" rIns="45718" bIns="45718" anchor="ctr"/>
+          <a:lstStyle/>
+          <a:p>
+            <a:pPr algn="ctr">
+              <a:defRPr>
+                <a:solidFill>
+                  <a:srgbClr val="FFFFFF"/>
+                </a:solidFill>
+              </a:defRPr>
+            </a:pPr>
+          </a:p>
+        </p:txBody>
+      </p:sp>
+      <p:sp>
+        <p:nvSpPr>
+          <p:cNvPr id="189" name="TextBox 167"/>
+          <p:cNvSpPr txBox="1"/>
+          <p:nvPr/>
+        </p:nvSpPr>
+        <p:spPr>
+          <a:xfrm>
+            <a:off x="6400800" y="6473952"/>
+            <a:ext cx="2377440" cy="190501"/>
+          </a:xfrm>
+          <a:prstGeom prst="rect">
+            <a:avLst/>
+          </a:prstGeom>
+          <a:ln w="12700">
+            <a:miter lim="400000"/>
+          </a:ln>
+          <a:extLst>
+            <a:ext uri="{C572A759-6A51-4108-AA02-DFA0A04FC94B}">
+              <ma14:wrappingTextBoxFlag xmlns:ma14="http://schemas.microsoft.com/office/mac/drawingml/2011/main" val="1"/>
+            </a:ext>
+          </a:extLst>
+        </p:spPr>
+        <p:txBody>
+          <a:bodyPr lIns="0" tIns="0" rIns="0" bIns="0">
+            <a:spAutoFit/>
+          </a:bodyPr>
+          <a:lstStyle>
+            <a:lvl1pPr algn="ctr">
+              <a:defRPr b="1" sz="1300">
+                <a:solidFill>
+                  <a:srgbClr val="7DE3F0"/>
+                </a:solidFill>
+                <a:latin typeface="Menlo Regular"/>
+                <a:ea typeface="Menlo Regular"/>
+                <a:cs typeface="Menlo Regular"/>
+                <a:sym typeface="Menlo Regular"/>
+              </a:defRPr>
+            </a:lvl1pPr>
+          </a:lstStyle>
+          <a:p>
+            <a:pPr/>
+            <a:r>
+              <a:t>SaaS</a:t>
             </a:r>
           </a:p>
         </p:txBody>
@@ -17613,7 +19478,7 @@
       </p:grpSpPr>
       <p:sp>
         <p:nvSpPr>
-          <p:cNvPr id="148" name="TextBox 1"/>
+          <p:cNvPr id="191" name="TextBox 1"/>
           <p:cNvSpPr txBox="1"/>
           <p:nvPr/>
         </p:nvSpPr>
@@ -17661,7 +19526,7 @@
       </p:sp>
       <p:sp>
         <p:nvSpPr>
-          <p:cNvPr id="149" name="TextBox 2"/>
+          <p:cNvPr id="192" name="TextBox 2"/>
           <p:cNvSpPr txBox="1"/>
           <p:nvPr/>
         </p:nvSpPr>
@@ -17709,7 +19574,7 @@
       </p:sp>
       <p:sp>
         <p:nvSpPr>
-          <p:cNvPr id="150" name="TextBox 3"/>
+          <p:cNvPr id="193" name="TextBox 3"/>
           <p:cNvSpPr txBox="1"/>
           <p:nvPr/>
         </p:nvSpPr>
@@ -17757,14 +19622,14 @@
       </p:sp>
       <p:sp>
         <p:nvSpPr>
-          <p:cNvPr id="151" name="Connector 4"/>
-          <p:cNvSpPr/>
-          <p:nvPr/>
-        </p:nvSpPr>
-        <p:spPr>
-          <a:xfrm>
-            <a:off x="685797" y="1911094"/>
-            <a:ext cx="822966" cy="5"/>
+          <p:cNvPr id="194" name="Connector 4"/>
+          <p:cNvSpPr/>
+          <p:nvPr/>
+        </p:nvSpPr>
+        <p:spPr>
+          <a:xfrm>
+            <a:off x="685796" y="1911094"/>
+            <a:ext cx="822967" cy="6"/>
           </a:xfrm>
           <a:prstGeom prst="line">
             <a:avLst/>
@@ -17785,14 +19650,14 @@
       </p:sp>
       <p:sp>
         <p:nvSpPr>
-          <p:cNvPr id="152" name="Oval 5"/>
+          <p:cNvPr id="195" name="Oval 5"/>
           <p:cNvSpPr/>
           <p:nvPr/>
         </p:nvSpPr>
         <p:spPr>
           <a:xfrm>
             <a:off x="658368" y="1883664"/>
-            <a:ext cx="54864" cy="54873"/>
+            <a:ext cx="54864" cy="54875"/>
           </a:xfrm>
           <a:prstGeom prst="ellipse">
             <a:avLst/>
@@ -17820,14 +19685,14 @@
       </p:sp>
       <p:sp>
         <p:nvSpPr>
-          <p:cNvPr id="153" name="Oval 6"/>
+          <p:cNvPr id="196" name="Oval 6"/>
           <p:cNvSpPr/>
           <p:nvPr/>
         </p:nvSpPr>
         <p:spPr>
           <a:xfrm>
             <a:off x="1069847" y="1883664"/>
-            <a:ext cx="54873" cy="54873"/>
+            <a:ext cx="54875" cy="54875"/>
           </a:xfrm>
           <a:prstGeom prst="ellipse">
             <a:avLst/>
@@ -17855,14 +19720,14 @@
       </p:sp>
       <p:sp>
         <p:nvSpPr>
-          <p:cNvPr id="154" name="Oval 7"/>
+          <p:cNvPr id="197" name="Oval 7"/>
           <p:cNvSpPr/>
           <p:nvPr/>
         </p:nvSpPr>
         <p:spPr>
           <a:xfrm>
             <a:off x="1481327" y="1883664"/>
-            <a:ext cx="54873" cy="54873"/>
+            <a:ext cx="54875" cy="54875"/>
           </a:xfrm>
           <a:prstGeom prst="ellipse">
             <a:avLst/>
@@ -17890,14 +19755,14 @@
       </p:sp>
       <p:sp>
         <p:nvSpPr>
-          <p:cNvPr id="155" name="Rectangle 8"/>
+          <p:cNvPr id="198" name="Rectangle 8"/>
           <p:cNvSpPr/>
           <p:nvPr/>
         </p:nvSpPr>
         <p:spPr>
           <a:xfrm>
             <a:off x="685798" y="2414016"/>
-            <a:ext cx="100590" cy="100589"/>
+            <a:ext cx="100591" cy="100590"/>
           </a:xfrm>
           <a:prstGeom prst="rect">
             <a:avLst/>
@@ -17925,7 +19790,7 @@
       </p:sp>
       <p:sp>
         <p:nvSpPr>
-          <p:cNvPr id="156" name="TextBox 9"/>
+          <p:cNvPr id="199" name="TextBox 9"/>
           <p:cNvSpPr txBox="1"/>
           <p:nvPr/>
         </p:nvSpPr>
@@ -17976,14 +19841,14 @@
       </p:sp>
       <p:sp>
         <p:nvSpPr>
-          <p:cNvPr id="157" name="Rectangle 10"/>
+          <p:cNvPr id="200" name="Rectangle 10"/>
           <p:cNvSpPr/>
           <p:nvPr/>
         </p:nvSpPr>
         <p:spPr>
           <a:xfrm>
             <a:off x="685795" y="2848989"/>
-            <a:ext cx="4946638" cy="3597535"/>
+            <a:ext cx="4946639" cy="3597536"/>
           </a:xfrm>
           <a:prstGeom prst="rect">
             <a:avLst/>
@@ -18013,14 +19878,14 @@
       </p:sp>
       <p:sp>
         <p:nvSpPr>
-          <p:cNvPr id="158" name="Rectangle 11"/>
+          <p:cNvPr id="201" name="Rectangle 11"/>
           <p:cNvSpPr/>
           <p:nvPr/>
         </p:nvSpPr>
         <p:spPr>
           <a:xfrm>
             <a:off x="685795" y="2848991"/>
-            <a:ext cx="4946638" cy="384053"/>
+            <a:ext cx="4946639" cy="384054"/>
           </a:xfrm>
           <a:prstGeom prst="rect">
             <a:avLst/>
@@ -18048,14 +19913,14 @@
       </p:sp>
       <p:sp>
         <p:nvSpPr>
-          <p:cNvPr id="159" name="TextBox 12"/>
+          <p:cNvPr id="202" name="TextBox 12"/>
           <p:cNvSpPr txBox="1"/>
           <p:nvPr/>
         </p:nvSpPr>
         <p:spPr>
           <a:xfrm>
             <a:off x="685795" y="2926713"/>
-            <a:ext cx="4946638" cy="228601"/>
+            <a:ext cx="4946639" cy="228601"/>
           </a:xfrm>
           <a:prstGeom prst="rect">
             <a:avLst/>
@@ -18096,14 +19961,14 @@
       </p:sp>
       <p:sp>
         <p:nvSpPr>
-          <p:cNvPr id="160" name="Rectangle 13"/>
+          <p:cNvPr id="203" name="Rectangle 13"/>
           <p:cNvSpPr/>
           <p:nvPr/>
         </p:nvSpPr>
         <p:spPr>
           <a:xfrm>
             <a:off x="6546828" y="2848989"/>
-            <a:ext cx="4946635" cy="3597535"/>
+            <a:ext cx="4946636" cy="3597536"/>
           </a:xfrm>
           <a:prstGeom prst="rect">
             <a:avLst/>
@@ -18133,14 +19998,14 @@
       </p:sp>
       <p:sp>
         <p:nvSpPr>
-          <p:cNvPr id="161" name="Rectangle 14"/>
+          <p:cNvPr id="204" name="Rectangle 14"/>
           <p:cNvSpPr/>
           <p:nvPr/>
         </p:nvSpPr>
         <p:spPr>
           <a:xfrm>
             <a:off x="6546828" y="2848991"/>
-            <a:ext cx="4946635" cy="384053"/>
+            <a:ext cx="4946636" cy="384054"/>
           </a:xfrm>
           <a:prstGeom prst="rect">
             <a:avLst/>
@@ -18168,14 +20033,14 @@
       </p:sp>
       <p:sp>
         <p:nvSpPr>
-          <p:cNvPr id="162" name="TextBox 15"/>
+          <p:cNvPr id="205" name="TextBox 15"/>
           <p:cNvSpPr txBox="1"/>
           <p:nvPr/>
         </p:nvSpPr>
         <p:spPr>
           <a:xfrm>
             <a:off x="6546828" y="2926713"/>
-            <a:ext cx="4946635" cy="228601"/>
+            <a:ext cx="4946636" cy="228601"/>
           </a:xfrm>
           <a:prstGeom prst="rect">
             <a:avLst/>
@@ -18216,14 +20081,14 @@
       </p:sp>
       <p:sp>
         <p:nvSpPr>
-          <p:cNvPr id="163" name="Connector 16"/>
+          <p:cNvPr id="206" name="Connector 16"/>
           <p:cNvSpPr/>
           <p:nvPr/>
         </p:nvSpPr>
         <p:spPr>
           <a:xfrm>
             <a:off x="5742156" y="4647755"/>
-            <a:ext cx="694949" cy="5"/>
+            <a:ext cx="694950" cy="6"/>
           </a:xfrm>
           <a:prstGeom prst="line">
             <a:avLst/>
@@ -18244,14 +20109,14 @@
       </p:sp>
       <p:sp>
         <p:nvSpPr>
-          <p:cNvPr id="164" name="Isosceles Triangle 17"/>
+          <p:cNvPr id="207" name="Isosceles Triangle 17"/>
           <p:cNvSpPr/>
           <p:nvPr/>
         </p:nvSpPr>
         <p:spPr>
           <a:xfrm rot="5400000">
             <a:off x="6290793" y="4556314"/>
-            <a:ext cx="182888" cy="182884"/>
+            <a:ext cx="182889" cy="182885"/>
           </a:xfrm>
           <a:prstGeom prst="triangle">
             <a:avLst/>
@@ -18312,7 +20177,7 @@
       </p:grpSpPr>
       <p:sp>
         <p:nvSpPr>
-          <p:cNvPr id="166" name="TextBox 1"/>
+          <p:cNvPr id="209" name="TextBox 1"/>
           <p:cNvSpPr txBox="1"/>
           <p:nvPr/>
         </p:nvSpPr>
@@ -18360,7 +20225,7 @@
       </p:sp>
       <p:sp>
         <p:nvSpPr>
-          <p:cNvPr id="167" name="TextBox 2"/>
+          <p:cNvPr id="210" name="TextBox 2"/>
           <p:cNvSpPr txBox="1"/>
           <p:nvPr/>
         </p:nvSpPr>
@@ -18408,14 +20273,14 @@
       </p:sp>
       <p:sp>
         <p:nvSpPr>
-          <p:cNvPr id="168" name="Connector 3"/>
-          <p:cNvSpPr/>
-          <p:nvPr/>
-        </p:nvSpPr>
-        <p:spPr>
-          <a:xfrm>
-            <a:off x="685797" y="1664205"/>
-            <a:ext cx="822966" cy="5"/>
+          <p:cNvPr id="211" name="Connector 3"/>
+          <p:cNvSpPr/>
+          <p:nvPr/>
+        </p:nvSpPr>
+        <p:spPr>
+          <a:xfrm>
+            <a:off x="685796" y="1664205"/>
+            <a:ext cx="822967" cy="6"/>
           </a:xfrm>
           <a:prstGeom prst="line">
             <a:avLst/>
@@ -18436,14 +20301,14 @@
       </p:sp>
       <p:sp>
         <p:nvSpPr>
-          <p:cNvPr id="169" name="Oval 4"/>
+          <p:cNvPr id="212" name="Oval 4"/>
           <p:cNvSpPr/>
           <p:nvPr/>
         </p:nvSpPr>
         <p:spPr>
           <a:xfrm>
             <a:off x="658368" y="1636776"/>
-            <a:ext cx="54864" cy="54873"/>
+            <a:ext cx="54864" cy="54875"/>
           </a:xfrm>
           <a:prstGeom prst="ellipse">
             <a:avLst/>
@@ -18471,14 +20336,14 @@
       </p:sp>
       <p:sp>
         <p:nvSpPr>
-          <p:cNvPr id="170" name="Oval 5"/>
+          <p:cNvPr id="213" name="Oval 5"/>
           <p:cNvSpPr/>
           <p:nvPr/>
         </p:nvSpPr>
         <p:spPr>
           <a:xfrm>
             <a:off x="1069847" y="1636776"/>
-            <a:ext cx="54873" cy="54873"/>
+            <a:ext cx="54875" cy="54875"/>
           </a:xfrm>
           <a:prstGeom prst="ellipse">
             <a:avLst/>
@@ -18506,14 +20371,14 @@
       </p:sp>
       <p:sp>
         <p:nvSpPr>
-          <p:cNvPr id="171" name="Oval 6"/>
+          <p:cNvPr id="214" name="Oval 6"/>
           <p:cNvSpPr/>
           <p:nvPr/>
         </p:nvSpPr>
         <p:spPr>
           <a:xfrm>
             <a:off x="1481327" y="1636776"/>
-            <a:ext cx="54873" cy="54873"/>
+            <a:ext cx="54875" cy="54875"/>
           </a:xfrm>
           <a:prstGeom prst="ellipse">
             <a:avLst/>
@@ -18541,14 +20406,14 @@
       </p:sp>
       <p:sp>
         <p:nvSpPr>
-          <p:cNvPr id="172" name="Rectangle 7"/>
+          <p:cNvPr id="215" name="Rectangle 7"/>
           <p:cNvSpPr/>
           <p:nvPr/>
         </p:nvSpPr>
         <p:spPr>
           <a:xfrm>
             <a:off x="685798" y="2212848"/>
-            <a:ext cx="100590" cy="100589"/>
+            <a:ext cx="100591" cy="100590"/>
           </a:xfrm>
           <a:prstGeom prst="rect">
             <a:avLst/>
@@ -18576,7 +20441,7 @@
       </p:sp>
       <p:sp>
         <p:nvSpPr>
-          <p:cNvPr id="173" name="TextBox 8"/>
+          <p:cNvPr id="216" name="TextBox 8"/>
           <p:cNvSpPr txBox="1"/>
           <p:nvPr/>
         </p:nvSpPr>
@@ -18627,14 +20492,14 @@
       </p:sp>
       <p:sp>
         <p:nvSpPr>
-          <p:cNvPr id="174" name="Rectangle 9"/>
+          <p:cNvPr id="217" name="Rectangle 9"/>
           <p:cNvSpPr/>
           <p:nvPr/>
         </p:nvSpPr>
         <p:spPr>
           <a:xfrm>
             <a:off x="685798" y="2665727"/>
-            <a:ext cx="100590" cy="100589"/>
+            <a:ext cx="100591" cy="100590"/>
           </a:xfrm>
           <a:prstGeom prst="rect">
             <a:avLst/>
@@ -18662,7 +20527,7 @@
       </p:sp>
       <p:sp>
         <p:nvSpPr>
-          <p:cNvPr id="175" name="TextBox 10"/>
+          <p:cNvPr id="218" name="TextBox 10"/>
           <p:cNvSpPr txBox="1"/>
           <p:nvPr/>
         </p:nvSpPr>
@@ -18713,14 +20578,14 @@
       </p:sp>
       <p:sp>
         <p:nvSpPr>
-          <p:cNvPr id="176" name="Rectangle 11"/>
+          <p:cNvPr id="219" name="Rectangle 11"/>
           <p:cNvSpPr/>
           <p:nvPr/>
         </p:nvSpPr>
         <p:spPr>
           <a:xfrm>
             <a:off x="685798" y="3118610"/>
-            <a:ext cx="100590" cy="100590"/>
+            <a:ext cx="100591" cy="100591"/>
           </a:xfrm>
           <a:prstGeom prst="rect">
             <a:avLst/>
@@ -18748,7 +20613,7 @@
       </p:sp>
       <p:sp>
         <p:nvSpPr>
-          <p:cNvPr id="177" name="TextBox 12"/>
+          <p:cNvPr id="220" name="TextBox 12"/>
           <p:cNvSpPr txBox="1"/>
           <p:nvPr/>
         </p:nvSpPr>
@@ -18832,7 +20697,7 @@
       </p:grpSpPr>
       <p:sp>
         <p:nvSpPr>
-          <p:cNvPr id="179" name="TextBox 1"/>
+          <p:cNvPr id="222" name="TextBox 1"/>
           <p:cNvSpPr txBox="1"/>
           <p:nvPr/>
         </p:nvSpPr>
@@ -18880,7 +20745,7 @@
       </p:sp>
       <p:sp>
         <p:nvSpPr>
-          <p:cNvPr id="180" name="TextBox 2"/>
+          <p:cNvPr id="223" name="TextBox 2"/>
           <p:cNvSpPr txBox="1"/>
           <p:nvPr/>
         </p:nvSpPr>
@@ -18928,14 +20793,14 @@
       </p:sp>
       <p:sp>
         <p:nvSpPr>
-          <p:cNvPr id="181" name="Connector 3"/>
-          <p:cNvSpPr/>
-          <p:nvPr/>
-        </p:nvSpPr>
-        <p:spPr>
-          <a:xfrm>
-            <a:off x="685797" y="1572766"/>
-            <a:ext cx="822966" cy="5"/>
+          <p:cNvPr id="224" name="Connector 3"/>
+          <p:cNvSpPr/>
+          <p:nvPr/>
+        </p:nvSpPr>
+        <p:spPr>
+          <a:xfrm>
+            <a:off x="685796" y="1572766"/>
+            <a:ext cx="822967" cy="6"/>
           </a:xfrm>
           <a:prstGeom prst="line">
             <a:avLst/>
@@ -18956,14 +20821,14 @@
       </p:sp>
       <p:sp>
         <p:nvSpPr>
-          <p:cNvPr id="182" name="Oval 4"/>
+          <p:cNvPr id="225" name="Oval 4"/>
           <p:cNvSpPr/>
           <p:nvPr/>
         </p:nvSpPr>
         <p:spPr>
           <a:xfrm>
             <a:off x="658368" y="1545336"/>
-            <a:ext cx="54864" cy="54873"/>
+            <a:ext cx="54864" cy="54875"/>
           </a:xfrm>
           <a:prstGeom prst="ellipse">
             <a:avLst/>
@@ -18991,14 +20856,14 @@
       </p:sp>
       <p:sp>
         <p:nvSpPr>
-          <p:cNvPr id="183" name="Oval 5"/>
+          <p:cNvPr id="226" name="Oval 5"/>
           <p:cNvSpPr/>
           <p:nvPr/>
         </p:nvSpPr>
         <p:spPr>
           <a:xfrm>
             <a:off x="1069847" y="1545336"/>
-            <a:ext cx="54873" cy="54873"/>
+            <a:ext cx="54875" cy="54875"/>
           </a:xfrm>
           <a:prstGeom prst="ellipse">
             <a:avLst/>
@@ -19026,14 +20891,14 @@
       </p:sp>
       <p:sp>
         <p:nvSpPr>
-          <p:cNvPr id="184" name="Oval 6"/>
+          <p:cNvPr id="227" name="Oval 6"/>
           <p:cNvSpPr/>
           <p:nvPr/>
         </p:nvSpPr>
         <p:spPr>
           <a:xfrm>
             <a:off x="1481327" y="1545336"/>
-            <a:ext cx="54873" cy="54873"/>
+            <a:ext cx="54875" cy="54875"/>
           </a:xfrm>
           <a:prstGeom prst="ellipse">
             <a:avLst/>
@@ -19061,7 +20926,7 @@
       </p:sp>
       <p:sp>
         <p:nvSpPr>
-          <p:cNvPr id="185" name="Rectangle 7"/>
+          <p:cNvPr id="228" name="Rectangle 7"/>
           <p:cNvSpPr/>
           <p:nvPr/>
         </p:nvSpPr>
@@ -19098,7 +20963,7 @@
       </p:sp>
       <p:pic>
         <p:nvPicPr>
-          <p:cNvPr id="186" name="Picture 8" descr="Picture 8"/>
+          <p:cNvPr id="229" name="Picture 8" descr="Picture 8"/>
           <p:cNvPicPr>
             <a:picLocks noChangeAspect="1"/>
           </p:cNvPicPr>
@@ -19127,14 +20992,14 @@
       </p:pic>
       <p:sp>
         <p:nvSpPr>
-          <p:cNvPr id="187" name="Rectangle 9"/>
+          <p:cNvPr id="230" name="Rectangle 9"/>
           <p:cNvSpPr/>
           <p:nvPr/>
         </p:nvSpPr>
         <p:spPr>
           <a:xfrm>
             <a:off x="630934" y="1975103"/>
-            <a:ext cx="310902" cy="54869"/>
+            <a:ext cx="310903" cy="54870"/>
           </a:xfrm>
           <a:prstGeom prst="rect">
             <a:avLst/>
@@ -19162,14 +21027,14 @@
       </p:sp>
       <p:sp>
         <p:nvSpPr>
-          <p:cNvPr id="188" name="Rectangle 10"/>
+          <p:cNvPr id="231" name="Rectangle 10"/>
           <p:cNvSpPr/>
           <p:nvPr/>
         </p:nvSpPr>
         <p:spPr>
           <a:xfrm>
             <a:off x="630936" y="1975103"/>
-            <a:ext cx="54869" cy="310901"/>
+            <a:ext cx="54870" cy="310902"/>
           </a:xfrm>
           <a:prstGeom prst="rect">
             <a:avLst/>
@@ -19197,28 +21062,28 @@
       </p:sp>
       <p:grpSp>
         <p:nvGrpSpPr>
-          <p:cNvPr id="191" name="Rounded Rectangle 11"/>
+          <p:cNvPr id="234" name="Rounded Rectangle 11"/>
           <p:cNvGrpSpPr/>
           <p:nvPr/>
         </p:nvGrpSpPr>
         <p:grpSpPr>
           <a:xfrm>
-            <a:off x="685798" y="5457649"/>
-            <a:ext cx="1024135" cy="310907"/>
+            <a:off x="685797" y="5457648"/>
+            <a:ext cx="1024136" cy="310910"/>
             <a:chOff x="0" y="0"/>
-            <a:chExt cx="1024134" cy="310905"/>
+            <a:chExt cx="1024135" cy="310908"/>
           </a:xfrm>
         </p:grpSpPr>
         <p:sp>
           <p:nvSpPr>
-            <p:cNvPr id="189" name="圓角矩形"/>
+            <p:cNvPr id="232" name="圓角矩形"/>
             <p:cNvSpPr/>
             <p:nvPr/>
           </p:nvSpPr>
           <p:spPr>
             <a:xfrm>
               <a:off x="-1" y="-1"/>
-              <a:ext cx="1024135" cy="310907"/>
+              <a:ext cx="1024136" cy="310909"/>
             </a:xfrm>
             <a:prstGeom prst="roundRect">
               <a:avLst>
@@ -19252,7 +21117,7 @@
         </p:sp>
         <p:sp>
           <p:nvSpPr>
-            <p:cNvPr id="190" name="分類管理"/>
+            <p:cNvPr id="233" name="分類管理"/>
             <p:cNvSpPr txBox="1"/>
             <p:nvPr/>
           </p:nvSpPr>
@@ -19304,7 +21169,7 @@
       </p:grpSp>
       <p:sp>
         <p:nvSpPr>
-          <p:cNvPr id="192" name="Rectangle 12"/>
+          <p:cNvPr id="235" name="Rectangle 12"/>
           <p:cNvSpPr/>
           <p:nvPr/>
         </p:nvSpPr>
@@ -19341,7 +21206,7 @@
       </p:sp>
       <p:pic>
         <p:nvPicPr>
-          <p:cNvPr id="193" name="Picture 13" descr="Picture 13"/>
+          <p:cNvPr id="236" name="Picture 13" descr="Picture 13"/>
           <p:cNvPicPr>
             <a:picLocks noChangeAspect="1"/>
           </p:cNvPicPr>
@@ -19370,14 +21235,14 @@
       </p:pic>
       <p:sp>
         <p:nvSpPr>
-          <p:cNvPr id="194" name="Rectangle 14"/>
+          <p:cNvPr id="237" name="Rectangle 14"/>
           <p:cNvSpPr/>
           <p:nvPr/>
         </p:nvSpPr>
         <p:spPr>
           <a:xfrm>
             <a:off x="6217644" y="1975103"/>
-            <a:ext cx="310901" cy="54869"/>
+            <a:ext cx="310902" cy="54870"/>
           </a:xfrm>
           <a:prstGeom prst="rect">
             <a:avLst/>
@@ -19405,14 +21270,14 @@
       </p:sp>
       <p:sp>
         <p:nvSpPr>
-          <p:cNvPr id="195" name="Rectangle 15"/>
+          <p:cNvPr id="238" name="Rectangle 15"/>
           <p:cNvSpPr/>
           <p:nvPr/>
         </p:nvSpPr>
         <p:spPr>
           <a:xfrm>
             <a:off x="6217644" y="1975103"/>
-            <a:ext cx="54869" cy="310901"/>
+            <a:ext cx="54870" cy="310902"/>
           </a:xfrm>
           <a:prstGeom prst="rect">
             <a:avLst/>
@@ -19440,28 +21305,28 @@
       </p:sp>
       <p:grpSp>
         <p:nvGrpSpPr>
-          <p:cNvPr id="198" name="Rounded Rectangle 16"/>
+          <p:cNvPr id="241" name="Rounded Rectangle 16"/>
           <p:cNvGrpSpPr/>
           <p:nvPr/>
         </p:nvGrpSpPr>
         <p:grpSpPr>
           <a:xfrm>
-            <a:off x="6272502" y="5457649"/>
-            <a:ext cx="1024138" cy="310907"/>
-            <a:chOff x="-1" y="0"/>
-            <a:chExt cx="1024137" cy="310905"/>
+            <a:off x="6272501" y="5457648"/>
+            <a:ext cx="1024139" cy="310910"/>
+            <a:chOff x="0" y="0"/>
+            <a:chExt cx="1024138" cy="310908"/>
           </a:xfrm>
         </p:grpSpPr>
         <p:sp>
           <p:nvSpPr>
-            <p:cNvPr id="196" name="圓角矩形"/>
+            <p:cNvPr id="239" name="圓角矩形"/>
             <p:cNvSpPr/>
             <p:nvPr/>
           </p:nvSpPr>
           <p:spPr>
             <a:xfrm>
-              <a:off x="-2" y="-1"/>
-              <a:ext cx="1024138" cy="310907"/>
+              <a:off x="-1" y="-1"/>
+              <a:ext cx="1024139" cy="310909"/>
             </a:xfrm>
             <a:prstGeom prst="roundRect">
               <a:avLst>
@@ -19495,13 +21360,13 @@
         </p:sp>
         <p:sp>
           <p:nvSpPr>
-            <p:cNvPr id="197" name="任務看板"/>
+            <p:cNvPr id="240" name="任務看板"/>
             <p:cNvSpPr txBox="1"/>
             <p:nvPr/>
           </p:nvSpPr>
           <p:spPr>
             <a:xfrm>
-              <a:off x="200914" y="47498"/>
+              <a:off x="200915" y="47498"/>
               <a:ext cx="622301" cy="215901"/>
             </a:xfrm>
             <a:prstGeom prst="rect">
@@ -19580,7 +21445,7 @@
       </p:grpSpPr>
       <p:sp>
         <p:nvSpPr>
-          <p:cNvPr id="200" name="TextBox 1"/>
+          <p:cNvPr id="243" name="TextBox 1"/>
           <p:cNvSpPr txBox="1"/>
           <p:nvPr/>
         </p:nvSpPr>
@@ -19628,7 +21493,7 @@
       </p:sp>
       <p:sp>
         <p:nvSpPr>
-          <p:cNvPr id="201" name="TextBox 2"/>
+          <p:cNvPr id="244" name="TextBox 2"/>
           <p:cNvSpPr txBox="1"/>
           <p:nvPr/>
         </p:nvSpPr>
@@ -19676,14 +21541,14 @@
       </p:sp>
       <p:sp>
         <p:nvSpPr>
-          <p:cNvPr id="202" name="Connector 3"/>
-          <p:cNvSpPr/>
-          <p:nvPr/>
-        </p:nvSpPr>
-        <p:spPr>
-          <a:xfrm>
-            <a:off x="685797" y="1527047"/>
-            <a:ext cx="822966" cy="5"/>
+          <p:cNvPr id="245" name="Connector 3"/>
+          <p:cNvSpPr/>
+          <p:nvPr/>
+        </p:nvSpPr>
+        <p:spPr>
+          <a:xfrm>
+            <a:off x="685796" y="1527047"/>
+            <a:ext cx="822967" cy="6"/>
           </a:xfrm>
           <a:prstGeom prst="line">
             <a:avLst/>
@@ -19704,14 +21569,14 @@
       </p:sp>
       <p:sp>
         <p:nvSpPr>
-          <p:cNvPr id="203" name="Oval 4"/>
+          <p:cNvPr id="246" name="Oval 4"/>
           <p:cNvSpPr/>
           <p:nvPr/>
         </p:nvSpPr>
         <p:spPr>
           <a:xfrm>
             <a:off x="658368" y="1499616"/>
-            <a:ext cx="54864" cy="54873"/>
+            <a:ext cx="54864" cy="54875"/>
           </a:xfrm>
           <a:prstGeom prst="ellipse">
             <a:avLst/>
@@ -19739,14 +21604,14 @@
       </p:sp>
       <p:sp>
         <p:nvSpPr>
-          <p:cNvPr id="204" name="Oval 5"/>
+          <p:cNvPr id="247" name="Oval 5"/>
           <p:cNvSpPr/>
           <p:nvPr/>
         </p:nvSpPr>
         <p:spPr>
           <a:xfrm>
             <a:off x="1069847" y="1499616"/>
-            <a:ext cx="54873" cy="54873"/>
+            <a:ext cx="54875" cy="54875"/>
           </a:xfrm>
           <a:prstGeom prst="ellipse">
             <a:avLst/>
@@ -19774,14 +21639,14 @@
       </p:sp>
       <p:sp>
         <p:nvSpPr>
-          <p:cNvPr id="205" name="Oval 6"/>
+          <p:cNvPr id="248" name="Oval 6"/>
           <p:cNvSpPr/>
           <p:nvPr/>
         </p:nvSpPr>
         <p:spPr>
           <a:xfrm>
             <a:off x="1481327" y="1499616"/>
-            <a:ext cx="54873" cy="54873"/>
+            <a:ext cx="54875" cy="54875"/>
           </a:xfrm>
           <a:prstGeom prst="ellipse">
             <a:avLst/>
@@ -19809,14 +21674,14 @@
       </p:sp>
       <p:sp>
         <p:nvSpPr>
-          <p:cNvPr id="206" name="Connector 7"/>
+          <p:cNvPr id="249" name="Connector 7"/>
           <p:cNvSpPr/>
           <p:nvPr/>
         </p:nvSpPr>
         <p:spPr>
           <a:xfrm>
             <a:off x="685797" y="2606038"/>
-            <a:ext cx="10807666" cy="5"/>
+            <a:ext cx="10807667" cy="6"/>
           </a:xfrm>
           <a:prstGeom prst="line">
             <a:avLst/>
@@ -19837,14 +21702,14 @@
       </p:sp>
       <p:sp>
         <p:nvSpPr>
-          <p:cNvPr id="207" name="Oval 8"/>
+          <p:cNvPr id="250" name="Oval 8"/>
           <p:cNvSpPr/>
           <p:nvPr/>
         </p:nvSpPr>
         <p:spPr>
           <a:xfrm>
             <a:off x="1954458" y="2523744"/>
-            <a:ext cx="164601" cy="164601"/>
+            <a:ext cx="164603" cy="164603"/>
           </a:xfrm>
           <a:prstGeom prst="ellipse">
             <a:avLst/>
@@ -19872,7 +21737,7 @@
       </p:sp>
       <p:sp>
         <p:nvSpPr>
-          <p:cNvPr id="208" name="TextBox 9"/>
+          <p:cNvPr id="251" name="TextBox 9"/>
           <p:cNvSpPr txBox="1"/>
           <p:nvPr/>
         </p:nvSpPr>
@@ -19920,14 +21785,14 @@
       </p:sp>
       <p:sp>
         <p:nvSpPr>
-          <p:cNvPr id="209" name="Rectangle 10"/>
+          <p:cNvPr id="252" name="Rectangle 10"/>
           <p:cNvSpPr/>
           <p:nvPr/>
         </p:nvSpPr>
         <p:spPr>
           <a:xfrm>
             <a:off x="795528" y="2926076"/>
-            <a:ext cx="2482458" cy="3200407"/>
+            <a:ext cx="2482458" cy="3200408"/>
           </a:xfrm>
           <a:prstGeom prst="rect">
             <a:avLst/>
@@ -19957,14 +21822,14 @@
       </p:sp>
       <p:sp>
         <p:nvSpPr>
-          <p:cNvPr id="210" name="Rectangle 11"/>
+          <p:cNvPr id="253" name="Rectangle 11"/>
           <p:cNvSpPr/>
           <p:nvPr/>
         </p:nvSpPr>
         <p:spPr>
           <a:xfrm>
             <a:off x="795528" y="2926077"/>
-            <a:ext cx="2482458" cy="54869"/>
+            <a:ext cx="2482458" cy="54870"/>
           </a:xfrm>
           <a:prstGeom prst="rect">
             <a:avLst/>
@@ -19992,7 +21857,7 @@
       </p:sp>
       <p:sp>
         <p:nvSpPr>
-          <p:cNvPr id="211" name="TextBox 12"/>
+          <p:cNvPr id="254" name="TextBox 12"/>
           <p:cNvSpPr txBox="1"/>
           <p:nvPr/>
         </p:nvSpPr>
@@ -20040,7 +21905,7 @@
       </p:sp>
       <p:sp>
         <p:nvSpPr>
-          <p:cNvPr id="212" name="TextBox 13"/>
+          <p:cNvPr id="255" name="TextBox 13"/>
           <p:cNvSpPr txBox="1"/>
           <p:nvPr/>
         </p:nvSpPr>
@@ -20091,7 +21956,7 @@
       </p:sp>
       <p:sp>
         <p:nvSpPr>
-          <p:cNvPr id="213" name="TextBox 14"/>
+          <p:cNvPr id="256" name="TextBox 14"/>
           <p:cNvSpPr txBox="1"/>
           <p:nvPr/>
         </p:nvSpPr>
@@ -20139,28 +22004,28 @@
       </p:sp>
       <p:grpSp>
         <p:nvGrpSpPr>
-          <p:cNvPr id="216" name="Rounded Rectangle 15"/>
+          <p:cNvPr id="259" name="Rounded Rectangle 15"/>
           <p:cNvGrpSpPr/>
           <p:nvPr/>
         </p:nvGrpSpPr>
         <p:grpSpPr>
           <a:xfrm>
-            <a:off x="941829" y="5705851"/>
-            <a:ext cx="1517916" cy="310907"/>
+            <a:off x="941828" y="5705849"/>
+            <a:ext cx="1517918" cy="310910"/>
             <a:chOff x="-1" y="0"/>
-            <a:chExt cx="1517915" cy="310905"/>
+            <a:chExt cx="1517917" cy="310908"/>
           </a:xfrm>
         </p:grpSpPr>
         <p:sp>
           <p:nvSpPr>
-            <p:cNvPr id="214" name="圓角矩形"/>
+            <p:cNvPr id="257" name="圓角矩形"/>
             <p:cNvSpPr/>
             <p:nvPr/>
           </p:nvSpPr>
           <p:spPr>
             <a:xfrm>
               <a:off x="-2" y="-1"/>
-              <a:ext cx="1517916" cy="310907"/>
+              <a:ext cx="1517919" cy="310909"/>
             </a:xfrm>
             <a:prstGeom prst="roundRect">
               <a:avLst>
@@ -20194,13 +22059,13 @@
         </p:sp>
         <p:sp>
           <p:nvSpPr>
-            <p:cNvPr id="215" name="耗時 11 天"/>
+            <p:cNvPr id="258" name="耗時 11 天"/>
             <p:cNvSpPr txBox="1"/>
             <p:nvPr/>
           </p:nvSpPr>
           <p:spPr>
             <a:xfrm>
-              <a:off x="409182" y="66549"/>
+              <a:off x="409183" y="66549"/>
               <a:ext cx="699543" cy="177801"/>
             </a:xfrm>
             <a:prstGeom prst="rect">
@@ -20246,14 +22111,14 @@
       </p:grpSp>
       <p:sp>
         <p:nvSpPr>
-          <p:cNvPr id="217" name="Oval 16"/>
+          <p:cNvPr id="260" name="Oval 16"/>
           <p:cNvSpPr/>
           <p:nvPr/>
         </p:nvSpPr>
         <p:spPr>
           <a:xfrm>
             <a:off x="4656375" y="2523744"/>
-            <a:ext cx="164601" cy="164601"/>
+            <a:ext cx="164603" cy="164603"/>
           </a:xfrm>
           <a:prstGeom prst="ellipse">
             <a:avLst/>
@@ -20281,14 +22146,14 @@
       </p:sp>
       <p:sp>
         <p:nvSpPr>
-          <p:cNvPr id="218" name="TextBox 17"/>
+          <p:cNvPr id="261" name="TextBox 17"/>
           <p:cNvSpPr txBox="1"/>
           <p:nvPr/>
         </p:nvSpPr>
         <p:spPr>
           <a:xfrm>
             <a:off x="3387714" y="2103120"/>
-            <a:ext cx="2701919" cy="177801"/>
+            <a:ext cx="2701920" cy="177801"/>
           </a:xfrm>
           <a:prstGeom prst="rect">
             <a:avLst/>
@@ -20329,14 +22194,14 @@
       </p:sp>
       <p:sp>
         <p:nvSpPr>
-          <p:cNvPr id="219" name="Rectangle 18"/>
+          <p:cNvPr id="262" name="Rectangle 18"/>
           <p:cNvSpPr/>
           <p:nvPr/>
         </p:nvSpPr>
         <p:spPr>
           <a:xfrm>
             <a:off x="3497441" y="2926076"/>
-            <a:ext cx="2482463" cy="3200407"/>
+            <a:ext cx="2482464" cy="3200408"/>
           </a:xfrm>
           <a:prstGeom prst="rect">
             <a:avLst/>
@@ -20366,14 +22231,14 @@
       </p:sp>
       <p:sp>
         <p:nvSpPr>
-          <p:cNvPr id="220" name="Rectangle 19"/>
+          <p:cNvPr id="263" name="Rectangle 19"/>
           <p:cNvSpPr/>
           <p:nvPr/>
         </p:nvSpPr>
         <p:spPr>
           <a:xfrm>
             <a:off x="3497441" y="2926077"/>
-            <a:ext cx="2482463" cy="54869"/>
+            <a:ext cx="2482464" cy="54870"/>
           </a:xfrm>
           <a:prstGeom prst="rect">
             <a:avLst/>
@@ -20401,7 +22266,7 @@
       </p:sp>
       <p:sp>
         <p:nvSpPr>
-          <p:cNvPr id="221" name="TextBox 20"/>
+          <p:cNvPr id="264" name="TextBox 20"/>
           <p:cNvSpPr txBox="1"/>
           <p:nvPr/>
         </p:nvSpPr>
@@ -20449,7 +22314,7 @@
       </p:sp>
       <p:sp>
         <p:nvSpPr>
-          <p:cNvPr id="222" name="TextBox 21"/>
+          <p:cNvPr id="265" name="TextBox 21"/>
           <p:cNvSpPr txBox="1"/>
           <p:nvPr/>
         </p:nvSpPr>
@@ -20500,7 +22365,7 @@
       </p:sp>
       <p:sp>
         <p:nvSpPr>
-          <p:cNvPr id="223" name="TextBox 22"/>
+          <p:cNvPr id="266" name="TextBox 22"/>
           <p:cNvSpPr txBox="1"/>
           <p:nvPr/>
         </p:nvSpPr>
@@ -20548,28 +22413,28 @@
       </p:sp>
       <p:grpSp>
         <p:nvGrpSpPr>
-          <p:cNvPr id="226" name="Rounded Rectangle 23"/>
+          <p:cNvPr id="269" name="Rounded Rectangle 23"/>
           <p:cNvGrpSpPr/>
           <p:nvPr/>
         </p:nvGrpSpPr>
         <p:grpSpPr>
           <a:xfrm>
-            <a:off x="3643742" y="5705851"/>
-            <a:ext cx="1517916" cy="310907"/>
+            <a:off x="3643740" y="5705849"/>
+            <a:ext cx="1517918" cy="310910"/>
             <a:chOff x="-1" y="0"/>
-            <a:chExt cx="1517915" cy="310905"/>
+            <a:chExt cx="1517917" cy="310908"/>
           </a:xfrm>
         </p:grpSpPr>
         <p:sp>
           <p:nvSpPr>
-            <p:cNvPr id="224" name="圓角矩形"/>
+            <p:cNvPr id="267" name="圓角矩形"/>
             <p:cNvSpPr/>
             <p:nvPr/>
           </p:nvSpPr>
           <p:spPr>
             <a:xfrm>
               <a:off x="-2" y="-1"/>
-              <a:ext cx="1517916" cy="310907"/>
+              <a:ext cx="1517919" cy="310909"/>
             </a:xfrm>
             <a:prstGeom prst="roundRect">
               <a:avLst>
@@ -20603,13 +22468,13 @@
         </p:sp>
         <p:sp>
           <p:nvSpPr>
-            <p:cNvPr id="225" name="耗時 14 天"/>
+            <p:cNvPr id="268" name="耗時 14 天"/>
             <p:cNvSpPr txBox="1"/>
             <p:nvPr/>
           </p:nvSpPr>
           <p:spPr>
             <a:xfrm>
-              <a:off x="409182" y="66549"/>
+              <a:off x="409183" y="66549"/>
               <a:ext cx="699543" cy="177801"/>
             </a:xfrm>
             <a:prstGeom prst="rect">
@@ -20655,14 +22520,14 @@
       </p:grpSp>
       <p:sp>
         <p:nvSpPr>
-          <p:cNvPr id="227" name="Oval 24"/>
+          <p:cNvPr id="270" name="Oval 24"/>
           <p:cNvSpPr/>
           <p:nvPr/>
         </p:nvSpPr>
         <p:spPr>
           <a:xfrm>
             <a:off x="7358288" y="2523744"/>
-            <a:ext cx="164601" cy="164601"/>
+            <a:ext cx="164603" cy="164603"/>
           </a:xfrm>
           <a:prstGeom prst="ellipse">
             <a:avLst/>
@@ -20690,14 +22555,14 @@
       </p:sp>
       <p:sp>
         <p:nvSpPr>
-          <p:cNvPr id="228" name="TextBox 25"/>
+          <p:cNvPr id="271" name="TextBox 25"/>
           <p:cNvSpPr txBox="1"/>
           <p:nvPr/>
         </p:nvSpPr>
         <p:spPr>
           <a:xfrm>
             <a:off x="6089629" y="2103120"/>
-            <a:ext cx="2701919" cy="177801"/>
+            <a:ext cx="2701920" cy="177801"/>
           </a:xfrm>
           <a:prstGeom prst="rect">
             <a:avLst/>
@@ -20738,14 +22603,14 @@
       </p:sp>
       <p:sp>
         <p:nvSpPr>
-          <p:cNvPr id="229" name="Rectangle 26"/>
+          <p:cNvPr id="272" name="Rectangle 26"/>
           <p:cNvSpPr/>
           <p:nvPr/>
         </p:nvSpPr>
         <p:spPr>
           <a:xfrm>
             <a:off x="6199356" y="2926076"/>
-            <a:ext cx="2482460" cy="3200407"/>
+            <a:ext cx="2482460" cy="3200408"/>
           </a:xfrm>
           <a:prstGeom prst="rect">
             <a:avLst/>
@@ -20775,14 +22640,14 @@
       </p:sp>
       <p:sp>
         <p:nvSpPr>
-          <p:cNvPr id="230" name="Rectangle 27"/>
+          <p:cNvPr id="273" name="Rectangle 27"/>
           <p:cNvSpPr/>
           <p:nvPr/>
         </p:nvSpPr>
         <p:spPr>
           <a:xfrm>
             <a:off x="6199356" y="2926077"/>
-            <a:ext cx="2482460" cy="54869"/>
+            <a:ext cx="2482460" cy="54870"/>
           </a:xfrm>
           <a:prstGeom prst="rect">
             <a:avLst/>
@@ -20810,7 +22675,7 @@
       </p:sp>
       <p:sp>
         <p:nvSpPr>
-          <p:cNvPr id="231" name="TextBox 28"/>
+          <p:cNvPr id="274" name="TextBox 28"/>
           <p:cNvSpPr txBox="1"/>
           <p:nvPr/>
         </p:nvSpPr>
@@ -20858,7 +22723,7 @@
       </p:sp>
       <p:sp>
         <p:nvSpPr>
-          <p:cNvPr id="232" name="TextBox 29"/>
+          <p:cNvPr id="275" name="TextBox 29"/>
           <p:cNvSpPr txBox="1"/>
           <p:nvPr/>
         </p:nvSpPr>
@@ -20909,7 +22774,7 @@
       </p:sp>
       <p:sp>
         <p:nvSpPr>
-          <p:cNvPr id="233" name="TextBox 30"/>
+          <p:cNvPr id="276" name="TextBox 30"/>
           <p:cNvSpPr txBox="1"/>
           <p:nvPr/>
         </p:nvSpPr>
@@ -20957,28 +22822,28 @@
       </p:sp>
       <p:grpSp>
         <p:nvGrpSpPr>
-          <p:cNvPr id="236" name="Rounded Rectangle 31"/>
+          <p:cNvPr id="279" name="Rounded Rectangle 31"/>
           <p:cNvGrpSpPr/>
           <p:nvPr/>
         </p:nvGrpSpPr>
         <p:grpSpPr>
           <a:xfrm>
-            <a:off x="6345658" y="5705851"/>
-            <a:ext cx="1353323" cy="310907"/>
+            <a:off x="6345656" y="5705849"/>
+            <a:ext cx="1353327" cy="310910"/>
             <a:chOff x="-1" y="0"/>
-            <a:chExt cx="1353322" cy="310905"/>
+            <a:chExt cx="1353325" cy="310908"/>
           </a:xfrm>
         </p:grpSpPr>
         <p:sp>
           <p:nvSpPr>
-            <p:cNvPr id="234" name="圓角矩形"/>
+            <p:cNvPr id="277" name="圓角矩形"/>
             <p:cNvSpPr/>
             <p:nvPr/>
           </p:nvSpPr>
           <p:spPr>
             <a:xfrm>
               <a:off x="-2" y="-1"/>
-              <a:ext cx="1353324" cy="310907"/>
+              <a:ext cx="1353327" cy="310909"/>
             </a:xfrm>
             <a:prstGeom prst="roundRect">
               <a:avLst>
@@ -21012,13 +22877,13 @@
         </p:sp>
         <p:sp>
           <p:nvSpPr>
-            <p:cNvPr id="235" name="耗時 5 天"/>
+            <p:cNvPr id="278" name="耗時 5 天"/>
             <p:cNvSpPr txBox="1"/>
             <p:nvPr/>
           </p:nvSpPr>
           <p:spPr>
             <a:xfrm>
-              <a:off x="365116" y="66549"/>
+              <a:off x="365117" y="66549"/>
               <a:ext cx="623082" cy="177801"/>
             </a:xfrm>
             <a:prstGeom prst="rect">
@@ -21064,14 +22929,14 @@
       </p:grpSp>
       <p:sp>
         <p:nvSpPr>
-          <p:cNvPr id="237" name="Oval 32"/>
+          <p:cNvPr id="280" name="Oval 32"/>
           <p:cNvSpPr/>
           <p:nvPr/>
         </p:nvSpPr>
         <p:spPr>
           <a:xfrm>
             <a:off x="10060205" y="2523744"/>
-            <a:ext cx="164601" cy="164601"/>
+            <a:ext cx="164603" cy="164603"/>
           </a:xfrm>
           <a:prstGeom prst="ellipse">
             <a:avLst/>
@@ -21099,7 +22964,7 @@
       </p:sp>
       <p:sp>
         <p:nvSpPr>
-          <p:cNvPr id="238" name="TextBox 33"/>
+          <p:cNvPr id="281" name="TextBox 33"/>
           <p:cNvSpPr txBox="1"/>
           <p:nvPr/>
         </p:nvSpPr>
@@ -21147,14 +23012,14 @@
       </p:sp>
       <p:sp>
         <p:nvSpPr>
-          <p:cNvPr id="239" name="Rectangle 34"/>
+          <p:cNvPr id="282" name="Rectangle 34"/>
           <p:cNvSpPr/>
           <p:nvPr/>
         </p:nvSpPr>
         <p:spPr>
           <a:xfrm>
             <a:off x="8901272" y="2926076"/>
-            <a:ext cx="2482463" cy="3200407"/>
+            <a:ext cx="2482464" cy="3200408"/>
           </a:xfrm>
           <a:prstGeom prst="rect">
             <a:avLst/>
@@ -21184,14 +23049,14 @@
       </p:sp>
       <p:sp>
         <p:nvSpPr>
-          <p:cNvPr id="240" name="Rectangle 35"/>
+          <p:cNvPr id="283" name="Rectangle 35"/>
           <p:cNvSpPr/>
           <p:nvPr/>
         </p:nvSpPr>
         <p:spPr>
           <a:xfrm>
             <a:off x="8901272" y="2926077"/>
-            <a:ext cx="2482463" cy="54869"/>
+            <a:ext cx="2482464" cy="54870"/>
           </a:xfrm>
           <a:prstGeom prst="rect">
             <a:avLst/>
@@ -21219,7 +23084,7 @@
       </p:sp>
       <p:sp>
         <p:nvSpPr>
-          <p:cNvPr id="241" name="TextBox 36"/>
+          <p:cNvPr id="284" name="TextBox 36"/>
           <p:cNvSpPr txBox="1"/>
           <p:nvPr/>
         </p:nvSpPr>
@@ -21267,7 +23132,7 @@
       </p:sp>
       <p:sp>
         <p:nvSpPr>
-          <p:cNvPr id="242" name="TextBox 37"/>
+          <p:cNvPr id="285" name="TextBox 37"/>
           <p:cNvSpPr txBox="1"/>
           <p:nvPr/>
         </p:nvSpPr>
@@ -21318,7 +23183,7 @@
       </p:sp>
       <p:sp>
         <p:nvSpPr>
-          <p:cNvPr id="243" name="TextBox 38"/>
+          <p:cNvPr id="286" name="TextBox 38"/>
           <p:cNvSpPr txBox="1"/>
           <p:nvPr/>
         </p:nvSpPr>
@@ -21366,28 +23231,28 @@
       </p:sp>
       <p:grpSp>
         <p:nvGrpSpPr>
-          <p:cNvPr id="246" name="Rounded Rectangle 39"/>
+          <p:cNvPr id="289" name="Rounded Rectangle 39"/>
           <p:cNvGrpSpPr/>
           <p:nvPr/>
         </p:nvGrpSpPr>
         <p:grpSpPr>
           <a:xfrm>
-            <a:off x="9047572" y="5705851"/>
-            <a:ext cx="1517916" cy="310907"/>
+            <a:off x="9047570" y="5705849"/>
+            <a:ext cx="1517918" cy="310910"/>
             <a:chOff x="-1" y="0"/>
-            <a:chExt cx="1517915" cy="310905"/>
+            <a:chExt cx="1517917" cy="310908"/>
           </a:xfrm>
         </p:grpSpPr>
         <p:sp>
           <p:nvSpPr>
-            <p:cNvPr id="244" name="圓角矩形"/>
+            <p:cNvPr id="287" name="圓角矩形"/>
             <p:cNvSpPr/>
             <p:nvPr/>
           </p:nvSpPr>
           <p:spPr>
             <a:xfrm>
               <a:off x="-2" y="-1"/>
-              <a:ext cx="1517916" cy="310907"/>
+              <a:ext cx="1517919" cy="310909"/>
             </a:xfrm>
             <a:prstGeom prst="roundRect">
               <a:avLst>
@@ -21421,13 +23286,13 @@
         </p:sp>
         <p:sp>
           <p:nvSpPr>
-            <p:cNvPr id="245" name="耗時 24 天"/>
+            <p:cNvPr id="288" name="耗時 24 天"/>
             <p:cNvSpPr txBox="1"/>
             <p:nvPr/>
           </p:nvSpPr>
           <p:spPr>
             <a:xfrm>
-              <a:off x="409182" y="66549"/>
+              <a:off x="409183" y="66549"/>
               <a:ext cx="699543" cy="177801"/>
             </a:xfrm>
             <a:prstGeom prst="rect">
@@ -21506,7 +23371,7 @@
       </p:grpSpPr>
       <p:sp>
         <p:nvSpPr>
-          <p:cNvPr id="248" name="TextBox 1"/>
+          <p:cNvPr id="291" name="TextBox 1"/>
           <p:cNvSpPr txBox="1"/>
           <p:nvPr/>
         </p:nvSpPr>
@@ -21554,7 +23419,7 @@
       </p:sp>
       <p:sp>
         <p:nvSpPr>
-          <p:cNvPr id="249" name="TextBox 2"/>
+          <p:cNvPr id="292" name="TextBox 2"/>
           <p:cNvSpPr txBox="1"/>
           <p:nvPr/>
         </p:nvSpPr>
@@ -21602,14 +23467,14 @@
       </p:sp>
       <p:sp>
         <p:nvSpPr>
-          <p:cNvPr id="250" name="Connector 3"/>
-          <p:cNvSpPr/>
-          <p:nvPr/>
-        </p:nvSpPr>
-        <p:spPr>
-          <a:xfrm>
-            <a:off x="685797" y="1664205"/>
-            <a:ext cx="822966" cy="5"/>
+          <p:cNvPr id="293" name="Connector 3"/>
+          <p:cNvSpPr/>
+          <p:nvPr/>
+        </p:nvSpPr>
+        <p:spPr>
+          <a:xfrm>
+            <a:off x="685796" y="1664205"/>
+            <a:ext cx="822967" cy="6"/>
           </a:xfrm>
           <a:prstGeom prst="line">
             <a:avLst/>
@@ -21630,14 +23495,14 @@
       </p:sp>
       <p:sp>
         <p:nvSpPr>
-          <p:cNvPr id="251" name="Oval 4"/>
+          <p:cNvPr id="294" name="Oval 4"/>
           <p:cNvSpPr/>
           <p:nvPr/>
         </p:nvSpPr>
         <p:spPr>
           <a:xfrm>
             <a:off x="658368" y="1636776"/>
-            <a:ext cx="54864" cy="54873"/>
+            <a:ext cx="54864" cy="54875"/>
           </a:xfrm>
           <a:prstGeom prst="ellipse">
             <a:avLst/>
@@ -21665,14 +23530,14 @@
       </p:sp>
       <p:sp>
         <p:nvSpPr>
-          <p:cNvPr id="252" name="Oval 5"/>
+          <p:cNvPr id="295" name="Oval 5"/>
           <p:cNvSpPr/>
           <p:nvPr/>
         </p:nvSpPr>
         <p:spPr>
           <a:xfrm>
             <a:off x="1069847" y="1636776"/>
-            <a:ext cx="54873" cy="54873"/>
+            <a:ext cx="54875" cy="54875"/>
           </a:xfrm>
           <a:prstGeom prst="ellipse">
             <a:avLst/>
@@ -21700,14 +23565,14 @@
       </p:sp>
       <p:sp>
         <p:nvSpPr>
-          <p:cNvPr id="253" name="Oval 6"/>
+          <p:cNvPr id="296" name="Oval 6"/>
           <p:cNvSpPr/>
           <p:nvPr/>
         </p:nvSpPr>
         <p:spPr>
           <a:xfrm>
             <a:off x="1481327" y="1636776"/>
-            <a:ext cx="54873" cy="54873"/>
+            <a:ext cx="54875" cy="54875"/>
           </a:xfrm>
           <a:prstGeom prst="ellipse">
             <a:avLst/>
@@ -21735,14 +23600,14 @@
       </p:sp>
       <p:sp>
         <p:nvSpPr>
-          <p:cNvPr id="254" name="Rectangle 7"/>
+          <p:cNvPr id="297" name="Rectangle 7"/>
           <p:cNvSpPr/>
           <p:nvPr/>
         </p:nvSpPr>
         <p:spPr>
           <a:xfrm>
             <a:off x="685798" y="2212848"/>
-            <a:ext cx="100590" cy="100589"/>
+            <a:ext cx="100591" cy="100590"/>
           </a:xfrm>
           <a:prstGeom prst="rect">
             <a:avLst/>
@@ -21770,7 +23635,7 @@
       </p:sp>
       <p:sp>
         <p:nvSpPr>
-          <p:cNvPr id="255" name="TextBox 8"/>
+          <p:cNvPr id="298" name="TextBox 8"/>
           <p:cNvSpPr txBox="1"/>
           <p:nvPr/>
         </p:nvSpPr>
@@ -21821,14 +23686,14 @@
       </p:sp>
       <p:sp>
         <p:nvSpPr>
-          <p:cNvPr id="256" name="Rectangle 9"/>
+          <p:cNvPr id="299" name="Rectangle 9"/>
           <p:cNvSpPr/>
           <p:nvPr/>
         </p:nvSpPr>
         <p:spPr>
           <a:xfrm>
             <a:off x="685798" y="2972305"/>
-            <a:ext cx="100590" cy="100589"/>
+            <a:ext cx="100591" cy="100590"/>
           </a:xfrm>
           <a:prstGeom prst="rect">
             <a:avLst/>
@@ -21856,7 +23721,7 @@
       </p:sp>
       <p:sp>
         <p:nvSpPr>
-          <p:cNvPr id="257" name="TextBox 10"/>
+          <p:cNvPr id="300" name="TextBox 10"/>
           <p:cNvSpPr txBox="1"/>
           <p:nvPr/>
         </p:nvSpPr>
@@ -21907,14 +23772,14 @@
       </p:sp>
       <p:sp>
         <p:nvSpPr>
-          <p:cNvPr id="258" name="Rectangle 11"/>
+          <p:cNvPr id="301" name="Rectangle 11"/>
           <p:cNvSpPr/>
           <p:nvPr/>
         </p:nvSpPr>
         <p:spPr>
           <a:xfrm>
             <a:off x="685798" y="3425190"/>
-            <a:ext cx="100590" cy="100589"/>
+            <a:ext cx="100591" cy="100590"/>
           </a:xfrm>
           <a:prstGeom prst="rect">
             <a:avLst/>
@@ -21942,7 +23807,7 @@
       </p:sp>
       <p:sp>
         <p:nvSpPr>
-          <p:cNvPr id="259" name="TextBox 12"/>
+          <p:cNvPr id="302" name="TextBox 12"/>
           <p:cNvSpPr txBox="1"/>
           <p:nvPr/>
         </p:nvSpPr>
@@ -22026,7 +23891,7 @@
       </p:grpSpPr>
       <p:sp>
         <p:nvSpPr>
-          <p:cNvPr id="261" name="TextBox 1"/>
+          <p:cNvPr id="304" name="TextBox 1"/>
           <p:cNvSpPr txBox="1"/>
           <p:nvPr/>
         </p:nvSpPr>
@@ -22074,7 +23939,7 @@
       </p:sp>
       <p:sp>
         <p:nvSpPr>
-          <p:cNvPr id="262" name="TextBox 2"/>
+          <p:cNvPr id="305" name="TextBox 2"/>
           <p:cNvSpPr txBox="1"/>
           <p:nvPr/>
         </p:nvSpPr>
@@ -22122,7 +23987,7 @@
       </p:sp>
       <p:sp>
         <p:nvSpPr>
-          <p:cNvPr id="263" name="TextBox 3"/>
+          <p:cNvPr id="306" name="TextBox 3"/>
           <p:cNvSpPr txBox="1"/>
           <p:nvPr/>
         </p:nvSpPr>
@@ -22170,14 +24035,14 @@
       </p:sp>
       <p:sp>
         <p:nvSpPr>
-          <p:cNvPr id="264" name="Connector 4"/>
-          <p:cNvSpPr/>
-          <p:nvPr/>
-        </p:nvSpPr>
-        <p:spPr>
-          <a:xfrm>
-            <a:off x="685797" y="1911094"/>
-            <a:ext cx="822966" cy="5"/>
+          <p:cNvPr id="307" name="Connector 4"/>
+          <p:cNvSpPr/>
+          <p:nvPr/>
+        </p:nvSpPr>
+        <p:spPr>
+          <a:xfrm>
+            <a:off x="685796" y="1911094"/>
+            <a:ext cx="822967" cy="6"/>
           </a:xfrm>
           <a:prstGeom prst="line">
             <a:avLst/>
@@ -22198,14 +24063,14 @@
       </p:sp>
       <p:sp>
         <p:nvSpPr>
-          <p:cNvPr id="265" name="Oval 5"/>
+          <p:cNvPr id="308" name="Oval 5"/>
           <p:cNvSpPr/>
           <p:nvPr/>
         </p:nvSpPr>
         <p:spPr>
           <a:xfrm>
             <a:off x="658368" y="1883664"/>
-            <a:ext cx="54864" cy="54873"/>
+            <a:ext cx="54864" cy="54875"/>
           </a:xfrm>
           <a:prstGeom prst="ellipse">
             <a:avLst/>
@@ -22233,14 +24098,14 @@
       </p:sp>
       <p:sp>
         <p:nvSpPr>
-          <p:cNvPr id="266" name="Oval 6"/>
+          <p:cNvPr id="309" name="Oval 6"/>
           <p:cNvSpPr/>
           <p:nvPr/>
         </p:nvSpPr>
         <p:spPr>
           <a:xfrm>
             <a:off x="1069847" y="1883664"/>
-            <a:ext cx="54873" cy="54873"/>
+            <a:ext cx="54875" cy="54875"/>
           </a:xfrm>
           <a:prstGeom prst="ellipse">
             <a:avLst/>
@@ -22268,14 +24133,14 @@
       </p:sp>
       <p:sp>
         <p:nvSpPr>
-          <p:cNvPr id="267" name="Oval 7"/>
+          <p:cNvPr id="310" name="Oval 7"/>
           <p:cNvSpPr/>
           <p:nvPr/>
         </p:nvSpPr>
         <p:spPr>
           <a:xfrm>
             <a:off x="1481327" y="1883664"/>
-            <a:ext cx="54873" cy="54873"/>
+            <a:ext cx="54875" cy="54875"/>
           </a:xfrm>
           <a:prstGeom prst="ellipse">
             <a:avLst/>
@@ -22303,14 +24168,14 @@
       </p:sp>
       <p:sp>
         <p:nvSpPr>
-          <p:cNvPr id="268" name="Rectangle 8"/>
+          <p:cNvPr id="311" name="Rectangle 8"/>
           <p:cNvSpPr/>
           <p:nvPr/>
         </p:nvSpPr>
         <p:spPr>
           <a:xfrm>
             <a:off x="685798" y="2414016"/>
-            <a:ext cx="100590" cy="100589"/>
+            <a:ext cx="100591" cy="100590"/>
           </a:xfrm>
           <a:prstGeom prst="rect">
             <a:avLst/>
@@ -22338,7 +24203,7 @@
       </p:sp>
       <p:sp>
         <p:nvSpPr>
-          <p:cNvPr id="269" name="TextBox 9"/>
+          <p:cNvPr id="312" name="TextBox 9"/>
           <p:cNvSpPr txBox="1"/>
           <p:nvPr/>
         </p:nvSpPr>
@@ -22389,14 +24254,14 @@
       </p:sp>
       <p:sp>
         <p:nvSpPr>
-          <p:cNvPr id="270" name="Rectangle 10"/>
+          <p:cNvPr id="313" name="Rectangle 10"/>
           <p:cNvSpPr/>
           <p:nvPr/>
         </p:nvSpPr>
         <p:spPr>
           <a:xfrm>
             <a:off x="685798" y="2848864"/>
-            <a:ext cx="100590" cy="100589"/>
+            <a:ext cx="100591" cy="100590"/>
           </a:xfrm>
           <a:prstGeom prst="rect">
             <a:avLst/>
@@ -22424,7 +24289,7 @@
       </p:sp>
       <p:sp>
         <p:nvSpPr>
-          <p:cNvPr id="271" name="TextBox 11"/>
+          <p:cNvPr id="314" name="TextBox 11"/>
           <p:cNvSpPr txBox="1"/>
           <p:nvPr/>
         </p:nvSpPr>
@@ -22475,14 +24340,14 @@
       </p:sp>
       <p:sp>
         <p:nvSpPr>
-          <p:cNvPr id="272" name="Rectangle 12"/>
+          <p:cNvPr id="315" name="Rectangle 12"/>
           <p:cNvSpPr/>
           <p:nvPr/>
         </p:nvSpPr>
         <p:spPr>
           <a:xfrm>
             <a:off x="685798" y="3283710"/>
-            <a:ext cx="100590" cy="100589"/>
+            <a:ext cx="100591" cy="100590"/>
           </a:xfrm>
           <a:prstGeom prst="rect">
             <a:avLst/>
@@ -22510,7 +24375,7 @@
       </p:sp>
       <p:sp>
         <p:nvSpPr>
-          <p:cNvPr id="273" name="TextBox 13"/>
+          <p:cNvPr id="316" name="TextBox 13"/>
           <p:cNvSpPr txBox="1"/>
           <p:nvPr/>
         </p:nvSpPr>
@@ -22561,14 +24426,14 @@
       </p:sp>
       <p:sp>
         <p:nvSpPr>
-          <p:cNvPr id="274" name="Rectangle 14"/>
+          <p:cNvPr id="317" name="Rectangle 14"/>
           <p:cNvSpPr/>
           <p:nvPr/>
         </p:nvSpPr>
         <p:spPr>
           <a:xfrm>
             <a:off x="685798" y="3718559"/>
-            <a:ext cx="100590" cy="100589"/>
+            <a:ext cx="100591" cy="100590"/>
           </a:xfrm>
           <a:prstGeom prst="rect">
             <a:avLst/>
@@ -22596,7 +24461,7 @@
       </p:sp>
       <p:sp>
         <p:nvSpPr>
-          <p:cNvPr id="275" name="TextBox 15"/>
+          <p:cNvPr id="318" name="TextBox 15"/>
           <p:cNvSpPr txBox="1"/>
           <p:nvPr/>
         </p:nvSpPr>
@@ -22647,14 +24512,14 @@
       </p:sp>
       <p:sp>
         <p:nvSpPr>
-          <p:cNvPr id="276" name="Rectangle 16"/>
+          <p:cNvPr id="319" name="Rectangle 16"/>
           <p:cNvSpPr/>
           <p:nvPr/>
         </p:nvSpPr>
         <p:spPr>
           <a:xfrm>
             <a:off x="685800" y="4153406"/>
-            <a:ext cx="10807659" cy="640085"/>
+            <a:ext cx="10807659" cy="640086"/>
           </a:xfrm>
           <a:prstGeom prst="rect">
             <a:avLst/>
@@ -22682,14 +24547,14 @@
       </p:sp>
       <p:sp>
         <p:nvSpPr>
-          <p:cNvPr id="277" name="TextBox 17"/>
+          <p:cNvPr id="320" name="TextBox 17"/>
           <p:cNvSpPr txBox="1"/>
           <p:nvPr/>
         </p:nvSpPr>
         <p:spPr>
           <a:xfrm>
-            <a:off x="914399" y="4226559"/>
-            <a:ext cx="2926086" cy="215901"/>
+            <a:off x="914398" y="4226559"/>
+            <a:ext cx="2926088" cy="215901"/>
           </a:xfrm>
           <a:prstGeom prst="rect">
             <a:avLst/>
@@ -22730,7 +24595,7 @@
       </p:sp>
       <p:sp>
         <p:nvSpPr>
-          <p:cNvPr id="278" name="TextBox 18"/>
+          <p:cNvPr id="321" name="TextBox 18"/>
           <p:cNvSpPr txBox="1"/>
           <p:nvPr/>
         </p:nvSpPr>
@@ -22828,14 +24693,14 @@
     </a:clrScheme>
     <a:fontScheme name="Office Theme">
       <a:majorFont>
+        <a:latin typeface="Calibri"/>
+        <a:ea typeface="Calibri"/>
+        <a:cs typeface="Calibri"/>
+      </a:majorFont>
+      <a:minorFont>
         <a:latin typeface="Helvetica"/>
         <a:ea typeface="Helvetica"/>
         <a:cs typeface="Helvetica"/>
-      </a:majorFont>
-      <a:minorFont>
-        <a:latin typeface="Calibri"/>
-        <a:ea typeface="Calibri"/>
-        <a:cs typeface="Calibri"/>
       </a:minorFont>
     </a:fontScheme>
     <a:fmtScheme name="Office Theme">
@@ -23040,9 +24905,9 @@
             </a:solidFill>
             <a:effectLst/>
             <a:uFillTx/>
-            <a:latin typeface="+mn-lt"/>
-            <a:ea typeface="+mn-ea"/>
-            <a:cs typeface="+mn-cs"/>
+            <a:latin typeface="+mj-lt"/>
+            <a:ea typeface="+mj-ea"/>
+            <a:cs typeface="+mj-cs"/>
             <a:sym typeface="Calibri"/>
           </a:defRPr>
         </a:defPPr>
@@ -23617,9 +25482,9 @@
             </a:solidFill>
             <a:effectLst/>
             <a:uFillTx/>
-            <a:latin typeface="+mn-lt"/>
-            <a:ea typeface="+mn-ea"/>
-            <a:cs typeface="+mn-cs"/>
+            <a:latin typeface="+mj-lt"/>
+            <a:ea typeface="+mj-ea"/>
+            <a:cs typeface="+mj-cs"/>
             <a:sym typeface="Calibri"/>
           </a:defRPr>
         </a:defPPr>
@@ -23912,14 +25777,14 @@
     </a:clrScheme>
     <a:fontScheme name="Office Theme">
       <a:majorFont>
+        <a:latin typeface="Calibri"/>
+        <a:ea typeface="Calibri"/>
+        <a:cs typeface="Calibri"/>
+      </a:majorFont>
+      <a:minorFont>
         <a:latin typeface="Helvetica"/>
         <a:ea typeface="Helvetica"/>
         <a:cs typeface="Helvetica"/>
-      </a:majorFont>
-      <a:minorFont>
-        <a:latin typeface="Calibri"/>
-        <a:ea typeface="Calibri"/>
-        <a:cs typeface="Calibri"/>
       </a:minorFont>
     </a:fontScheme>
     <a:fmtScheme name="Office Theme">
@@ -24124,9 +25989,9 @@
             </a:solidFill>
             <a:effectLst/>
             <a:uFillTx/>
-            <a:latin typeface="+mn-lt"/>
-            <a:ea typeface="+mn-ea"/>
-            <a:cs typeface="+mn-cs"/>
+            <a:latin typeface="+mj-lt"/>
+            <a:ea typeface="+mj-ea"/>
+            <a:cs typeface="+mj-cs"/>
             <a:sym typeface="Calibri"/>
           </a:defRPr>
         </a:defPPr>
@@ -24701,9 +26566,9 @@
             </a:solidFill>
             <a:effectLst/>
             <a:uFillTx/>
-            <a:latin typeface="+mn-lt"/>
-            <a:ea typeface="+mn-ea"/>
-            <a:cs typeface="+mn-cs"/>
+            <a:latin typeface="+mj-lt"/>
+            <a:ea typeface="+mj-ea"/>
+            <a:cs typeface="+mj-cs"/>
             <a:sym typeface="Calibri"/>
           </a:defRPr>
         </a:defPPr>

--- a/docs/專案介紹.pptx
+++ b/docs/專案介紹.pptx
@@ -86,10 +86,10 @@
         </a:solidFill>
         <a:effectLst/>
         <a:uFillTx/>
-        <a:latin typeface="+mj-lt"/>
-        <a:ea typeface="+mj-ea"/>
-        <a:cs typeface="+mj-cs"/>
-        <a:sym typeface="Calibri"/>
+        <a:latin typeface="+mn-lt"/>
+        <a:ea typeface="+mn-ea"/>
+        <a:cs typeface="+mn-cs"/>
+        <a:sym typeface="Helvetica"/>
       </a:defRPr>
     </a:lvl1pPr>
     <a:lvl2pPr marL="0" marR="0" indent="0" algn="l" defTabSz="457200" rtl="0" fontAlgn="auto" latinLnBrk="0" hangingPunct="0">
@@ -116,10 +116,10 @@
         </a:solidFill>
         <a:effectLst/>
         <a:uFillTx/>
-        <a:latin typeface="+mj-lt"/>
-        <a:ea typeface="+mj-ea"/>
-        <a:cs typeface="+mj-cs"/>
-        <a:sym typeface="Calibri"/>
+        <a:latin typeface="+mn-lt"/>
+        <a:ea typeface="+mn-ea"/>
+        <a:cs typeface="+mn-cs"/>
+        <a:sym typeface="Helvetica"/>
       </a:defRPr>
     </a:lvl2pPr>
     <a:lvl3pPr marL="0" marR="0" indent="0" algn="l" defTabSz="457200" rtl="0" fontAlgn="auto" latinLnBrk="0" hangingPunct="0">
@@ -146,10 +146,10 @@
         </a:solidFill>
         <a:effectLst/>
         <a:uFillTx/>
-        <a:latin typeface="+mj-lt"/>
-        <a:ea typeface="+mj-ea"/>
-        <a:cs typeface="+mj-cs"/>
-        <a:sym typeface="Calibri"/>
+        <a:latin typeface="+mn-lt"/>
+        <a:ea typeface="+mn-ea"/>
+        <a:cs typeface="+mn-cs"/>
+        <a:sym typeface="Helvetica"/>
       </a:defRPr>
     </a:lvl3pPr>
     <a:lvl4pPr marL="0" marR="0" indent="0" algn="l" defTabSz="457200" rtl="0" fontAlgn="auto" latinLnBrk="0" hangingPunct="0">
@@ -176,10 +176,10 @@
         </a:solidFill>
         <a:effectLst/>
         <a:uFillTx/>
-        <a:latin typeface="+mj-lt"/>
-        <a:ea typeface="+mj-ea"/>
-        <a:cs typeface="+mj-cs"/>
-        <a:sym typeface="Calibri"/>
+        <a:latin typeface="+mn-lt"/>
+        <a:ea typeface="+mn-ea"/>
+        <a:cs typeface="+mn-cs"/>
+        <a:sym typeface="Helvetica"/>
       </a:defRPr>
     </a:lvl4pPr>
     <a:lvl5pPr marL="0" marR="0" indent="0" algn="l" defTabSz="457200" rtl="0" fontAlgn="auto" latinLnBrk="0" hangingPunct="0">
@@ -206,10 +206,10 @@
         </a:solidFill>
         <a:effectLst/>
         <a:uFillTx/>
-        <a:latin typeface="+mj-lt"/>
-        <a:ea typeface="+mj-ea"/>
-        <a:cs typeface="+mj-cs"/>
-        <a:sym typeface="Calibri"/>
+        <a:latin typeface="+mn-lt"/>
+        <a:ea typeface="+mn-ea"/>
+        <a:cs typeface="+mn-cs"/>
+        <a:sym typeface="Helvetica"/>
       </a:defRPr>
     </a:lvl5pPr>
     <a:lvl6pPr marL="0" marR="0" indent="0" algn="l" defTabSz="457200" rtl="0" fontAlgn="auto" latinLnBrk="0" hangingPunct="0">
@@ -236,10 +236,10 @@
         </a:solidFill>
         <a:effectLst/>
         <a:uFillTx/>
-        <a:latin typeface="+mj-lt"/>
-        <a:ea typeface="+mj-ea"/>
-        <a:cs typeface="+mj-cs"/>
-        <a:sym typeface="Calibri"/>
+        <a:latin typeface="+mn-lt"/>
+        <a:ea typeface="+mn-ea"/>
+        <a:cs typeface="+mn-cs"/>
+        <a:sym typeface="Helvetica"/>
       </a:defRPr>
     </a:lvl6pPr>
     <a:lvl7pPr marL="0" marR="0" indent="0" algn="l" defTabSz="457200" rtl="0" fontAlgn="auto" latinLnBrk="0" hangingPunct="0">
@@ -266,10 +266,10 @@
         </a:solidFill>
         <a:effectLst/>
         <a:uFillTx/>
-        <a:latin typeface="+mj-lt"/>
-        <a:ea typeface="+mj-ea"/>
-        <a:cs typeface="+mj-cs"/>
-        <a:sym typeface="Calibri"/>
+        <a:latin typeface="+mn-lt"/>
+        <a:ea typeface="+mn-ea"/>
+        <a:cs typeface="+mn-cs"/>
+        <a:sym typeface="Helvetica"/>
       </a:defRPr>
     </a:lvl7pPr>
     <a:lvl8pPr marL="0" marR="0" indent="0" algn="l" defTabSz="457200" rtl="0" fontAlgn="auto" latinLnBrk="0" hangingPunct="0">
@@ -296,10 +296,10 @@
         </a:solidFill>
         <a:effectLst/>
         <a:uFillTx/>
-        <a:latin typeface="+mj-lt"/>
-        <a:ea typeface="+mj-ea"/>
-        <a:cs typeface="+mj-cs"/>
-        <a:sym typeface="Calibri"/>
+        <a:latin typeface="+mn-lt"/>
+        <a:ea typeface="+mn-ea"/>
+        <a:cs typeface="+mn-cs"/>
+        <a:sym typeface="Helvetica"/>
       </a:defRPr>
     </a:lvl8pPr>
     <a:lvl9pPr marL="0" marR="0" indent="0" algn="l" defTabSz="457200" rtl="0" fontAlgn="auto" latinLnBrk="0" hangingPunct="0">
@@ -326,10 +326,10 @@
         </a:solidFill>
         <a:effectLst/>
         <a:uFillTx/>
-        <a:latin typeface="+mj-lt"/>
-        <a:ea typeface="+mj-ea"/>
-        <a:cs typeface="+mj-cs"/>
-        <a:sym typeface="Calibri"/>
+        <a:latin typeface="+mn-lt"/>
+        <a:ea typeface="+mn-ea"/>
+        <a:cs typeface="+mn-cs"/>
+        <a:sym typeface="Helvetica"/>
       </a:defRPr>
     </a:lvl9pPr>
   </p:defaultTextStyle>
@@ -846,7 +846,7 @@
         <p:spPr>
           <a:xfrm>
             <a:off x="722312" y="2906713"/>
-            <a:ext cx="7772401" cy="1500209"/>
+            <a:ext cx="7772401" cy="1500210"/>
           </a:xfrm>
           <a:prstGeom prst="rect">
             <a:avLst/>
@@ -1289,7 +1289,7 @@
         <p:spPr>
           <a:xfrm>
             <a:off x="4645025" y="1535111"/>
-            <a:ext cx="4041775" cy="639785"/>
+            <a:ext cx="4041775" cy="639786"/>
           </a:xfrm>
           <a:prstGeom prst="rect">
             <a:avLst/>
@@ -1698,7 +1698,7 @@
         <p:spPr>
           <a:xfrm>
             <a:off x="1792288" y="5367337"/>
-            <a:ext cx="5486404" cy="804884"/>
+            <a:ext cx="5486404" cy="804885"/>
           </a:xfrm>
           <a:prstGeom prst="rect">
             <a:avLst/>
@@ -1970,6 +1970,10 @@
                 <a:solidFill>
                   <a:srgbClr val="888888"/>
                 </a:solidFill>
+                <a:latin typeface="+mj-lt"/>
+                <a:ea typeface="+mj-ea"/>
+                <a:cs typeface="+mj-cs"/>
+                <a:sym typeface="Calibri"/>
               </a:defRPr>
             </a:lvl1pPr>
           </a:lstStyle>
@@ -2761,6 +2765,10 @@
                 <a:solidFill>
                   <a:srgbClr val="FFFFFF"/>
                 </a:solidFill>
+                <a:latin typeface="+mj-lt"/>
+                <a:ea typeface="+mj-ea"/>
+                <a:cs typeface="+mj-cs"/>
+                <a:sym typeface="Calibri"/>
               </a:defRPr>
             </a:pPr>
           </a:p>
@@ -2824,6 +2832,10 @@
                 <a:solidFill>
                   <a:srgbClr val="FFFFFF"/>
                 </a:solidFill>
+                <a:latin typeface="+mj-lt"/>
+                <a:ea typeface="+mj-ea"/>
+                <a:cs typeface="+mj-cs"/>
+                <a:sym typeface="Calibri"/>
               </a:defRPr>
             </a:pPr>
           </a:p>
@@ -2859,6 +2871,10 @@
                 <a:solidFill>
                   <a:srgbClr val="FFFFFF"/>
                 </a:solidFill>
+                <a:latin typeface="+mj-lt"/>
+                <a:ea typeface="+mj-ea"/>
+                <a:cs typeface="+mj-cs"/>
+                <a:sym typeface="Calibri"/>
               </a:defRPr>
             </a:pPr>
           </a:p>
@@ -2894,6 +2910,10 @@
                 <a:solidFill>
                   <a:srgbClr val="FFFFFF"/>
                 </a:solidFill>
+                <a:latin typeface="+mj-lt"/>
+                <a:ea typeface="+mj-ea"/>
+                <a:cs typeface="+mj-cs"/>
+                <a:sym typeface="Calibri"/>
               </a:defRPr>
             </a:pPr>
           </a:p>
@@ -2929,6 +2949,10 @@
                 <a:solidFill>
                   <a:srgbClr val="FFFFFF"/>
                 </a:solidFill>
+                <a:latin typeface="+mj-lt"/>
+                <a:ea typeface="+mj-ea"/>
+                <a:cs typeface="+mj-cs"/>
+                <a:sym typeface="Calibri"/>
               </a:defRPr>
             </a:pPr>
           </a:p>
@@ -3089,8 +3113,8 @@
         </p:nvSpPr>
         <p:spPr>
           <a:xfrm>
-            <a:off x="685794" y="4663440"/>
-            <a:ext cx="4983495" cy="9"/>
+            <a:off x="685793" y="4663440"/>
+            <a:ext cx="4983497" cy="10"/>
           </a:xfrm>
           <a:prstGeom prst="line">
             <a:avLst/>
@@ -3165,10 +3189,10 @@
         </p:nvGrpSpPr>
         <p:grpSpPr>
           <a:xfrm>
-            <a:off x="685788" y="6126470"/>
-            <a:ext cx="2999253" cy="310916"/>
-            <a:chOff x="-1" y="0"/>
-            <a:chExt cx="2999251" cy="310915"/>
+            <a:off x="685787" y="6126468"/>
+            <a:ext cx="2999255" cy="310918"/>
+            <a:chOff x="0" y="-1"/>
+            <a:chExt cx="2999254" cy="310917"/>
           </a:xfrm>
         </p:grpSpPr>
         <p:sp>
@@ -3179,8 +3203,8 @@
           </p:nvSpPr>
           <p:spPr>
             <a:xfrm>
-              <a:off x="-2" y="-1"/>
-              <a:ext cx="2999253" cy="310916"/>
+              <a:off x="-1" y="-2"/>
+              <a:ext cx="2999255" cy="310919"/>
             </a:xfrm>
             <a:prstGeom prst="roundRect">
               <a:avLst>
@@ -3207,6 +3231,10 @@
                   <a:solidFill>
                     <a:srgbClr val="FFFFFF"/>
                   </a:solidFill>
+                  <a:latin typeface="+mj-lt"/>
+                  <a:ea typeface="+mj-ea"/>
+                  <a:cs typeface="+mj-cs"/>
+                  <a:sym typeface="Calibri"/>
                 </a:defRPr>
               </a:pPr>
             </a:p>
@@ -3220,7 +3248,7 @@
           </p:nvSpPr>
           <p:spPr>
             <a:xfrm>
-              <a:off x="820417" y="72900"/>
+              <a:off x="820418" y="72900"/>
               <a:ext cx="1358405" cy="165101"/>
             </a:xfrm>
             <a:prstGeom prst="rect">
@@ -3273,7 +3301,7 @@
         <p:spPr>
           <a:xfrm>
             <a:off x="8778240" y="1371599"/>
-            <a:ext cx="2194568" cy="91449"/>
+            <a:ext cx="2194569" cy="91450"/>
           </a:xfrm>
           <a:prstGeom prst="rect">
             <a:avLst/>
@@ -3294,6 +3322,10 @@
                 <a:solidFill>
                   <a:srgbClr val="FFFFFF"/>
                 </a:solidFill>
+                <a:latin typeface="+mj-lt"/>
+                <a:ea typeface="+mj-ea"/>
+                <a:cs typeface="+mj-cs"/>
+                <a:sym typeface="Calibri"/>
               </a:defRPr>
             </a:pPr>
           </a:p>
@@ -3308,7 +3340,7 @@
         <p:spPr>
           <a:xfrm>
             <a:off x="8778240" y="4846320"/>
-            <a:ext cx="2194568" cy="91448"/>
+            <a:ext cx="2194569" cy="91449"/>
           </a:xfrm>
           <a:prstGeom prst="rect">
             <a:avLst/>
@@ -3329,6 +3361,10 @@
                 <a:solidFill>
                   <a:srgbClr val="FFFFFF"/>
                 </a:solidFill>
+                <a:latin typeface="+mj-lt"/>
+                <a:ea typeface="+mj-ea"/>
+                <a:cs typeface="+mj-cs"/>
+                <a:sym typeface="Calibri"/>
               </a:defRPr>
             </a:pPr>
           </a:p>
@@ -3363,6 +3399,10 @@
                 <a:solidFill>
                   <a:srgbClr val="FFFFFF"/>
                 </a:solidFill>
+                <a:latin typeface="+mj-lt"/>
+                <a:ea typeface="+mj-ea"/>
+                <a:cs typeface="+mj-cs"/>
+                <a:sym typeface="Calibri"/>
               </a:defRPr>
             </a:pPr>
           </a:p>
@@ -3397,6 +3437,10 @@
                 <a:solidFill>
                   <a:srgbClr val="FFFFFF"/>
                 </a:solidFill>
+                <a:latin typeface="+mj-lt"/>
+                <a:ea typeface="+mj-ea"/>
+                <a:cs typeface="+mj-cs"/>
+                <a:sym typeface="Calibri"/>
               </a:defRPr>
             </a:pPr>
           </a:p>
@@ -3411,7 +3455,7 @@
         <p:spPr>
           <a:xfrm>
             <a:off x="9464040" y="4462271"/>
-            <a:ext cx="822969" cy="384063"/>
+            <a:ext cx="822969" cy="384065"/>
           </a:xfrm>
           <a:prstGeom prst="ellipse">
             <a:avLst/>
@@ -3432,6 +3476,10 @@
                 <a:solidFill>
                   <a:srgbClr val="FFFFFF"/>
                 </a:solidFill>
+                <a:latin typeface="+mj-lt"/>
+                <a:ea typeface="+mj-ea"/>
+                <a:cs typeface="+mj-cs"/>
+                <a:sym typeface="Calibri"/>
               </a:defRPr>
             </a:pPr>
           </a:p>
@@ -3446,7 +3494,7 @@
         <p:spPr>
           <a:xfrm>
             <a:off x="9674352" y="2971799"/>
-            <a:ext cx="402351" cy="146319"/>
+            <a:ext cx="402353" cy="146321"/>
           </a:xfrm>
           <a:prstGeom prst="ellipse">
             <a:avLst/>
@@ -3467,6 +3515,10 @@
                 <a:solidFill>
                   <a:srgbClr val="FFFFFF"/>
                 </a:solidFill>
+                <a:latin typeface="+mj-lt"/>
+                <a:ea typeface="+mj-ea"/>
+                <a:cs typeface="+mj-cs"/>
+                <a:sym typeface="Calibri"/>
               </a:defRPr>
             </a:pPr>
           </a:p>
@@ -3502,6 +3554,10 @@
                 <a:solidFill>
                   <a:srgbClr val="FFFFFF"/>
                 </a:solidFill>
+                <a:latin typeface="+mj-lt"/>
+                <a:ea typeface="+mj-ea"/>
+                <a:cs typeface="+mj-cs"/>
+                <a:sym typeface="Calibri"/>
               </a:defRPr>
             </a:pPr>
           </a:p>
@@ -3516,7 +3572,7 @@
         <p:spPr>
           <a:xfrm>
             <a:off x="8503918" y="5486400"/>
-            <a:ext cx="822968" cy="0"/>
+            <a:ext cx="822969" cy="0"/>
           </a:xfrm>
           <a:prstGeom prst="line">
             <a:avLst/>
@@ -3565,6 +3621,10 @@
                 <a:solidFill>
                   <a:srgbClr val="FFFFFF"/>
                 </a:solidFill>
+                <a:latin typeface="+mj-lt"/>
+                <a:ea typeface="+mj-ea"/>
+                <a:cs typeface="+mj-cs"/>
+                <a:sym typeface="Calibri"/>
               </a:defRPr>
             </a:pPr>
           </a:p>
@@ -3600,6 +3660,10 @@
                 <a:solidFill>
                   <a:srgbClr val="FFFFFF"/>
                 </a:solidFill>
+                <a:latin typeface="+mj-lt"/>
+                <a:ea typeface="+mj-ea"/>
+                <a:cs typeface="+mj-cs"/>
+                <a:sym typeface="Calibri"/>
               </a:defRPr>
             </a:pPr>
           </a:p>
@@ -3635,6 +3699,10 @@
                 <a:solidFill>
                   <a:srgbClr val="FFFFFF"/>
                 </a:solidFill>
+                <a:latin typeface="+mj-lt"/>
+                <a:ea typeface="+mj-ea"/>
+                <a:cs typeface="+mj-cs"/>
+                <a:sym typeface="Calibri"/>
               </a:defRPr>
             </a:pPr>
           </a:p>
@@ -3649,7 +3717,7 @@
         <p:spPr>
           <a:xfrm>
             <a:off x="6675118" y="6428232"/>
-            <a:ext cx="4800607" cy="228601"/>
+            <a:ext cx="4800608" cy="228601"/>
           </a:xfrm>
           <a:prstGeom prst="rect">
             <a:avLst/>
@@ -3723,7 +3791,7 @@
       </p:grpSpPr>
       <p:sp>
         <p:nvSpPr>
-          <p:cNvPr id="347" name="TextBox 1"/>
+          <p:cNvPr id="352" name="TextBox 1"/>
           <p:cNvSpPr txBox="1"/>
           <p:nvPr/>
         </p:nvSpPr>
@@ -3771,7 +3839,7 @@
       </p:sp>
       <p:sp>
         <p:nvSpPr>
-          <p:cNvPr id="348" name="TextBox 2"/>
+          <p:cNvPr id="353" name="TextBox 2"/>
           <p:cNvSpPr txBox="1"/>
           <p:nvPr/>
         </p:nvSpPr>
@@ -3819,7 +3887,7 @@
       </p:sp>
       <p:sp>
         <p:nvSpPr>
-          <p:cNvPr id="349" name="TextBox 3"/>
+          <p:cNvPr id="354" name="TextBox 3"/>
           <p:cNvSpPr txBox="1"/>
           <p:nvPr/>
         </p:nvSpPr>
@@ -3867,7 +3935,7 @@
       </p:sp>
       <p:sp>
         <p:nvSpPr>
-          <p:cNvPr id="350" name="Connector 4"/>
+          <p:cNvPr id="355" name="Connector 4"/>
           <p:cNvSpPr/>
           <p:nvPr/>
         </p:nvSpPr>
@@ -3895,7 +3963,7 @@
       </p:sp>
       <p:sp>
         <p:nvSpPr>
-          <p:cNvPr id="351" name="Oval 5"/>
+          <p:cNvPr id="356" name="Oval 5"/>
           <p:cNvSpPr/>
           <p:nvPr/>
         </p:nvSpPr>
@@ -3923,6 +3991,10 @@
                 <a:solidFill>
                   <a:srgbClr val="FFFFFF"/>
                 </a:solidFill>
+                <a:latin typeface="+mj-lt"/>
+                <a:ea typeface="+mj-ea"/>
+                <a:cs typeface="+mj-cs"/>
+                <a:sym typeface="Calibri"/>
               </a:defRPr>
             </a:pPr>
           </a:p>
@@ -3930,7 +4002,7 @@
       </p:sp>
       <p:sp>
         <p:nvSpPr>
-          <p:cNvPr id="352" name="Oval 6"/>
+          <p:cNvPr id="357" name="Oval 6"/>
           <p:cNvSpPr/>
           <p:nvPr/>
         </p:nvSpPr>
@@ -3958,6 +4030,10 @@
                 <a:solidFill>
                   <a:srgbClr val="FFFFFF"/>
                 </a:solidFill>
+                <a:latin typeface="+mj-lt"/>
+                <a:ea typeface="+mj-ea"/>
+                <a:cs typeface="+mj-cs"/>
+                <a:sym typeface="Calibri"/>
               </a:defRPr>
             </a:pPr>
           </a:p>
@@ -3965,7 +4041,7 @@
       </p:sp>
       <p:sp>
         <p:nvSpPr>
-          <p:cNvPr id="353" name="Oval 7"/>
+          <p:cNvPr id="358" name="Oval 7"/>
           <p:cNvSpPr/>
           <p:nvPr/>
         </p:nvSpPr>
@@ -3993,6 +4069,10 @@
                 <a:solidFill>
                   <a:srgbClr val="FFFFFF"/>
                 </a:solidFill>
+                <a:latin typeface="+mj-lt"/>
+                <a:ea typeface="+mj-ea"/>
+                <a:cs typeface="+mj-cs"/>
+                <a:sym typeface="Calibri"/>
               </a:defRPr>
             </a:pPr>
           </a:p>
@@ -4000,14 +4080,14 @@
       </p:sp>
       <p:sp>
         <p:nvSpPr>
-          <p:cNvPr id="354" name="Rectangle 8"/>
+          <p:cNvPr id="359" name="Rectangle 8"/>
           <p:cNvSpPr/>
           <p:nvPr/>
         </p:nvSpPr>
         <p:spPr>
           <a:xfrm>
             <a:off x="685798" y="2596894"/>
-            <a:ext cx="100598" cy="100597"/>
+            <a:ext cx="100599" cy="100598"/>
           </a:xfrm>
           <a:prstGeom prst="rect">
             <a:avLst/>
@@ -4028,6 +4108,10 @@
                 <a:solidFill>
                   <a:srgbClr val="FFFFFF"/>
                 </a:solidFill>
+                <a:latin typeface="+mj-lt"/>
+                <a:ea typeface="+mj-ea"/>
+                <a:cs typeface="+mj-cs"/>
+                <a:sym typeface="Calibri"/>
               </a:defRPr>
             </a:pPr>
           </a:p>
@@ -4035,7 +4119,7 @@
       </p:sp>
       <p:sp>
         <p:nvSpPr>
-          <p:cNvPr id="355" name="TextBox 9"/>
+          <p:cNvPr id="360" name="TextBox 9"/>
           <p:cNvSpPr txBox="1"/>
           <p:nvPr/>
         </p:nvSpPr>
@@ -4086,14 +4170,14 @@
       </p:sp>
       <p:sp>
         <p:nvSpPr>
-          <p:cNvPr id="356" name="Rectangle 10"/>
+          <p:cNvPr id="361" name="Rectangle 10"/>
           <p:cNvSpPr/>
           <p:nvPr/>
         </p:nvSpPr>
         <p:spPr>
           <a:xfrm>
             <a:off x="685798" y="3049777"/>
-            <a:ext cx="100598" cy="100597"/>
+            <a:ext cx="100599" cy="100598"/>
           </a:xfrm>
           <a:prstGeom prst="rect">
             <a:avLst/>
@@ -4114,6 +4198,10 @@
                 <a:solidFill>
                   <a:srgbClr val="FFFFFF"/>
                 </a:solidFill>
+                <a:latin typeface="+mj-lt"/>
+                <a:ea typeface="+mj-ea"/>
+                <a:cs typeface="+mj-cs"/>
+                <a:sym typeface="Calibri"/>
               </a:defRPr>
             </a:pPr>
           </a:p>
@@ -4121,7 +4209,7 @@
       </p:sp>
       <p:sp>
         <p:nvSpPr>
-          <p:cNvPr id="357" name="TextBox 11"/>
+          <p:cNvPr id="362" name="TextBox 11"/>
           <p:cNvSpPr txBox="1"/>
           <p:nvPr/>
         </p:nvSpPr>
@@ -4172,14 +4260,14 @@
       </p:sp>
       <p:sp>
         <p:nvSpPr>
-          <p:cNvPr id="358" name="Rectangle 12"/>
+          <p:cNvPr id="363" name="Rectangle 12"/>
           <p:cNvSpPr/>
           <p:nvPr/>
         </p:nvSpPr>
         <p:spPr>
           <a:xfrm>
             <a:off x="685798" y="3502659"/>
-            <a:ext cx="100598" cy="100597"/>
+            <a:ext cx="100599" cy="100598"/>
           </a:xfrm>
           <a:prstGeom prst="rect">
             <a:avLst/>
@@ -4200,6 +4288,10 @@
                 <a:solidFill>
                   <a:srgbClr val="FFFFFF"/>
                 </a:solidFill>
+                <a:latin typeface="+mj-lt"/>
+                <a:ea typeface="+mj-ea"/>
+                <a:cs typeface="+mj-cs"/>
+                <a:sym typeface="Calibri"/>
               </a:defRPr>
             </a:pPr>
           </a:p>
@@ -4207,7 +4299,7 @@
       </p:sp>
       <p:sp>
         <p:nvSpPr>
-          <p:cNvPr id="359" name="TextBox 13"/>
+          <p:cNvPr id="364" name="TextBox 13"/>
           <p:cNvSpPr txBox="1"/>
           <p:nvPr/>
         </p:nvSpPr>
@@ -4258,14 +4350,14 @@
       </p:sp>
       <p:sp>
         <p:nvSpPr>
-          <p:cNvPr id="360" name="Rectangle 14"/>
+          <p:cNvPr id="365" name="Rectangle 14"/>
           <p:cNvSpPr/>
           <p:nvPr/>
         </p:nvSpPr>
         <p:spPr>
           <a:xfrm>
             <a:off x="685798" y="3955541"/>
-            <a:ext cx="100598" cy="100597"/>
+            <a:ext cx="100599" cy="100598"/>
           </a:xfrm>
           <a:prstGeom prst="rect">
             <a:avLst/>
@@ -4286,6 +4378,10 @@
                 <a:solidFill>
                   <a:srgbClr val="FFFFFF"/>
                 </a:solidFill>
+                <a:latin typeface="+mj-lt"/>
+                <a:ea typeface="+mj-ea"/>
+                <a:cs typeface="+mj-cs"/>
+                <a:sym typeface="Calibri"/>
               </a:defRPr>
             </a:pPr>
           </a:p>
@@ -4293,7 +4389,7 @@
       </p:sp>
       <p:sp>
         <p:nvSpPr>
-          <p:cNvPr id="361" name="TextBox 15"/>
+          <p:cNvPr id="366" name="TextBox 15"/>
           <p:cNvSpPr txBox="1"/>
           <p:nvPr/>
         </p:nvSpPr>
@@ -4344,14 +4440,14 @@
       </p:sp>
       <p:sp>
         <p:nvSpPr>
-          <p:cNvPr id="362" name="TextBox 351"/>
+          <p:cNvPr id="367" name="TextBox 351"/>
           <p:cNvSpPr txBox="1"/>
           <p:nvPr/>
         </p:nvSpPr>
         <p:spPr>
           <a:xfrm>
             <a:off x="6675118" y="6428232"/>
-            <a:ext cx="4800607" cy="228601"/>
+            <a:ext cx="4800608" cy="228601"/>
           </a:xfrm>
           <a:prstGeom prst="rect">
             <a:avLst/>
@@ -4425,7 +4521,7 @@
       </p:grpSpPr>
       <p:sp>
         <p:nvSpPr>
-          <p:cNvPr id="364" name="TextBox 1"/>
+          <p:cNvPr id="369" name="TextBox 1"/>
           <p:cNvSpPr txBox="1"/>
           <p:nvPr/>
         </p:nvSpPr>
@@ -4473,7 +4569,7 @@
       </p:sp>
       <p:sp>
         <p:nvSpPr>
-          <p:cNvPr id="365" name="TextBox 2"/>
+          <p:cNvPr id="370" name="TextBox 2"/>
           <p:cNvSpPr txBox="1"/>
           <p:nvPr/>
         </p:nvSpPr>
@@ -4521,7 +4617,7 @@
       </p:sp>
       <p:sp>
         <p:nvSpPr>
-          <p:cNvPr id="366" name="Connector 3"/>
+          <p:cNvPr id="371" name="Connector 3"/>
           <p:cNvSpPr/>
           <p:nvPr/>
         </p:nvSpPr>
@@ -4549,7 +4645,7 @@
       </p:sp>
       <p:sp>
         <p:nvSpPr>
-          <p:cNvPr id="367" name="Oval 4"/>
+          <p:cNvPr id="372" name="Oval 4"/>
           <p:cNvSpPr/>
           <p:nvPr/>
         </p:nvSpPr>
@@ -4577,6 +4673,10 @@
                 <a:solidFill>
                   <a:srgbClr val="FFFFFF"/>
                 </a:solidFill>
+                <a:latin typeface="+mj-lt"/>
+                <a:ea typeface="+mj-ea"/>
+                <a:cs typeface="+mj-cs"/>
+                <a:sym typeface="Calibri"/>
               </a:defRPr>
             </a:pPr>
           </a:p>
@@ -4584,7 +4684,7 @@
       </p:sp>
       <p:sp>
         <p:nvSpPr>
-          <p:cNvPr id="368" name="Oval 5"/>
+          <p:cNvPr id="373" name="Oval 5"/>
           <p:cNvSpPr/>
           <p:nvPr/>
         </p:nvSpPr>
@@ -4612,6 +4712,10 @@
                 <a:solidFill>
                   <a:srgbClr val="FFFFFF"/>
                 </a:solidFill>
+                <a:latin typeface="+mj-lt"/>
+                <a:ea typeface="+mj-ea"/>
+                <a:cs typeface="+mj-cs"/>
+                <a:sym typeface="Calibri"/>
               </a:defRPr>
             </a:pPr>
           </a:p>
@@ -4619,7 +4723,7 @@
       </p:sp>
       <p:sp>
         <p:nvSpPr>
-          <p:cNvPr id="369" name="Oval 6"/>
+          <p:cNvPr id="374" name="Oval 6"/>
           <p:cNvSpPr/>
           <p:nvPr/>
         </p:nvSpPr>
@@ -4647,6 +4751,10 @@
                 <a:solidFill>
                   <a:srgbClr val="FFFFFF"/>
                 </a:solidFill>
+                <a:latin typeface="+mj-lt"/>
+                <a:ea typeface="+mj-ea"/>
+                <a:cs typeface="+mj-cs"/>
+                <a:sym typeface="Calibri"/>
               </a:defRPr>
             </a:pPr>
           </a:p>
@@ -4654,14 +4762,14 @@
       </p:sp>
       <p:sp>
         <p:nvSpPr>
-          <p:cNvPr id="370" name="Rectangle 7"/>
+          <p:cNvPr id="375" name="Rectangle 7"/>
           <p:cNvSpPr/>
           <p:nvPr/>
         </p:nvSpPr>
         <p:spPr>
           <a:xfrm>
             <a:off x="4899228" y="1975103"/>
-            <a:ext cx="2380814" cy="4041650"/>
+            <a:ext cx="2380815" cy="4041650"/>
           </a:xfrm>
           <a:prstGeom prst="rect">
             <a:avLst/>
@@ -4684,6 +4792,10 @@
                 <a:solidFill>
                   <a:srgbClr val="FFFFFF"/>
                 </a:solidFill>
+                <a:latin typeface="+mj-lt"/>
+                <a:ea typeface="+mj-ea"/>
+                <a:cs typeface="+mj-cs"/>
+                <a:sym typeface="Calibri"/>
               </a:defRPr>
             </a:pPr>
           </a:p>
@@ -4691,7 +4803,7 @@
       </p:sp>
       <p:pic>
         <p:nvPicPr>
-          <p:cNvPr id="371" name="Picture 8" descr="Picture 8"/>
+          <p:cNvPr id="376" name="Picture 8" descr="Picture 8"/>
           <p:cNvPicPr>
             <a:picLocks noChangeAspect="1"/>
           </p:cNvPicPr>
@@ -4708,7 +4820,7 @@
         <p:spPr>
           <a:xfrm>
             <a:off x="4954092" y="2029966"/>
-            <a:ext cx="2271086" cy="3931924"/>
+            <a:ext cx="2271087" cy="3931924"/>
           </a:xfrm>
           <a:prstGeom prst="rect">
             <a:avLst/>
@@ -4720,14 +4832,14 @@
       </p:pic>
       <p:sp>
         <p:nvSpPr>
-          <p:cNvPr id="372" name="Rectangle 9"/>
+          <p:cNvPr id="377" name="Rectangle 9"/>
           <p:cNvSpPr/>
           <p:nvPr/>
         </p:nvSpPr>
         <p:spPr>
           <a:xfrm>
             <a:off x="4899228" y="1975103"/>
-            <a:ext cx="310909" cy="54870"/>
+            <a:ext cx="310910" cy="54870"/>
           </a:xfrm>
           <a:prstGeom prst="rect">
             <a:avLst/>
@@ -4748,6 +4860,10 @@
                 <a:solidFill>
                   <a:srgbClr val="FFFFFF"/>
                 </a:solidFill>
+                <a:latin typeface="+mj-lt"/>
+                <a:ea typeface="+mj-ea"/>
+                <a:cs typeface="+mj-cs"/>
+                <a:sym typeface="Calibri"/>
               </a:defRPr>
             </a:pPr>
           </a:p>
@@ -4755,14 +4871,14 @@
       </p:sp>
       <p:sp>
         <p:nvSpPr>
-          <p:cNvPr id="373" name="Rectangle 10"/>
+          <p:cNvPr id="378" name="Rectangle 10"/>
           <p:cNvSpPr/>
           <p:nvPr/>
         </p:nvSpPr>
         <p:spPr>
           <a:xfrm>
             <a:off x="4899228" y="1975103"/>
-            <a:ext cx="54870" cy="310909"/>
+            <a:ext cx="54870" cy="310910"/>
           </a:xfrm>
           <a:prstGeom prst="rect">
             <a:avLst/>
@@ -4783,6 +4899,10 @@
                 <a:solidFill>
                   <a:srgbClr val="FFFFFF"/>
                 </a:solidFill>
+                <a:latin typeface="+mj-lt"/>
+                <a:ea typeface="+mj-ea"/>
+                <a:cs typeface="+mj-cs"/>
+                <a:sym typeface="Calibri"/>
               </a:defRPr>
             </a:pPr>
           </a:p>
@@ -4790,28 +4910,28 @@
       </p:sp>
       <p:grpSp>
         <p:nvGrpSpPr>
-          <p:cNvPr id="376" name="Rounded Rectangle 11"/>
+          <p:cNvPr id="381" name="Rounded Rectangle 11"/>
           <p:cNvGrpSpPr/>
           <p:nvPr/>
         </p:nvGrpSpPr>
         <p:grpSpPr>
           <a:xfrm>
-            <a:off x="4954076" y="6126463"/>
-            <a:ext cx="4809774" cy="310925"/>
-            <a:chOff x="-1" y="-1"/>
-            <a:chExt cx="4809773" cy="310924"/>
+            <a:off x="4954074" y="6126461"/>
+            <a:ext cx="4809777" cy="310928"/>
+            <a:chOff x="0" y="0"/>
+            <a:chExt cx="4809775" cy="310926"/>
           </a:xfrm>
         </p:grpSpPr>
         <p:sp>
           <p:nvSpPr>
-            <p:cNvPr id="374" name="圓角矩形"/>
+            <p:cNvPr id="379" name="圓角矩形"/>
             <p:cNvSpPr/>
             <p:nvPr/>
           </p:nvSpPr>
           <p:spPr>
             <a:xfrm>
-              <a:off x="-2" y="-2"/>
-              <a:ext cx="4809775" cy="310926"/>
+              <a:off x="-1" y="-1"/>
+              <a:ext cx="4809776" cy="310927"/>
             </a:xfrm>
             <a:prstGeom prst="roundRect">
               <a:avLst>
@@ -4838,6 +4958,10 @@
                   <a:solidFill>
                     <a:srgbClr val="FFFFFF"/>
                   </a:solidFill>
+                  <a:latin typeface="+mj-lt"/>
+                  <a:ea typeface="+mj-ea"/>
+                  <a:cs typeface="+mj-cs"/>
+                  <a:sym typeface="Calibri"/>
                 </a:defRPr>
               </a:pPr>
             </a:p>
@@ -4845,13 +4969,13 @@
         </p:sp>
         <p:sp>
           <p:nvSpPr>
-            <p:cNvPr id="375" name="節點內容更貼近真實場景：主機申請、防火牆開通、資安檢核"/>
+            <p:cNvPr id="380" name="節點內容更貼近真實場景：主機申請、防火牆開通、資安檢核"/>
             <p:cNvSpPr txBox="1"/>
             <p:nvPr/>
           </p:nvSpPr>
           <p:spPr>
             <a:xfrm>
-              <a:off x="341120" y="47500"/>
+              <a:off x="341120" y="47501"/>
               <a:ext cx="4127501" cy="215901"/>
             </a:xfrm>
             <a:prstGeom prst="rect">
@@ -4897,14 +5021,14 @@
       </p:grpSp>
       <p:sp>
         <p:nvSpPr>
-          <p:cNvPr id="377" name="TextBox 365"/>
+          <p:cNvPr id="382" name="TextBox 365"/>
           <p:cNvSpPr txBox="1"/>
           <p:nvPr/>
         </p:nvSpPr>
         <p:spPr>
           <a:xfrm>
             <a:off x="6675118" y="6537959"/>
-            <a:ext cx="4800607" cy="228601"/>
+            <a:ext cx="4800608" cy="228601"/>
           </a:xfrm>
           <a:prstGeom prst="rect">
             <a:avLst/>
@@ -4978,7 +5102,7 @@
       </p:grpSpPr>
       <p:sp>
         <p:nvSpPr>
-          <p:cNvPr id="379" name="TextBox 1"/>
+          <p:cNvPr id="384" name="TextBox 1"/>
           <p:cNvSpPr txBox="1"/>
           <p:nvPr/>
         </p:nvSpPr>
@@ -5026,7 +5150,7 @@
       </p:sp>
       <p:sp>
         <p:nvSpPr>
-          <p:cNvPr id="380" name="TextBox 2"/>
+          <p:cNvPr id="385" name="TextBox 2"/>
           <p:cNvSpPr txBox="1"/>
           <p:nvPr/>
         </p:nvSpPr>
@@ -5074,7 +5198,7 @@
       </p:sp>
       <p:sp>
         <p:nvSpPr>
-          <p:cNvPr id="381" name="TextBox 3"/>
+          <p:cNvPr id="386" name="TextBox 3"/>
           <p:cNvSpPr txBox="1"/>
           <p:nvPr/>
         </p:nvSpPr>
@@ -5122,7 +5246,7 @@
       </p:sp>
       <p:sp>
         <p:nvSpPr>
-          <p:cNvPr id="382" name="Connector 4"/>
+          <p:cNvPr id="387" name="Connector 4"/>
           <p:cNvSpPr/>
           <p:nvPr/>
         </p:nvSpPr>
@@ -5150,7 +5274,7 @@
       </p:sp>
       <p:sp>
         <p:nvSpPr>
-          <p:cNvPr id="383" name="Oval 5"/>
+          <p:cNvPr id="388" name="Oval 5"/>
           <p:cNvSpPr/>
           <p:nvPr/>
         </p:nvSpPr>
@@ -5178,6 +5302,10 @@
                 <a:solidFill>
                   <a:srgbClr val="FFFFFF"/>
                 </a:solidFill>
+                <a:latin typeface="+mj-lt"/>
+                <a:ea typeface="+mj-ea"/>
+                <a:cs typeface="+mj-cs"/>
+                <a:sym typeface="Calibri"/>
               </a:defRPr>
             </a:pPr>
           </a:p>
@@ -5185,7 +5313,7 @@
       </p:sp>
       <p:sp>
         <p:nvSpPr>
-          <p:cNvPr id="384" name="Oval 6"/>
+          <p:cNvPr id="389" name="Oval 6"/>
           <p:cNvSpPr/>
           <p:nvPr/>
         </p:nvSpPr>
@@ -5213,6 +5341,10 @@
                 <a:solidFill>
                   <a:srgbClr val="FFFFFF"/>
                 </a:solidFill>
+                <a:latin typeface="+mj-lt"/>
+                <a:ea typeface="+mj-ea"/>
+                <a:cs typeface="+mj-cs"/>
+                <a:sym typeface="Calibri"/>
               </a:defRPr>
             </a:pPr>
           </a:p>
@@ -5220,7 +5352,7 @@
       </p:sp>
       <p:sp>
         <p:nvSpPr>
-          <p:cNvPr id="385" name="Oval 7"/>
+          <p:cNvPr id="390" name="Oval 7"/>
           <p:cNvSpPr/>
           <p:nvPr/>
         </p:nvSpPr>
@@ -5248,6 +5380,10 @@
                 <a:solidFill>
                   <a:srgbClr val="FFFFFF"/>
                 </a:solidFill>
+                <a:latin typeface="+mj-lt"/>
+                <a:ea typeface="+mj-ea"/>
+                <a:cs typeface="+mj-cs"/>
+                <a:sym typeface="Calibri"/>
               </a:defRPr>
             </a:pPr>
           </a:p>
@@ -5255,14 +5391,14 @@
       </p:sp>
       <p:sp>
         <p:nvSpPr>
-          <p:cNvPr id="386" name="Rectangle 8"/>
+          <p:cNvPr id="391" name="Rectangle 8"/>
           <p:cNvSpPr/>
           <p:nvPr/>
         </p:nvSpPr>
         <p:spPr>
           <a:xfrm>
             <a:off x="685798" y="2596894"/>
-            <a:ext cx="100598" cy="100597"/>
+            <a:ext cx="100599" cy="100598"/>
           </a:xfrm>
           <a:prstGeom prst="rect">
             <a:avLst/>
@@ -5283,6 +5419,10 @@
                 <a:solidFill>
                   <a:srgbClr val="FFFFFF"/>
                 </a:solidFill>
+                <a:latin typeface="+mj-lt"/>
+                <a:ea typeface="+mj-ea"/>
+                <a:cs typeface="+mj-cs"/>
+                <a:sym typeface="Calibri"/>
               </a:defRPr>
             </a:pPr>
           </a:p>
@@ -5290,7 +5430,7 @@
       </p:sp>
       <p:sp>
         <p:nvSpPr>
-          <p:cNvPr id="387" name="TextBox 9"/>
+          <p:cNvPr id="392" name="TextBox 9"/>
           <p:cNvSpPr txBox="1"/>
           <p:nvPr/>
         </p:nvSpPr>
@@ -5341,14 +5481,14 @@
       </p:sp>
       <p:sp>
         <p:nvSpPr>
-          <p:cNvPr id="388" name="Rectangle 10"/>
+          <p:cNvPr id="393" name="Rectangle 10"/>
           <p:cNvSpPr/>
           <p:nvPr/>
         </p:nvSpPr>
         <p:spPr>
           <a:xfrm>
             <a:off x="685798" y="3049777"/>
-            <a:ext cx="100598" cy="100597"/>
+            <a:ext cx="100599" cy="100598"/>
           </a:xfrm>
           <a:prstGeom prst="rect">
             <a:avLst/>
@@ -5369,6 +5509,10 @@
                 <a:solidFill>
                   <a:srgbClr val="FFFFFF"/>
                 </a:solidFill>
+                <a:latin typeface="+mj-lt"/>
+                <a:ea typeface="+mj-ea"/>
+                <a:cs typeface="+mj-cs"/>
+                <a:sym typeface="Calibri"/>
               </a:defRPr>
             </a:pPr>
           </a:p>
@@ -5376,7 +5520,7 @@
       </p:sp>
       <p:sp>
         <p:nvSpPr>
-          <p:cNvPr id="389" name="TextBox 11"/>
+          <p:cNvPr id="394" name="TextBox 11"/>
           <p:cNvSpPr txBox="1"/>
           <p:nvPr/>
         </p:nvSpPr>
@@ -5427,14 +5571,14 @@
       </p:sp>
       <p:sp>
         <p:nvSpPr>
-          <p:cNvPr id="390" name="Rectangle 12"/>
+          <p:cNvPr id="395" name="Rectangle 12"/>
           <p:cNvSpPr/>
           <p:nvPr/>
         </p:nvSpPr>
         <p:spPr>
           <a:xfrm>
             <a:off x="685798" y="3502659"/>
-            <a:ext cx="100598" cy="100597"/>
+            <a:ext cx="100599" cy="100598"/>
           </a:xfrm>
           <a:prstGeom prst="rect">
             <a:avLst/>
@@ -5455,6 +5599,10 @@
                 <a:solidFill>
                   <a:srgbClr val="FFFFFF"/>
                 </a:solidFill>
+                <a:latin typeface="+mj-lt"/>
+                <a:ea typeface="+mj-ea"/>
+                <a:cs typeface="+mj-cs"/>
+                <a:sym typeface="Calibri"/>
               </a:defRPr>
             </a:pPr>
           </a:p>
@@ -5462,7 +5610,7 @@
       </p:sp>
       <p:sp>
         <p:nvSpPr>
-          <p:cNvPr id="391" name="TextBox 13"/>
+          <p:cNvPr id="396" name="TextBox 13"/>
           <p:cNvSpPr txBox="1"/>
           <p:nvPr/>
         </p:nvSpPr>
@@ -5513,14 +5661,14 @@
       </p:sp>
       <p:sp>
         <p:nvSpPr>
-          <p:cNvPr id="392" name="Rectangle 14"/>
+          <p:cNvPr id="397" name="Rectangle 14"/>
           <p:cNvSpPr/>
           <p:nvPr/>
         </p:nvSpPr>
         <p:spPr>
           <a:xfrm>
             <a:off x="685798" y="3955541"/>
-            <a:ext cx="100598" cy="100597"/>
+            <a:ext cx="100599" cy="100598"/>
           </a:xfrm>
           <a:prstGeom prst="rect">
             <a:avLst/>
@@ -5541,6 +5689,10 @@
                 <a:solidFill>
                   <a:srgbClr val="FFFFFF"/>
                 </a:solidFill>
+                <a:latin typeface="+mj-lt"/>
+                <a:ea typeface="+mj-ea"/>
+                <a:cs typeface="+mj-cs"/>
+                <a:sym typeface="Calibri"/>
               </a:defRPr>
             </a:pPr>
           </a:p>
@@ -5548,7 +5700,7 @@
       </p:sp>
       <p:sp>
         <p:nvSpPr>
-          <p:cNvPr id="393" name="TextBox 15"/>
+          <p:cNvPr id="398" name="TextBox 15"/>
           <p:cNvSpPr txBox="1"/>
           <p:nvPr/>
         </p:nvSpPr>
@@ -5599,14 +5751,14 @@
       </p:sp>
       <p:sp>
         <p:nvSpPr>
-          <p:cNvPr id="394" name="TextBox 381"/>
+          <p:cNvPr id="399" name="TextBox 381"/>
           <p:cNvSpPr txBox="1"/>
           <p:nvPr/>
         </p:nvSpPr>
         <p:spPr>
           <a:xfrm>
             <a:off x="6675118" y="6428232"/>
-            <a:ext cx="4800607" cy="228601"/>
+            <a:ext cx="4800608" cy="228601"/>
           </a:xfrm>
           <a:prstGeom prst="rect">
             <a:avLst/>
@@ -5680,7 +5832,7 @@
       </p:grpSpPr>
       <p:sp>
         <p:nvSpPr>
-          <p:cNvPr id="396" name="TextBox 1"/>
+          <p:cNvPr id="401" name="TextBox 1"/>
           <p:cNvSpPr txBox="1"/>
           <p:nvPr/>
         </p:nvSpPr>
@@ -5728,7 +5880,7 @@
       </p:sp>
       <p:sp>
         <p:nvSpPr>
-          <p:cNvPr id="397" name="TextBox 2"/>
+          <p:cNvPr id="402" name="TextBox 2"/>
           <p:cNvSpPr txBox="1"/>
           <p:nvPr/>
         </p:nvSpPr>
@@ -5776,7 +5928,7 @@
       </p:sp>
       <p:sp>
         <p:nvSpPr>
-          <p:cNvPr id="398" name="Connector 3"/>
+          <p:cNvPr id="403" name="Connector 3"/>
           <p:cNvSpPr/>
           <p:nvPr/>
         </p:nvSpPr>
@@ -5804,7 +5956,7 @@
       </p:sp>
       <p:sp>
         <p:nvSpPr>
-          <p:cNvPr id="399" name="Oval 4"/>
+          <p:cNvPr id="404" name="Oval 4"/>
           <p:cNvSpPr/>
           <p:nvPr/>
         </p:nvSpPr>
@@ -5832,6 +5984,10 @@
                 <a:solidFill>
                   <a:srgbClr val="FFFFFF"/>
                 </a:solidFill>
+                <a:latin typeface="+mj-lt"/>
+                <a:ea typeface="+mj-ea"/>
+                <a:cs typeface="+mj-cs"/>
+                <a:sym typeface="Calibri"/>
               </a:defRPr>
             </a:pPr>
           </a:p>
@@ -5839,7 +5995,7 @@
       </p:sp>
       <p:sp>
         <p:nvSpPr>
-          <p:cNvPr id="400" name="Oval 5"/>
+          <p:cNvPr id="405" name="Oval 5"/>
           <p:cNvSpPr/>
           <p:nvPr/>
         </p:nvSpPr>
@@ -5867,6 +6023,10 @@
                 <a:solidFill>
                   <a:srgbClr val="FFFFFF"/>
                 </a:solidFill>
+                <a:latin typeface="+mj-lt"/>
+                <a:ea typeface="+mj-ea"/>
+                <a:cs typeface="+mj-cs"/>
+                <a:sym typeface="Calibri"/>
               </a:defRPr>
             </a:pPr>
           </a:p>
@@ -5874,7 +6034,7 @@
       </p:sp>
       <p:sp>
         <p:nvSpPr>
-          <p:cNvPr id="401" name="Oval 6"/>
+          <p:cNvPr id="406" name="Oval 6"/>
           <p:cNvSpPr/>
           <p:nvPr/>
         </p:nvSpPr>
@@ -5902,6 +6062,10 @@
                 <a:solidFill>
                   <a:srgbClr val="FFFFFF"/>
                 </a:solidFill>
+                <a:latin typeface="+mj-lt"/>
+                <a:ea typeface="+mj-ea"/>
+                <a:cs typeface="+mj-cs"/>
+                <a:sym typeface="Calibri"/>
               </a:defRPr>
             </a:pPr>
           </a:p>
@@ -5909,7 +6073,7 @@
       </p:sp>
       <p:sp>
         <p:nvSpPr>
-          <p:cNvPr id="402" name="Rectangle 7"/>
+          <p:cNvPr id="407" name="Rectangle 7"/>
           <p:cNvSpPr/>
           <p:nvPr/>
         </p:nvSpPr>
@@ -5939,6 +6103,10 @@
                 <a:solidFill>
                   <a:srgbClr val="FFFFFF"/>
                 </a:solidFill>
+                <a:latin typeface="+mj-lt"/>
+                <a:ea typeface="+mj-ea"/>
+                <a:cs typeface="+mj-cs"/>
+                <a:sym typeface="Calibri"/>
               </a:defRPr>
             </a:pPr>
           </a:p>
@@ -5946,7 +6114,7 @@
       </p:sp>
       <p:pic>
         <p:nvPicPr>
-          <p:cNvPr id="403" name="Picture 8" descr="Picture 8"/>
+          <p:cNvPr id="408" name="Picture 8" descr="Picture 8"/>
           <p:cNvPicPr>
             <a:picLocks noChangeAspect="1"/>
           </p:cNvPicPr>
@@ -5975,14 +6143,14 @@
       </p:pic>
       <p:sp>
         <p:nvSpPr>
-          <p:cNvPr id="404" name="Rectangle 9"/>
+          <p:cNvPr id="409" name="Rectangle 9"/>
           <p:cNvSpPr/>
           <p:nvPr/>
         </p:nvSpPr>
         <p:spPr>
           <a:xfrm>
             <a:off x="3176540" y="1975103"/>
-            <a:ext cx="310909" cy="54870"/>
+            <a:ext cx="310910" cy="54870"/>
           </a:xfrm>
           <a:prstGeom prst="rect">
             <a:avLst/>
@@ -6003,6 +6171,10 @@
                 <a:solidFill>
                   <a:srgbClr val="FFFFFF"/>
                 </a:solidFill>
+                <a:latin typeface="+mj-lt"/>
+                <a:ea typeface="+mj-ea"/>
+                <a:cs typeface="+mj-cs"/>
+                <a:sym typeface="Calibri"/>
               </a:defRPr>
             </a:pPr>
           </a:p>
@@ -6010,14 +6182,14 @@
       </p:sp>
       <p:sp>
         <p:nvSpPr>
-          <p:cNvPr id="405" name="Rectangle 10"/>
+          <p:cNvPr id="410" name="Rectangle 10"/>
           <p:cNvSpPr/>
           <p:nvPr/>
         </p:nvSpPr>
         <p:spPr>
           <a:xfrm>
             <a:off x="3176540" y="1975103"/>
-            <a:ext cx="54870" cy="310909"/>
+            <a:ext cx="54870" cy="310910"/>
           </a:xfrm>
           <a:prstGeom prst="rect">
             <a:avLst/>
@@ -6038,6 +6210,10 @@
                 <a:solidFill>
                   <a:srgbClr val="FFFFFF"/>
                 </a:solidFill>
+                <a:latin typeface="+mj-lt"/>
+                <a:ea typeface="+mj-ea"/>
+                <a:cs typeface="+mj-cs"/>
+                <a:sym typeface="Calibri"/>
               </a:defRPr>
             </a:pPr>
           </a:p>
@@ -6045,28 +6221,28 @@
       </p:sp>
       <p:grpSp>
         <p:nvGrpSpPr>
-          <p:cNvPr id="408" name="Rounded Rectangle 11"/>
+          <p:cNvPr id="413" name="Rounded Rectangle 11"/>
           <p:cNvGrpSpPr/>
           <p:nvPr/>
         </p:nvGrpSpPr>
         <p:grpSpPr>
           <a:xfrm>
-            <a:off x="3231389" y="6126463"/>
-            <a:ext cx="5138959" cy="310925"/>
-            <a:chOff x="0" y="-1"/>
-            <a:chExt cx="5138958" cy="310924"/>
+            <a:off x="3231388" y="6126461"/>
+            <a:ext cx="5138961" cy="310928"/>
+            <a:chOff x="0" y="0"/>
+            <a:chExt cx="5138959" cy="310926"/>
           </a:xfrm>
         </p:grpSpPr>
         <p:sp>
           <p:nvSpPr>
-            <p:cNvPr id="406" name="圓角矩形"/>
+            <p:cNvPr id="411" name="圓角矩形"/>
             <p:cNvSpPr/>
             <p:nvPr/>
           </p:nvSpPr>
           <p:spPr>
             <a:xfrm>
-              <a:off x="-1" y="-2"/>
-              <a:ext cx="5138959" cy="310926"/>
+              <a:off x="-1" y="-1"/>
+              <a:ext cx="5138961" cy="310927"/>
             </a:xfrm>
             <a:prstGeom prst="roundRect">
               <a:avLst>
@@ -6093,6 +6269,10 @@
                   <a:solidFill>
                     <a:srgbClr val="FFFFFF"/>
                   </a:solidFill>
+                  <a:latin typeface="+mj-lt"/>
+                  <a:ea typeface="+mj-ea"/>
+                  <a:cs typeface="+mj-cs"/>
+                  <a:sym typeface="Calibri"/>
                 </a:defRPr>
               </a:pPr>
             </a:p>
@@ -6100,13 +6280,13 @@
         </p:sp>
         <p:sp>
           <p:nvSpPr>
-            <p:cNvPr id="407" name="從「一棵樹」變成「三個欄位＋卡片」，成為最終系統的核心體驗"/>
+            <p:cNvPr id="412" name="從「一棵樹」變成「三個欄位＋卡片」，成為最終系統的核心體驗"/>
             <p:cNvSpPr txBox="1"/>
             <p:nvPr/>
           </p:nvSpPr>
           <p:spPr>
             <a:xfrm>
-              <a:off x="353314" y="47500"/>
+              <a:off x="353314" y="47501"/>
               <a:ext cx="4432301" cy="215901"/>
             </a:xfrm>
             <a:prstGeom prst="rect">
@@ -6152,14 +6332,14 @@
       </p:grpSp>
       <p:sp>
         <p:nvSpPr>
-          <p:cNvPr id="409" name="TextBox 395"/>
+          <p:cNvPr id="414" name="TextBox 395"/>
           <p:cNvSpPr txBox="1"/>
           <p:nvPr/>
         </p:nvSpPr>
         <p:spPr>
           <a:xfrm>
             <a:off x="6675118" y="6537959"/>
-            <a:ext cx="4800607" cy="228601"/>
+            <a:ext cx="4800608" cy="228601"/>
           </a:xfrm>
           <a:prstGeom prst="rect">
             <a:avLst/>
@@ -6233,7 +6413,7 @@
       </p:grpSpPr>
       <p:sp>
         <p:nvSpPr>
-          <p:cNvPr id="411" name="TextBox 1"/>
+          <p:cNvPr id="416" name="TextBox 1"/>
           <p:cNvSpPr txBox="1"/>
           <p:nvPr/>
         </p:nvSpPr>
@@ -6281,7 +6461,7 @@
       </p:sp>
       <p:sp>
         <p:nvSpPr>
-          <p:cNvPr id="412" name="TextBox 2"/>
+          <p:cNvPr id="417" name="TextBox 2"/>
           <p:cNvSpPr txBox="1"/>
           <p:nvPr/>
         </p:nvSpPr>
@@ -6329,7 +6509,7 @@
       </p:sp>
       <p:sp>
         <p:nvSpPr>
-          <p:cNvPr id="413" name="TextBox 3"/>
+          <p:cNvPr id="418" name="TextBox 3"/>
           <p:cNvSpPr txBox="1"/>
           <p:nvPr/>
         </p:nvSpPr>
@@ -6377,7 +6557,7 @@
       </p:sp>
       <p:sp>
         <p:nvSpPr>
-          <p:cNvPr id="414" name="Connector 4"/>
+          <p:cNvPr id="419" name="Connector 4"/>
           <p:cNvSpPr/>
           <p:nvPr/>
         </p:nvSpPr>
@@ -6405,7 +6585,7 @@
       </p:sp>
       <p:sp>
         <p:nvSpPr>
-          <p:cNvPr id="415" name="Oval 5"/>
+          <p:cNvPr id="420" name="Oval 5"/>
           <p:cNvSpPr/>
           <p:nvPr/>
         </p:nvSpPr>
@@ -6433,6 +6613,10 @@
                 <a:solidFill>
                   <a:srgbClr val="FFFFFF"/>
                 </a:solidFill>
+                <a:latin typeface="+mj-lt"/>
+                <a:ea typeface="+mj-ea"/>
+                <a:cs typeface="+mj-cs"/>
+                <a:sym typeface="Calibri"/>
               </a:defRPr>
             </a:pPr>
           </a:p>
@@ -6440,7 +6624,7 @@
       </p:sp>
       <p:sp>
         <p:nvSpPr>
-          <p:cNvPr id="416" name="Oval 6"/>
+          <p:cNvPr id="421" name="Oval 6"/>
           <p:cNvSpPr/>
           <p:nvPr/>
         </p:nvSpPr>
@@ -6468,6 +6652,10 @@
                 <a:solidFill>
                   <a:srgbClr val="FFFFFF"/>
                 </a:solidFill>
+                <a:latin typeface="+mj-lt"/>
+                <a:ea typeface="+mj-ea"/>
+                <a:cs typeface="+mj-cs"/>
+                <a:sym typeface="Calibri"/>
               </a:defRPr>
             </a:pPr>
           </a:p>
@@ -6475,7 +6663,7 @@
       </p:sp>
       <p:sp>
         <p:nvSpPr>
-          <p:cNvPr id="417" name="Oval 7"/>
+          <p:cNvPr id="422" name="Oval 7"/>
           <p:cNvSpPr/>
           <p:nvPr/>
         </p:nvSpPr>
@@ -6503,6 +6691,10 @@
                 <a:solidFill>
                   <a:srgbClr val="FFFFFF"/>
                 </a:solidFill>
+                <a:latin typeface="+mj-lt"/>
+                <a:ea typeface="+mj-ea"/>
+                <a:cs typeface="+mj-cs"/>
+                <a:sym typeface="Calibri"/>
               </a:defRPr>
             </a:pPr>
           </a:p>
@@ -6510,14 +6702,14 @@
       </p:sp>
       <p:sp>
         <p:nvSpPr>
-          <p:cNvPr id="418" name="Rectangle 8"/>
+          <p:cNvPr id="423" name="Rectangle 8"/>
           <p:cNvSpPr/>
           <p:nvPr/>
         </p:nvSpPr>
         <p:spPr>
           <a:xfrm>
             <a:off x="685798" y="2414016"/>
-            <a:ext cx="100598" cy="100597"/>
+            <a:ext cx="100599" cy="100598"/>
           </a:xfrm>
           <a:prstGeom prst="rect">
             <a:avLst/>
@@ -6538,6 +6730,10 @@
                 <a:solidFill>
                   <a:srgbClr val="FFFFFF"/>
                 </a:solidFill>
+                <a:latin typeface="+mj-lt"/>
+                <a:ea typeface="+mj-ea"/>
+                <a:cs typeface="+mj-cs"/>
+                <a:sym typeface="Calibri"/>
               </a:defRPr>
             </a:pPr>
           </a:p>
@@ -6545,7 +6741,7 @@
       </p:sp>
       <p:sp>
         <p:nvSpPr>
-          <p:cNvPr id="419" name="TextBox 9"/>
+          <p:cNvPr id="424" name="TextBox 9"/>
           <p:cNvSpPr txBox="1"/>
           <p:nvPr/>
         </p:nvSpPr>
@@ -6596,14 +6792,14 @@
       </p:sp>
       <p:sp>
         <p:nvSpPr>
-          <p:cNvPr id="420" name="Rectangle 10"/>
+          <p:cNvPr id="425" name="Rectangle 10"/>
           <p:cNvSpPr/>
           <p:nvPr/>
         </p:nvSpPr>
         <p:spPr>
           <a:xfrm>
-            <a:off x="685790" y="3408045"/>
-            <a:ext cx="4946651" cy="3038488"/>
+            <a:off x="685789" y="3408045"/>
+            <a:ext cx="4946653" cy="3038489"/>
           </a:xfrm>
           <a:prstGeom prst="rect">
             <a:avLst/>
@@ -6626,6 +6822,10 @@
                 <a:solidFill>
                   <a:srgbClr val="FFFFFF"/>
                 </a:solidFill>
+                <a:latin typeface="+mj-lt"/>
+                <a:ea typeface="+mj-ea"/>
+                <a:cs typeface="+mj-cs"/>
+                <a:sym typeface="Calibri"/>
               </a:defRPr>
             </a:pPr>
           </a:p>
@@ -6633,14 +6833,14 @@
       </p:sp>
       <p:sp>
         <p:nvSpPr>
-          <p:cNvPr id="421" name="Rectangle 11"/>
+          <p:cNvPr id="426" name="Rectangle 11"/>
           <p:cNvSpPr/>
           <p:nvPr/>
         </p:nvSpPr>
         <p:spPr>
           <a:xfrm>
-            <a:off x="685790" y="3408045"/>
-            <a:ext cx="4946651" cy="384061"/>
+            <a:off x="685789" y="3408045"/>
+            <a:ext cx="4946653" cy="384062"/>
           </a:xfrm>
           <a:prstGeom prst="rect">
             <a:avLst/>
@@ -6661,6 +6861,10 @@
                 <a:solidFill>
                   <a:srgbClr val="FFFFFF"/>
                 </a:solidFill>
+                <a:latin typeface="+mj-lt"/>
+                <a:ea typeface="+mj-ea"/>
+                <a:cs typeface="+mj-cs"/>
+                <a:sym typeface="Calibri"/>
               </a:defRPr>
             </a:pPr>
           </a:p>
@@ -6668,14 +6872,14 @@
       </p:sp>
       <p:sp>
         <p:nvSpPr>
-          <p:cNvPr id="422" name="TextBox 12"/>
+          <p:cNvPr id="427" name="TextBox 12"/>
           <p:cNvSpPr txBox="1"/>
           <p:nvPr/>
         </p:nvSpPr>
         <p:spPr>
           <a:xfrm>
-            <a:off x="685790" y="3485769"/>
-            <a:ext cx="4946651" cy="228601"/>
+            <a:off x="685789" y="3485769"/>
+            <a:ext cx="4946653" cy="228601"/>
           </a:xfrm>
           <a:prstGeom prst="rect">
             <a:avLst/>
@@ -6716,14 +6920,14 @@
       </p:sp>
       <p:sp>
         <p:nvSpPr>
-          <p:cNvPr id="423" name="Rectangle 13"/>
+          <p:cNvPr id="428" name="Rectangle 13"/>
           <p:cNvSpPr/>
           <p:nvPr/>
         </p:nvSpPr>
         <p:spPr>
           <a:xfrm>
             <a:off x="6546828" y="3408045"/>
-            <a:ext cx="4946643" cy="3038488"/>
+            <a:ext cx="4946644" cy="3038489"/>
           </a:xfrm>
           <a:prstGeom prst="rect">
             <a:avLst/>
@@ -6746,6 +6950,10 @@
                 <a:solidFill>
                   <a:srgbClr val="FFFFFF"/>
                 </a:solidFill>
+                <a:latin typeface="+mj-lt"/>
+                <a:ea typeface="+mj-ea"/>
+                <a:cs typeface="+mj-cs"/>
+                <a:sym typeface="Calibri"/>
               </a:defRPr>
             </a:pPr>
           </a:p>
@@ -6753,14 +6961,14 @@
       </p:sp>
       <p:sp>
         <p:nvSpPr>
-          <p:cNvPr id="424" name="Rectangle 14"/>
+          <p:cNvPr id="429" name="Rectangle 14"/>
           <p:cNvSpPr/>
           <p:nvPr/>
         </p:nvSpPr>
         <p:spPr>
           <a:xfrm>
             <a:off x="6546828" y="3408045"/>
-            <a:ext cx="4946643" cy="384061"/>
+            <a:ext cx="4946644" cy="384062"/>
           </a:xfrm>
           <a:prstGeom prst="rect">
             <a:avLst/>
@@ -6781,6 +6989,10 @@
                 <a:solidFill>
                   <a:srgbClr val="FFFFFF"/>
                 </a:solidFill>
+                <a:latin typeface="+mj-lt"/>
+                <a:ea typeface="+mj-ea"/>
+                <a:cs typeface="+mj-cs"/>
+                <a:sym typeface="Calibri"/>
               </a:defRPr>
             </a:pPr>
           </a:p>
@@ -6788,14 +7000,14 @@
       </p:sp>
       <p:sp>
         <p:nvSpPr>
-          <p:cNvPr id="425" name="TextBox 15"/>
+          <p:cNvPr id="430" name="TextBox 15"/>
           <p:cNvSpPr txBox="1"/>
           <p:nvPr/>
         </p:nvSpPr>
         <p:spPr>
           <a:xfrm>
             <a:off x="6546828" y="3485769"/>
-            <a:ext cx="4946643" cy="228601"/>
+            <a:ext cx="4946644" cy="228601"/>
           </a:xfrm>
           <a:prstGeom prst="rect">
             <a:avLst/>
@@ -6836,14 +7048,14 @@
       </p:sp>
       <p:sp>
         <p:nvSpPr>
-          <p:cNvPr id="426" name="Connector 16"/>
+          <p:cNvPr id="431" name="Connector 16"/>
           <p:cNvSpPr/>
           <p:nvPr/>
         </p:nvSpPr>
         <p:spPr>
           <a:xfrm>
             <a:off x="5742156" y="4927282"/>
-            <a:ext cx="694957" cy="13"/>
+            <a:ext cx="694958" cy="13"/>
           </a:xfrm>
           <a:prstGeom prst="line">
             <a:avLst/>
@@ -6864,14 +7076,14 @@
       </p:sp>
       <p:sp>
         <p:nvSpPr>
-          <p:cNvPr id="427" name="Isosceles Triangle 17"/>
+          <p:cNvPr id="432" name="Isosceles Triangle 17"/>
           <p:cNvSpPr/>
           <p:nvPr/>
         </p:nvSpPr>
         <p:spPr>
           <a:xfrm rot="5400000">
             <a:off x="6290793" y="4835836"/>
-            <a:ext cx="182894" cy="182893"/>
+            <a:ext cx="182895" cy="182893"/>
           </a:xfrm>
           <a:prstGeom prst="triangle">
             <a:avLst/>
@@ -6892,6 +7104,10 @@
                 <a:solidFill>
                   <a:srgbClr val="FFFFFF"/>
                 </a:solidFill>
+                <a:latin typeface="+mj-lt"/>
+                <a:ea typeface="+mj-ea"/>
+                <a:cs typeface="+mj-cs"/>
+                <a:sym typeface="Calibri"/>
               </a:defRPr>
             </a:pPr>
           </a:p>
@@ -6899,7 +7115,7 @@
       </p:sp>
       <p:pic>
         <p:nvPicPr>
-          <p:cNvPr id="428" name="Picture 18" descr="Picture 18"/>
+          <p:cNvPr id="433" name="Picture 18" descr="Picture 18"/>
           <p:cNvPicPr>
             <a:picLocks noChangeAspect="1"/>
           </p:cNvPicPr>
@@ -6928,7 +7144,7 @@
       </p:pic>
       <p:pic>
         <p:nvPicPr>
-          <p:cNvPr id="429" name="Picture 19" descr="Picture 19"/>
+          <p:cNvPr id="434" name="Picture 19" descr="Picture 19"/>
           <p:cNvPicPr>
             <a:picLocks noChangeAspect="1"/>
           </p:cNvPicPr>
@@ -6957,14 +7173,14 @@
       </p:pic>
       <p:sp>
         <p:nvSpPr>
-          <p:cNvPr id="430" name="TextBox 415"/>
+          <p:cNvPr id="435" name="TextBox 415"/>
           <p:cNvSpPr txBox="1"/>
           <p:nvPr/>
         </p:nvSpPr>
         <p:spPr>
           <a:xfrm>
             <a:off x="6675118" y="6537959"/>
-            <a:ext cx="4800607" cy="228601"/>
+            <a:ext cx="4800608" cy="228601"/>
           </a:xfrm>
           <a:prstGeom prst="rect">
             <a:avLst/>
@@ -7038,7 +7254,7 @@
       </p:grpSpPr>
       <p:sp>
         <p:nvSpPr>
-          <p:cNvPr id="432" name="TextBox 1"/>
+          <p:cNvPr id="437" name="TextBox 1"/>
           <p:cNvSpPr txBox="1"/>
           <p:nvPr/>
         </p:nvSpPr>
@@ -7086,7 +7302,7 @@
       </p:sp>
       <p:sp>
         <p:nvSpPr>
-          <p:cNvPr id="433" name="TextBox 2"/>
+          <p:cNvPr id="438" name="TextBox 2"/>
           <p:cNvSpPr txBox="1"/>
           <p:nvPr/>
         </p:nvSpPr>
@@ -7134,7 +7350,7 @@
       </p:sp>
       <p:sp>
         <p:nvSpPr>
-          <p:cNvPr id="434" name="Connector 3"/>
+          <p:cNvPr id="439" name="Connector 3"/>
           <p:cNvSpPr/>
           <p:nvPr/>
         </p:nvSpPr>
@@ -7162,7 +7378,7 @@
       </p:sp>
       <p:sp>
         <p:nvSpPr>
-          <p:cNvPr id="435" name="Oval 4"/>
+          <p:cNvPr id="440" name="Oval 4"/>
           <p:cNvSpPr/>
           <p:nvPr/>
         </p:nvSpPr>
@@ -7190,6 +7406,10 @@
                 <a:solidFill>
                   <a:srgbClr val="FFFFFF"/>
                 </a:solidFill>
+                <a:latin typeface="+mj-lt"/>
+                <a:ea typeface="+mj-ea"/>
+                <a:cs typeface="+mj-cs"/>
+                <a:sym typeface="Calibri"/>
               </a:defRPr>
             </a:pPr>
           </a:p>
@@ -7197,7 +7417,7 @@
       </p:sp>
       <p:sp>
         <p:nvSpPr>
-          <p:cNvPr id="436" name="Oval 5"/>
+          <p:cNvPr id="441" name="Oval 5"/>
           <p:cNvSpPr/>
           <p:nvPr/>
         </p:nvSpPr>
@@ -7225,6 +7445,10 @@
                 <a:solidFill>
                   <a:srgbClr val="FFFFFF"/>
                 </a:solidFill>
+                <a:latin typeface="+mj-lt"/>
+                <a:ea typeface="+mj-ea"/>
+                <a:cs typeface="+mj-cs"/>
+                <a:sym typeface="Calibri"/>
               </a:defRPr>
             </a:pPr>
           </a:p>
@@ -7232,7 +7456,7 @@
       </p:sp>
       <p:sp>
         <p:nvSpPr>
-          <p:cNvPr id="437" name="Oval 6"/>
+          <p:cNvPr id="442" name="Oval 6"/>
           <p:cNvSpPr/>
           <p:nvPr/>
         </p:nvSpPr>
@@ -7260,6 +7484,10 @@
                 <a:solidFill>
                   <a:srgbClr val="FFFFFF"/>
                 </a:solidFill>
+                <a:latin typeface="+mj-lt"/>
+                <a:ea typeface="+mj-ea"/>
+                <a:cs typeface="+mj-cs"/>
+                <a:sym typeface="Calibri"/>
               </a:defRPr>
             </a:pPr>
           </a:p>
@@ -7267,14 +7495,14 @@
       </p:sp>
       <p:sp>
         <p:nvSpPr>
-          <p:cNvPr id="438" name="Rectangle 7"/>
+          <p:cNvPr id="443" name="Rectangle 7"/>
           <p:cNvSpPr/>
           <p:nvPr/>
         </p:nvSpPr>
         <p:spPr>
           <a:xfrm>
             <a:off x="685798" y="2075688"/>
-            <a:ext cx="100598" cy="100597"/>
+            <a:ext cx="100599" cy="100598"/>
           </a:xfrm>
           <a:prstGeom prst="rect">
             <a:avLst/>
@@ -7295,6 +7523,10 @@
                 <a:solidFill>
                   <a:srgbClr val="FFFFFF"/>
                 </a:solidFill>
+                <a:latin typeface="+mj-lt"/>
+                <a:ea typeface="+mj-ea"/>
+                <a:cs typeface="+mj-cs"/>
+                <a:sym typeface="Calibri"/>
               </a:defRPr>
             </a:pPr>
           </a:p>
@@ -7302,7 +7534,7 @@
       </p:sp>
       <p:sp>
         <p:nvSpPr>
-          <p:cNvPr id="439" name="TextBox 8"/>
+          <p:cNvPr id="444" name="TextBox 8"/>
           <p:cNvSpPr txBox="1"/>
           <p:nvPr/>
         </p:nvSpPr>
@@ -7353,14 +7585,14 @@
       </p:sp>
       <p:sp>
         <p:nvSpPr>
-          <p:cNvPr id="440" name="Rectangle 9"/>
+          <p:cNvPr id="445" name="Rectangle 9"/>
           <p:cNvSpPr/>
           <p:nvPr/>
         </p:nvSpPr>
         <p:spPr>
           <a:xfrm>
             <a:off x="685798" y="2428619"/>
-            <a:ext cx="100598" cy="100597"/>
+            <a:ext cx="100599" cy="100598"/>
           </a:xfrm>
           <a:prstGeom prst="rect">
             <a:avLst/>
@@ -7381,6 +7613,10 @@
                 <a:solidFill>
                   <a:srgbClr val="FFFFFF"/>
                 </a:solidFill>
+                <a:latin typeface="+mj-lt"/>
+                <a:ea typeface="+mj-ea"/>
+                <a:cs typeface="+mj-cs"/>
+                <a:sym typeface="Calibri"/>
               </a:defRPr>
             </a:pPr>
           </a:p>
@@ -7388,7 +7624,7 @@
       </p:sp>
       <p:sp>
         <p:nvSpPr>
-          <p:cNvPr id="441" name="TextBox 10"/>
+          <p:cNvPr id="446" name="TextBox 10"/>
           <p:cNvSpPr txBox="1"/>
           <p:nvPr/>
         </p:nvSpPr>
@@ -7439,14 +7675,14 @@
       </p:sp>
       <p:sp>
         <p:nvSpPr>
-          <p:cNvPr id="442" name="Rectangle 11"/>
+          <p:cNvPr id="447" name="Rectangle 11"/>
           <p:cNvSpPr/>
           <p:nvPr/>
         </p:nvSpPr>
         <p:spPr>
           <a:xfrm>
             <a:off x="685798" y="2781554"/>
-            <a:ext cx="100598" cy="100597"/>
+            <a:ext cx="100599" cy="100598"/>
           </a:xfrm>
           <a:prstGeom prst="rect">
             <a:avLst/>
@@ -7467,6 +7703,10 @@
                 <a:solidFill>
                   <a:srgbClr val="FFFFFF"/>
                 </a:solidFill>
+                <a:latin typeface="+mj-lt"/>
+                <a:ea typeface="+mj-ea"/>
+                <a:cs typeface="+mj-cs"/>
+                <a:sym typeface="Calibri"/>
               </a:defRPr>
             </a:pPr>
           </a:p>
@@ -7474,7 +7714,7 @@
       </p:sp>
       <p:sp>
         <p:nvSpPr>
-          <p:cNvPr id="443" name="TextBox 12"/>
+          <p:cNvPr id="448" name="TextBox 12"/>
           <p:cNvSpPr txBox="1"/>
           <p:nvPr/>
         </p:nvSpPr>
@@ -7525,14 +7765,14 @@
       </p:sp>
       <p:sp>
         <p:nvSpPr>
-          <p:cNvPr id="444" name="Rectangle 13"/>
+          <p:cNvPr id="449" name="Rectangle 13"/>
           <p:cNvSpPr/>
           <p:nvPr/>
         </p:nvSpPr>
         <p:spPr>
           <a:xfrm>
             <a:off x="685798" y="3134485"/>
-            <a:ext cx="100598" cy="100598"/>
+            <a:ext cx="100599" cy="100599"/>
           </a:xfrm>
           <a:prstGeom prst="rect">
             <a:avLst/>
@@ -7553,6 +7793,10 @@
                 <a:solidFill>
                   <a:srgbClr val="FFFFFF"/>
                 </a:solidFill>
+                <a:latin typeface="+mj-lt"/>
+                <a:ea typeface="+mj-ea"/>
+                <a:cs typeface="+mj-cs"/>
+                <a:sym typeface="Calibri"/>
               </a:defRPr>
             </a:pPr>
           </a:p>
@@ -7560,7 +7804,7 @@
       </p:sp>
       <p:sp>
         <p:nvSpPr>
-          <p:cNvPr id="445" name="TextBox 14"/>
+          <p:cNvPr id="450" name="TextBox 14"/>
           <p:cNvSpPr txBox="1"/>
           <p:nvPr/>
         </p:nvSpPr>
@@ -7611,14 +7855,14 @@
       </p:sp>
       <p:sp>
         <p:nvSpPr>
-          <p:cNvPr id="446" name="Rectangle 15"/>
+          <p:cNvPr id="451" name="Rectangle 15"/>
           <p:cNvSpPr/>
           <p:nvPr/>
         </p:nvSpPr>
         <p:spPr>
           <a:xfrm>
             <a:off x="685798" y="3487420"/>
-            <a:ext cx="100598" cy="100597"/>
+            <a:ext cx="100599" cy="100598"/>
           </a:xfrm>
           <a:prstGeom prst="rect">
             <a:avLst/>
@@ -7639,6 +7883,10 @@
                 <a:solidFill>
                   <a:srgbClr val="FFFFFF"/>
                 </a:solidFill>
+                <a:latin typeface="+mj-lt"/>
+                <a:ea typeface="+mj-ea"/>
+                <a:cs typeface="+mj-cs"/>
+                <a:sym typeface="Calibri"/>
               </a:defRPr>
             </a:pPr>
           </a:p>
@@ -7646,7 +7894,7 @@
       </p:sp>
       <p:sp>
         <p:nvSpPr>
-          <p:cNvPr id="447" name="TextBox 16"/>
+          <p:cNvPr id="452" name="TextBox 16"/>
           <p:cNvSpPr txBox="1"/>
           <p:nvPr/>
         </p:nvSpPr>
@@ -7697,14 +7945,14 @@
       </p:sp>
       <p:sp>
         <p:nvSpPr>
-          <p:cNvPr id="448" name="Rectangle 17"/>
+          <p:cNvPr id="453" name="Rectangle 17"/>
           <p:cNvSpPr/>
           <p:nvPr/>
         </p:nvSpPr>
         <p:spPr>
           <a:xfrm>
             <a:off x="685800" y="3794633"/>
-            <a:ext cx="10807659" cy="566941"/>
+            <a:ext cx="10807659" cy="566942"/>
           </a:xfrm>
           <a:prstGeom prst="rect">
             <a:avLst/>
@@ -7725,6 +7973,10 @@
                 <a:solidFill>
                   <a:srgbClr val="FFFFFF"/>
                 </a:solidFill>
+                <a:latin typeface="+mj-lt"/>
+                <a:ea typeface="+mj-ea"/>
+                <a:cs typeface="+mj-cs"/>
+                <a:sym typeface="Calibri"/>
               </a:defRPr>
             </a:pPr>
           </a:p>
@@ -7732,14 +7984,14 @@
       </p:sp>
       <p:sp>
         <p:nvSpPr>
-          <p:cNvPr id="449" name="Rectangle 18"/>
+          <p:cNvPr id="454" name="Rectangle 18"/>
           <p:cNvSpPr/>
           <p:nvPr/>
         </p:nvSpPr>
         <p:spPr>
           <a:xfrm>
             <a:off x="685798" y="3794633"/>
-            <a:ext cx="73166" cy="566941"/>
+            <a:ext cx="73167" cy="566942"/>
           </a:xfrm>
           <a:prstGeom prst="rect">
             <a:avLst/>
@@ -7760,6 +8012,10 @@
                 <a:solidFill>
                   <a:srgbClr val="FFFFFF"/>
                 </a:solidFill>
+                <a:latin typeface="+mj-lt"/>
+                <a:ea typeface="+mj-ea"/>
+                <a:cs typeface="+mj-cs"/>
+                <a:sym typeface="Calibri"/>
               </a:defRPr>
             </a:pPr>
           </a:p>
@@ -7767,7 +8023,7 @@
       </p:sp>
       <p:sp>
         <p:nvSpPr>
-          <p:cNvPr id="450" name="TextBox 19"/>
+          <p:cNvPr id="455" name="TextBox 19"/>
           <p:cNvSpPr txBox="1"/>
           <p:nvPr/>
         </p:nvSpPr>
@@ -7815,14 +8071,14 @@
       </p:sp>
       <p:sp>
         <p:nvSpPr>
-          <p:cNvPr id="451" name="TextBox 435"/>
+          <p:cNvPr id="456" name="TextBox 435"/>
           <p:cNvSpPr txBox="1"/>
           <p:nvPr/>
         </p:nvSpPr>
         <p:spPr>
           <a:xfrm>
             <a:off x="6675118" y="6428232"/>
-            <a:ext cx="4800607" cy="228601"/>
+            <a:ext cx="4800608" cy="228601"/>
           </a:xfrm>
           <a:prstGeom prst="rect">
             <a:avLst/>
@@ -7896,7 +8152,7 @@
       </p:grpSpPr>
       <p:sp>
         <p:nvSpPr>
-          <p:cNvPr id="453" name="TextBox 1"/>
+          <p:cNvPr id="458" name="TextBox 1"/>
           <p:cNvSpPr txBox="1"/>
           <p:nvPr/>
         </p:nvSpPr>
@@ -7944,7 +8200,7 @@
       </p:sp>
       <p:sp>
         <p:nvSpPr>
-          <p:cNvPr id="454" name="TextBox 2"/>
+          <p:cNvPr id="459" name="TextBox 2"/>
           <p:cNvSpPr txBox="1"/>
           <p:nvPr/>
         </p:nvSpPr>
@@ -7992,7 +8248,7 @@
       </p:sp>
       <p:sp>
         <p:nvSpPr>
-          <p:cNvPr id="455" name="Connector 3"/>
+          <p:cNvPr id="460" name="Connector 3"/>
           <p:cNvSpPr/>
           <p:nvPr/>
         </p:nvSpPr>
@@ -8020,7 +8276,7 @@
       </p:sp>
       <p:sp>
         <p:nvSpPr>
-          <p:cNvPr id="456" name="Oval 4"/>
+          <p:cNvPr id="461" name="Oval 4"/>
           <p:cNvSpPr/>
           <p:nvPr/>
         </p:nvSpPr>
@@ -8048,6 +8304,10 @@
                 <a:solidFill>
                   <a:srgbClr val="FFFFFF"/>
                 </a:solidFill>
+                <a:latin typeface="+mj-lt"/>
+                <a:ea typeface="+mj-ea"/>
+                <a:cs typeface="+mj-cs"/>
+                <a:sym typeface="Calibri"/>
               </a:defRPr>
             </a:pPr>
           </a:p>
@@ -8055,7 +8315,7 @@
       </p:sp>
       <p:sp>
         <p:nvSpPr>
-          <p:cNvPr id="457" name="Oval 5"/>
+          <p:cNvPr id="462" name="Oval 5"/>
           <p:cNvSpPr/>
           <p:nvPr/>
         </p:nvSpPr>
@@ -8083,6 +8343,10 @@
                 <a:solidFill>
                   <a:srgbClr val="FFFFFF"/>
                 </a:solidFill>
+                <a:latin typeface="+mj-lt"/>
+                <a:ea typeface="+mj-ea"/>
+                <a:cs typeface="+mj-cs"/>
+                <a:sym typeface="Calibri"/>
               </a:defRPr>
             </a:pPr>
           </a:p>
@@ -8090,7 +8354,7 @@
       </p:sp>
       <p:sp>
         <p:nvSpPr>
-          <p:cNvPr id="458" name="Oval 6"/>
+          <p:cNvPr id="463" name="Oval 6"/>
           <p:cNvSpPr/>
           <p:nvPr/>
         </p:nvSpPr>
@@ -8118,6 +8382,10 @@
                 <a:solidFill>
                   <a:srgbClr val="FFFFFF"/>
                 </a:solidFill>
+                <a:latin typeface="+mj-lt"/>
+                <a:ea typeface="+mj-ea"/>
+                <a:cs typeface="+mj-cs"/>
+                <a:sym typeface="Calibri"/>
               </a:defRPr>
             </a:pPr>
           </a:p>
@@ -8125,14 +8393,14 @@
       </p:sp>
       <p:sp>
         <p:nvSpPr>
-          <p:cNvPr id="459" name="Rectangle 7"/>
+          <p:cNvPr id="464" name="Rectangle 7"/>
           <p:cNvSpPr/>
           <p:nvPr/>
         </p:nvSpPr>
         <p:spPr>
           <a:xfrm>
             <a:off x="685798" y="2212848"/>
-            <a:ext cx="100598" cy="100597"/>
+            <a:ext cx="100599" cy="100598"/>
           </a:xfrm>
           <a:prstGeom prst="rect">
             <a:avLst/>
@@ -8153,6 +8421,10 @@
                 <a:solidFill>
                   <a:srgbClr val="FFFFFF"/>
                 </a:solidFill>
+                <a:latin typeface="+mj-lt"/>
+                <a:ea typeface="+mj-ea"/>
+                <a:cs typeface="+mj-cs"/>
+                <a:sym typeface="Calibri"/>
               </a:defRPr>
             </a:pPr>
           </a:p>
@@ -8160,7 +8432,7 @@
       </p:sp>
       <p:sp>
         <p:nvSpPr>
-          <p:cNvPr id="460" name="TextBox 8"/>
+          <p:cNvPr id="465" name="TextBox 8"/>
           <p:cNvSpPr txBox="1"/>
           <p:nvPr/>
         </p:nvSpPr>
@@ -8211,14 +8483,14 @@
       </p:sp>
       <p:sp>
         <p:nvSpPr>
-          <p:cNvPr id="461" name="Rectangle 9"/>
+          <p:cNvPr id="466" name="Rectangle 9"/>
           <p:cNvSpPr/>
           <p:nvPr/>
         </p:nvSpPr>
         <p:spPr>
           <a:xfrm>
             <a:off x="685798" y="2665727"/>
-            <a:ext cx="100598" cy="100597"/>
+            <a:ext cx="100599" cy="100598"/>
           </a:xfrm>
           <a:prstGeom prst="rect">
             <a:avLst/>
@@ -8239,6 +8511,10 @@
                 <a:solidFill>
                   <a:srgbClr val="FFFFFF"/>
                 </a:solidFill>
+                <a:latin typeface="+mj-lt"/>
+                <a:ea typeface="+mj-ea"/>
+                <a:cs typeface="+mj-cs"/>
+                <a:sym typeface="Calibri"/>
               </a:defRPr>
             </a:pPr>
           </a:p>
@@ -8246,7 +8522,7 @@
       </p:sp>
       <p:sp>
         <p:nvSpPr>
-          <p:cNvPr id="462" name="TextBox 10"/>
+          <p:cNvPr id="467" name="TextBox 10"/>
           <p:cNvSpPr txBox="1"/>
           <p:nvPr/>
         </p:nvSpPr>
@@ -8297,14 +8573,14 @@
       </p:sp>
       <p:sp>
         <p:nvSpPr>
-          <p:cNvPr id="463" name="TextBox 446"/>
+          <p:cNvPr id="468" name="TextBox 446"/>
           <p:cNvSpPr txBox="1"/>
           <p:nvPr/>
         </p:nvSpPr>
         <p:spPr>
           <a:xfrm>
             <a:off x="6675118" y="6428232"/>
-            <a:ext cx="4800607" cy="228601"/>
+            <a:ext cx="4800608" cy="228601"/>
           </a:xfrm>
           <a:prstGeom prst="rect">
             <a:avLst/>
@@ -8378,7 +8654,7 @@
       </p:grpSpPr>
       <p:sp>
         <p:nvSpPr>
-          <p:cNvPr id="465" name="TextBox 1"/>
+          <p:cNvPr id="470" name="TextBox 1"/>
           <p:cNvSpPr txBox="1"/>
           <p:nvPr/>
         </p:nvSpPr>
@@ -8426,7 +8702,7 @@
       </p:sp>
       <p:sp>
         <p:nvSpPr>
-          <p:cNvPr id="466" name="TextBox 2"/>
+          <p:cNvPr id="471" name="TextBox 2"/>
           <p:cNvSpPr txBox="1"/>
           <p:nvPr/>
         </p:nvSpPr>
@@ -8474,7 +8750,7 @@
       </p:sp>
       <p:sp>
         <p:nvSpPr>
-          <p:cNvPr id="467" name="TextBox 3"/>
+          <p:cNvPr id="472" name="TextBox 3"/>
           <p:cNvSpPr txBox="1"/>
           <p:nvPr/>
         </p:nvSpPr>
@@ -8522,7 +8798,7 @@
       </p:sp>
       <p:sp>
         <p:nvSpPr>
-          <p:cNvPr id="468" name="Connector 4"/>
+          <p:cNvPr id="473" name="Connector 4"/>
           <p:cNvSpPr/>
           <p:nvPr/>
         </p:nvSpPr>
@@ -8550,7 +8826,7 @@
       </p:sp>
       <p:sp>
         <p:nvSpPr>
-          <p:cNvPr id="469" name="Oval 5"/>
+          <p:cNvPr id="474" name="Oval 5"/>
           <p:cNvSpPr/>
           <p:nvPr/>
         </p:nvSpPr>
@@ -8578,6 +8854,10 @@
                 <a:solidFill>
                   <a:srgbClr val="FFFFFF"/>
                 </a:solidFill>
+                <a:latin typeface="+mj-lt"/>
+                <a:ea typeface="+mj-ea"/>
+                <a:cs typeface="+mj-cs"/>
+                <a:sym typeface="Calibri"/>
               </a:defRPr>
             </a:pPr>
           </a:p>
@@ -8585,7 +8865,7 @@
       </p:sp>
       <p:sp>
         <p:nvSpPr>
-          <p:cNvPr id="470" name="Oval 6"/>
+          <p:cNvPr id="475" name="Oval 6"/>
           <p:cNvSpPr/>
           <p:nvPr/>
         </p:nvSpPr>
@@ -8613,6 +8893,10 @@
                 <a:solidFill>
                   <a:srgbClr val="FFFFFF"/>
                 </a:solidFill>
+                <a:latin typeface="+mj-lt"/>
+                <a:ea typeface="+mj-ea"/>
+                <a:cs typeface="+mj-cs"/>
+                <a:sym typeface="Calibri"/>
               </a:defRPr>
             </a:pPr>
           </a:p>
@@ -8620,7 +8904,7 @@
       </p:sp>
       <p:sp>
         <p:nvSpPr>
-          <p:cNvPr id="471" name="Oval 7"/>
+          <p:cNvPr id="476" name="Oval 7"/>
           <p:cNvSpPr/>
           <p:nvPr/>
         </p:nvSpPr>
@@ -8648,6 +8932,10 @@
                 <a:solidFill>
                   <a:srgbClr val="FFFFFF"/>
                 </a:solidFill>
+                <a:latin typeface="+mj-lt"/>
+                <a:ea typeface="+mj-ea"/>
+                <a:cs typeface="+mj-cs"/>
+                <a:sym typeface="Calibri"/>
               </a:defRPr>
             </a:pPr>
           </a:p>
@@ -8655,7 +8943,7 @@
       </p:sp>
       <p:sp>
         <p:nvSpPr>
-          <p:cNvPr id="472" name="Rectangle 8"/>
+          <p:cNvPr id="477" name="Rectangle 8"/>
           <p:cNvSpPr/>
           <p:nvPr/>
         </p:nvSpPr>
@@ -8685,6 +8973,10 @@
                 <a:solidFill>
                   <a:srgbClr val="FFFFFF"/>
                 </a:solidFill>
+                <a:latin typeface="+mj-lt"/>
+                <a:ea typeface="+mj-ea"/>
+                <a:cs typeface="+mj-cs"/>
+                <a:sym typeface="Calibri"/>
               </a:defRPr>
             </a:pPr>
           </a:p>
@@ -8692,7 +8984,7 @@
       </p:sp>
       <p:sp>
         <p:nvSpPr>
-          <p:cNvPr id="473" name="Rectangle 9"/>
+          <p:cNvPr id="478" name="Rectangle 9"/>
           <p:cNvSpPr/>
           <p:nvPr/>
         </p:nvSpPr>
@@ -8720,6 +9012,10 @@
                 <a:solidFill>
                   <a:srgbClr val="FFFFFF"/>
                 </a:solidFill>
+                <a:latin typeface="+mj-lt"/>
+                <a:ea typeface="+mj-ea"/>
+                <a:cs typeface="+mj-cs"/>
+                <a:sym typeface="Calibri"/>
               </a:defRPr>
             </a:pPr>
           </a:p>
@@ -8727,7 +9023,7 @@
       </p:sp>
       <p:sp>
         <p:nvSpPr>
-          <p:cNvPr id="474" name="TextBox 10"/>
+          <p:cNvPr id="479" name="TextBox 10"/>
           <p:cNvSpPr txBox="1"/>
           <p:nvPr/>
         </p:nvSpPr>
@@ -8775,7 +9071,7 @@
       </p:sp>
       <p:sp>
         <p:nvSpPr>
-          <p:cNvPr id="475" name="TextBox 11"/>
+          <p:cNvPr id="480" name="TextBox 11"/>
           <p:cNvSpPr txBox="1"/>
           <p:nvPr/>
         </p:nvSpPr>
@@ -8826,7 +9122,7 @@
       </p:sp>
       <p:sp>
         <p:nvSpPr>
-          <p:cNvPr id="476" name="Rectangle 12"/>
+          <p:cNvPr id="481" name="Rectangle 12"/>
           <p:cNvSpPr/>
           <p:nvPr/>
         </p:nvSpPr>
@@ -8856,6 +9152,10 @@
                 <a:solidFill>
                   <a:srgbClr val="FFFFFF"/>
                 </a:solidFill>
+                <a:latin typeface="+mj-lt"/>
+                <a:ea typeface="+mj-ea"/>
+                <a:cs typeface="+mj-cs"/>
+                <a:sym typeface="Calibri"/>
               </a:defRPr>
             </a:pPr>
           </a:p>
@@ -8863,7 +9163,7 @@
       </p:sp>
       <p:sp>
         <p:nvSpPr>
-          <p:cNvPr id="477" name="Rectangle 13"/>
+          <p:cNvPr id="482" name="Rectangle 13"/>
           <p:cNvSpPr/>
           <p:nvPr/>
         </p:nvSpPr>
@@ -8891,6 +9191,10 @@
                 <a:solidFill>
                   <a:srgbClr val="FFFFFF"/>
                 </a:solidFill>
+                <a:latin typeface="+mj-lt"/>
+                <a:ea typeface="+mj-ea"/>
+                <a:cs typeface="+mj-cs"/>
+                <a:sym typeface="Calibri"/>
               </a:defRPr>
             </a:pPr>
           </a:p>
@@ -8898,7 +9202,7 @@
       </p:sp>
       <p:sp>
         <p:nvSpPr>
-          <p:cNvPr id="478" name="TextBox 14"/>
+          <p:cNvPr id="483" name="TextBox 14"/>
           <p:cNvSpPr txBox="1"/>
           <p:nvPr/>
         </p:nvSpPr>
@@ -8946,7 +9250,7 @@
       </p:sp>
       <p:sp>
         <p:nvSpPr>
-          <p:cNvPr id="479" name="TextBox 15"/>
+          <p:cNvPr id="484" name="TextBox 15"/>
           <p:cNvSpPr txBox="1"/>
           <p:nvPr/>
         </p:nvSpPr>
@@ -9033,14 +9337,14 @@
       </p:sp>
       <p:sp>
         <p:nvSpPr>
-          <p:cNvPr id="480" name="Rectangle 16"/>
+          <p:cNvPr id="485" name="Rectangle 16"/>
           <p:cNvSpPr/>
           <p:nvPr/>
         </p:nvSpPr>
         <p:spPr>
           <a:xfrm>
             <a:off x="685800" y="4983479"/>
-            <a:ext cx="10807659" cy="594373"/>
+            <a:ext cx="10807659" cy="594374"/>
           </a:xfrm>
           <a:prstGeom prst="rect">
             <a:avLst/>
@@ -9063,6 +9367,10 @@
                 <a:solidFill>
                   <a:srgbClr val="FFFFFF"/>
                 </a:solidFill>
+                <a:latin typeface="+mj-lt"/>
+                <a:ea typeface="+mj-ea"/>
+                <a:cs typeface="+mj-cs"/>
+                <a:sym typeface="Calibri"/>
               </a:defRPr>
             </a:pPr>
           </a:p>
@@ -9070,7 +9378,7 @@
       </p:sp>
       <p:sp>
         <p:nvSpPr>
-          <p:cNvPr id="481" name="TextBox 17"/>
+          <p:cNvPr id="486" name="TextBox 17"/>
           <p:cNvSpPr txBox="1"/>
           <p:nvPr/>
         </p:nvSpPr>
@@ -9118,7 +9426,7 @@
       </p:sp>
       <p:sp>
         <p:nvSpPr>
-          <p:cNvPr id="482" name="TextBox 18"/>
+          <p:cNvPr id="487" name="TextBox 18"/>
           <p:cNvSpPr txBox="1"/>
           <p:nvPr/>
         </p:nvSpPr>
@@ -9169,14 +9477,14 @@
       </p:sp>
       <p:sp>
         <p:nvSpPr>
-          <p:cNvPr id="483" name="TextBox 465"/>
+          <p:cNvPr id="488" name="TextBox 465"/>
           <p:cNvSpPr txBox="1"/>
           <p:nvPr/>
         </p:nvSpPr>
         <p:spPr>
           <a:xfrm>
             <a:off x="6675118" y="6428232"/>
-            <a:ext cx="4800607" cy="228601"/>
+            <a:ext cx="4800608" cy="228601"/>
           </a:xfrm>
           <a:prstGeom prst="rect">
             <a:avLst/>
@@ -9250,7 +9558,7 @@
       </p:grpSpPr>
       <p:sp>
         <p:nvSpPr>
-          <p:cNvPr id="485" name="TextBox 1"/>
+          <p:cNvPr id="490" name="TextBox 1"/>
           <p:cNvSpPr txBox="1"/>
           <p:nvPr/>
         </p:nvSpPr>
@@ -9298,7 +9606,7 @@
       </p:sp>
       <p:sp>
         <p:nvSpPr>
-          <p:cNvPr id="486" name="TextBox 2"/>
+          <p:cNvPr id="491" name="TextBox 2"/>
           <p:cNvSpPr txBox="1"/>
           <p:nvPr/>
         </p:nvSpPr>
@@ -9346,7 +9654,7 @@
       </p:sp>
       <p:sp>
         <p:nvSpPr>
-          <p:cNvPr id="487" name="TextBox 3"/>
+          <p:cNvPr id="492" name="TextBox 3"/>
           <p:cNvSpPr txBox="1"/>
           <p:nvPr/>
         </p:nvSpPr>
@@ -9394,7 +9702,7 @@
       </p:sp>
       <p:sp>
         <p:nvSpPr>
-          <p:cNvPr id="488" name="Connector 4"/>
+          <p:cNvPr id="493" name="Connector 4"/>
           <p:cNvSpPr/>
           <p:nvPr/>
         </p:nvSpPr>
@@ -9422,7 +9730,7 @@
       </p:sp>
       <p:sp>
         <p:nvSpPr>
-          <p:cNvPr id="489" name="Oval 5"/>
+          <p:cNvPr id="494" name="Oval 5"/>
           <p:cNvSpPr/>
           <p:nvPr/>
         </p:nvSpPr>
@@ -9450,6 +9758,10 @@
                 <a:solidFill>
                   <a:srgbClr val="FFFFFF"/>
                 </a:solidFill>
+                <a:latin typeface="+mj-lt"/>
+                <a:ea typeface="+mj-ea"/>
+                <a:cs typeface="+mj-cs"/>
+                <a:sym typeface="Calibri"/>
               </a:defRPr>
             </a:pPr>
           </a:p>
@@ -9457,7 +9769,7 @@
       </p:sp>
       <p:sp>
         <p:nvSpPr>
-          <p:cNvPr id="490" name="Oval 6"/>
+          <p:cNvPr id="495" name="Oval 6"/>
           <p:cNvSpPr/>
           <p:nvPr/>
         </p:nvSpPr>
@@ -9485,6 +9797,10 @@
                 <a:solidFill>
                   <a:srgbClr val="FFFFFF"/>
                 </a:solidFill>
+                <a:latin typeface="+mj-lt"/>
+                <a:ea typeface="+mj-ea"/>
+                <a:cs typeface="+mj-cs"/>
+                <a:sym typeface="Calibri"/>
               </a:defRPr>
             </a:pPr>
           </a:p>
@@ -9492,7 +9808,7 @@
       </p:sp>
       <p:sp>
         <p:nvSpPr>
-          <p:cNvPr id="491" name="Oval 7"/>
+          <p:cNvPr id="496" name="Oval 7"/>
           <p:cNvSpPr/>
           <p:nvPr/>
         </p:nvSpPr>
@@ -9520,6 +9836,10 @@
                 <a:solidFill>
                   <a:srgbClr val="FFFFFF"/>
                 </a:solidFill>
+                <a:latin typeface="+mj-lt"/>
+                <a:ea typeface="+mj-ea"/>
+                <a:cs typeface="+mj-cs"/>
+                <a:sym typeface="Calibri"/>
               </a:defRPr>
             </a:pPr>
           </a:p>
@@ -9527,7 +9847,7 @@
       </p:sp>
       <p:sp>
         <p:nvSpPr>
-          <p:cNvPr id="492" name="Rectangle 8"/>
+          <p:cNvPr id="497" name="Rectangle 8"/>
           <p:cNvSpPr/>
           <p:nvPr/>
         </p:nvSpPr>
@@ -9557,6 +9877,10 @@
                 <a:solidFill>
                   <a:srgbClr val="FFFFFF"/>
                 </a:solidFill>
+                <a:latin typeface="+mj-lt"/>
+                <a:ea typeface="+mj-ea"/>
+                <a:cs typeface="+mj-cs"/>
+                <a:sym typeface="Calibri"/>
               </a:defRPr>
             </a:pPr>
           </a:p>
@@ -9564,7 +9888,7 @@
       </p:sp>
       <p:sp>
         <p:nvSpPr>
-          <p:cNvPr id="493" name="Rectangle 9"/>
+          <p:cNvPr id="498" name="Rectangle 9"/>
           <p:cNvSpPr/>
           <p:nvPr/>
         </p:nvSpPr>
@@ -9592,6 +9916,10 @@
                 <a:solidFill>
                   <a:srgbClr val="FFFFFF"/>
                 </a:solidFill>
+                <a:latin typeface="+mj-lt"/>
+                <a:ea typeface="+mj-ea"/>
+                <a:cs typeface="+mj-cs"/>
+                <a:sym typeface="Calibri"/>
               </a:defRPr>
             </a:pPr>
           </a:p>
@@ -9599,7 +9927,7 @@
       </p:sp>
       <p:sp>
         <p:nvSpPr>
-          <p:cNvPr id="494" name="TextBox 10"/>
+          <p:cNvPr id="499" name="TextBox 10"/>
           <p:cNvSpPr txBox="1"/>
           <p:nvPr/>
         </p:nvSpPr>
@@ -9647,7 +9975,7 @@
       </p:sp>
       <p:sp>
         <p:nvSpPr>
-          <p:cNvPr id="495" name="TextBox 11"/>
+          <p:cNvPr id="500" name="TextBox 11"/>
           <p:cNvSpPr txBox="1"/>
           <p:nvPr/>
         </p:nvSpPr>
@@ -9698,7 +10026,7 @@
       </p:sp>
       <p:sp>
         <p:nvSpPr>
-          <p:cNvPr id="496" name="Rectangle 12"/>
+          <p:cNvPr id="501" name="Rectangle 12"/>
           <p:cNvSpPr/>
           <p:nvPr/>
         </p:nvSpPr>
@@ -9728,6 +10056,10 @@
                 <a:solidFill>
                   <a:srgbClr val="FFFFFF"/>
                 </a:solidFill>
+                <a:latin typeface="+mj-lt"/>
+                <a:ea typeface="+mj-ea"/>
+                <a:cs typeface="+mj-cs"/>
+                <a:sym typeface="Calibri"/>
               </a:defRPr>
             </a:pPr>
           </a:p>
@@ -9735,7 +10067,7 @@
       </p:sp>
       <p:sp>
         <p:nvSpPr>
-          <p:cNvPr id="497" name="Rectangle 13"/>
+          <p:cNvPr id="502" name="Rectangle 13"/>
           <p:cNvSpPr/>
           <p:nvPr/>
         </p:nvSpPr>
@@ -9763,6 +10095,10 @@
                 <a:solidFill>
                   <a:srgbClr val="FFFFFF"/>
                 </a:solidFill>
+                <a:latin typeface="+mj-lt"/>
+                <a:ea typeface="+mj-ea"/>
+                <a:cs typeface="+mj-cs"/>
+                <a:sym typeface="Calibri"/>
               </a:defRPr>
             </a:pPr>
           </a:p>
@@ -9770,7 +10106,7 @@
       </p:sp>
       <p:sp>
         <p:nvSpPr>
-          <p:cNvPr id="498" name="TextBox 14"/>
+          <p:cNvPr id="503" name="TextBox 14"/>
           <p:cNvSpPr txBox="1"/>
           <p:nvPr/>
         </p:nvSpPr>
@@ -9818,7 +10154,7 @@
       </p:sp>
       <p:sp>
         <p:nvSpPr>
-          <p:cNvPr id="499" name="TextBox 15"/>
+          <p:cNvPr id="504" name="TextBox 15"/>
           <p:cNvSpPr txBox="1"/>
           <p:nvPr/>
         </p:nvSpPr>
@@ -9905,7 +10241,7 @@
       </p:sp>
       <p:sp>
         <p:nvSpPr>
-          <p:cNvPr id="500" name="Rectangle 16"/>
+          <p:cNvPr id="505" name="Rectangle 16"/>
           <p:cNvSpPr/>
           <p:nvPr/>
         </p:nvSpPr>
@@ -9935,6 +10271,10 @@
                 <a:solidFill>
                   <a:srgbClr val="FFFFFF"/>
                 </a:solidFill>
+                <a:latin typeface="+mj-lt"/>
+                <a:ea typeface="+mj-ea"/>
+                <a:cs typeface="+mj-cs"/>
+                <a:sym typeface="Calibri"/>
               </a:defRPr>
             </a:pPr>
           </a:p>
@@ -9942,7 +10282,7 @@
       </p:sp>
       <p:sp>
         <p:nvSpPr>
-          <p:cNvPr id="501" name="TextBox 17"/>
+          <p:cNvPr id="506" name="TextBox 17"/>
           <p:cNvSpPr txBox="1"/>
           <p:nvPr/>
         </p:nvSpPr>
@@ -9990,7 +10330,7 @@
       </p:sp>
       <p:sp>
         <p:nvSpPr>
-          <p:cNvPr id="502" name="TextBox 18"/>
+          <p:cNvPr id="507" name="TextBox 18"/>
           <p:cNvSpPr txBox="1"/>
           <p:nvPr/>
         </p:nvSpPr>
@@ -10041,14 +10381,14 @@
       </p:sp>
       <p:sp>
         <p:nvSpPr>
-          <p:cNvPr id="503" name="TextBox 484"/>
+          <p:cNvPr id="508" name="TextBox 484"/>
           <p:cNvSpPr txBox="1"/>
           <p:nvPr/>
         </p:nvSpPr>
         <p:spPr>
           <a:xfrm>
             <a:off x="6675118" y="6428232"/>
-            <a:ext cx="4800607" cy="228601"/>
+            <a:ext cx="4800608" cy="228601"/>
           </a:xfrm>
           <a:prstGeom prst="rect">
             <a:avLst/>
@@ -10122,7 +10462,7 @@
       </p:grpSpPr>
       <p:sp>
         <p:nvSpPr>
-          <p:cNvPr id="505" name="TextBox 1"/>
+          <p:cNvPr id="510" name="TextBox 1"/>
           <p:cNvSpPr txBox="1"/>
           <p:nvPr/>
         </p:nvSpPr>
@@ -10170,7 +10510,7 @@
       </p:sp>
       <p:sp>
         <p:nvSpPr>
-          <p:cNvPr id="506" name="TextBox 2"/>
+          <p:cNvPr id="511" name="TextBox 2"/>
           <p:cNvSpPr txBox="1"/>
           <p:nvPr/>
         </p:nvSpPr>
@@ -10218,7 +10558,7 @@
       </p:sp>
       <p:sp>
         <p:nvSpPr>
-          <p:cNvPr id="507" name="Connector 3"/>
+          <p:cNvPr id="512" name="Connector 3"/>
           <p:cNvSpPr/>
           <p:nvPr/>
         </p:nvSpPr>
@@ -10246,7 +10586,7 @@
       </p:sp>
       <p:sp>
         <p:nvSpPr>
-          <p:cNvPr id="508" name="Oval 4"/>
+          <p:cNvPr id="513" name="Oval 4"/>
           <p:cNvSpPr/>
           <p:nvPr/>
         </p:nvSpPr>
@@ -10274,6 +10614,10 @@
                 <a:solidFill>
                   <a:srgbClr val="FFFFFF"/>
                 </a:solidFill>
+                <a:latin typeface="+mj-lt"/>
+                <a:ea typeface="+mj-ea"/>
+                <a:cs typeface="+mj-cs"/>
+                <a:sym typeface="Calibri"/>
               </a:defRPr>
             </a:pPr>
           </a:p>
@@ -10281,7 +10625,7 @@
       </p:sp>
       <p:sp>
         <p:nvSpPr>
-          <p:cNvPr id="509" name="Oval 5"/>
+          <p:cNvPr id="514" name="Oval 5"/>
           <p:cNvSpPr/>
           <p:nvPr/>
         </p:nvSpPr>
@@ -10309,6 +10653,10 @@
                 <a:solidFill>
                   <a:srgbClr val="FFFFFF"/>
                 </a:solidFill>
+                <a:latin typeface="+mj-lt"/>
+                <a:ea typeface="+mj-ea"/>
+                <a:cs typeface="+mj-cs"/>
+                <a:sym typeface="Calibri"/>
               </a:defRPr>
             </a:pPr>
           </a:p>
@@ -10316,7 +10664,7 @@
       </p:sp>
       <p:sp>
         <p:nvSpPr>
-          <p:cNvPr id="510" name="Oval 6"/>
+          <p:cNvPr id="515" name="Oval 6"/>
           <p:cNvSpPr/>
           <p:nvPr/>
         </p:nvSpPr>
@@ -10344,6 +10692,10 @@
                 <a:solidFill>
                   <a:srgbClr val="FFFFFF"/>
                 </a:solidFill>
+                <a:latin typeface="+mj-lt"/>
+                <a:ea typeface="+mj-ea"/>
+                <a:cs typeface="+mj-cs"/>
+                <a:sym typeface="Calibri"/>
               </a:defRPr>
             </a:pPr>
           </a:p>
@@ -10351,14 +10703,14 @@
       </p:sp>
       <p:sp>
         <p:nvSpPr>
-          <p:cNvPr id="511" name="Rectangle 7"/>
+          <p:cNvPr id="516" name="Rectangle 7"/>
           <p:cNvSpPr/>
           <p:nvPr/>
         </p:nvSpPr>
         <p:spPr>
           <a:xfrm>
             <a:off x="685798" y="2212848"/>
-            <a:ext cx="100598" cy="100597"/>
+            <a:ext cx="100599" cy="100598"/>
           </a:xfrm>
           <a:prstGeom prst="rect">
             <a:avLst/>
@@ -10379,6 +10731,10 @@
                 <a:solidFill>
                   <a:srgbClr val="FFFFFF"/>
                 </a:solidFill>
+                <a:latin typeface="+mj-lt"/>
+                <a:ea typeface="+mj-ea"/>
+                <a:cs typeface="+mj-cs"/>
+                <a:sym typeface="Calibri"/>
               </a:defRPr>
             </a:pPr>
           </a:p>
@@ -10386,7 +10742,7 @@
       </p:sp>
       <p:sp>
         <p:nvSpPr>
-          <p:cNvPr id="512" name="TextBox 8"/>
+          <p:cNvPr id="517" name="TextBox 8"/>
           <p:cNvSpPr txBox="1"/>
           <p:nvPr/>
         </p:nvSpPr>
@@ -10437,14 +10793,14 @@
       </p:sp>
       <p:sp>
         <p:nvSpPr>
-          <p:cNvPr id="513" name="Rectangle 9"/>
+          <p:cNvPr id="518" name="Rectangle 9"/>
           <p:cNvSpPr/>
           <p:nvPr/>
         </p:nvSpPr>
         <p:spPr>
           <a:xfrm>
             <a:off x="685798" y="2665727"/>
-            <a:ext cx="100598" cy="100597"/>
+            <a:ext cx="100599" cy="100598"/>
           </a:xfrm>
           <a:prstGeom prst="rect">
             <a:avLst/>
@@ -10465,6 +10821,10 @@
                 <a:solidFill>
                   <a:srgbClr val="FFFFFF"/>
                 </a:solidFill>
+                <a:latin typeface="+mj-lt"/>
+                <a:ea typeface="+mj-ea"/>
+                <a:cs typeface="+mj-cs"/>
+                <a:sym typeface="Calibri"/>
               </a:defRPr>
             </a:pPr>
           </a:p>
@@ -10472,7 +10832,7 @@
       </p:sp>
       <p:sp>
         <p:nvSpPr>
-          <p:cNvPr id="514" name="TextBox 10"/>
+          <p:cNvPr id="519" name="TextBox 10"/>
           <p:cNvSpPr txBox="1"/>
           <p:nvPr/>
         </p:nvSpPr>
@@ -10523,14 +10883,14 @@
       </p:sp>
       <p:sp>
         <p:nvSpPr>
-          <p:cNvPr id="515" name="Rectangle 11"/>
+          <p:cNvPr id="520" name="Rectangle 11"/>
           <p:cNvSpPr/>
           <p:nvPr/>
         </p:nvSpPr>
         <p:spPr>
           <a:xfrm>
             <a:off x="685798" y="3118610"/>
-            <a:ext cx="100598" cy="100598"/>
+            <a:ext cx="100599" cy="100599"/>
           </a:xfrm>
           <a:prstGeom prst="rect">
             <a:avLst/>
@@ -10551,6 +10911,10 @@
                 <a:solidFill>
                   <a:srgbClr val="FFFFFF"/>
                 </a:solidFill>
+                <a:latin typeface="+mj-lt"/>
+                <a:ea typeface="+mj-ea"/>
+                <a:cs typeface="+mj-cs"/>
+                <a:sym typeface="Calibri"/>
               </a:defRPr>
             </a:pPr>
           </a:p>
@@ -10558,7 +10922,7 @@
       </p:sp>
       <p:sp>
         <p:nvSpPr>
-          <p:cNvPr id="516" name="TextBox 12"/>
+          <p:cNvPr id="521" name="TextBox 12"/>
           <p:cNvSpPr txBox="1"/>
           <p:nvPr/>
         </p:nvSpPr>
@@ -10609,14 +10973,14 @@
       </p:sp>
       <p:sp>
         <p:nvSpPr>
-          <p:cNvPr id="517" name="TextBox 497"/>
+          <p:cNvPr id="522" name="TextBox 497"/>
           <p:cNvSpPr txBox="1"/>
           <p:nvPr/>
         </p:nvSpPr>
         <p:spPr>
           <a:xfrm>
             <a:off x="6675118" y="6428232"/>
-            <a:ext cx="4800607" cy="228601"/>
+            <a:ext cx="4800608" cy="228601"/>
           </a:xfrm>
           <a:prstGeom prst="rect">
             <a:avLst/>
@@ -10842,6 +11206,10 @@
                 <a:solidFill>
                   <a:srgbClr val="FFFFFF"/>
                 </a:solidFill>
+                <a:latin typeface="+mj-lt"/>
+                <a:ea typeface="+mj-ea"/>
+                <a:cs typeface="+mj-cs"/>
+                <a:sym typeface="Calibri"/>
               </a:defRPr>
             </a:pPr>
           </a:p>
@@ -10877,6 +11245,10 @@
                 <a:solidFill>
                   <a:srgbClr val="FFFFFF"/>
                 </a:solidFill>
+                <a:latin typeface="+mj-lt"/>
+                <a:ea typeface="+mj-ea"/>
+                <a:cs typeface="+mj-cs"/>
+                <a:sym typeface="Calibri"/>
               </a:defRPr>
             </a:pPr>
           </a:p>
@@ -10912,6 +11284,10 @@
                 <a:solidFill>
                   <a:srgbClr val="FFFFFF"/>
                 </a:solidFill>
+                <a:latin typeface="+mj-lt"/>
+                <a:ea typeface="+mj-ea"/>
+                <a:cs typeface="+mj-cs"/>
+                <a:sym typeface="Calibri"/>
               </a:defRPr>
             </a:pPr>
           </a:p>
@@ -10926,7 +11302,7 @@
         <p:spPr>
           <a:xfrm>
             <a:off x="685800" y="2121404"/>
-            <a:ext cx="310896" cy="310919"/>
+            <a:ext cx="310896" cy="310921"/>
           </a:xfrm>
           <a:prstGeom prst="ellipse">
             <a:avLst/>
@@ -10947,6 +11323,10 @@
                 <a:solidFill>
                   <a:srgbClr val="FFFFFF"/>
                 </a:solidFill>
+                <a:latin typeface="+mj-lt"/>
+                <a:ea typeface="+mj-ea"/>
+                <a:cs typeface="+mj-cs"/>
+                <a:sym typeface="Calibri"/>
               </a:defRPr>
             </a:pPr>
           </a:p>
@@ -11060,7 +11440,7 @@
         <p:spPr>
           <a:xfrm>
             <a:off x="685800" y="2834638"/>
-            <a:ext cx="310896" cy="310921"/>
+            <a:ext cx="310896" cy="310923"/>
           </a:xfrm>
           <a:prstGeom prst="ellipse">
             <a:avLst/>
@@ -11081,6 +11461,10 @@
                 <a:solidFill>
                   <a:srgbClr val="FFFFFF"/>
                 </a:solidFill>
+                <a:latin typeface="+mj-lt"/>
+                <a:ea typeface="+mj-ea"/>
+                <a:cs typeface="+mj-cs"/>
+                <a:sym typeface="Calibri"/>
               </a:defRPr>
             </a:pPr>
           </a:p>
@@ -11194,7 +11578,7 @@
         <p:spPr>
           <a:xfrm>
             <a:off x="685800" y="3547871"/>
-            <a:ext cx="310896" cy="310921"/>
+            <a:ext cx="310896" cy="310923"/>
           </a:xfrm>
           <a:prstGeom prst="ellipse">
             <a:avLst/>
@@ -11215,6 +11599,10 @@
                 <a:solidFill>
                   <a:srgbClr val="FFFFFF"/>
                 </a:solidFill>
+                <a:latin typeface="+mj-lt"/>
+                <a:ea typeface="+mj-ea"/>
+                <a:cs typeface="+mj-cs"/>
+                <a:sym typeface="Calibri"/>
               </a:defRPr>
             </a:pPr>
           </a:p>
@@ -11328,7 +11716,7 @@
         <p:spPr>
           <a:xfrm>
             <a:off x="685800" y="4261103"/>
-            <a:ext cx="310896" cy="310921"/>
+            <a:ext cx="310896" cy="310923"/>
           </a:xfrm>
           <a:prstGeom prst="ellipse">
             <a:avLst/>
@@ -11349,6 +11737,10 @@
                 <a:solidFill>
                   <a:srgbClr val="FFFFFF"/>
                 </a:solidFill>
+                <a:latin typeface="+mj-lt"/>
+                <a:ea typeface="+mj-ea"/>
+                <a:cs typeface="+mj-cs"/>
+                <a:sym typeface="Calibri"/>
               </a:defRPr>
             </a:pPr>
           </a:p>
@@ -11462,7 +11854,7 @@
         <p:spPr>
           <a:xfrm>
             <a:off x="685800" y="4974335"/>
-            <a:ext cx="310896" cy="310921"/>
+            <a:ext cx="310896" cy="310923"/>
           </a:xfrm>
           <a:prstGeom prst="ellipse">
             <a:avLst/>
@@ -11483,6 +11875,10 @@
                 <a:solidFill>
                   <a:srgbClr val="FFFFFF"/>
                 </a:solidFill>
+                <a:latin typeface="+mj-lt"/>
+                <a:ea typeface="+mj-ea"/>
+                <a:cs typeface="+mj-cs"/>
+                <a:sym typeface="Calibri"/>
               </a:defRPr>
             </a:pPr>
           </a:p>
@@ -11596,7 +11992,7 @@
         <p:spPr>
           <a:xfrm>
             <a:off x="9098280" y="5349240"/>
-            <a:ext cx="1005846" cy="1005846"/>
+            <a:ext cx="1005847" cy="1005847"/>
           </a:xfrm>
           <a:custGeom>
             <a:avLst/>
@@ -11656,10 +12052,6 @@
                 <a:solidFill>
                   <a:srgbClr val="FFFFFF"/>
                 </a:solidFill>
-                <a:latin typeface="+mn-lt"/>
-                <a:ea typeface="+mn-ea"/>
-                <a:cs typeface="+mn-cs"/>
-                <a:sym typeface="Helvetica"/>
               </a:defRPr>
             </a:pPr>
           </a:p>
@@ -11674,7 +12066,7 @@
         <p:spPr>
           <a:xfrm>
             <a:off x="9381742" y="5614415"/>
-            <a:ext cx="438919" cy="438919"/>
+            <a:ext cx="438920" cy="438920"/>
           </a:xfrm>
           <a:custGeom>
             <a:avLst/>
@@ -11740,10 +12132,6 @@
                 <a:solidFill>
                   <a:srgbClr val="FFFFFF"/>
                 </a:solidFill>
-                <a:latin typeface="+mn-lt"/>
-                <a:ea typeface="+mn-ea"/>
-                <a:cs typeface="+mn-cs"/>
-                <a:sym typeface="Helvetica"/>
               </a:defRPr>
             </a:pPr>
           </a:p>
@@ -11758,7 +12146,7 @@
         <p:spPr>
           <a:xfrm>
             <a:off x="9052559" y="6464808"/>
-            <a:ext cx="1097287" cy="7"/>
+            <a:ext cx="1097288" cy="8"/>
           </a:xfrm>
           <a:prstGeom prst="line">
             <a:avLst/>
@@ -11807,10 +12195,6 @@
                 <a:solidFill>
                   <a:srgbClr val="FFFFFF"/>
                 </a:solidFill>
-                <a:latin typeface="+mn-lt"/>
-                <a:ea typeface="+mn-ea"/>
-                <a:cs typeface="+mn-cs"/>
-                <a:sym typeface="Helvetica"/>
               </a:defRPr>
             </a:pPr>
           </a:p>
@@ -11846,10 +12230,6 @@
                 <a:solidFill>
                   <a:srgbClr val="FFFFFF"/>
                 </a:solidFill>
-                <a:latin typeface="+mn-lt"/>
-                <a:ea typeface="+mn-ea"/>
-                <a:cs typeface="+mn-cs"/>
-                <a:sym typeface="Helvetica"/>
               </a:defRPr>
             </a:pPr>
           </a:p>
@@ -11863,10 +12243,10 @@
         </p:nvGrpSpPr>
         <p:grpSpPr>
           <a:xfrm>
-            <a:off x="8412480" y="6647688"/>
-            <a:ext cx="2468894" cy="274334"/>
-            <a:chOff x="0" y="0"/>
-            <a:chExt cx="2468892" cy="274333"/>
+            <a:off x="8412480" y="6647687"/>
+            <a:ext cx="2468896" cy="274337"/>
+            <a:chOff x="0" y="-1"/>
+            <a:chExt cx="2468895" cy="274336"/>
           </a:xfrm>
         </p:grpSpPr>
         <p:sp>
@@ -11877,8 +12257,8 @@
           </p:nvSpPr>
           <p:spPr>
             <a:xfrm>
-              <a:off x="0" y="-1"/>
-              <a:ext cx="2468893" cy="274335"/>
+              <a:off x="0" y="-2"/>
+              <a:ext cx="2468896" cy="274338"/>
             </a:xfrm>
             <a:prstGeom prst="roundRect">
               <a:avLst>
@@ -11905,10 +12285,6 @@
                   <a:solidFill>
                     <a:srgbClr val="FFFFFF"/>
                   </a:solidFill>
-                  <a:latin typeface="+mn-lt"/>
-                  <a:ea typeface="+mn-ea"/>
-                  <a:cs typeface="+mn-cs"/>
-                  <a:sym typeface="Helvetica"/>
                 </a:defRPr>
               </a:pPr>
             </a:p>
@@ -12049,7 +12425,7 @@
       </p:grpSpPr>
       <p:sp>
         <p:nvSpPr>
-          <p:cNvPr id="519" name="TextBox 1"/>
+          <p:cNvPr id="524" name="TextBox 1"/>
           <p:cNvSpPr txBox="1"/>
           <p:nvPr/>
         </p:nvSpPr>
@@ -12097,7 +12473,7 @@
       </p:sp>
       <p:sp>
         <p:nvSpPr>
-          <p:cNvPr id="520" name="TextBox 2"/>
+          <p:cNvPr id="525" name="TextBox 2"/>
           <p:cNvSpPr txBox="1"/>
           <p:nvPr/>
         </p:nvSpPr>
@@ -12145,7 +12521,7 @@
       </p:sp>
       <p:sp>
         <p:nvSpPr>
-          <p:cNvPr id="521" name="TextBox 3"/>
+          <p:cNvPr id="526" name="TextBox 3"/>
           <p:cNvSpPr txBox="1"/>
           <p:nvPr/>
         </p:nvSpPr>
@@ -12193,14 +12569,14 @@
       </p:sp>
       <p:sp>
         <p:nvSpPr>
-          <p:cNvPr id="522" name="Connector 4"/>
+          <p:cNvPr id="527" name="Connector 4"/>
           <p:cNvSpPr/>
           <p:nvPr/>
         </p:nvSpPr>
         <p:spPr>
           <a:xfrm>
             <a:off x="685795" y="1911094"/>
-            <a:ext cx="822969" cy="11"/>
+            <a:ext cx="822969" cy="12"/>
           </a:xfrm>
           <a:prstGeom prst="line">
             <a:avLst/>
@@ -12221,7 +12597,7 @@
       </p:sp>
       <p:sp>
         <p:nvSpPr>
-          <p:cNvPr id="523" name="Oval 5"/>
+          <p:cNvPr id="528" name="Oval 5"/>
           <p:cNvSpPr/>
           <p:nvPr/>
         </p:nvSpPr>
@@ -12249,10 +12625,6 @@
                 <a:solidFill>
                   <a:srgbClr val="FFFFFF"/>
                 </a:solidFill>
-                <a:latin typeface="+mn-lt"/>
-                <a:ea typeface="+mn-ea"/>
-                <a:cs typeface="+mn-cs"/>
-                <a:sym typeface="Helvetica"/>
               </a:defRPr>
             </a:pPr>
           </a:p>
@@ -12260,7 +12632,7 @@
       </p:sp>
       <p:sp>
         <p:nvSpPr>
-          <p:cNvPr id="524" name="Oval 6"/>
+          <p:cNvPr id="529" name="Oval 6"/>
           <p:cNvSpPr/>
           <p:nvPr/>
         </p:nvSpPr>
@@ -12288,10 +12660,6 @@
                 <a:solidFill>
                   <a:srgbClr val="FFFFFF"/>
                 </a:solidFill>
-                <a:latin typeface="+mn-lt"/>
-                <a:ea typeface="+mn-ea"/>
-                <a:cs typeface="+mn-cs"/>
-                <a:sym typeface="Helvetica"/>
               </a:defRPr>
             </a:pPr>
           </a:p>
@@ -12299,7 +12667,7 @@
       </p:sp>
       <p:sp>
         <p:nvSpPr>
-          <p:cNvPr id="525" name="Oval 7"/>
+          <p:cNvPr id="530" name="Oval 7"/>
           <p:cNvSpPr/>
           <p:nvPr/>
         </p:nvSpPr>
@@ -12327,10 +12695,6 @@
                 <a:solidFill>
                   <a:srgbClr val="FFFFFF"/>
                 </a:solidFill>
-                <a:latin typeface="+mn-lt"/>
-                <a:ea typeface="+mn-ea"/>
-                <a:cs typeface="+mn-cs"/>
-                <a:sym typeface="Helvetica"/>
               </a:defRPr>
             </a:pPr>
           </a:p>
@@ -12338,7 +12702,7 @@
       </p:sp>
       <p:sp>
         <p:nvSpPr>
-          <p:cNvPr id="526" name="Rectangle 8"/>
+          <p:cNvPr id="531" name="Rectangle 8"/>
           <p:cNvSpPr/>
           <p:nvPr/>
         </p:nvSpPr>
@@ -12368,10 +12732,6 @@
                 <a:solidFill>
                   <a:srgbClr val="FFFFFF"/>
                 </a:solidFill>
-                <a:latin typeface="+mn-lt"/>
-                <a:ea typeface="+mn-ea"/>
-                <a:cs typeface="+mn-cs"/>
-                <a:sym typeface="Helvetica"/>
               </a:defRPr>
             </a:pPr>
           </a:p>
@@ -12379,14 +12739,14 @@
       </p:sp>
       <p:sp>
         <p:nvSpPr>
-          <p:cNvPr id="527" name="Rectangle 9"/>
+          <p:cNvPr id="532" name="Rectangle 9"/>
           <p:cNvSpPr/>
           <p:nvPr/>
         </p:nvSpPr>
         <p:spPr>
           <a:xfrm>
             <a:off x="685798" y="2304288"/>
-            <a:ext cx="73164" cy="1417324"/>
+            <a:ext cx="73165" cy="1417324"/>
           </a:xfrm>
           <a:prstGeom prst="rect">
             <a:avLst/>
@@ -12407,10 +12767,6 @@
                 <a:solidFill>
                   <a:srgbClr val="FFFFFF"/>
                 </a:solidFill>
-                <a:latin typeface="+mn-lt"/>
-                <a:ea typeface="+mn-ea"/>
-                <a:cs typeface="+mn-cs"/>
-                <a:sym typeface="Helvetica"/>
               </a:defRPr>
             </a:pPr>
           </a:p>
@@ -12418,28 +12774,28 @@
       </p:sp>
       <p:grpSp>
         <p:nvGrpSpPr>
-          <p:cNvPr id="530" name="Rounded Rectangle 10"/>
+          <p:cNvPr id="535" name="Rounded Rectangle 10"/>
           <p:cNvGrpSpPr/>
           <p:nvPr/>
         </p:nvGrpSpPr>
         <p:grpSpPr>
           <a:xfrm>
-            <a:off x="941823" y="2468866"/>
-            <a:ext cx="1051586" cy="310921"/>
-            <a:chOff x="0" y="-1"/>
-            <a:chExt cx="1051584" cy="310920"/>
+            <a:off x="941822" y="2468864"/>
+            <a:ext cx="1051588" cy="310924"/>
+            <a:chOff x="0" y="0"/>
+            <a:chExt cx="1051586" cy="310922"/>
           </a:xfrm>
         </p:grpSpPr>
         <p:sp>
           <p:nvSpPr>
-            <p:cNvPr id="528" name="圓角矩形"/>
+            <p:cNvPr id="533" name="圓角矩形"/>
             <p:cNvSpPr/>
             <p:nvPr/>
           </p:nvSpPr>
           <p:spPr>
             <a:xfrm>
-              <a:off x="-1" y="-2"/>
-              <a:ext cx="1051585" cy="310922"/>
+              <a:off x="-1" y="-1"/>
+              <a:ext cx="1051587" cy="310923"/>
             </a:xfrm>
             <a:prstGeom prst="roundRect">
               <a:avLst>
@@ -12466,10 +12822,6 @@
                   <a:solidFill>
                     <a:srgbClr val="FFFFFF"/>
                   </a:solidFill>
-                  <a:latin typeface="+mn-lt"/>
-                  <a:ea typeface="+mn-ea"/>
-                  <a:cs typeface="+mn-cs"/>
-                  <a:sym typeface="Helvetica"/>
                 </a:defRPr>
               </a:pPr>
             </a:p>
@@ -12477,13 +12829,13 @@
         </p:sp>
         <p:sp>
           <p:nvSpPr>
-            <p:cNvPr id="529" name="cc-new"/>
+            <p:cNvPr id="534" name="cc-new"/>
             <p:cNvSpPr txBox="1"/>
             <p:nvPr/>
           </p:nvSpPr>
           <p:spPr>
             <a:xfrm>
-              <a:off x="244177" y="66550"/>
+              <a:off x="244177" y="66551"/>
               <a:ext cx="563216" cy="177801"/>
             </a:xfrm>
             <a:prstGeom prst="rect">
@@ -12529,7 +12881,7 @@
       </p:grpSp>
       <p:sp>
         <p:nvSpPr>
-          <p:cNvPr id="531" name="TextBox 11"/>
+          <p:cNvPr id="536" name="TextBox 11"/>
           <p:cNvSpPr txBox="1"/>
           <p:nvPr/>
         </p:nvSpPr>
@@ -12577,14 +12929,14 @@
       </p:sp>
       <p:sp>
         <p:nvSpPr>
-          <p:cNvPr id="532" name="Rectangle 12"/>
+          <p:cNvPr id="537" name="Rectangle 12"/>
           <p:cNvSpPr/>
           <p:nvPr/>
         </p:nvSpPr>
         <p:spPr>
           <a:xfrm>
             <a:off x="941832" y="2953511"/>
-            <a:ext cx="82307" cy="82297"/>
+            <a:ext cx="82308" cy="82297"/>
           </a:xfrm>
           <a:prstGeom prst="rect">
             <a:avLst/>
@@ -12605,10 +12957,6 @@
                 <a:solidFill>
                   <a:srgbClr val="FFFFFF"/>
                 </a:solidFill>
-                <a:latin typeface="+mn-lt"/>
-                <a:ea typeface="+mn-ea"/>
-                <a:cs typeface="+mn-cs"/>
-                <a:sym typeface="Helvetica"/>
               </a:defRPr>
             </a:pPr>
           </a:p>
@@ -12616,7 +12964,7 @@
       </p:sp>
       <p:sp>
         <p:nvSpPr>
-          <p:cNvPr id="533" name="TextBox 13"/>
+          <p:cNvPr id="538" name="TextBox 13"/>
           <p:cNvSpPr txBox="1"/>
           <p:nvPr/>
         </p:nvSpPr>
@@ -12664,14 +13012,14 @@
       </p:sp>
       <p:sp>
         <p:nvSpPr>
-          <p:cNvPr id="534" name="Rectangle 14"/>
+          <p:cNvPr id="539" name="Rectangle 14"/>
           <p:cNvSpPr/>
           <p:nvPr/>
         </p:nvSpPr>
         <p:spPr>
           <a:xfrm>
             <a:off x="941832" y="3227832"/>
-            <a:ext cx="82307" cy="82307"/>
+            <a:ext cx="82308" cy="82308"/>
           </a:xfrm>
           <a:prstGeom prst="rect">
             <a:avLst/>
@@ -12692,10 +13040,6 @@
                 <a:solidFill>
                   <a:srgbClr val="FFFFFF"/>
                 </a:solidFill>
-                <a:latin typeface="+mn-lt"/>
-                <a:ea typeface="+mn-ea"/>
-                <a:cs typeface="+mn-cs"/>
-                <a:sym typeface="Helvetica"/>
               </a:defRPr>
             </a:pPr>
           </a:p>
@@ -12703,7 +13047,7 @@
       </p:sp>
       <p:sp>
         <p:nvSpPr>
-          <p:cNvPr id="535" name="TextBox 15"/>
+          <p:cNvPr id="540" name="TextBox 15"/>
           <p:cNvSpPr txBox="1"/>
           <p:nvPr/>
         </p:nvSpPr>
@@ -12751,14 +13095,14 @@
       </p:sp>
       <p:sp>
         <p:nvSpPr>
-          <p:cNvPr id="536" name="Rectangle 16"/>
+          <p:cNvPr id="541" name="Rectangle 16"/>
           <p:cNvSpPr/>
           <p:nvPr/>
         </p:nvSpPr>
         <p:spPr>
           <a:xfrm>
             <a:off x="941832" y="3502152"/>
-            <a:ext cx="82307" cy="82307"/>
+            <a:ext cx="82308" cy="82308"/>
           </a:xfrm>
           <a:prstGeom prst="rect">
             <a:avLst/>
@@ -12779,10 +13123,6 @@
                 <a:solidFill>
                   <a:srgbClr val="FFFFFF"/>
                 </a:solidFill>
-                <a:latin typeface="+mn-lt"/>
-                <a:ea typeface="+mn-ea"/>
-                <a:cs typeface="+mn-cs"/>
-                <a:sym typeface="Helvetica"/>
               </a:defRPr>
             </a:pPr>
           </a:p>
@@ -12790,7 +13130,7 @@
       </p:sp>
       <p:sp>
         <p:nvSpPr>
-          <p:cNvPr id="537" name="TextBox 17"/>
+          <p:cNvPr id="542" name="TextBox 17"/>
           <p:cNvSpPr txBox="1"/>
           <p:nvPr/>
         </p:nvSpPr>
@@ -12838,14 +13178,14 @@
       </p:sp>
       <p:sp>
         <p:nvSpPr>
-          <p:cNvPr id="538" name="Oval 18"/>
+          <p:cNvPr id="543" name="Oval 18"/>
           <p:cNvSpPr/>
           <p:nvPr/>
         </p:nvSpPr>
         <p:spPr>
           <a:xfrm>
             <a:off x="2729207" y="4041647"/>
-            <a:ext cx="1371621" cy="1371621"/>
+            <a:ext cx="1371623" cy="1371623"/>
           </a:xfrm>
           <a:prstGeom prst="ellipse">
             <a:avLst/>
@@ -12866,10 +13206,6 @@
                 <a:solidFill>
                   <a:srgbClr val="FFFFFF"/>
                 </a:solidFill>
-                <a:latin typeface="+mn-lt"/>
-                <a:ea typeface="+mn-ea"/>
-                <a:cs typeface="+mn-cs"/>
-                <a:sym typeface="Helvetica"/>
               </a:defRPr>
             </a:pPr>
           </a:p>
@@ -12877,14 +13213,14 @@
       </p:sp>
       <p:sp>
         <p:nvSpPr>
-          <p:cNvPr id="539" name="TextBox 19"/>
+          <p:cNvPr id="544" name="TextBox 19"/>
           <p:cNvSpPr txBox="1"/>
           <p:nvPr/>
         </p:nvSpPr>
         <p:spPr>
           <a:xfrm>
             <a:off x="2729207" y="4169664"/>
-            <a:ext cx="1371612" cy="177801"/>
+            <a:ext cx="1371613" cy="177801"/>
           </a:xfrm>
           <a:prstGeom prst="rect">
             <a:avLst/>
@@ -12925,14 +13261,14 @@
       </p:sp>
       <p:sp>
         <p:nvSpPr>
-          <p:cNvPr id="540" name="TextBox 20"/>
+          <p:cNvPr id="545" name="TextBox 20"/>
           <p:cNvSpPr txBox="1"/>
           <p:nvPr/>
         </p:nvSpPr>
         <p:spPr>
           <a:xfrm>
             <a:off x="2729207" y="4575047"/>
-            <a:ext cx="1371612" cy="304801"/>
+            <a:ext cx="1371613" cy="304801"/>
           </a:xfrm>
           <a:prstGeom prst="rect">
             <a:avLst/>
@@ -12973,14 +13309,14 @@
       </p:sp>
       <p:sp>
         <p:nvSpPr>
-          <p:cNvPr id="541" name="Connector 21"/>
+          <p:cNvPr id="546" name="Connector 21"/>
           <p:cNvSpPr/>
           <p:nvPr/>
         </p:nvSpPr>
         <p:spPr>
           <a:xfrm>
             <a:off x="4100807" y="4727447"/>
-            <a:ext cx="411486" cy="11"/>
+            <a:ext cx="411486" cy="12"/>
           </a:xfrm>
           <a:prstGeom prst="line">
             <a:avLst/>
@@ -13001,14 +13337,14 @@
       </p:sp>
       <p:sp>
         <p:nvSpPr>
-          <p:cNvPr id="542" name="Oval 22"/>
+          <p:cNvPr id="547" name="Oval 22"/>
           <p:cNvSpPr/>
           <p:nvPr/>
         </p:nvSpPr>
         <p:spPr>
           <a:xfrm>
             <a:off x="4512288" y="4041647"/>
-            <a:ext cx="1371621" cy="1371621"/>
+            <a:ext cx="1371623" cy="1371623"/>
           </a:xfrm>
           <a:prstGeom prst="ellipse">
             <a:avLst/>
@@ -13029,10 +13365,6 @@
                 <a:solidFill>
                   <a:srgbClr val="FFFFFF"/>
                 </a:solidFill>
-                <a:latin typeface="+mn-lt"/>
-                <a:ea typeface="+mn-ea"/>
-                <a:cs typeface="+mn-cs"/>
-                <a:sym typeface="Helvetica"/>
               </a:defRPr>
             </a:pPr>
           </a:p>
@@ -13040,14 +13372,14 @@
       </p:sp>
       <p:sp>
         <p:nvSpPr>
-          <p:cNvPr id="543" name="TextBox 23"/>
+          <p:cNvPr id="548" name="TextBox 23"/>
           <p:cNvSpPr txBox="1"/>
           <p:nvPr/>
         </p:nvSpPr>
         <p:spPr>
           <a:xfrm>
             <a:off x="4512288" y="4169664"/>
-            <a:ext cx="1371611" cy="177801"/>
+            <a:ext cx="1371612" cy="177801"/>
           </a:xfrm>
           <a:prstGeom prst="rect">
             <a:avLst/>
@@ -13088,14 +13420,14 @@
       </p:sp>
       <p:sp>
         <p:nvSpPr>
-          <p:cNvPr id="544" name="TextBox 24"/>
+          <p:cNvPr id="549" name="TextBox 24"/>
           <p:cNvSpPr txBox="1"/>
           <p:nvPr/>
         </p:nvSpPr>
         <p:spPr>
           <a:xfrm>
             <a:off x="4512288" y="4575047"/>
-            <a:ext cx="1371611" cy="304801"/>
+            <a:ext cx="1371612" cy="304801"/>
           </a:xfrm>
           <a:prstGeom prst="rect">
             <a:avLst/>
@@ -13136,14 +13468,14 @@
       </p:sp>
       <p:sp>
         <p:nvSpPr>
-          <p:cNvPr id="545" name="Connector 25"/>
+          <p:cNvPr id="550" name="Connector 25"/>
           <p:cNvSpPr/>
           <p:nvPr/>
         </p:nvSpPr>
         <p:spPr>
           <a:xfrm>
             <a:off x="5883888" y="4727447"/>
-            <a:ext cx="411486" cy="11"/>
+            <a:ext cx="411486" cy="12"/>
           </a:xfrm>
           <a:prstGeom prst="line">
             <a:avLst/>
@@ -13164,14 +13496,14 @@
       </p:sp>
       <p:sp>
         <p:nvSpPr>
-          <p:cNvPr id="546" name="Oval 26"/>
+          <p:cNvPr id="551" name="Oval 26"/>
           <p:cNvSpPr/>
           <p:nvPr/>
         </p:nvSpPr>
         <p:spPr>
           <a:xfrm>
             <a:off x="6295368" y="4041647"/>
-            <a:ext cx="1371621" cy="1371621"/>
+            <a:ext cx="1371623" cy="1371623"/>
           </a:xfrm>
           <a:prstGeom prst="ellipse">
             <a:avLst/>
@@ -13192,10 +13524,6 @@
                 <a:solidFill>
                   <a:srgbClr val="FFFFFF"/>
                 </a:solidFill>
-                <a:latin typeface="+mn-lt"/>
-                <a:ea typeface="+mn-ea"/>
-                <a:cs typeface="+mn-cs"/>
-                <a:sym typeface="Helvetica"/>
               </a:defRPr>
             </a:pPr>
           </a:p>
@@ -13203,14 +13531,14 @@
       </p:sp>
       <p:sp>
         <p:nvSpPr>
-          <p:cNvPr id="547" name="TextBox 27"/>
+          <p:cNvPr id="552" name="TextBox 27"/>
           <p:cNvSpPr txBox="1"/>
           <p:nvPr/>
         </p:nvSpPr>
         <p:spPr>
           <a:xfrm>
             <a:off x="6295368" y="4169664"/>
-            <a:ext cx="1371611" cy="177801"/>
+            <a:ext cx="1371612" cy="177801"/>
           </a:xfrm>
           <a:prstGeom prst="rect">
             <a:avLst/>
@@ -13251,14 +13579,14 @@
       </p:sp>
       <p:sp>
         <p:nvSpPr>
-          <p:cNvPr id="548" name="TextBox 28"/>
+          <p:cNvPr id="553" name="TextBox 28"/>
           <p:cNvSpPr txBox="1"/>
           <p:nvPr/>
         </p:nvSpPr>
         <p:spPr>
           <a:xfrm>
             <a:off x="6295368" y="4575047"/>
-            <a:ext cx="1371611" cy="304801"/>
+            <a:ext cx="1371612" cy="304801"/>
           </a:xfrm>
           <a:prstGeom prst="rect">
             <a:avLst/>
@@ -13299,14 +13627,14 @@
       </p:sp>
       <p:sp>
         <p:nvSpPr>
-          <p:cNvPr id="549" name="Connector 29"/>
+          <p:cNvPr id="554" name="Connector 29"/>
           <p:cNvSpPr/>
           <p:nvPr/>
         </p:nvSpPr>
         <p:spPr>
           <a:xfrm>
             <a:off x="7666969" y="4727447"/>
-            <a:ext cx="411486" cy="11"/>
+            <a:ext cx="411486" cy="12"/>
           </a:xfrm>
           <a:prstGeom prst="line">
             <a:avLst/>
@@ -13327,14 +13655,14 @@
       </p:sp>
       <p:sp>
         <p:nvSpPr>
-          <p:cNvPr id="550" name="Oval 30"/>
+          <p:cNvPr id="555" name="Oval 30"/>
           <p:cNvSpPr/>
           <p:nvPr/>
         </p:nvSpPr>
         <p:spPr>
           <a:xfrm>
             <a:off x="8078447" y="4041647"/>
-            <a:ext cx="1371621" cy="1371621"/>
+            <a:ext cx="1371623" cy="1371623"/>
           </a:xfrm>
           <a:prstGeom prst="ellipse">
             <a:avLst/>
@@ -13355,10 +13683,6 @@
                 <a:solidFill>
                   <a:srgbClr val="FFFFFF"/>
                 </a:solidFill>
-                <a:latin typeface="+mn-lt"/>
-                <a:ea typeface="+mn-ea"/>
-                <a:cs typeface="+mn-cs"/>
-                <a:sym typeface="Helvetica"/>
               </a:defRPr>
             </a:pPr>
           </a:p>
@@ -13366,14 +13690,14 @@
       </p:sp>
       <p:sp>
         <p:nvSpPr>
-          <p:cNvPr id="551" name="TextBox 31"/>
+          <p:cNvPr id="556" name="TextBox 31"/>
           <p:cNvSpPr txBox="1"/>
           <p:nvPr/>
         </p:nvSpPr>
         <p:spPr>
           <a:xfrm>
             <a:off x="8078447" y="4169664"/>
-            <a:ext cx="1371612" cy="177801"/>
+            <a:ext cx="1371613" cy="177801"/>
           </a:xfrm>
           <a:prstGeom prst="rect">
             <a:avLst/>
@@ -13414,14 +13738,14 @@
       </p:sp>
       <p:sp>
         <p:nvSpPr>
-          <p:cNvPr id="552" name="TextBox 32"/>
+          <p:cNvPr id="557" name="TextBox 32"/>
           <p:cNvSpPr txBox="1"/>
           <p:nvPr/>
         </p:nvSpPr>
         <p:spPr>
           <a:xfrm>
             <a:off x="8078447" y="4575047"/>
-            <a:ext cx="1371612" cy="304801"/>
+            <a:ext cx="1371613" cy="304801"/>
           </a:xfrm>
           <a:prstGeom prst="rect">
             <a:avLst/>
@@ -13462,7 +13786,7 @@
       </p:sp>
       <p:sp>
         <p:nvSpPr>
-          <p:cNvPr id="553" name="TextBox 33"/>
+          <p:cNvPr id="558" name="TextBox 33"/>
           <p:cNvSpPr txBox="1"/>
           <p:nvPr/>
         </p:nvSpPr>
@@ -13510,14 +13834,14 @@
       </p:sp>
       <p:sp>
         <p:nvSpPr>
-          <p:cNvPr id="554" name="TextBox 533"/>
+          <p:cNvPr id="559" name="TextBox 533"/>
           <p:cNvSpPr txBox="1"/>
           <p:nvPr/>
         </p:nvSpPr>
         <p:spPr>
           <a:xfrm>
             <a:off x="6675118" y="6428232"/>
-            <a:ext cx="4800607" cy="228601"/>
+            <a:ext cx="4800608" cy="228601"/>
           </a:xfrm>
           <a:prstGeom prst="rect">
             <a:avLst/>
@@ -13591,7 +13915,7 @@
       </p:grpSpPr>
       <p:sp>
         <p:nvSpPr>
-          <p:cNvPr id="556" name="TextBox 1"/>
+          <p:cNvPr id="561" name="TextBox 1"/>
           <p:cNvSpPr txBox="1"/>
           <p:nvPr/>
         </p:nvSpPr>
@@ -13639,7 +13963,7 @@
       </p:sp>
       <p:sp>
         <p:nvSpPr>
-          <p:cNvPr id="557" name="TextBox 2"/>
+          <p:cNvPr id="562" name="TextBox 2"/>
           <p:cNvSpPr txBox="1"/>
           <p:nvPr/>
         </p:nvSpPr>
@@ -13687,7 +14011,7 @@
       </p:sp>
       <p:sp>
         <p:nvSpPr>
-          <p:cNvPr id="558" name="Connector 3"/>
+          <p:cNvPr id="563" name="Connector 3"/>
           <p:cNvSpPr/>
           <p:nvPr/>
         </p:nvSpPr>
@@ -13715,7 +14039,7 @@
       </p:sp>
       <p:sp>
         <p:nvSpPr>
-          <p:cNvPr id="559" name="Oval 4"/>
+          <p:cNvPr id="564" name="Oval 4"/>
           <p:cNvSpPr/>
           <p:nvPr/>
         </p:nvSpPr>
@@ -13743,6 +14067,10 @@
                 <a:solidFill>
                   <a:srgbClr val="FFFFFF"/>
                 </a:solidFill>
+                <a:latin typeface="+mj-lt"/>
+                <a:ea typeface="+mj-ea"/>
+                <a:cs typeface="+mj-cs"/>
+                <a:sym typeface="Calibri"/>
               </a:defRPr>
             </a:pPr>
           </a:p>
@@ -13750,7 +14078,7 @@
       </p:sp>
       <p:sp>
         <p:nvSpPr>
-          <p:cNvPr id="560" name="Oval 5"/>
+          <p:cNvPr id="565" name="Oval 5"/>
           <p:cNvSpPr/>
           <p:nvPr/>
         </p:nvSpPr>
@@ -13778,6 +14106,10 @@
                 <a:solidFill>
                   <a:srgbClr val="FFFFFF"/>
                 </a:solidFill>
+                <a:latin typeface="+mj-lt"/>
+                <a:ea typeface="+mj-ea"/>
+                <a:cs typeface="+mj-cs"/>
+                <a:sym typeface="Calibri"/>
               </a:defRPr>
             </a:pPr>
           </a:p>
@@ -13785,7 +14117,7 @@
       </p:sp>
       <p:sp>
         <p:nvSpPr>
-          <p:cNvPr id="561" name="Oval 6"/>
+          <p:cNvPr id="566" name="Oval 6"/>
           <p:cNvSpPr/>
           <p:nvPr/>
         </p:nvSpPr>
@@ -13813,6 +14145,10 @@
                 <a:solidFill>
                   <a:srgbClr val="FFFFFF"/>
                 </a:solidFill>
+                <a:latin typeface="+mj-lt"/>
+                <a:ea typeface="+mj-ea"/>
+                <a:cs typeface="+mj-cs"/>
+                <a:sym typeface="Calibri"/>
               </a:defRPr>
             </a:pPr>
           </a:p>
@@ -13820,14 +14156,14 @@
       </p:sp>
       <p:sp>
         <p:nvSpPr>
-          <p:cNvPr id="562" name="Rectangle 7"/>
+          <p:cNvPr id="567" name="Rectangle 7"/>
           <p:cNvSpPr/>
           <p:nvPr/>
         </p:nvSpPr>
         <p:spPr>
           <a:xfrm>
             <a:off x="685798" y="2212848"/>
-            <a:ext cx="100598" cy="100597"/>
+            <a:ext cx="100599" cy="100598"/>
           </a:xfrm>
           <a:prstGeom prst="rect">
             <a:avLst/>
@@ -13848,6 +14184,10 @@
                 <a:solidFill>
                   <a:srgbClr val="FFFFFF"/>
                 </a:solidFill>
+                <a:latin typeface="+mj-lt"/>
+                <a:ea typeface="+mj-ea"/>
+                <a:cs typeface="+mj-cs"/>
+                <a:sym typeface="Calibri"/>
               </a:defRPr>
             </a:pPr>
           </a:p>
@@ -13855,7 +14195,7 @@
       </p:sp>
       <p:sp>
         <p:nvSpPr>
-          <p:cNvPr id="563" name="TextBox 8"/>
+          <p:cNvPr id="568" name="TextBox 8"/>
           <p:cNvSpPr txBox="1"/>
           <p:nvPr/>
         </p:nvSpPr>
@@ -13906,14 +14246,14 @@
       </p:sp>
       <p:sp>
         <p:nvSpPr>
-          <p:cNvPr id="564" name="Rectangle 9"/>
+          <p:cNvPr id="569" name="Rectangle 9"/>
           <p:cNvSpPr/>
           <p:nvPr/>
         </p:nvSpPr>
         <p:spPr>
           <a:xfrm>
             <a:off x="685798" y="2972305"/>
-            <a:ext cx="100598" cy="100597"/>
+            <a:ext cx="100599" cy="100598"/>
           </a:xfrm>
           <a:prstGeom prst="rect">
             <a:avLst/>
@@ -13934,6 +14274,10 @@
                 <a:solidFill>
                   <a:srgbClr val="FFFFFF"/>
                 </a:solidFill>
+                <a:latin typeface="+mj-lt"/>
+                <a:ea typeface="+mj-ea"/>
+                <a:cs typeface="+mj-cs"/>
+                <a:sym typeface="Calibri"/>
               </a:defRPr>
             </a:pPr>
           </a:p>
@@ -13941,7 +14285,7 @@
       </p:sp>
       <p:sp>
         <p:nvSpPr>
-          <p:cNvPr id="565" name="TextBox 10"/>
+          <p:cNvPr id="570" name="TextBox 10"/>
           <p:cNvSpPr txBox="1"/>
           <p:nvPr/>
         </p:nvSpPr>
@@ -13992,14 +14336,14 @@
       </p:sp>
       <p:sp>
         <p:nvSpPr>
-          <p:cNvPr id="566" name="Rectangle 11"/>
+          <p:cNvPr id="571" name="Rectangle 11"/>
           <p:cNvSpPr/>
           <p:nvPr/>
         </p:nvSpPr>
         <p:spPr>
           <a:xfrm>
             <a:off x="685798" y="3731767"/>
-            <a:ext cx="100598" cy="100597"/>
+            <a:ext cx="100599" cy="100598"/>
           </a:xfrm>
           <a:prstGeom prst="rect">
             <a:avLst/>
@@ -14020,6 +14364,10 @@
                 <a:solidFill>
                   <a:srgbClr val="FFFFFF"/>
                 </a:solidFill>
+                <a:latin typeface="+mj-lt"/>
+                <a:ea typeface="+mj-ea"/>
+                <a:cs typeface="+mj-cs"/>
+                <a:sym typeface="Calibri"/>
               </a:defRPr>
             </a:pPr>
           </a:p>
@@ -14027,7 +14375,7 @@
       </p:sp>
       <p:sp>
         <p:nvSpPr>
-          <p:cNvPr id="567" name="TextBox 12"/>
+          <p:cNvPr id="572" name="TextBox 12"/>
           <p:cNvSpPr txBox="1"/>
           <p:nvPr/>
         </p:nvSpPr>
@@ -14078,14 +14426,14 @@
       </p:sp>
       <p:sp>
         <p:nvSpPr>
-          <p:cNvPr id="568" name="Rectangle 13"/>
+          <p:cNvPr id="573" name="Rectangle 13"/>
           <p:cNvSpPr/>
           <p:nvPr/>
         </p:nvSpPr>
         <p:spPr>
           <a:xfrm>
             <a:off x="685798" y="4184648"/>
-            <a:ext cx="100598" cy="100597"/>
+            <a:ext cx="100599" cy="100598"/>
           </a:xfrm>
           <a:prstGeom prst="rect">
             <a:avLst/>
@@ -14106,6 +14454,10 @@
                 <a:solidFill>
                   <a:srgbClr val="FFFFFF"/>
                 </a:solidFill>
+                <a:latin typeface="+mj-lt"/>
+                <a:ea typeface="+mj-ea"/>
+                <a:cs typeface="+mj-cs"/>
+                <a:sym typeface="Calibri"/>
               </a:defRPr>
             </a:pPr>
           </a:p>
@@ -14113,7 +14465,7 @@
       </p:sp>
       <p:sp>
         <p:nvSpPr>
-          <p:cNvPr id="569" name="TextBox 14"/>
+          <p:cNvPr id="574" name="TextBox 14"/>
           <p:cNvSpPr txBox="1"/>
           <p:nvPr/>
         </p:nvSpPr>
@@ -14164,14 +14516,14 @@
       </p:sp>
       <p:sp>
         <p:nvSpPr>
-          <p:cNvPr id="570" name="TextBox 548"/>
+          <p:cNvPr id="575" name="TextBox 548"/>
           <p:cNvSpPr txBox="1"/>
           <p:nvPr/>
         </p:nvSpPr>
         <p:spPr>
           <a:xfrm>
             <a:off x="6675118" y="6428232"/>
-            <a:ext cx="4800607" cy="228601"/>
+            <a:ext cx="4800608" cy="228601"/>
           </a:xfrm>
           <a:prstGeom prst="rect">
             <a:avLst/>
@@ -14245,7 +14597,7 @@
       </p:grpSpPr>
       <p:sp>
         <p:nvSpPr>
-          <p:cNvPr id="572" name="Rectangle 1"/>
+          <p:cNvPr id="577" name="Rectangle 1"/>
           <p:cNvSpPr/>
           <p:nvPr/>
         </p:nvSpPr>
@@ -14273,10 +14625,6 @@
                 <a:solidFill>
                   <a:srgbClr val="FFFFFF"/>
                 </a:solidFill>
-                <a:latin typeface="+mn-lt"/>
-                <a:ea typeface="+mn-ea"/>
-                <a:cs typeface="+mn-cs"/>
-                <a:sym typeface="Helvetica"/>
               </a:defRPr>
             </a:pPr>
           </a:p>
@@ -14284,7 +14632,7 @@
       </p:sp>
       <p:sp>
         <p:nvSpPr>
-          <p:cNvPr id="573" name="TextBox 2"/>
+          <p:cNvPr id="578" name="TextBox 2"/>
           <p:cNvSpPr txBox="1"/>
           <p:nvPr/>
         </p:nvSpPr>
@@ -14332,7 +14680,7 @@
       </p:sp>
       <p:sp>
         <p:nvSpPr>
-          <p:cNvPr id="574" name="TextBox 3"/>
+          <p:cNvPr id="579" name="TextBox 3"/>
           <p:cNvSpPr txBox="1"/>
           <p:nvPr/>
         </p:nvSpPr>
@@ -14380,14 +14728,14 @@
       </p:sp>
       <p:sp>
         <p:nvSpPr>
-          <p:cNvPr id="575" name="Connector 4"/>
+          <p:cNvPr id="580" name="Connector 4"/>
           <p:cNvSpPr/>
           <p:nvPr/>
         </p:nvSpPr>
         <p:spPr>
           <a:xfrm>
             <a:off x="685795" y="1572766"/>
-            <a:ext cx="822969" cy="10"/>
+            <a:ext cx="822969" cy="11"/>
           </a:xfrm>
           <a:prstGeom prst="line">
             <a:avLst/>
@@ -14408,7 +14756,7 @@
       </p:sp>
       <p:sp>
         <p:nvSpPr>
-          <p:cNvPr id="576" name="Oval 5"/>
+          <p:cNvPr id="581" name="Oval 5"/>
           <p:cNvSpPr/>
           <p:nvPr/>
         </p:nvSpPr>
@@ -14436,10 +14784,6 @@
                 <a:solidFill>
                   <a:srgbClr val="FFFFFF"/>
                 </a:solidFill>
-                <a:latin typeface="+mn-lt"/>
-                <a:ea typeface="+mn-ea"/>
-                <a:cs typeface="+mn-cs"/>
-                <a:sym typeface="Helvetica"/>
               </a:defRPr>
             </a:pPr>
           </a:p>
@@ -14447,7 +14791,7 @@
       </p:sp>
       <p:sp>
         <p:nvSpPr>
-          <p:cNvPr id="577" name="Oval 6"/>
+          <p:cNvPr id="582" name="Oval 6"/>
           <p:cNvSpPr/>
           <p:nvPr/>
         </p:nvSpPr>
@@ -14475,10 +14819,6 @@
                 <a:solidFill>
                   <a:srgbClr val="FFFFFF"/>
                 </a:solidFill>
-                <a:latin typeface="+mn-lt"/>
-                <a:ea typeface="+mn-ea"/>
-                <a:cs typeface="+mn-cs"/>
-                <a:sym typeface="Helvetica"/>
               </a:defRPr>
             </a:pPr>
           </a:p>
@@ -14486,7 +14826,7 @@
       </p:sp>
       <p:sp>
         <p:nvSpPr>
-          <p:cNvPr id="578" name="Oval 7"/>
+          <p:cNvPr id="583" name="Oval 7"/>
           <p:cNvSpPr/>
           <p:nvPr/>
         </p:nvSpPr>
@@ -14514,10 +14854,6 @@
                 <a:solidFill>
                   <a:srgbClr val="FFFFFF"/>
                 </a:solidFill>
-                <a:latin typeface="+mn-lt"/>
-                <a:ea typeface="+mn-ea"/>
-                <a:cs typeface="+mn-cs"/>
-                <a:sym typeface="Helvetica"/>
               </a:defRPr>
             </a:pPr>
           </a:p>
@@ -14525,7 +14861,7 @@
       </p:sp>
       <p:sp>
         <p:nvSpPr>
-          <p:cNvPr id="579" name="TextBox 8"/>
+          <p:cNvPr id="584" name="TextBox 8"/>
           <p:cNvSpPr txBox="1"/>
           <p:nvPr/>
         </p:nvSpPr>
@@ -14573,7 +14909,7 @@
       </p:sp>
       <p:sp>
         <p:nvSpPr>
-          <p:cNvPr id="580" name="TextBox 9"/>
+          <p:cNvPr id="585" name="TextBox 9"/>
           <p:cNvSpPr txBox="1"/>
           <p:nvPr/>
         </p:nvSpPr>
@@ -14624,14 +14960,14 @@
       </p:sp>
       <p:sp>
         <p:nvSpPr>
-          <p:cNvPr id="581" name="Connector 10"/>
+          <p:cNvPr id="586" name="Connector 10"/>
           <p:cNvSpPr/>
           <p:nvPr/>
         </p:nvSpPr>
         <p:spPr>
           <a:xfrm>
             <a:off x="4288351" y="2606037"/>
-            <a:ext cx="10" cy="1325892"/>
+            <a:ext cx="11" cy="1325893"/>
           </a:xfrm>
           <a:prstGeom prst="line">
             <a:avLst/>
@@ -14652,14 +14988,14 @@
       </p:sp>
       <p:sp>
         <p:nvSpPr>
-          <p:cNvPr id="582" name="TextBox 11"/>
+          <p:cNvPr id="587" name="TextBox 11"/>
           <p:cNvSpPr txBox="1"/>
           <p:nvPr/>
         </p:nvSpPr>
         <p:spPr>
           <a:xfrm>
             <a:off x="4562671" y="2468877"/>
-            <a:ext cx="3053924" cy="558801"/>
+            <a:ext cx="3053925" cy="558801"/>
           </a:xfrm>
           <a:prstGeom prst="rect">
             <a:avLst/>
@@ -14700,14 +15036,14 @@
       </p:sp>
       <p:sp>
         <p:nvSpPr>
-          <p:cNvPr id="583" name="TextBox 12"/>
+          <p:cNvPr id="588" name="TextBox 12"/>
           <p:cNvSpPr txBox="1"/>
           <p:nvPr/>
         </p:nvSpPr>
         <p:spPr>
           <a:xfrm>
             <a:off x="4562671" y="3337559"/>
-            <a:ext cx="3053924" cy="215901"/>
+            <a:ext cx="3053925" cy="215901"/>
           </a:xfrm>
           <a:prstGeom prst="rect">
             <a:avLst/>
@@ -14751,14 +15087,14 @@
       </p:sp>
       <p:sp>
         <p:nvSpPr>
-          <p:cNvPr id="584" name="Connector 13"/>
+          <p:cNvPr id="589" name="Connector 13"/>
           <p:cNvSpPr/>
           <p:nvPr/>
         </p:nvSpPr>
         <p:spPr>
           <a:xfrm>
             <a:off x="7890905" y="2606037"/>
-            <a:ext cx="10" cy="1325892"/>
+            <a:ext cx="11" cy="1325893"/>
           </a:xfrm>
           <a:prstGeom prst="line">
             <a:avLst/>
@@ -14779,14 +15115,14 @@
       </p:sp>
       <p:sp>
         <p:nvSpPr>
-          <p:cNvPr id="585" name="TextBox 14"/>
+          <p:cNvPr id="590" name="TextBox 14"/>
           <p:cNvSpPr txBox="1"/>
           <p:nvPr/>
         </p:nvSpPr>
         <p:spPr>
           <a:xfrm>
             <a:off x="8165224" y="2468877"/>
-            <a:ext cx="3053923" cy="558801"/>
+            <a:ext cx="3053924" cy="558801"/>
           </a:xfrm>
           <a:prstGeom prst="rect">
             <a:avLst/>
@@ -14827,14 +15163,14 @@
       </p:sp>
       <p:sp>
         <p:nvSpPr>
-          <p:cNvPr id="586" name="TextBox 15"/>
+          <p:cNvPr id="591" name="TextBox 15"/>
           <p:cNvSpPr txBox="1"/>
           <p:nvPr/>
         </p:nvSpPr>
         <p:spPr>
           <a:xfrm>
             <a:off x="8165224" y="3337559"/>
-            <a:ext cx="3053923" cy="215901"/>
+            <a:ext cx="3053924" cy="215901"/>
           </a:xfrm>
           <a:prstGeom prst="rect">
             <a:avLst/>
@@ -14878,7 +15214,7 @@
       </p:sp>
       <p:sp>
         <p:nvSpPr>
-          <p:cNvPr id="587" name="TextBox 16"/>
+          <p:cNvPr id="592" name="TextBox 16"/>
           <p:cNvSpPr txBox="1"/>
           <p:nvPr/>
         </p:nvSpPr>
@@ -14926,7 +15262,7 @@
       </p:sp>
       <p:sp>
         <p:nvSpPr>
-          <p:cNvPr id="588" name="TextBox 17"/>
+          <p:cNvPr id="593" name="TextBox 17"/>
           <p:cNvSpPr txBox="1"/>
           <p:nvPr/>
         </p:nvSpPr>
@@ -14977,14 +15313,14 @@
       </p:sp>
       <p:sp>
         <p:nvSpPr>
-          <p:cNvPr id="589" name="Connector 18"/>
+          <p:cNvPr id="594" name="Connector 18"/>
           <p:cNvSpPr/>
           <p:nvPr/>
         </p:nvSpPr>
         <p:spPr>
           <a:xfrm>
             <a:off x="4288351" y="4343398"/>
-            <a:ext cx="10" cy="1325891"/>
+            <a:ext cx="11" cy="1325892"/>
           </a:xfrm>
           <a:prstGeom prst="line">
             <a:avLst/>
@@ -15005,14 +15341,14 @@
       </p:sp>
       <p:sp>
         <p:nvSpPr>
-          <p:cNvPr id="590" name="TextBox 19"/>
+          <p:cNvPr id="595" name="TextBox 19"/>
           <p:cNvSpPr txBox="1"/>
           <p:nvPr/>
         </p:nvSpPr>
         <p:spPr>
           <a:xfrm>
             <a:off x="4562671" y="4206240"/>
-            <a:ext cx="3053924" cy="558801"/>
+            <a:ext cx="3053925" cy="558801"/>
           </a:xfrm>
           <a:prstGeom prst="rect">
             <a:avLst/>
@@ -15053,14 +15389,14 @@
       </p:sp>
       <p:sp>
         <p:nvSpPr>
-          <p:cNvPr id="591" name="TextBox 20"/>
+          <p:cNvPr id="596" name="TextBox 20"/>
           <p:cNvSpPr txBox="1"/>
           <p:nvPr/>
         </p:nvSpPr>
         <p:spPr>
           <a:xfrm>
             <a:off x="4562671" y="5074920"/>
-            <a:ext cx="3053924" cy="464186"/>
+            <a:ext cx="3053925" cy="464186"/>
           </a:xfrm>
           <a:prstGeom prst="rect">
             <a:avLst/>
@@ -15104,14 +15440,14 @@
       </p:sp>
       <p:sp>
         <p:nvSpPr>
-          <p:cNvPr id="592" name="Connector 21"/>
+          <p:cNvPr id="597" name="Connector 21"/>
           <p:cNvSpPr/>
           <p:nvPr/>
         </p:nvSpPr>
         <p:spPr>
           <a:xfrm>
             <a:off x="7890905" y="4343398"/>
-            <a:ext cx="10" cy="1325891"/>
+            <a:ext cx="11" cy="1325892"/>
           </a:xfrm>
           <a:prstGeom prst="line">
             <a:avLst/>
@@ -15132,14 +15468,14 @@
       </p:sp>
       <p:sp>
         <p:nvSpPr>
-          <p:cNvPr id="593" name="TextBox 22"/>
+          <p:cNvPr id="598" name="TextBox 22"/>
           <p:cNvSpPr txBox="1"/>
           <p:nvPr/>
         </p:nvSpPr>
         <p:spPr>
           <a:xfrm>
             <a:off x="8165224" y="4206240"/>
-            <a:ext cx="3053923" cy="558801"/>
+            <a:ext cx="3053924" cy="558801"/>
           </a:xfrm>
           <a:prstGeom prst="rect">
             <a:avLst/>
@@ -15180,14 +15516,14 @@
       </p:sp>
       <p:sp>
         <p:nvSpPr>
-          <p:cNvPr id="594" name="TextBox 23"/>
+          <p:cNvPr id="599" name="TextBox 23"/>
           <p:cNvSpPr txBox="1"/>
           <p:nvPr/>
         </p:nvSpPr>
         <p:spPr>
           <a:xfrm>
             <a:off x="8165224" y="5074920"/>
-            <a:ext cx="3053923" cy="215901"/>
+            <a:ext cx="3053924" cy="215901"/>
           </a:xfrm>
           <a:prstGeom prst="rect">
             <a:avLst/>
@@ -15231,14 +15567,14 @@
       </p:sp>
       <p:sp>
         <p:nvSpPr>
-          <p:cNvPr id="595" name="TextBox 572"/>
+          <p:cNvPr id="600" name="TextBox 572"/>
           <p:cNvSpPr txBox="1"/>
           <p:nvPr/>
         </p:nvSpPr>
         <p:spPr>
           <a:xfrm>
             <a:off x="6675118" y="6428232"/>
-            <a:ext cx="4800607" cy="228601"/>
+            <a:ext cx="4800608" cy="228601"/>
           </a:xfrm>
           <a:prstGeom prst="rect">
             <a:avLst/>
@@ -15312,7 +15648,7 @@
       </p:grpSpPr>
       <p:sp>
         <p:nvSpPr>
-          <p:cNvPr id="597" name="TextBox 1"/>
+          <p:cNvPr id="602" name="TextBox 1"/>
           <p:cNvSpPr txBox="1"/>
           <p:nvPr/>
         </p:nvSpPr>
@@ -15360,7 +15696,7 @@
       </p:sp>
       <p:sp>
         <p:nvSpPr>
-          <p:cNvPr id="598" name="TextBox 2"/>
+          <p:cNvPr id="603" name="TextBox 2"/>
           <p:cNvSpPr txBox="1"/>
           <p:nvPr/>
         </p:nvSpPr>
@@ -15408,7 +15744,7 @@
       </p:sp>
       <p:sp>
         <p:nvSpPr>
-          <p:cNvPr id="599" name="Connector 3"/>
+          <p:cNvPr id="604" name="Connector 3"/>
           <p:cNvSpPr/>
           <p:nvPr/>
         </p:nvSpPr>
@@ -15436,7 +15772,7 @@
       </p:sp>
       <p:sp>
         <p:nvSpPr>
-          <p:cNvPr id="600" name="Oval 4"/>
+          <p:cNvPr id="605" name="Oval 4"/>
           <p:cNvSpPr/>
           <p:nvPr/>
         </p:nvSpPr>
@@ -15464,6 +15800,10 @@
                 <a:solidFill>
                   <a:srgbClr val="FFFFFF"/>
                 </a:solidFill>
+                <a:latin typeface="+mj-lt"/>
+                <a:ea typeface="+mj-ea"/>
+                <a:cs typeface="+mj-cs"/>
+                <a:sym typeface="Calibri"/>
               </a:defRPr>
             </a:pPr>
           </a:p>
@@ -15471,7 +15811,7 @@
       </p:sp>
       <p:sp>
         <p:nvSpPr>
-          <p:cNvPr id="601" name="Oval 5"/>
+          <p:cNvPr id="606" name="Oval 5"/>
           <p:cNvSpPr/>
           <p:nvPr/>
         </p:nvSpPr>
@@ -15499,6 +15839,10 @@
                 <a:solidFill>
                   <a:srgbClr val="FFFFFF"/>
                 </a:solidFill>
+                <a:latin typeface="+mj-lt"/>
+                <a:ea typeface="+mj-ea"/>
+                <a:cs typeface="+mj-cs"/>
+                <a:sym typeface="Calibri"/>
               </a:defRPr>
             </a:pPr>
           </a:p>
@@ -15506,7 +15850,7 @@
       </p:sp>
       <p:sp>
         <p:nvSpPr>
-          <p:cNvPr id="602" name="Oval 6"/>
+          <p:cNvPr id="607" name="Oval 6"/>
           <p:cNvSpPr/>
           <p:nvPr/>
         </p:nvSpPr>
@@ -15534,6 +15878,10 @@
                 <a:solidFill>
                   <a:srgbClr val="FFFFFF"/>
                 </a:solidFill>
+                <a:latin typeface="+mj-lt"/>
+                <a:ea typeface="+mj-ea"/>
+                <a:cs typeface="+mj-cs"/>
+                <a:sym typeface="Calibri"/>
               </a:defRPr>
             </a:pPr>
           </a:p>
@@ -15541,7 +15889,7 @@
       </p:sp>
       <p:sp>
         <p:nvSpPr>
-          <p:cNvPr id="603" name="Rectangle 7"/>
+          <p:cNvPr id="608" name="Rectangle 7"/>
           <p:cNvSpPr/>
           <p:nvPr/>
         </p:nvSpPr>
@@ -15571,6 +15919,10 @@
                 <a:solidFill>
                   <a:srgbClr val="FFFFFF"/>
                 </a:solidFill>
+                <a:latin typeface="+mj-lt"/>
+                <a:ea typeface="+mj-ea"/>
+                <a:cs typeface="+mj-cs"/>
+                <a:sym typeface="Calibri"/>
               </a:defRPr>
             </a:pPr>
           </a:p>
@@ -15578,14 +15930,14 @@
       </p:sp>
       <p:sp>
         <p:nvSpPr>
-          <p:cNvPr id="604" name="Rectangle 9"/>
+          <p:cNvPr id="609" name="Rectangle 9"/>
           <p:cNvSpPr/>
           <p:nvPr/>
         </p:nvSpPr>
         <p:spPr>
           <a:xfrm>
             <a:off x="630934" y="1975103"/>
-            <a:ext cx="310910" cy="54870"/>
+            <a:ext cx="310911" cy="54870"/>
           </a:xfrm>
           <a:prstGeom prst="rect">
             <a:avLst/>
@@ -15606,6 +15958,10 @@
                 <a:solidFill>
                   <a:srgbClr val="FFFFFF"/>
                 </a:solidFill>
+                <a:latin typeface="+mj-lt"/>
+                <a:ea typeface="+mj-ea"/>
+                <a:cs typeface="+mj-cs"/>
+                <a:sym typeface="Calibri"/>
               </a:defRPr>
             </a:pPr>
           </a:p>
@@ -15613,14 +15969,14 @@
       </p:sp>
       <p:sp>
         <p:nvSpPr>
-          <p:cNvPr id="605" name="Rectangle 10"/>
+          <p:cNvPr id="610" name="Rectangle 10"/>
           <p:cNvSpPr/>
           <p:nvPr/>
         </p:nvSpPr>
         <p:spPr>
           <a:xfrm>
             <a:off x="630936" y="1975103"/>
-            <a:ext cx="54870" cy="310909"/>
+            <a:ext cx="54870" cy="310910"/>
           </a:xfrm>
           <a:prstGeom prst="rect">
             <a:avLst/>
@@ -15641,6 +15997,10 @@
                 <a:solidFill>
                   <a:srgbClr val="FFFFFF"/>
                 </a:solidFill>
+                <a:latin typeface="+mj-lt"/>
+                <a:ea typeface="+mj-ea"/>
+                <a:cs typeface="+mj-cs"/>
+                <a:sym typeface="Calibri"/>
               </a:defRPr>
             </a:pPr>
           </a:p>
@@ -15648,28 +16008,28 @@
       </p:sp>
       <p:grpSp>
         <p:nvGrpSpPr>
-          <p:cNvPr id="608" name="Rounded Rectangle 11"/>
+          <p:cNvPr id="613" name="Rounded Rectangle 11"/>
           <p:cNvGrpSpPr/>
           <p:nvPr/>
         </p:nvGrpSpPr>
         <p:grpSpPr>
           <a:xfrm>
-            <a:off x="685789" y="5457636"/>
-            <a:ext cx="1024152" cy="310925"/>
-            <a:chOff x="0" y="-1"/>
-            <a:chExt cx="1024151" cy="310924"/>
+            <a:off x="685787" y="5457634"/>
+            <a:ext cx="1024155" cy="310928"/>
+            <a:chOff x="-1" y="0"/>
+            <a:chExt cx="1024153" cy="310926"/>
           </a:xfrm>
         </p:grpSpPr>
         <p:sp>
           <p:nvSpPr>
-            <p:cNvPr id="606" name="圓角矩形"/>
+            <p:cNvPr id="611" name="圓角矩形"/>
             <p:cNvSpPr/>
             <p:nvPr/>
           </p:nvSpPr>
           <p:spPr>
             <a:xfrm>
-              <a:off x="-1" y="-2"/>
-              <a:ext cx="1024152" cy="310926"/>
+              <a:off x="-2" y="-1"/>
+              <a:ext cx="1024155" cy="310927"/>
             </a:xfrm>
             <a:prstGeom prst="roundRect">
               <a:avLst>
@@ -15696,6 +16056,10 @@
                   <a:solidFill>
                     <a:srgbClr val="FFFFFF"/>
                   </a:solidFill>
+                  <a:latin typeface="+mj-lt"/>
+                  <a:ea typeface="+mj-ea"/>
+                  <a:cs typeface="+mj-cs"/>
+                  <a:sym typeface="Calibri"/>
                 </a:defRPr>
               </a:pPr>
             </a:p>
@@ -15703,13 +16067,13 @@
         </p:sp>
         <p:sp>
           <p:nvSpPr>
-            <p:cNvPr id="607" name="分類管理"/>
+            <p:cNvPr id="612" name="分類管理"/>
             <p:cNvSpPr txBox="1"/>
             <p:nvPr/>
           </p:nvSpPr>
           <p:spPr>
             <a:xfrm>
-              <a:off x="169811" y="47500"/>
+              <a:off x="169811" y="47501"/>
               <a:ext cx="684511" cy="215901"/>
             </a:xfrm>
             <a:prstGeom prst="rect">
@@ -15755,7 +16119,7 @@
       </p:grpSp>
       <p:sp>
         <p:nvSpPr>
-          <p:cNvPr id="609" name="Rectangle 12"/>
+          <p:cNvPr id="614" name="Rectangle 12"/>
           <p:cNvSpPr/>
           <p:nvPr/>
         </p:nvSpPr>
@@ -15785,6 +16149,10 @@
                 <a:solidFill>
                   <a:srgbClr val="FFFFFF"/>
                 </a:solidFill>
+                <a:latin typeface="+mj-lt"/>
+                <a:ea typeface="+mj-ea"/>
+                <a:cs typeface="+mj-cs"/>
+                <a:sym typeface="Calibri"/>
               </a:defRPr>
             </a:pPr>
           </a:p>
@@ -15792,14 +16160,14 @@
       </p:sp>
       <p:sp>
         <p:nvSpPr>
-          <p:cNvPr id="610" name="Rectangle 14"/>
+          <p:cNvPr id="615" name="Rectangle 14"/>
           <p:cNvSpPr/>
           <p:nvPr/>
         </p:nvSpPr>
         <p:spPr>
           <a:xfrm>
             <a:off x="6217644" y="1975103"/>
-            <a:ext cx="310909" cy="54870"/>
+            <a:ext cx="310910" cy="54870"/>
           </a:xfrm>
           <a:prstGeom prst="rect">
             <a:avLst/>
@@ -15820,6 +16188,10 @@
                 <a:solidFill>
                   <a:srgbClr val="FFFFFF"/>
                 </a:solidFill>
+                <a:latin typeface="+mj-lt"/>
+                <a:ea typeface="+mj-ea"/>
+                <a:cs typeface="+mj-cs"/>
+                <a:sym typeface="Calibri"/>
               </a:defRPr>
             </a:pPr>
           </a:p>
@@ -15827,14 +16199,14 @@
       </p:sp>
       <p:sp>
         <p:nvSpPr>
-          <p:cNvPr id="611" name="Rectangle 15"/>
+          <p:cNvPr id="616" name="Rectangle 15"/>
           <p:cNvSpPr/>
           <p:nvPr/>
         </p:nvSpPr>
         <p:spPr>
           <a:xfrm>
             <a:off x="6217644" y="1975103"/>
-            <a:ext cx="54870" cy="310909"/>
+            <a:ext cx="54870" cy="310910"/>
           </a:xfrm>
           <a:prstGeom prst="rect">
             <a:avLst/>
@@ -15855,6 +16227,10 @@
                 <a:solidFill>
                   <a:srgbClr val="FFFFFF"/>
                 </a:solidFill>
+                <a:latin typeface="+mj-lt"/>
+                <a:ea typeface="+mj-ea"/>
+                <a:cs typeface="+mj-cs"/>
+                <a:sym typeface="Calibri"/>
               </a:defRPr>
             </a:pPr>
           </a:p>
@@ -15862,28 +16238,28 @@
       </p:sp>
       <p:grpSp>
         <p:nvGrpSpPr>
-          <p:cNvPr id="614" name="Rounded Rectangle 16"/>
+          <p:cNvPr id="619" name="Rounded Rectangle 16"/>
           <p:cNvGrpSpPr/>
           <p:nvPr/>
         </p:nvGrpSpPr>
         <p:grpSpPr>
           <a:xfrm>
-            <a:off x="6272488" y="5457636"/>
-            <a:ext cx="1024159" cy="310925"/>
-            <a:chOff x="-1" y="-1"/>
-            <a:chExt cx="1024157" cy="310924"/>
+            <a:off x="6272487" y="5457634"/>
+            <a:ext cx="1024162" cy="310928"/>
+            <a:chOff x="-1" y="0"/>
+            <a:chExt cx="1024161" cy="310926"/>
           </a:xfrm>
         </p:grpSpPr>
         <p:sp>
           <p:nvSpPr>
-            <p:cNvPr id="612" name="圓角矩形"/>
+            <p:cNvPr id="617" name="圓角矩形"/>
             <p:cNvSpPr/>
             <p:nvPr/>
           </p:nvSpPr>
           <p:spPr>
             <a:xfrm>
-              <a:off x="-2" y="-2"/>
-              <a:ext cx="1024159" cy="310926"/>
+              <a:off x="-2" y="-1"/>
+              <a:ext cx="1024163" cy="310927"/>
             </a:xfrm>
             <a:prstGeom prst="roundRect">
               <a:avLst>
@@ -15910,6 +16286,10 @@
                   <a:solidFill>
                     <a:srgbClr val="FFFFFF"/>
                   </a:solidFill>
+                  <a:latin typeface="+mj-lt"/>
+                  <a:ea typeface="+mj-ea"/>
+                  <a:cs typeface="+mj-cs"/>
+                  <a:sym typeface="Calibri"/>
                 </a:defRPr>
               </a:pPr>
             </a:p>
@@ -15917,13 +16297,13 @@
         </p:sp>
         <p:sp>
           <p:nvSpPr>
-            <p:cNvPr id="613" name="任務看板"/>
+            <p:cNvPr id="618" name="任務看板"/>
             <p:cNvSpPr txBox="1"/>
             <p:nvPr/>
           </p:nvSpPr>
           <p:spPr>
             <a:xfrm>
-              <a:off x="200920" y="47500"/>
+              <a:off x="200921" y="47501"/>
               <a:ext cx="622301" cy="215901"/>
             </a:xfrm>
             <a:prstGeom prst="rect">
@@ -15969,14 +16349,14 @@
       </p:grpSp>
       <p:sp>
         <p:nvSpPr>
-          <p:cNvPr id="615" name="TextBox 241"/>
+          <p:cNvPr id="620" name="TextBox 241"/>
           <p:cNvSpPr txBox="1"/>
           <p:nvPr/>
         </p:nvSpPr>
         <p:spPr>
           <a:xfrm>
             <a:off x="6675118" y="6428232"/>
-            <a:ext cx="4800607" cy="228601"/>
+            <a:ext cx="4800608" cy="228601"/>
           </a:xfrm>
           <a:prstGeom prst="rect">
             <a:avLst/>
@@ -16017,28 +16397,28 @@
       </p:sp>
       <p:grpSp>
         <p:nvGrpSpPr>
-          <p:cNvPr id="618" name="Rounded Rectangle 269"/>
+          <p:cNvPr id="623" name="Rounded Rectangle 269"/>
           <p:cNvGrpSpPr/>
           <p:nvPr/>
         </p:nvGrpSpPr>
         <p:grpSpPr>
           <a:xfrm>
-            <a:off x="685795" y="1691638"/>
-            <a:ext cx="1353321" cy="292616"/>
-            <a:chOff x="-1" y="0"/>
-            <a:chExt cx="1353319" cy="292615"/>
+            <a:off x="685793" y="1691637"/>
+            <a:ext cx="1353325" cy="292619"/>
+            <a:chOff x="-1" y="-1"/>
+            <a:chExt cx="1353323" cy="292618"/>
           </a:xfrm>
         </p:grpSpPr>
         <p:sp>
           <p:nvSpPr>
-            <p:cNvPr id="616" name="圓角矩形"/>
+            <p:cNvPr id="621" name="圓角矩形"/>
             <p:cNvSpPr/>
             <p:nvPr/>
           </p:nvSpPr>
           <p:spPr>
             <a:xfrm>
-              <a:off x="-2" y="-1"/>
-              <a:ext cx="1353321" cy="292617"/>
+              <a:off x="-2" y="-2"/>
+              <a:ext cx="1353324" cy="292620"/>
             </a:xfrm>
             <a:prstGeom prst="roundRect">
               <a:avLst>
@@ -16065,10 +16445,6 @@
                   <a:solidFill>
                     <a:srgbClr val="FFFFFF"/>
                   </a:solidFill>
-                  <a:latin typeface="+mn-lt"/>
-                  <a:ea typeface="+mn-ea"/>
-                  <a:cs typeface="+mn-cs"/>
-                  <a:sym typeface="Helvetica"/>
                 </a:defRPr>
               </a:pPr>
             </a:p>
@@ -16076,13 +16452,13 @@
         </p:sp>
         <p:sp>
           <p:nvSpPr>
-            <p:cNvPr id="617" name="白色簡約視覺"/>
+            <p:cNvPr id="622" name="白色簡約視覺"/>
             <p:cNvSpPr txBox="1"/>
             <p:nvPr/>
           </p:nvSpPr>
           <p:spPr>
             <a:xfrm>
-              <a:off x="251206" y="44703"/>
+              <a:off x="251207" y="44703"/>
               <a:ext cx="850901" cy="203201"/>
             </a:xfrm>
             <a:prstGeom prst="rect">
@@ -16128,28 +16504,28 @@
       </p:grpSp>
       <p:grpSp>
         <p:nvGrpSpPr>
-          <p:cNvPr id="621" name="Rounded Rectangle 270"/>
+          <p:cNvPr id="626" name="Rounded Rectangle 270"/>
           <p:cNvGrpSpPr/>
           <p:nvPr/>
         </p:nvGrpSpPr>
         <p:grpSpPr>
           <a:xfrm>
-            <a:off x="2203703" y="1691638"/>
-            <a:ext cx="1517913" cy="292616"/>
-            <a:chOff x="-1" y="0"/>
-            <a:chExt cx="1517911" cy="292615"/>
+            <a:off x="2203702" y="1691637"/>
+            <a:ext cx="1517916" cy="292619"/>
+            <a:chOff x="-1" y="-1"/>
+            <a:chExt cx="1517915" cy="292618"/>
           </a:xfrm>
         </p:grpSpPr>
         <p:sp>
           <p:nvSpPr>
-            <p:cNvPr id="619" name="圓角矩形"/>
+            <p:cNvPr id="624" name="圓角矩形"/>
             <p:cNvSpPr/>
             <p:nvPr/>
           </p:nvSpPr>
           <p:spPr>
             <a:xfrm>
-              <a:off x="-2" y="-1"/>
-              <a:ext cx="1517913" cy="292617"/>
+              <a:off x="-2" y="-2"/>
+              <a:ext cx="1517916" cy="292620"/>
             </a:xfrm>
             <a:prstGeom prst="roundRect">
               <a:avLst>
@@ -16176,10 +16552,6 @@
                   <a:solidFill>
                     <a:srgbClr val="FFFFFF"/>
                   </a:solidFill>
-                  <a:latin typeface="+mn-lt"/>
-                  <a:ea typeface="+mn-ea"/>
-                  <a:cs typeface="+mn-cs"/>
-                  <a:sym typeface="Helvetica"/>
                 </a:defRPr>
               </a:pPr>
             </a:p>
@@ -16187,13 +16559,13 @@
         </p:sp>
         <p:sp>
           <p:nvSpPr>
-            <p:cNvPr id="620" name="側邊欄導覽重構"/>
+            <p:cNvPr id="625" name="側邊欄導覽重構"/>
             <p:cNvSpPr txBox="1"/>
             <p:nvPr/>
           </p:nvSpPr>
           <p:spPr>
             <a:xfrm>
-              <a:off x="263651" y="44703"/>
+              <a:off x="263652" y="44703"/>
               <a:ext cx="990601" cy="203201"/>
             </a:xfrm>
             <a:prstGeom prst="rect">
@@ -16239,28 +16611,28 @@
       </p:grpSp>
       <p:grpSp>
         <p:nvGrpSpPr>
-          <p:cNvPr id="624" name="Rounded Rectangle 271"/>
+          <p:cNvPr id="629" name="Rounded Rectangle 271"/>
           <p:cNvGrpSpPr/>
           <p:nvPr/>
         </p:nvGrpSpPr>
         <p:grpSpPr>
           <a:xfrm>
-            <a:off x="3886200" y="1691638"/>
-            <a:ext cx="1682498" cy="292616"/>
-            <a:chOff x="0" y="0"/>
-            <a:chExt cx="1682497" cy="292615"/>
+            <a:off x="3886200" y="1691637"/>
+            <a:ext cx="1682500" cy="292619"/>
+            <a:chOff x="0" y="-1"/>
+            <a:chExt cx="1682499" cy="292618"/>
           </a:xfrm>
         </p:grpSpPr>
         <p:sp>
           <p:nvSpPr>
-            <p:cNvPr id="622" name="圓角矩形"/>
+            <p:cNvPr id="627" name="圓角矩形"/>
             <p:cNvSpPr/>
             <p:nvPr/>
           </p:nvSpPr>
           <p:spPr>
             <a:xfrm>
-              <a:off x="0" y="-1"/>
-              <a:ext cx="1682498" cy="292617"/>
+              <a:off x="0" y="-2"/>
+              <a:ext cx="1682500" cy="292620"/>
             </a:xfrm>
             <a:prstGeom prst="roundRect">
               <a:avLst>
@@ -16287,10 +16659,6 @@
                   <a:solidFill>
                     <a:srgbClr val="FFFFFF"/>
                   </a:solidFill>
-                  <a:latin typeface="+mn-lt"/>
-                  <a:ea typeface="+mn-ea"/>
-                  <a:cs typeface="+mn-cs"/>
-                  <a:sym typeface="Helvetica"/>
                 </a:defRPr>
               </a:pPr>
             </a:p>
@@ -16298,7 +16666,7 @@
         </p:sp>
         <p:sp>
           <p:nvSpPr>
-            <p:cNvPr id="623" name="WBS 新增大項"/>
+            <p:cNvPr id="628" name="WBS 新增大項"/>
             <p:cNvSpPr txBox="1"/>
             <p:nvPr/>
           </p:nvSpPr>
@@ -16350,28 +16718,28 @@
       </p:grpSp>
       <p:grpSp>
         <p:nvGrpSpPr>
-          <p:cNvPr id="627" name="Rounded Rectangle 272"/>
+          <p:cNvPr id="632" name="Rounded Rectangle 272"/>
           <p:cNvGrpSpPr/>
           <p:nvPr/>
         </p:nvGrpSpPr>
         <p:grpSpPr>
           <a:xfrm>
-            <a:off x="5733285" y="1691638"/>
-            <a:ext cx="1517913" cy="292616"/>
-            <a:chOff x="-1" y="0"/>
-            <a:chExt cx="1517911" cy="292615"/>
+            <a:off x="5733283" y="1691637"/>
+            <a:ext cx="1517916" cy="292619"/>
+            <a:chOff x="-1" y="-1"/>
+            <a:chExt cx="1517915" cy="292618"/>
           </a:xfrm>
         </p:grpSpPr>
         <p:sp>
           <p:nvSpPr>
-            <p:cNvPr id="625" name="圓角矩形"/>
+            <p:cNvPr id="630" name="圓角矩形"/>
             <p:cNvSpPr/>
             <p:nvPr/>
           </p:nvSpPr>
           <p:spPr>
             <a:xfrm>
-              <a:off x="-2" y="-1"/>
-              <a:ext cx="1517913" cy="292617"/>
+              <a:off x="-2" y="-2"/>
+              <a:ext cx="1517916" cy="292620"/>
             </a:xfrm>
             <a:prstGeom prst="roundRect">
               <a:avLst>
@@ -16398,10 +16766,6 @@
                   <a:solidFill>
                     <a:srgbClr val="FFFFFF"/>
                   </a:solidFill>
-                  <a:latin typeface="+mn-lt"/>
-                  <a:ea typeface="+mn-ea"/>
-                  <a:cs typeface="+mn-cs"/>
-                  <a:sym typeface="Helvetica"/>
                 </a:defRPr>
               </a:pPr>
             </a:p>
@@ -16409,13 +16773,13 @@
         </p:sp>
         <p:sp>
           <p:nvSpPr>
-            <p:cNvPr id="626" name="首頁儀表板三層"/>
+            <p:cNvPr id="631" name="首頁儀表板三層"/>
             <p:cNvSpPr txBox="1"/>
             <p:nvPr/>
           </p:nvSpPr>
           <p:spPr>
             <a:xfrm>
-              <a:off x="263651" y="44703"/>
+              <a:off x="263652" y="44703"/>
               <a:ext cx="990601" cy="203201"/>
             </a:xfrm>
             <a:prstGeom prst="rect">
@@ -16461,7 +16825,7 @@
       </p:grpSp>
       <p:pic>
         <p:nvPicPr>
-          <p:cNvPr id="628" name="Picture 281" descr="Picture 281"/>
+          <p:cNvPr id="633" name="Picture 281" descr="Picture 281"/>
           <p:cNvPicPr>
             <a:picLocks noChangeAspect="1"/>
           </p:cNvPicPr>
@@ -16490,7 +16854,7 @@
       </p:pic>
       <p:pic>
         <p:nvPicPr>
-          <p:cNvPr id="629" name="Picture 282" descr="Picture 282"/>
+          <p:cNvPr id="634" name="Picture 282" descr="Picture 282"/>
           <p:cNvPicPr>
             <a:picLocks noChangeAspect="1"/>
           </p:cNvPicPr>
@@ -16552,7 +16916,7 @@
       </p:grpSpPr>
       <p:sp>
         <p:nvSpPr>
-          <p:cNvPr id="631" name="Rectangle 1"/>
+          <p:cNvPr id="636" name="Rectangle 1"/>
           <p:cNvSpPr/>
           <p:nvPr/>
         </p:nvSpPr>
@@ -16580,6 +16944,10 @@
                 <a:solidFill>
                   <a:srgbClr val="FFFFFF"/>
                 </a:solidFill>
+                <a:latin typeface="+mj-lt"/>
+                <a:ea typeface="+mj-ea"/>
+                <a:cs typeface="+mj-cs"/>
+                <a:sym typeface="Calibri"/>
               </a:defRPr>
             </a:pPr>
           </a:p>
@@ -16587,7 +16955,7 @@
       </p:sp>
       <p:sp>
         <p:nvSpPr>
-          <p:cNvPr id="632" name="Connector 2"/>
+          <p:cNvPr id="637" name="Connector 2"/>
           <p:cNvSpPr/>
           <p:nvPr/>
         </p:nvSpPr>
@@ -16615,7 +16983,7 @@
       </p:sp>
       <p:sp>
         <p:nvSpPr>
-          <p:cNvPr id="633" name="Oval 3"/>
+          <p:cNvPr id="638" name="Oval 3"/>
           <p:cNvSpPr/>
           <p:nvPr/>
         </p:nvSpPr>
@@ -16643,6 +17011,10 @@
                 <a:solidFill>
                   <a:srgbClr val="FFFFFF"/>
                 </a:solidFill>
+                <a:latin typeface="+mj-lt"/>
+                <a:ea typeface="+mj-ea"/>
+                <a:cs typeface="+mj-cs"/>
+                <a:sym typeface="Calibri"/>
               </a:defRPr>
             </a:pPr>
           </a:p>
@@ -16650,7 +17022,7 @@
       </p:sp>
       <p:sp>
         <p:nvSpPr>
-          <p:cNvPr id="634" name="Oval 4"/>
+          <p:cNvPr id="639" name="Oval 4"/>
           <p:cNvSpPr/>
           <p:nvPr/>
         </p:nvSpPr>
@@ -16678,6 +17050,10 @@
                 <a:solidFill>
                   <a:srgbClr val="FFFFFF"/>
                 </a:solidFill>
+                <a:latin typeface="+mj-lt"/>
+                <a:ea typeface="+mj-ea"/>
+                <a:cs typeface="+mj-cs"/>
+                <a:sym typeface="Calibri"/>
               </a:defRPr>
             </a:pPr>
           </a:p>
@@ -16685,7 +17061,7 @@
       </p:sp>
       <p:sp>
         <p:nvSpPr>
-          <p:cNvPr id="635" name="Oval 5"/>
+          <p:cNvPr id="640" name="Oval 5"/>
           <p:cNvSpPr/>
           <p:nvPr/>
         </p:nvSpPr>
@@ -16713,6 +17089,10 @@
                 <a:solidFill>
                   <a:srgbClr val="FFFFFF"/>
                 </a:solidFill>
+                <a:latin typeface="+mj-lt"/>
+                <a:ea typeface="+mj-ea"/>
+                <a:cs typeface="+mj-cs"/>
+                <a:sym typeface="Calibri"/>
               </a:defRPr>
             </a:pPr>
           </a:p>
@@ -16720,7 +17100,7 @@
       </p:sp>
       <p:sp>
         <p:nvSpPr>
-          <p:cNvPr id="636" name="TextBox 6"/>
+          <p:cNvPr id="641" name="TextBox 6"/>
           <p:cNvSpPr txBox="1"/>
           <p:nvPr/>
         </p:nvSpPr>
@@ -16768,7 +17148,7 @@
       </p:sp>
       <p:sp>
         <p:nvSpPr>
-          <p:cNvPr id="637" name="TextBox 7"/>
+          <p:cNvPr id="642" name="TextBox 7"/>
           <p:cNvSpPr txBox="1"/>
           <p:nvPr/>
         </p:nvSpPr>
@@ -16816,14 +17196,14 @@
       </p:sp>
       <p:sp>
         <p:nvSpPr>
-          <p:cNvPr id="638" name="Rectangle 8"/>
+          <p:cNvPr id="643" name="Rectangle 8"/>
           <p:cNvSpPr/>
           <p:nvPr/>
         </p:nvSpPr>
         <p:spPr>
           <a:xfrm>
             <a:off x="685798" y="2706622"/>
-            <a:ext cx="100598" cy="100586"/>
+            <a:ext cx="100599" cy="100586"/>
           </a:xfrm>
           <a:prstGeom prst="rect">
             <a:avLst/>
@@ -16844,6 +17224,10 @@
                 <a:solidFill>
                   <a:srgbClr val="FFFFFF"/>
                 </a:solidFill>
+                <a:latin typeface="+mj-lt"/>
+                <a:ea typeface="+mj-ea"/>
+                <a:cs typeface="+mj-cs"/>
+                <a:sym typeface="Calibri"/>
               </a:defRPr>
             </a:pPr>
           </a:p>
@@ -16851,7 +17235,7 @@
       </p:sp>
       <p:sp>
         <p:nvSpPr>
-          <p:cNvPr id="639" name="TextBox 9"/>
+          <p:cNvPr id="644" name="TextBox 9"/>
           <p:cNvSpPr txBox="1"/>
           <p:nvPr/>
         </p:nvSpPr>
@@ -16902,14 +17286,14 @@
       </p:sp>
       <p:sp>
         <p:nvSpPr>
-          <p:cNvPr id="640" name="Rectangle 10"/>
+          <p:cNvPr id="645" name="Rectangle 10"/>
           <p:cNvSpPr/>
           <p:nvPr/>
         </p:nvSpPr>
         <p:spPr>
           <a:xfrm>
             <a:off x="685798" y="3218688"/>
-            <a:ext cx="100598" cy="100597"/>
+            <a:ext cx="100599" cy="100598"/>
           </a:xfrm>
           <a:prstGeom prst="rect">
             <a:avLst/>
@@ -16930,6 +17314,10 @@
                 <a:solidFill>
                   <a:srgbClr val="FFFFFF"/>
                 </a:solidFill>
+                <a:latin typeface="+mj-lt"/>
+                <a:ea typeface="+mj-ea"/>
+                <a:cs typeface="+mj-cs"/>
+                <a:sym typeface="Calibri"/>
               </a:defRPr>
             </a:pPr>
           </a:p>
@@ -16937,7 +17325,7 @@
       </p:sp>
       <p:sp>
         <p:nvSpPr>
-          <p:cNvPr id="641" name="TextBox 11"/>
+          <p:cNvPr id="646" name="TextBox 11"/>
           <p:cNvSpPr txBox="1"/>
           <p:nvPr/>
         </p:nvSpPr>
@@ -16988,14 +17376,14 @@
       </p:sp>
       <p:sp>
         <p:nvSpPr>
-          <p:cNvPr id="642" name="Rectangle 12"/>
+          <p:cNvPr id="647" name="Rectangle 12"/>
           <p:cNvSpPr/>
           <p:nvPr/>
         </p:nvSpPr>
         <p:spPr>
           <a:xfrm>
             <a:off x="685798" y="3730752"/>
-            <a:ext cx="100598" cy="100597"/>
+            <a:ext cx="100599" cy="100598"/>
           </a:xfrm>
           <a:prstGeom prst="rect">
             <a:avLst/>
@@ -17016,6 +17404,10 @@
                 <a:solidFill>
                   <a:srgbClr val="FFFFFF"/>
                 </a:solidFill>
+                <a:latin typeface="+mj-lt"/>
+                <a:ea typeface="+mj-ea"/>
+                <a:cs typeface="+mj-cs"/>
+                <a:sym typeface="Calibri"/>
               </a:defRPr>
             </a:pPr>
           </a:p>
@@ -17023,7 +17415,7 @@
       </p:sp>
       <p:sp>
         <p:nvSpPr>
-          <p:cNvPr id="643" name="TextBox 13"/>
+          <p:cNvPr id="648" name="TextBox 13"/>
           <p:cNvSpPr txBox="1"/>
           <p:nvPr/>
         </p:nvSpPr>
@@ -17074,14 +17466,14 @@
       </p:sp>
       <p:sp>
         <p:nvSpPr>
-          <p:cNvPr id="644" name="Rectangle 14"/>
+          <p:cNvPr id="649" name="Rectangle 14"/>
           <p:cNvSpPr/>
           <p:nvPr/>
         </p:nvSpPr>
         <p:spPr>
           <a:xfrm>
             <a:off x="685798" y="4242815"/>
-            <a:ext cx="100598" cy="100597"/>
+            <a:ext cx="100599" cy="100598"/>
           </a:xfrm>
           <a:prstGeom prst="rect">
             <a:avLst/>
@@ -17102,6 +17494,10 @@
                 <a:solidFill>
                   <a:srgbClr val="FFFFFF"/>
                 </a:solidFill>
+                <a:latin typeface="+mj-lt"/>
+                <a:ea typeface="+mj-ea"/>
+                <a:cs typeface="+mj-cs"/>
+                <a:sym typeface="Calibri"/>
               </a:defRPr>
             </a:pPr>
           </a:p>
@@ -17109,7 +17505,7 @@
       </p:sp>
       <p:sp>
         <p:nvSpPr>
-          <p:cNvPr id="645" name="TextBox 15"/>
+          <p:cNvPr id="650" name="TextBox 15"/>
           <p:cNvSpPr txBox="1"/>
           <p:nvPr/>
         </p:nvSpPr>
@@ -17160,14 +17556,14 @@
       </p:sp>
       <p:sp>
         <p:nvSpPr>
-          <p:cNvPr id="646" name="Connector 16"/>
+          <p:cNvPr id="651" name="Connector 16"/>
           <p:cNvSpPr/>
           <p:nvPr/>
         </p:nvSpPr>
         <p:spPr>
           <a:xfrm>
-            <a:off x="685791" y="4791454"/>
-            <a:ext cx="4983502" cy="13"/>
+            <a:off x="685790" y="4791454"/>
+            <a:ext cx="4983504" cy="13"/>
           </a:xfrm>
           <a:prstGeom prst="line">
             <a:avLst/>
@@ -17188,7 +17584,7 @@
       </p:sp>
       <p:sp>
         <p:nvSpPr>
-          <p:cNvPr id="647" name="TextBox 17"/>
+          <p:cNvPr id="652" name="TextBox 17"/>
           <p:cNvSpPr txBox="1"/>
           <p:nvPr/>
         </p:nvSpPr>
@@ -17236,14 +17632,14 @@
       </p:sp>
       <p:sp>
         <p:nvSpPr>
-          <p:cNvPr id="648" name="TextBox 640"/>
+          <p:cNvPr id="653" name="TextBox 640"/>
           <p:cNvSpPr txBox="1"/>
           <p:nvPr/>
         </p:nvSpPr>
         <p:spPr>
           <a:xfrm>
             <a:off x="6675118" y="6428232"/>
-            <a:ext cx="4800607" cy="228601"/>
+            <a:ext cx="4800608" cy="228601"/>
           </a:xfrm>
           <a:prstGeom prst="rect">
             <a:avLst/>
@@ -17420,7 +17816,7 @@
         <p:spPr>
           <a:xfrm>
             <a:off x="685795" y="1664205"/>
-            <a:ext cx="822969" cy="9"/>
+            <a:ext cx="822969" cy="10"/>
           </a:xfrm>
           <a:prstGeom prst="line">
             <a:avLst/>
@@ -17469,6 +17865,10 @@
                 <a:solidFill>
                   <a:srgbClr val="FFFFFF"/>
                 </a:solidFill>
+                <a:latin typeface="+mj-lt"/>
+                <a:ea typeface="+mj-ea"/>
+                <a:cs typeface="+mj-cs"/>
+                <a:sym typeface="Calibri"/>
               </a:defRPr>
             </a:pPr>
           </a:p>
@@ -17504,6 +17904,10 @@
                 <a:solidFill>
                   <a:srgbClr val="FFFFFF"/>
                 </a:solidFill>
+                <a:latin typeface="+mj-lt"/>
+                <a:ea typeface="+mj-ea"/>
+                <a:cs typeface="+mj-cs"/>
+                <a:sym typeface="Calibri"/>
               </a:defRPr>
             </a:pPr>
           </a:p>
@@ -17539,6 +17943,10 @@
                 <a:solidFill>
                   <a:srgbClr val="FFFFFF"/>
                 </a:solidFill>
+                <a:latin typeface="+mj-lt"/>
+                <a:ea typeface="+mj-ea"/>
+                <a:cs typeface="+mj-cs"/>
+                <a:sym typeface="Calibri"/>
               </a:defRPr>
             </a:pPr>
           </a:p>
@@ -17553,7 +17961,7 @@
         <p:spPr>
           <a:xfrm>
             <a:off x="685798" y="2212848"/>
-            <a:ext cx="100594" cy="100593"/>
+            <a:ext cx="100595" cy="100594"/>
           </a:xfrm>
           <a:prstGeom prst="rect">
             <a:avLst/>
@@ -17574,6 +17982,10 @@
                 <a:solidFill>
                   <a:srgbClr val="FFFFFF"/>
                 </a:solidFill>
+                <a:latin typeface="+mj-lt"/>
+                <a:ea typeface="+mj-ea"/>
+                <a:cs typeface="+mj-cs"/>
+                <a:sym typeface="Calibri"/>
               </a:defRPr>
             </a:pPr>
           </a:p>
@@ -17639,7 +18051,7 @@
         <p:spPr>
           <a:xfrm>
             <a:off x="685798" y="2638679"/>
-            <a:ext cx="100594" cy="100593"/>
+            <a:ext cx="100595" cy="100594"/>
           </a:xfrm>
           <a:prstGeom prst="rect">
             <a:avLst/>
@@ -17660,6 +18072,10 @@
                 <a:solidFill>
                   <a:srgbClr val="FFFFFF"/>
                 </a:solidFill>
+                <a:latin typeface="+mj-lt"/>
+                <a:ea typeface="+mj-ea"/>
+                <a:cs typeface="+mj-cs"/>
+                <a:sym typeface="Calibri"/>
               </a:defRPr>
             </a:pPr>
           </a:p>
@@ -17725,7 +18141,7 @@
         <p:spPr>
           <a:xfrm>
             <a:off x="685798" y="3344035"/>
-            <a:ext cx="100594" cy="100593"/>
+            <a:ext cx="100595" cy="100594"/>
           </a:xfrm>
           <a:prstGeom prst="rect">
             <a:avLst/>
@@ -17746,6 +18162,10 @@
                 <a:solidFill>
                   <a:srgbClr val="FFFFFF"/>
                 </a:solidFill>
+                <a:latin typeface="+mj-lt"/>
+                <a:ea typeface="+mj-ea"/>
+                <a:cs typeface="+mj-cs"/>
+                <a:sym typeface="Calibri"/>
               </a:defRPr>
             </a:pPr>
           </a:p>
@@ -17811,7 +18231,7 @@
         <p:spPr>
           <a:xfrm>
             <a:off x="685798" y="4049393"/>
-            <a:ext cx="100594" cy="100593"/>
+            <a:ext cx="100595" cy="100594"/>
           </a:xfrm>
           <a:prstGeom prst="rect">
             <a:avLst/>
@@ -17832,6 +18252,10 @@
                 <a:solidFill>
                   <a:srgbClr val="FFFFFF"/>
                 </a:solidFill>
+                <a:latin typeface="+mj-lt"/>
+                <a:ea typeface="+mj-ea"/>
+                <a:cs typeface="+mj-cs"/>
+                <a:sym typeface="Calibri"/>
               </a:defRPr>
             </a:pPr>
           </a:p>
@@ -17897,7 +18321,7 @@
         <p:spPr>
           <a:xfrm>
             <a:off x="685798" y="4475224"/>
-            <a:ext cx="100594" cy="100593"/>
+            <a:ext cx="100595" cy="100594"/>
           </a:xfrm>
           <a:prstGeom prst="rect">
             <a:avLst/>
@@ -17918,6 +18342,10 @@
                 <a:solidFill>
                   <a:srgbClr val="FFFFFF"/>
                 </a:solidFill>
+                <a:latin typeface="+mj-lt"/>
+                <a:ea typeface="+mj-ea"/>
+                <a:cs typeface="+mj-cs"/>
+                <a:sym typeface="Calibri"/>
               </a:defRPr>
             </a:pPr>
           </a:p>
@@ -17983,7 +18411,7 @@
         <p:spPr>
           <a:xfrm rot="21120000">
             <a:off x="822960" y="5303520"/>
-            <a:ext cx="566936" cy="731528"/>
+            <a:ext cx="566937" cy="731529"/>
           </a:xfrm>
           <a:prstGeom prst="roundRect">
             <a:avLst>
@@ -18008,6 +18436,10 @@
                 <a:solidFill>
                   <a:srgbClr val="FFFFFF"/>
                 </a:solidFill>
+                <a:latin typeface="+mj-lt"/>
+                <a:ea typeface="+mj-ea"/>
+                <a:cs typeface="+mj-cs"/>
+                <a:sym typeface="Calibri"/>
               </a:defRPr>
             </a:pPr>
           </a:p>
@@ -18022,7 +18454,7 @@
         <p:spPr>
           <a:xfrm>
             <a:off x="914400" y="5449823"/>
-            <a:ext cx="384048" cy="41156"/>
+            <a:ext cx="384048" cy="41157"/>
           </a:xfrm>
           <a:prstGeom prst="rect">
             <a:avLst/>
@@ -18043,6 +18475,10 @@
                 <a:solidFill>
                   <a:srgbClr val="FFFFFF"/>
                 </a:solidFill>
+                <a:latin typeface="+mj-lt"/>
+                <a:ea typeface="+mj-ea"/>
+                <a:cs typeface="+mj-cs"/>
+                <a:sym typeface="Calibri"/>
               </a:defRPr>
             </a:pPr>
           </a:p>
@@ -18057,7 +18493,7 @@
         <p:spPr>
           <a:xfrm>
             <a:off x="914400" y="5596128"/>
-            <a:ext cx="384048" cy="41156"/>
+            <a:ext cx="384048" cy="41157"/>
           </a:xfrm>
           <a:prstGeom prst="rect">
             <a:avLst/>
@@ -18078,6 +18514,10 @@
                 <a:solidFill>
                   <a:srgbClr val="FFFFFF"/>
                 </a:solidFill>
+                <a:latin typeface="+mj-lt"/>
+                <a:ea typeface="+mj-ea"/>
+                <a:cs typeface="+mj-cs"/>
+                <a:sym typeface="Calibri"/>
               </a:defRPr>
             </a:pPr>
           </a:p>
@@ -18092,7 +18532,7 @@
         <p:spPr>
           <a:xfrm>
             <a:off x="914400" y="5742432"/>
-            <a:ext cx="384048" cy="41156"/>
+            <a:ext cx="384048" cy="41157"/>
           </a:xfrm>
           <a:prstGeom prst="rect">
             <a:avLst/>
@@ -18113,6 +18553,10 @@
                 <a:solidFill>
                   <a:srgbClr val="FFFFFF"/>
                 </a:solidFill>
+                <a:latin typeface="+mj-lt"/>
+                <a:ea typeface="+mj-ea"/>
+                <a:cs typeface="+mj-cs"/>
+                <a:sym typeface="Calibri"/>
               </a:defRPr>
             </a:pPr>
           </a:p>
@@ -18127,7 +18571,7 @@
         <p:spPr>
           <a:xfrm rot="300000">
             <a:off x="1600200" y="5120640"/>
-            <a:ext cx="566928" cy="731528"/>
+            <a:ext cx="566928" cy="731529"/>
           </a:xfrm>
           <a:prstGeom prst="roundRect">
             <a:avLst>
@@ -18152,6 +18596,10 @@
                 <a:solidFill>
                   <a:srgbClr val="FFFFFF"/>
                 </a:solidFill>
+                <a:latin typeface="+mj-lt"/>
+                <a:ea typeface="+mj-ea"/>
+                <a:cs typeface="+mj-cs"/>
+                <a:sym typeface="Calibri"/>
               </a:defRPr>
             </a:pPr>
           </a:p>
@@ -18166,7 +18614,7 @@
         <p:spPr>
           <a:xfrm>
             <a:off x="1691638" y="5266944"/>
-            <a:ext cx="384056" cy="41156"/>
+            <a:ext cx="384057" cy="41157"/>
           </a:xfrm>
           <a:prstGeom prst="rect">
             <a:avLst/>
@@ -18187,6 +18635,10 @@
                 <a:solidFill>
                   <a:srgbClr val="FFFFFF"/>
                 </a:solidFill>
+                <a:latin typeface="+mj-lt"/>
+                <a:ea typeface="+mj-ea"/>
+                <a:cs typeface="+mj-cs"/>
+                <a:sym typeface="Calibri"/>
               </a:defRPr>
             </a:pPr>
           </a:p>
@@ -18201,7 +18653,7 @@
         <p:spPr>
           <a:xfrm>
             <a:off x="1691638" y="5413247"/>
-            <a:ext cx="384056" cy="41156"/>
+            <a:ext cx="384057" cy="41157"/>
           </a:xfrm>
           <a:prstGeom prst="rect">
             <a:avLst/>
@@ -18222,6 +18674,10 @@
                 <a:solidFill>
                   <a:srgbClr val="FFFFFF"/>
                 </a:solidFill>
+                <a:latin typeface="+mj-lt"/>
+                <a:ea typeface="+mj-ea"/>
+                <a:cs typeface="+mj-cs"/>
+                <a:sym typeface="Calibri"/>
               </a:defRPr>
             </a:pPr>
           </a:p>
@@ -18236,7 +18692,7 @@
         <p:spPr>
           <a:xfrm>
             <a:off x="1691638" y="5559552"/>
-            <a:ext cx="384056" cy="41156"/>
+            <a:ext cx="384057" cy="41157"/>
           </a:xfrm>
           <a:prstGeom prst="rect">
             <a:avLst/>
@@ -18257,6 +18713,10 @@
                 <a:solidFill>
                   <a:srgbClr val="FFFFFF"/>
                 </a:solidFill>
+                <a:latin typeface="+mj-lt"/>
+                <a:ea typeface="+mj-ea"/>
+                <a:cs typeface="+mj-cs"/>
+                <a:sym typeface="Calibri"/>
               </a:defRPr>
             </a:pPr>
           </a:p>
@@ -18271,7 +18731,7 @@
         <p:spPr>
           <a:xfrm rot="21360000">
             <a:off x="2331720" y="5349240"/>
-            <a:ext cx="566936" cy="731528"/>
+            <a:ext cx="566937" cy="731529"/>
           </a:xfrm>
           <a:prstGeom prst="roundRect">
             <a:avLst>
@@ -18296,6 +18756,10 @@
                 <a:solidFill>
                   <a:srgbClr val="FFFFFF"/>
                 </a:solidFill>
+                <a:latin typeface="+mj-lt"/>
+                <a:ea typeface="+mj-ea"/>
+                <a:cs typeface="+mj-cs"/>
+                <a:sym typeface="Calibri"/>
               </a:defRPr>
             </a:pPr>
           </a:p>
@@ -18310,7 +18774,7 @@
         <p:spPr>
           <a:xfrm>
             <a:off x="2423160" y="5495544"/>
-            <a:ext cx="384056" cy="41156"/>
+            <a:ext cx="384057" cy="41157"/>
           </a:xfrm>
           <a:prstGeom prst="rect">
             <a:avLst/>
@@ -18331,6 +18795,10 @@
                 <a:solidFill>
                   <a:srgbClr val="FFFFFF"/>
                 </a:solidFill>
+                <a:latin typeface="+mj-lt"/>
+                <a:ea typeface="+mj-ea"/>
+                <a:cs typeface="+mj-cs"/>
+                <a:sym typeface="Calibri"/>
               </a:defRPr>
             </a:pPr>
           </a:p>
@@ -18345,7 +18813,7 @@
         <p:spPr>
           <a:xfrm>
             <a:off x="2423160" y="5641847"/>
-            <a:ext cx="384056" cy="41156"/>
+            <a:ext cx="384057" cy="41157"/>
           </a:xfrm>
           <a:prstGeom prst="rect">
             <a:avLst/>
@@ -18366,6 +18834,10 @@
                 <a:solidFill>
                   <a:srgbClr val="FFFFFF"/>
                 </a:solidFill>
+                <a:latin typeface="+mj-lt"/>
+                <a:ea typeface="+mj-ea"/>
+                <a:cs typeface="+mj-cs"/>
+                <a:sym typeface="Calibri"/>
               </a:defRPr>
             </a:pPr>
           </a:p>
@@ -18380,7 +18852,7 @@
         <p:spPr>
           <a:xfrm>
             <a:off x="2423160" y="5788152"/>
-            <a:ext cx="384056" cy="41156"/>
+            <a:ext cx="384057" cy="41157"/>
           </a:xfrm>
           <a:prstGeom prst="rect">
             <a:avLst/>
@@ -18401,6 +18873,10 @@
                 <a:solidFill>
                   <a:srgbClr val="FFFFFF"/>
                 </a:solidFill>
+                <a:latin typeface="+mj-lt"/>
+                <a:ea typeface="+mj-ea"/>
+                <a:cs typeface="+mj-cs"/>
+                <a:sym typeface="Calibri"/>
               </a:defRPr>
             </a:pPr>
           </a:p>
@@ -18415,7 +18891,7 @@
         <p:spPr>
           <a:xfrm rot="420000">
             <a:off x="3108960" y="5074920"/>
-            <a:ext cx="566936" cy="731528"/>
+            <a:ext cx="566937" cy="731529"/>
           </a:xfrm>
           <a:prstGeom prst="roundRect">
             <a:avLst>
@@ -18440,6 +18916,10 @@
                 <a:solidFill>
                   <a:srgbClr val="FFFFFF"/>
                 </a:solidFill>
+                <a:latin typeface="+mj-lt"/>
+                <a:ea typeface="+mj-ea"/>
+                <a:cs typeface="+mj-cs"/>
+                <a:sym typeface="Calibri"/>
               </a:defRPr>
             </a:pPr>
           </a:p>
@@ -18454,7 +18934,7 @@
         <p:spPr>
           <a:xfrm>
             <a:off x="3200400" y="5221223"/>
-            <a:ext cx="384048" cy="41156"/>
+            <a:ext cx="384048" cy="41157"/>
           </a:xfrm>
           <a:prstGeom prst="rect">
             <a:avLst/>
@@ -18475,6 +18955,10 @@
                 <a:solidFill>
                   <a:srgbClr val="FFFFFF"/>
                 </a:solidFill>
+                <a:latin typeface="+mj-lt"/>
+                <a:ea typeface="+mj-ea"/>
+                <a:cs typeface="+mj-cs"/>
+                <a:sym typeface="Calibri"/>
               </a:defRPr>
             </a:pPr>
           </a:p>
@@ -18489,7 +18973,7 @@
         <p:spPr>
           <a:xfrm>
             <a:off x="3200400" y="5367528"/>
-            <a:ext cx="384048" cy="41156"/>
+            <a:ext cx="384048" cy="41157"/>
           </a:xfrm>
           <a:prstGeom prst="rect">
             <a:avLst/>
@@ -18510,6 +18994,10 @@
                 <a:solidFill>
                   <a:srgbClr val="FFFFFF"/>
                 </a:solidFill>
+                <a:latin typeface="+mj-lt"/>
+                <a:ea typeface="+mj-ea"/>
+                <a:cs typeface="+mj-cs"/>
+                <a:sym typeface="Calibri"/>
               </a:defRPr>
             </a:pPr>
           </a:p>
@@ -18524,7 +19012,7 @@
         <p:spPr>
           <a:xfrm>
             <a:off x="3200400" y="5513832"/>
-            <a:ext cx="384048" cy="41156"/>
+            <a:ext cx="384048" cy="41157"/>
           </a:xfrm>
           <a:prstGeom prst="rect">
             <a:avLst/>
@@ -18545,6 +19033,10 @@
                 <a:solidFill>
                   <a:srgbClr val="FFFFFF"/>
                 </a:solidFill>
+                <a:latin typeface="+mj-lt"/>
+                <a:ea typeface="+mj-ea"/>
+                <a:cs typeface="+mj-cs"/>
+                <a:sym typeface="Calibri"/>
               </a:defRPr>
             </a:pPr>
           </a:p>
@@ -18559,7 +19051,7 @@
         <p:spPr>
           <a:xfrm>
             <a:off x="4206240" y="5349240"/>
-            <a:ext cx="502928" cy="365768"/>
+            <a:ext cx="502929" cy="365769"/>
           </a:xfrm>
           <a:prstGeom prst="chevron">
             <a:avLst>
@@ -18582,6 +19074,10 @@
                 <a:solidFill>
                   <a:srgbClr val="FFFFFF"/>
                 </a:solidFill>
+                <a:latin typeface="+mj-lt"/>
+                <a:ea typeface="+mj-ea"/>
+                <a:cs typeface="+mj-cs"/>
+                <a:sym typeface="Calibri"/>
               </a:defRPr>
             </a:pPr>
           </a:p>
@@ -18596,7 +19092,7 @@
         <p:spPr>
           <a:xfrm>
             <a:off x="4892040" y="5349240"/>
-            <a:ext cx="502928" cy="365768"/>
+            <a:ext cx="502929" cy="365769"/>
           </a:xfrm>
           <a:prstGeom prst="chevron">
             <a:avLst>
@@ -18619,6 +19115,10 @@
                 <a:solidFill>
                   <a:srgbClr val="FFFFFF"/>
                 </a:solidFill>
+                <a:latin typeface="+mj-lt"/>
+                <a:ea typeface="+mj-ea"/>
+                <a:cs typeface="+mj-cs"/>
+                <a:sym typeface="Calibri"/>
               </a:defRPr>
             </a:pPr>
           </a:p>
@@ -18633,7 +19133,7 @@
         <p:spPr>
           <a:xfrm>
             <a:off x="5577840" y="5349240"/>
-            <a:ext cx="502928" cy="365768"/>
+            <a:ext cx="502929" cy="365769"/>
           </a:xfrm>
           <a:prstGeom prst="chevron">
             <a:avLst>
@@ -18656,6 +19156,10 @@
                 <a:solidFill>
                   <a:srgbClr val="FFFFFF"/>
                 </a:solidFill>
+                <a:latin typeface="+mj-lt"/>
+                <a:ea typeface="+mj-ea"/>
+                <a:cs typeface="+mj-cs"/>
+                <a:sym typeface="Calibri"/>
               </a:defRPr>
             </a:pPr>
           </a:p>
@@ -18669,10 +19173,10 @@
         </p:nvGrpSpPr>
         <p:grpSpPr>
           <a:xfrm>
-            <a:off x="6399134" y="5033521"/>
-            <a:ext cx="2380912" cy="1374472"/>
+            <a:off x="6399184" y="5033505"/>
+            <a:ext cx="2380958" cy="1374502"/>
             <a:chOff x="50" y="-15"/>
-            <a:chExt cx="2380911" cy="1374471"/>
+            <a:chExt cx="2380957" cy="1374500"/>
           </a:xfrm>
         </p:grpSpPr>
         <p:sp>
@@ -18684,7 +19188,7 @@
           <p:spPr>
             <a:xfrm>
               <a:off x="50" y="-16"/>
-              <a:ext cx="2380913" cy="1374473"/>
+              <a:ext cx="2380959" cy="1374502"/>
             </a:xfrm>
             <a:custGeom>
               <a:avLst/>
@@ -18845,6 +19349,10 @@
                   <a:solidFill>
                     <a:srgbClr val="FFFFFF"/>
                   </a:solidFill>
+                  <a:latin typeface="+mj-lt"/>
+                  <a:ea typeface="+mj-ea"/>
+                  <a:cs typeface="+mj-cs"/>
+                  <a:sym typeface="Calibri"/>
                 </a:defRPr>
               </a:pPr>
             </a:p>
@@ -18858,8 +19366,8 @@
           </p:nvSpPr>
           <p:spPr>
             <a:xfrm>
-              <a:off x="120581" y="69969"/>
-              <a:ext cx="2181429" cy="1166810"/>
+              <a:off x="120531" y="69984"/>
+              <a:ext cx="2181431" cy="1166811"/>
             </a:xfrm>
             <a:custGeom>
               <a:avLst/>
@@ -18994,6 +19502,10 @@
                   <a:solidFill>
                     <a:srgbClr val="FFFFFF"/>
                   </a:solidFill>
+                  <a:latin typeface="+mj-lt"/>
+                  <a:ea typeface="+mj-ea"/>
+                  <a:cs typeface="+mj-cs"/>
+                  <a:sym typeface="Calibri"/>
                 </a:defRPr>
               </a:pPr>
             </a:p>
@@ -19030,6 +19542,10 @@
                 <a:solidFill>
                   <a:srgbClr val="FFFFFF"/>
                 </a:solidFill>
+                <a:latin typeface="+mj-lt"/>
+                <a:ea typeface="+mj-ea"/>
+                <a:cs typeface="+mj-cs"/>
+                <a:sym typeface="Calibri"/>
               </a:defRPr>
             </a:pPr>
           </a:p>
@@ -19366,6 +19882,10 @@
                 <a:solidFill>
                   <a:srgbClr val="FFFFFF"/>
                 </a:solidFill>
+                <a:latin typeface="+mj-lt"/>
+                <a:ea typeface="+mj-ea"/>
+                <a:cs typeface="+mj-cs"/>
+                <a:sym typeface="Calibri"/>
               </a:defRPr>
             </a:pPr>
           </a:p>
@@ -19401,6 +19921,10 @@
                 <a:solidFill>
                   <a:srgbClr val="FFFFFF"/>
                 </a:solidFill>
+                <a:latin typeface="+mj-lt"/>
+                <a:ea typeface="+mj-ea"/>
+                <a:cs typeface="+mj-cs"/>
+                <a:sym typeface="Calibri"/>
               </a:defRPr>
             </a:pPr>
           </a:p>
@@ -19436,6 +19960,10 @@
                 <a:solidFill>
                   <a:srgbClr val="FFFFFF"/>
                 </a:solidFill>
+                <a:latin typeface="+mj-lt"/>
+                <a:ea typeface="+mj-ea"/>
+                <a:cs typeface="+mj-cs"/>
+                <a:sym typeface="Calibri"/>
               </a:defRPr>
             </a:pPr>
           </a:p>
@@ -19450,7 +19978,7 @@
         <p:spPr>
           <a:xfrm>
             <a:off x="685798" y="2414016"/>
-            <a:ext cx="100598" cy="100597"/>
+            <a:ext cx="100599" cy="100598"/>
           </a:xfrm>
           <a:prstGeom prst="rect">
             <a:avLst/>
@@ -19471,6 +19999,10 @@
                 <a:solidFill>
                   <a:srgbClr val="FFFFFF"/>
                 </a:solidFill>
+                <a:latin typeface="+mj-lt"/>
+                <a:ea typeface="+mj-ea"/>
+                <a:cs typeface="+mj-cs"/>
+                <a:sym typeface="Calibri"/>
               </a:defRPr>
             </a:pPr>
           </a:p>
@@ -19535,8 +20067,8 @@
         </p:nvSpPr>
         <p:spPr>
           <a:xfrm>
-            <a:off x="685790" y="2848989"/>
-            <a:ext cx="4946651" cy="3597536"/>
+            <a:off x="685789" y="2848989"/>
+            <a:ext cx="4946653" cy="3597536"/>
           </a:xfrm>
           <a:prstGeom prst="rect">
             <a:avLst/>
@@ -19559,6 +20091,10 @@
                 <a:solidFill>
                   <a:srgbClr val="FFFFFF"/>
                 </a:solidFill>
+                <a:latin typeface="+mj-lt"/>
+                <a:ea typeface="+mj-ea"/>
+                <a:cs typeface="+mj-cs"/>
+                <a:sym typeface="Calibri"/>
               </a:defRPr>
             </a:pPr>
           </a:p>
@@ -19572,8 +20108,8 @@
         </p:nvSpPr>
         <p:spPr>
           <a:xfrm>
-            <a:off x="685790" y="2848991"/>
-            <a:ext cx="4946651" cy="384061"/>
+            <a:off x="685789" y="2848991"/>
+            <a:ext cx="4946653" cy="384062"/>
           </a:xfrm>
           <a:prstGeom prst="rect">
             <a:avLst/>
@@ -19594,6 +20130,10 @@
                 <a:solidFill>
                   <a:srgbClr val="FFFFFF"/>
                 </a:solidFill>
+                <a:latin typeface="+mj-lt"/>
+                <a:ea typeface="+mj-ea"/>
+                <a:cs typeface="+mj-cs"/>
+                <a:sym typeface="Calibri"/>
               </a:defRPr>
             </a:pPr>
           </a:p>
@@ -19607,8 +20147,8 @@
         </p:nvSpPr>
         <p:spPr>
           <a:xfrm>
-            <a:off x="685790" y="2926713"/>
-            <a:ext cx="4946651" cy="228601"/>
+            <a:off x="685789" y="2926713"/>
+            <a:ext cx="4946653" cy="228601"/>
           </a:xfrm>
           <a:prstGeom prst="rect">
             <a:avLst/>
@@ -19656,7 +20196,7 @@
         <p:spPr>
           <a:xfrm>
             <a:off x="6546828" y="2848989"/>
-            <a:ext cx="4946643" cy="3597536"/>
+            <a:ext cx="4946644" cy="3597536"/>
           </a:xfrm>
           <a:prstGeom prst="rect">
             <a:avLst/>
@@ -19679,6 +20219,10 @@
                 <a:solidFill>
                   <a:srgbClr val="FFFFFF"/>
                 </a:solidFill>
+                <a:latin typeface="+mj-lt"/>
+                <a:ea typeface="+mj-ea"/>
+                <a:cs typeface="+mj-cs"/>
+                <a:sym typeface="Calibri"/>
               </a:defRPr>
             </a:pPr>
           </a:p>
@@ -19693,7 +20237,7 @@
         <p:spPr>
           <a:xfrm>
             <a:off x="6546828" y="2848991"/>
-            <a:ext cx="4946643" cy="384061"/>
+            <a:ext cx="4946644" cy="384062"/>
           </a:xfrm>
           <a:prstGeom prst="rect">
             <a:avLst/>
@@ -19714,6 +20258,10 @@
                 <a:solidFill>
                   <a:srgbClr val="FFFFFF"/>
                 </a:solidFill>
+                <a:latin typeface="+mj-lt"/>
+                <a:ea typeface="+mj-ea"/>
+                <a:cs typeface="+mj-cs"/>
+                <a:sym typeface="Calibri"/>
               </a:defRPr>
             </a:pPr>
           </a:p>
@@ -19728,7 +20276,7 @@
         <p:spPr>
           <a:xfrm>
             <a:off x="6546828" y="2926713"/>
-            <a:ext cx="4946643" cy="228601"/>
+            <a:ext cx="4946644" cy="228601"/>
           </a:xfrm>
           <a:prstGeom prst="rect">
             <a:avLst/>
@@ -19776,7 +20324,7 @@
         <p:spPr>
           <a:xfrm>
             <a:off x="5742156" y="4647755"/>
-            <a:ext cx="694957" cy="13"/>
+            <a:ext cx="694958" cy="13"/>
           </a:xfrm>
           <a:prstGeom prst="line">
             <a:avLst/>
@@ -19803,8 +20351,8 @@
         </p:nvSpPr>
         <p:spPr>
           <a:xfrm rot="5400000">
-            <a:off x="6290787" y="4556310"/>
-            <a:ext cx="182900" cy="182893"/>
+            <a:off x="6290787" y="4556309"/>
+            <a:ext cx="182900" cy="182895"/>
           </a:xfrm>
           <a:prstGeom prst="triangle">
             <a:avLst/>
@@ -19825,6 +20373,10 @@
                 <a:solidFill>
                   <a:srgbClr val="FFFFFF"/>
                 </a:solidFill>
+                <a:latin typeface="+mj-lt"/>
+                <a:ea typeface="+mj-ea"/>
+                <a:cs typeface="+mj-cs"/>
+                <a:sym typeface="Calibri"/>
               </a:defRPr>
             </a:pPr>
           </a:p>
@@ -19839,7 +20391,7 @@
         <p:spPr>
           <a:xfrm>
             <a:off x="6675118" y="6537959"/>
-            <a:ext cx="4800607" cy="228601"/>
+            <a:ext cx="4800608" cy="228601"/>
           </a:xfrm>
           <a:prstGeom prst="rect">
             <a:avLst/>
@@ -19887,7 +20439,7 @@
         <p:spPr>
           <a:xfrm rot="21120000">
             <a:off x="1417319" y="4160520"/>
-            <a:ext cx="868681" cy="1097286"/>
+            <a:ext cx="868681" cy="1097287"/>
           </a:xfrm>
           <a:prstGeom prst="roundRect">
             <a:avLst>
@@ -19912,6 +20464,10 @@
                 <a:solidFill>
                   <a:srgbClr val="FFFFFF"/>
                 </a:solidFill>
+                <a:latin typeface="+mj-lt"/>
+                <a:ea typeface="+mj-ea"/>
+                <a:cs typeface="+mj-cs"/>
+                <a:sym typeface="Calibri"/>
               </a:defRPr>
             </a:pPr>
           </a:p>
@@ -19947,6 +20503,10 @@
                 <a:solidFill>
                   <a:srgbClr val="FFFFFF"/>
                 </a:solidFill>
+                <a:latin typeface="+mj-lt"/>
+                <a:ea typeface="+mj-ea"/>
+                <a:cs typeface="+mj-cs"/>
+                <a:sym typeface="Calibri"/>
               </a:defRPr>
             </a:pPr>
           </a:p>
@@ -19982,6 +20542,10 @@
                 <a:solidFill>
                   <a:srgbClr val="FFFFFF"/>
                 </a:solidFill>
+                <a:latin typeface="+mj-lt"/>
+                <a:ea typeface="+mj-ea"/>
+                <a:cs typeface="+mj-cs"/>
+                <a:sym typeface="Calibri"/>
               </a:defRPr>
             </a:pPr>
           </a:p>
@@ -20017,6 +20581,10 @@
                 <a:solidFill>
                   <a:srgbClr val="FFFFFF"/>
                 </a:solidFill>
+                <a:latin typeface="+mj-lt"/>
+                <a:ea typeface="+mj-ea"/>
+                <a:cs typeface="+mj-cs"/>
+                <a:sym typeface="Calibri"/>
               </a:defRPr>
             </a:pPr>
           </a:p>
@@ -20031,7 +20599,7 @@
         <p:spPr>
           <a:xfrm rot="300000">
             <a:off x="2606038" y="3794759"/>
-            <a:ext cx="868682" cy="1097286"/>
+            <a:ext cx="868682" cy="1097287"/>
           </a:xfrm>
           <a:prstGeom prst="roundRect">
             <a:avLst>
@@ -20056,6 +20624,10 @@
                 <a:solidFill>
                   <a:srgbClr val="FFFFFF"/>
                 </a:solidFill>
+                <a:latin typeface="+mj-lt"/>
+                <a:ea typeface="+mj-ea"/>
+                <a:cs typeface="+mj-cs"/>
+                <a:sym typeface="Calibri"/>
               </a:defRPr>
             </a:pPr>
           </a:p>
@@ -20091,6 +20663,10 @@
                 <a:solidFill>
                   <a:srgbClr val="FFFFFF"/>
                 </a:solidFill>
+                <a:latin typeface="+mj-lt"/>
+                <a:ea typeface="+mj-ea"/>
+                <a:cs typeface="+mj-cs"/>
+                <a:sym typeface="Calibri"/>
               </a:defRPr>
             </a:pPr>
           </a:p>
@@ -20126,6 +20702,10 @@
                 <a:solidFill>
                   <a:srgbClr val="FFFFFF"/>
                 </a:solidFill>
+                <a:latin typeface="+mj-lt"/>
+                <a:ea typeface="+mj-ea"/>
+                <a:cs typeface="+mj-cs"/>
+                <a:sym typeface="Calibri"/>
               </a:defRPr>
             </a:pPr>
           </a:p>
@@ -20161,6 +20741,10 @@
                 <a:solidFill>
                   <a:srgbClr val="FFFFFF"/>
                 </a:solidFill>
+                <a:latin typeface="+mj-lt"/>
+                <a:ea typeface="+mj-ea"/>
+                <a:cs typeface="+mj-cs"/>
+                <a:sym typeface="Calibri"/>
               </a:defRPr>
             </a:pPr>
           </a:p>
@@ -20175,7 +20759,7 @@
         <p:spPr>
           <a:xfrm rot="21300000">
             <a:off x="3794759" y="4206240"/>
-            <a:ext cx="868686" cy="1097286"/>
+            <a:ext cx="868687" cy="1097287"/>
           </a:xfrm>
           <a:prstGeom prst="roundRect">
             <a:avLst>
@@ -20200,6 +20784,10 @@
                 <a:solidFill>
                   <a:srgbClr val="FFFFFF"/>
                 </a:solidFill>
+                <a:latin typeface="+mj-lt"/>
+                <a:ea typeface="+mj-ea"/>
+                <a:cs typeface="+mj-cs"/>
+                <a:sym typeface="Calibri"/>
               </a:defRPr>
             </a:pPr>
           </a:p>
@@ -20214,7 +20802,7 @@
         <p:spPr>
           <a:xfrm>
             <a:off x="3931920" y="4462271"/>
-            <a:ext cx="594366" cy="54870"/>
+            <a:ext cx="594367" cy="54870"/>
           </a:xfrm>
           <a:prstGeom prst="rect">
             <a:avLst/>
@@ -20235,6 +20823,10 @@
                 <a:solidFill>
                   <a:srgbClr val="FFFFFF"/>
                 </a:solidFill>
+                <a:latin typeface="+mj-lt"/>
+                <a:ea typeface="+mj-ea"/>
+                <a:cs typeface="+mj-cs"/>
+                <a:sym typeface="Calibri"/>
               </a:defRPr>
             </a:pPr>
           </a:p>
@@ -20249,7 +20841,7 @@
         <p:spPr>
           <a:xfrm>
             <a:off x="3931920" y="4645152"/>
-            <a:ext cx="594366" cy="54870"/>
+            <a:ext cx="594367" cy="54870"/>
           </a:xfrm>
           <a:prstGeom prst="rect">
             <a:avLst/>
@@ -20270,6 +20862,10 @@
                 <a:solidFill>
                   <a:srgbClr val="FFFFFF"/>
                 </a:solidFill>
+                <a:latin typeface="+mj-lt"/>
+                <a:ea typeface="+mj-ea"/>
+                <a:cs typeface="+mj-cs"/>
+                <a:sym typeface="Calibri"/>
               </a:defRPr>
             </a:pPr>
           </a:p>
@@ -20284,7 +20880,7 @@
         <p:spPr>
           <a:xfrm>
             <a:off x="3931920" y="4828032"/>
-            <a:ext cx="594366" cy="54870"/>
+            <a:ext cx="594367" cy="54870"/>
           </a:xfrm>
           <a:prstGeom prst="rect">
             <a:avLst/>
@@ -20305,6 +20901,10 @@
                 <a:solidFill>
                   <a:srgbClr val="FFFFFF"/>
                 </a:solidFill>
+                <a:latin typeface="+mj-lt"/>
+                <a:ea typeface="+mj-ea"/>
+                <a:cs typeface="+mj-cs"/>
+                <a:sym typeface="Calibri"/>
               </a:defRPr>
             </a:pPr>
           </a:p>
@@ -20319,7 +20919,7 @@
         <p:spPr>
           <a:xfrm>
             <a:off x="7278623" y="3529584"/>
-            <a:ext cx="164603" cy="164603"/>
+            <a:ext cx="164605" cy="164605"/>
           </a:xfrm>
           <a:prstGeom prst="ellipse">
             <a:avLst/>
@@ -20340,6 +20940,10 @@
                 <a:solidFill>
                   <a:srgbClr val="FFFFFF"/>
                 </a:solidFill>
+                <a:latin typeface="+mj-lt"/>
+                <a:ea typeface="+mj-ea"/>
+                <a:cs typeface="+mj-cs"/>
+                <a:sym typeface="Calibri"/>
               </a:defRPr>
             </a:pPr>
           </a:p>
@@ -20354,7 +20958,7 @@
         <p:spPr>
           <a:xfrm>
             <a:off x="7360918" y="3694176"/>
-            <a:ext cx="1659636" cy="740670"/>
+            <a:ext cx="1659636" cy="740671"/>
           </a:xfrm>
           <a:prstGeom prst="line">
             <a:avLst/>
@@ -20382,7 +20986,7 @@
         <p:spPr>
           <a:xfrm>
             <a:off x="8938259" y="3529584"/>
-            <a:ext cx="164603" cy="164603"/>
+            <a:ext cx="164605" cy="164605"/>
           </a:xfrm>
           <a:prstGeom prst="ellipse">
             <a:avLst/>
@@ -20403,6 +21007,10 @@
                 <a:solidFill>
                   <a:srgbClr val="FFFFFF"/>
                 </a:solidFill>
+                <a:latin typeface="+mj-lt"/>
+                <a:ea typeface="+mj-ea"/>
+                <a:cs typeface="+mj-cs"/>
+                <a:sym typeface="Calibri"/>
               </a:defRPr>
             </a:pPr>
           </a:p>
@@ -20417,7 +21025,7 @@
         <p:spPr>
           <a:xfrm>
             <a:off x="9020556" y="3694176"/>
-            <a:ext cx="6" cy="740670"/>
+            <a:ext cx="7" cy="740671"/>
           </a:xfrm>
           <a:prstGeom prst="line">
             <a:avLst/>
@@ -20445,7 +21053,7 @@
         <p:spPr>
           <a:xfrm>
             <a:off x="10597894" y="3529584"/>
-            <a:ext cx="164603" cy="164603"/>
+            <a:ext cx="164605" cy="164605"/>
           </a:xfrm>
           <a:prstGeom prst="ellipse">
             <a:avLst/>
@@ -20466,6 +21074,10 @@
                 <a:solidFill>
                   <a:srgbClr val="FFFFFF"/>
                 </a:solidFill>
+                <a:latin typeface="+mj-lt"/>
+                <a:ea typeface="+mj-ea"/>
+                <a:cs typeface="+mj-cs"/>
+                <a:sym typeface="Calibri"/>
               </a:defRPr>
             </a:pPr>
           </a:p>
@@ -20480,7 +21092,7 @@
         <p:spPr>
           <a:xfrm flipH="1">
             <a:off x="9020558" y="3694176"/>
-            <a:ext cx="1659636" cy="740670"/>
+            <a:ext cx="1659636" cy="740671"/>
           </a:xfrm>
           <a:prstGeom prst="line">
             <a:avLst/>
@@ -20507,10 +21119,10 @@
         </p:nvGrpSpPr>
         <p:grpSpPr>
           <a:xfrm>
-            <a:off x="7953718" y="4438757"/>
-            <a:ext cx="2106116" cy="1236972"/>
+            <a:off x="7953762" y="4438743"/>
+            <a:ext cx="2106157" cy="1236998"/>
             <a:chOff x="44" y="-13"/>
-            <a:chExt cx="2106114" cy="1236971"/>
+            <a:chExt cx="2106156" cy="1236996"/>
           </a:xfrm>
         </p:grpSpPr>
         <p:sp>
@@ -20522,7 +21134,7 @@
           <p:spPr>
             <a:xfrm>
               <a:off x="44" y="-14"/>
-              <a:ext cx="2106116" cy="1236972"/>
+              <a:ext cx="2106158" cy="1236998"/>
             </a:xfrm>
             <a:custGeom>
               <a:avLst/>
@@ -20683,6 +21295,10 @@
                   <a:solidFill>
                     <a:srgbClr val="FFFFFF"/>
                   </a:solidFill>
+                  <a:latin typeface="+mj-lt"/>
+                  <a:ea typeface="+mj-ea"/>
+                  <a:cs typeface="+mj-cs"/>
+                  <a:sym typeface="Calibri"/>
                 </a:defRPr>
               </a:pPr>
             </a:p>
@@ -20696,8 +21312,8 @@
           </p:nvSpPr>
           <p:spPr>
             <a:xfrm>
-              <a:off x="106757" y="62943"/>
-              <a:ext cx="1929725" cy="1050126"/>
+              <a:off x="106713" y="62956"/>
+              <a:ext cx="1929727" cy="1050127"/>
             </a:xfrm>
             <a:custGeom>
               <a:avLst/>
@@ -20832,6 +21448,10 @@
                   <a:solidFill>
                     <a:srgbClr val="FFFFFF"/>
                   </a:solidFill>
+                  <a:latin typeface="+mj-lt"/>
+                  <a:ea typeface="+mj-ea"/>
+                  <a:cs typeface="+mj-cs"/>
+                  <a:sym typeface="Calibri"/>
                 </a:defRPr>
               </a:pPr>
             </a:p>
@@ -20847,7 +21467,7 @@
         <p:spPr>
           <a:xfrm>
             <a:off x="8933687" y="4978908"/>
-            <a:ext cx="146315" cy="146315"/>
+            <a:ext cx="146317" cy="146317"/>
           </a:xfrm>
           <a:prstGeom prst="ellipse">
             <a:avLst/>
@@ -20868,6 +21488,10 @@
                 <a:solidFill>
                   <a:srgbClr val="FFFFFF"/>
                 </a:solidFill>
+                <a:latin typeface="+mj-lt"/>
+                <a:ea typeface="+mj-ea"/>
+                <a:cs typeface="+mj-cs"/>
+                <a:sym typeface="Calibri"/>
               </a:defRPr>
             </a:pPr>
           </a:p>
@@ -21060,6 +21684,10 @@
                 <a:solidFill>
                   <a:srgbClr val="FFFFFF"/>
                 </a:solidFill>
+                <a:latin typeface="+mj-lt"/>
+                <a:ea typeface="+mj-ea"/>
+                <a:cs typeface="+mj-cs"/>
+                <a:sym typeface="Calibri"/>
               </a:defRPr>
             </a:pPr>
           </a:p>
@@ -21095,6 +21723,10 @@
                 <a:solidFill>
                   <a:srgbClr val="FFFFFF"/>
                 </a:solidFill>
+                <a:latin typeface="+mj-lt"/>
+                <a:ea typeface="+mj-ea"/>
+                <a:cs typeface="+mj-cs"/>
+                <a:sym typeface="Calibri"/>
               </a:defRPr>
             </a:pPr>
           </a:p>
@@ -21130,6 +21762,10 @@
                 <a:solidFill>
                   <a:srgbClr val="FFFFFF"/>
                 </a:solidFill>
+                <a:latin typeface="+mj-lt"/>
+                <a:ea typeface="+mj-ea"/>
+                <a:cs typeface="+mj-cs"/>
+                <a:sym typeface="Calibri"/>
               </a:defRPr>
             </a:pPr>
           </a:p>
@@ -21144,7 +21780,7 @@
         <p:spPr>
           <a:xfrm>
             <a:off x="685798" y="2212848"/>
-            <a:ext cx="100598" cy="100597"/>
+            <a:ext cx="100599" cy="100598"/>
           </a:xfrm>
           <a:prstGeom prst="rect">
             <a:avLst/>
@@ -21165,6 +21801,10 @@
                 <a:solidFill>
                   <a:srgbClr val="FFFFFF"/>
                 </a:solidFill>
+                <a:latin typeface="+mj-lt"/>
+                <a:ea typeface="+mj-ea"/>
+                <a:cs typeface="+mj-cs"/>
+                <a:sym typeface="Calibri"/>
               </a:defRPr>
             </a:pPr>
           </a:p>
@@ -21230,7 +21870,7 @@
         <p:spPr>
           <a:xfrm>
             <a:off x="685798" y="2665727"/>
-            <a:ext cx="100598" cy="100597"/>
+            <a:ext cx="100599" cy="100598"/>
           </a:xfrm>
           <a:prstGeom prst="rect">
             <a:avLst/>
@@ -21251,6 +21891,10 @@
                 <a:solidFill>
                   <a:srgbClr val="FFFFFF"/>
                 </a:solidFill>
+                <a:latin typeface="+mj-lt"/>
+                <a:ea typeface="+mj-ea"/>
+                <a:cs typeface="+mj-cs"/>
+                <a:sym typeface="Calibri"/>
               </a:defRPr>
             </a:pPr>
           </a:p>
@@ -21316,7 +21960,7 @@
         <p:spPr>
           <a:xfrm>
             <a:off x="685798" y="3118610"/>
-            <a:ext cx="100598" cy="100598"/>
+            <a:ext cx="100599" cy="100599"/>
           </a:xfrm>
           <a:prstGeom prst="rect">
             <a:avLst/>
@@ -21337,6 +21981,10 @@
                 <a:solidFill>
                   <a:srgbClr val="FFFFFF"/>
                 </a:solidFill>
+                <a:latin typeface="+mj-lt"/>
+                <a:ea typeface="+mj-ea"/>
+                <a:cs typeface="+mj-cs"/>
+                <a:sym typeface="Calibri"/>
               </a:defRPr>
             </a:pPr>
           </a:p>
@@ -21402,7 +22050,7 @@
         <p:spPr>
           <a:xfrm>
             <a:off x="6675118" y="6428232"/>
-            <a:ext cx="4800607" cy="228601"/>
+            <a:ext cx="4800608" cy="228601"/>
           </a:xfrm>
           <a:prstGeom prst="rect">
             <a:avLst/>
@@ -21628,6 +22276,10 @@
                 <a:solidFill>
                   <a:srgbClr val="FFFFFF"/>
                 </a:solidFill>
+                <a:latin typeface="+mj-lt"/>
+                <a:ea typeface="+mj-ea"/>
+                <a:cs typeface="+mj-cs"/>
+                <a:sym typeface="Calibri"/>
               </a:defRPr>
             </a:pPr>
           </a:p>
@@ -21663,6 +22315,10 @@
                 <a:solidFill>
                   <a:srgbClr val="FFFFFF"/>
                 </a:solidFill>
+                <a:latin typeface="+mj-lt"/>
+                <a:ea typeface="+mj-ea"/>
+                <a:cs typeface="+mj-cs"/>
+                <a:sym typeface="Calibri"/>
               </a:defRPr>
             </a:pPr>
           </a:p>
@@ -21698,6 +22354,10 @@
                 <a:solidFill>
                   <a:srgbClr val="FFFFFF"/>
                 </a:solidFill>
+                <a:latin typeface="+mj-lt"/>
+                <a:ea typeface="+mj-ea"/>
+                <a:cs typeface="+mj-cs"/>
+                <a:sym typeface="Calibri"/>
               </a:defRPr>
             </a:pPr>
           </a:p>
@@ -21740,7 +22400,7 @@
         <p:spPr>
           <a:xfrm>
             <a:off x="1954458" y="2523744"/>
-            <a:ext cx="164617" cy="164617"/>
+            <a:ext cx="164619" cy="164619"/>
           </a:xfrm>
           <a:prstGeom prst="ellipse">
             <a:avLst/>
@@ -21761,6 +22421,10 @@
                 <a:solidFill>
                   <a:srgbClr val="FFFFFF"/>
                 </a:solidFill>
+                <a:latin typeface="+mj-lt"/>
+                <a:ea typeface="+mj-ea"/>
+                <a:cs typeface="+mj-cs"/>
+                <a:sym typeface="Calibri"/>
               </a:defRPr>
             </a:pPr>
           </a:p>
@@ -21823,7 +22487,7 @@
         <p:spPr>
           <a:xfrm>
             <a:off x="795528" y="2926075"/>
-            <a:ext cx="2482458" cy="3200416"/>
+            <a:ext cx="2482458" cy="3200417"/>
           </a:xfrm>
           <a:prstGeom prst="rect">
             <a:avLst/>
@@ -21846,6 +22510,10 @@
                 <a:solidFill>
                   <a:srgbClr val="FFFFFF"/>
                 </a:solidFill>
+                <a:latin typeface="+mj-lt"/>
+                <a:ea typeface="+mj-ea"/>
+                <a:cs typeface="+mj-cs"/>
+                <a:sym typeface="Calibri"/>
               </a:defRPr>
             </a:pPr>
           </a:p>
@@ -21881,6 +22549,10 @@
                 <a:solidFill>
                   <a:srgbClr val="FFFFFF"/>
                 </a:solidFill>
+                <a:latin typeface="+mj-lt"/>
+                <a:ea typeface="+mj-ea"/>
+                <a:cs typeface="+mj-cs"/>
+                <a:sym typeface="Calibri"/>
               </a:defRPr>
             </a:pPr>
           </a:p>
@@ -22041,10 +22713,10 @@
         </p:nvGrpSpPr>
         <p:grpSpPr>
           <a:xfrm>
-            <a:off x="941817" y="5705837"/>
-            <a:ext cx="1517938" cy="310926"/>
-            <a:chOff x="-1" y="0"/>
-            <a:chExt cx="1517936" cy="310924"/>
+            <a:off x="941816" y="5705835"/>
+            <a:ext cx="1517941" cy="310929"/>
+            <a:chOff x="-1" y="-1"/>
+            <a:chExt cx="1517940" cy="310927"/>
           </a:xfrm>
         </p:grpSpPr>
         <p:sp>
@@ -22055,8 +22727,8 @@
           </p:nvSpPr>
           <p:spPr>
             <a:xfrm>
-              <a:off x="-2" y="-1"/>
-              <a:ext cx="1517938" cy="310925"/>
+              <a:off x="-2" y="-2"/>
+              <a:ext cx="1517941" cy="310929"/>
             </a:xfrm>
             <a:prstGeom prst="roundRect">
               <a:avLst>
@@ -22083,6 +22755,10 @@
                   <a:solidFill>
                     <a:srgbClr val="FFFFFF"/>
                   </a:solidFill>
+                  <a:latin typeface="+mj-lt"/>
+                  <a:ea typeface="+mj-ea"/>
+                  <a:cs typeface="+mj-cs"/>
+                  <a:sym typeface="Calibri"/>
                 </a:defRPr>
               </a:pPr>
             </a:p>
@@ -22096,7 +22772,7 @@
           </p:nvSpPr>
           <p:spPr>
             <a:xfrm>
-              <a:off x="409188" y="66551"/>
+              <a:off x="409189" y="66551"/>
               <a:ext cx="699543" cy="177801"/>
             </a:xfrm>
             <a:prstGeom prst="rect">
@@ -22149,7 +22825,7 @@
         <p:spPr>
           <a:xfrm>
             <a:off x="4656375" y="2523744"/>
-            <a:ext cx="164617" cy="164617"/>
+            <a:ext cx="164619" cy="164619"/>
           </a:xfrm>
           <a:prstGeom prst="ellipse">
             <a:avLst/>
@@ -22170,6 +22846,10 @@
                 <a:solidFill>
                   <a:srgbClr val="FFFFFF"/>
                 </a:solidFill>
+                <a:latin typeface="+mj-lt"/>
+                <a:ea typeface="+mj-ea"/>
+                <a:cs typeface="+mj-cs"/>
+                <a:sym typeface="Calibri"/>
               </a:defRPr>
             </a:pPr>
           </a:p>
@@ -22184,7 +22864,7 @@
         <p:spPr>
           <a:xfrm>
             <a:off x="3387714" y="2103120"/>
-            <a:ext cx="2701927" cy="177801"/>
+            <a:ext cx="2701928" cy="177801"/>
           </a:xfrm>
           <a:prstGeom prst="rect">
             <a:avLst/>
@@ -22232,7 +22912,7 @@
         <p:spPr>
           <a:xfrm>
             <a:off x="3497441" y="2926075"/>
-            <a:ext cx="2482471" cy="3200416"/>
+            <a:ext cx="2482472" cy="3200417"/>
           </a:xfrm>
           <a:prstGeom prst="rect">
             <a:avLst/>
@@ -22255,6 +22935,10 @@
                 <a:solidFill>
                   <a:srgbClr val="FFFFFF"/>
                 </a:solidFill>
+                <a:latin typeface="+mj-lt"/>
+                <a:ea typeface="+mj-ea"/>
+                <a:cs typeface="+mj-cs"/>
+                <a:sym typeface="Calibri"/>
               </a:defRPr>
             </a:pPr>
           </a:p>
@@ -22269,7 +22953,7 @@
         <p:spPr>
           <a:xfrm>
             <a:off x="3497441" y="2926077"/>
-            <a:ext cx="2482471" cy="54870"/>
+            <a:ext cx="2482472" cy="54870"/>
           </a:xfrm>
           <a:prstGeom prst="rect">
             <a:avLst/>
@@ -22290,6 +22974,10 @@
                 <a:solidFill>
                   <a:srgbClr val="FFFFFF"/>
                 </a:solidFill>
+                <a:latin typeface="+mj-lt"/>
+                <a:ea typeface="+mj-ea"/>
+                <a:cs typeface="+mj-cs"/>
+                <a:sym typeface="Calibri"/>
               </a:defRPr>
             </a:pPr>
           </a:p>
@@ -22450,10 +23138,10 @@
         </p:nvGrpSpPr>
         <p:grpSpPr>
           <a:xfrm>
-            <a:off x="3643728" y="5705837"/>
-            <a:ext cx="1517938" cy="310926"/>
-            <a:chOff x="-1" y="0"/>
-            <a:chExt cx="1517936" cy="310924"/>
+            <a:off x="3643726" y="5705835"/>
+            <a:ext cx="1517941" cy="310929"/>
+            <a:chOff x="-1" y="-1"/>
+            <a:chExt cx="1517940" cy="310927"/>
           </a:xfrm>
         </p:grpSpPr>
         <p:sp>
@@ -22464,8 +23152,8 @@
           </p:nvSpPr>
           <p:spPr>
             <a:xfrm>
-              <a:off x="-2" y="-1"/>
-              <a:ext cx="1517938" cy="310925"/>
+              <a:off x="-2" y="-2"/>
+              <a:ext cx="1517941" cy="310929"/>
             </a:xfrm>
             <a:prstGeom prst="roundRect">
               <a:avLst>
@@ -22492,6 +23180,10 @@
                   <a:solidFill>
                     <a:srgbClr val="FFFFFF"/>
                   </a:solidFill>
+                  <a:latin typeface="+mj-lt"/>
+                  <a:ea typeface="+mj-ea"/>
+                  <a:cs typeface="+mj-cs"/>
+                  <a:sym typeface="Calibri"/>
                 </a:defRPr>
               </a:pPr>
             </a:p>
@@ -22505,7 +23197,7 @@
           </p:nvSpPr>
           <p:spPr>
             <a:xfrm>
-              <a:off x="409188" y="66551"/>
+              <a:off x="409189" y="66551"/>
               <a:ext cx="699543" cy="177801"/>
             </a:xfrm>
             <a:prstGeom prst="rect">
@@ -22558,7 +23250,7 @@
         <p:spPr>
           <a:xfrm>
             <a:off x="7358288" y="2523744"/>
-            <a:ext cx="164617" cy="164617"/>
+            <a:ext cx="164619" cy="164619"/>
           </a:xfrm>
           <a:prstGeom prst="ellipse">
             <a:avLst/>
@@ -22579,6 +23271,10 @@
                 <a:solidFill>
                   <a:srgbClr val="FFFFFF"/>
                 </a:solidFill>
+                <a:latin typeface="+mj-lt"/>
+                <a:ea typeface="+mj-ea"/>
+                <a:cs typeface="+mj-cs"/>
+                <a:sym typeface="Calibri"/>
               </a:defRPr>
             </a:pPr>
           </a:p>
@@ -22593,7 +23289,7 @@
         <p:spPr>
           <a:xfrm>
             <a:off x="6089629" y="2103120"/>
-            <a:ext cx="2701927" cy="177801"/>
+            <a:ext cx="2701928" cy="177801"/>
           </a:xfrm>
           <a:prstGeom prst="rect">
             <a:avLst/>
@@ -22641,7 +23337,7 @@
         <p:spPr>
           <a:xfrm>
             <a:off x="6199356" y="2926075"/>
-            <a:ext cx="2482460" cy="3200416"/>
+            <a:ext cx="2482460" cy="3200417"/>
           </a:xfrm>
           <a:prstGeom prst="rect">
             <a:avLst/>
@@ -22664,6 +23360,10 @@
                 <a:solidFill>
                   <a:srgbClr val="FFFFFF"/>
                 </a:solidFill>
+                <a:latin typeface="+mj-lt"/>
+                <a:ea typeface="+mj-ea"/>
+                <a:cs typeface="+mj-cs"/>
+                <a:sym typeface="Calibri"/>
               </a:defRPr>
             </a:pPr>
           </a:p>
@@ -22699,6 +23399,10 @@
                 <a:solidFill>
                   <a:srgbClr val="FFFFFF"/>
                 </a:solidFill>
+                <a:latin typeface="+mj-lt"/>
+                <a:ea typeface="+mj-ea"/>
+                <a:cs typeface="+mj-cs"/>
+                <a:sym typeface="Calibri"/>
               </a:defRPr>
             </a:pPr>
           </a:p>
@@ -22859,10 +23563,10 @@
         </p:nvGrpSpPr>
         <p:grpSpPr>
           <a:xfrm>
-            <a:off x="6345644" y="5705837"/>
-            <a:ext cx="1353349" cy="310926"/>
-            <a:chOff x="-1" y="0"/>
-            <a:chExt cx="1353347" cy="310924"/>
+            <a:off x="6345643" y="5705835"/>
+            <a:ext cx="1353352" cy="310929"/>
+            <a:chOff x="-1" y="-1"/>
+            <a:chExt cx="1353351" cy="310927"/>
           </a:xfrm>
         </p:grpSpPr>
         <p:sp>
@@ -22873,8 +23577,8 @@
           </p:nvSpPr>
           <p:spPr>
             <a:xfrm>
-              <a:off x="-2" y="-1"/>
-              <a:ext cx="1353349" cy="310925"/>
+              <a:off x="-2" y="-2"/>
+              <a:ext cx="1353352" cy="310929"/>
             </a:xfrm>
             <a:prstGeom prst="roundRect">
               <a:avLst>
@@ -22901,6 +23605,10 @@
                   <a:solidFill>
                     <a:srgbClr val="FFFFFF"/>
                   </a:solidFill>
+                  <a:latin typeface="+mj-lt"/>
+                  <a:ea typeface="+mj-ea"/>
+                  <a:cs typeface="+mj-cs"/>
+                  <a:sym typeface="Calibri"/>
                 </a:defRPr>
               </a:pPr>
             </a:p>
@@ -22914,7 +23622,7 @@
           </p:nvSpPr>
           <p:spPr>
             <a:xfrm>
-              <a:off x="365124" y="66551"/>
+              <a:off x="365125" y="66551"/>
               <a:ext cx="623082" cy="177801"/>
             </a:xfrm>
             <a:prstGeom prst="rect">
@@ -22967,7 +23675,7 @@
         <p:spPr>
           <a:xfrm>
             <a:off x="10060205" y="2523744"/>
-            <a:ext cx="164617" cy="164617"/>
+            <a:ext cx="164619" cy="164619"/>
           </a:xfrm>
           <a:prstGeom prst="ellipse">
             <a:avLst/>
@@ -22988,6 +23696,10 @@
                 <a:solidFill>
                   <a:srgbClr val="FFFFFF"/>
                 </a:solidFill>
+                <a:latin typeface="+mj-lt"/>
+                <a:ea typeface="+mj-ea"/>
+                <a:cs typeface="+mj-cs"/>
+                <a:sym typeface="Calibri"/>
               </a:defRPr>
             </a:pPr>
           </a:p>
@@ -23050,7 +23762,7 @@
         <p:spPr>
           <a:xfrm>
             <a:off x="8901272" y="2926075"/>
-            <a:ext cx="2482471" cy="3200416"/>
+            <a:ext cx="2482472" cy="3200417"/>
           </a:xfrm>
           <a:prstGeom prst="rect">
             <a:avLst/>
@@ -23073,6 +23785,10 @@
                 <a:solidFill>
                   <a:srgbClr val="FFFFFF"/>
                 </a:solidFill>
+                <a:latin typeface="+mj-lt"/>
+                <a:ea typeface="+mj-ea"/>
+                <a:cs typeface="+mj-cs"/>
+                <a:sym typeface="Calibri"/>
               </a:defRPr>
             </a:pPr>
           </a:p>
@@ -23087,7 +23803,7 @@
         <p:spPr>
           <a:xfrm>
             <a:off x="8901272" y="2926077"/>
-            <a:ext cx="2482471" cy="54870"/>
+            <a:ext cx="2482472" cy="54870"/>
           </a:xfrm>
           <a:prstGeom prst="rect">
             <a:avLst/>
@@ -23108,6 +23824,10 @@
                 <a:solidFill>
                   <a:srgbClr val="FFFFFF"/>
                 </a:solidFill>
+                <a:latin typeface="+mj-lt"/>
+                <a:ea typeface="+mj-ea"/>
+                <a:cs typeface="+mj-cs"/>
+                <a:sym typeface="Calibri"/>
               </a:defRPr>
             </a:pPr>
           </a:p>
@@ -23268,10 +23988,10 @@
         </p:nvGrpSpPr>
         <p:grpSpPr>
           <a:xfrm>
-            <a:off x="9047560" y="5705837"/>
-            <a:ext cx="1517938" cy="310926"/>
-            <a:chOff x="-1" y="0"/>
-            <a:chExt cx="1517936" cy="310924"/>
+            <a:off x="9047559" y="5705835"/>
+            <a:ext cx="1517941" cy="310929"/>
+            <a:chOff x="-1" y="-1"/>
+            <a:chExt cx="1517940" cy="310927"/>
           </a:xfrm>
         </p:grpSpPr>
         <p:sp>
@@ -23282,8 +24002,8 @@
           </p:nvSpPr>
           <p:spPr>
             <a:xfrm>
-              <a:off x="-2" y="-1"/>
-              <a:ext cx="1517938" cy="310925"/>
+              <a:off x="-2" y="-2"/>
+              <a:ext cx="1517941" cy="310929"/>
             </a:xfrm>
             <a:prstGeom prst="roundRect">
               <a:avLst>
@@ -23310,6 +24030,10 @@
                   <a:solidFill>
                     <a:srgbClr val="FFFFFF"/>
                   </a:solidFill>
+                  <a:latin typeface="+mj-lt"/>
+                  <a:ea typeface="+mj-ea"/>
+                  <a:cs typeface="+mj-cs"/>
+                  <a:sym typeface="Calibri"/>
                 </a:defRPr>
               </a:pPr>
             </a:p>
@@ -23323,7 +24047,7 @@
           </p:nvSpPr>
           <p:spPr>
             <a:xfrm>
-              <a:off x="409188" y="66551"/>
+              <a:off x="409189" y="66551"/>
               <a:ext cx="699543" cy="177801"/>
             </a:xfrm>
             <a:prstGeom prst="rect">
@@ -23376,7 +24100,7 @@
         <p:spPr>
           <a:xfrm>
             <a:off x="6675118" y="6428232"/>
-            <a:ext cx="4800607" cy="228601"/>
+            <a:ext cx="4800608" cy="228601"/>
           </a:xfrm>
           <a:prstGeom prst="rect">
             <a:avLst/>
@@ -23602,6 +24326,10 @@
                 <a:solidFill>
                   <a:srgbClr val="FFFFFF"/>
                 </a:solidFill>
+                <a:latin typeface="+mj-lt"/>
+                <a:ea typeface="+mj-ea"/>
+                <a:cs typeface="+mj-cs"/>
+                <a:sym typeface="Calibri"/>
               </a:defRPr>
             </a:pPr>
           </a:p>
@@ -23637,6 +24365,10 @@
                 <a:solidFill>
                   <a:srgbClr val="FFFFFF"/>
                 </a:solidFill>
+                <a:latin typeface="+mj-lt"/>
+                <a:ea typeface="+mj-ea"/>
+                <a:cs typeface="+mj-cs"/>
+                <a:sym typeface="Calibri"/>
               </a:defRPr>
             </a:pPr>
           </a:p>
@@ -23672,6 +24404,10 @@
                 <a:solidFill>
                   <a:srgbClr val="FFFFFF"/>
                 </a:solidFill>
+                <a:latin typeface="+mj-lt"/>
+                <a:ea typeface="+mj-ea"/>
+                <a:cs typeface="+mj-cs"/>
+                <a:sym typeface="Calibri"/>
               </a:defRPr>
             </a:pPr>
           </a:p>
@@ -23686,7 +24422,7 @@
         <p:spPr>
           <a:xfrm>
             <a:off x="685798" y="2212848"/>
-            <a:ext cx="100598" cy="100597"/>
+            <a:ext cx="100599" cy="100598"/>
           </a:xfrm>
           <a:prstGeom prst="rect">
             <a:avLst/>
@@ -23707,6 +24443,10 @@
                 <a:solidFill>
                   <a:srgbClr val="FFFFFF"/>
                 </a:solidFill>
+                <a:latin typeface="+mj-lt"/>
+                <a:ea typeface="+mj-ea"/>
+                <a:cs typeface="+mj-cs"/>
+                <a:sym typeface="Calibri"/>
               </a:defRPr>
             </a:pPr>
           </a:p>
@@ -23772,7 +24512,7 @@
         <p:spPr>
           <a:xfrm>
             <a:off x="685798" y="2972305"/>
-            <a:ext cx="100598" cy="100597"/>
+            <a:ext cx="100599" cy="100598"/>
           </a:xfrm>
           <a:prstGeom prst="rect">
             <a:avLst/>
@@ -23793,6 +24533,10 @@
                 <a:solidFill>
                   <a:srgbClr val="FFFFFF"/>
                 </a:solidFill>
+                <a:latin typeface="+mj-lt"/>
+                <a:ea typeface="+mj-ea"/>
+                <a:cs typeface="+mj-cs"/>
+                <a:sym typeface="Calibri"/>
               </a:defRPr>
             </a:pPr>
           </a:p>
@@ -23858,7 +24602,7 @@
         <p:spPr>
           <a:xfrm>
             <a:off x="685798" y="3425190"/>
-            <a:ext cx="100598" cy="100597"/>
+            <a:ext cx="100599" cy="100598"/>
           </a:xfrm>
           <a:prstGeom prst="rect">
             <a:avLst/>
@@ -23879,6 +24623,10 @@
                 <a:solidFill>
                   <a:srgbClr val="FFFFFF"/>
                 </a:solidFill>
+                <a:latin typeface="+mj-lt"/>
+                <a:ea typeface="+mj-ea"/>
+                <a:cs typeface="+mj-cs"/>
+                <a:sym typeface="Calibri"/>
               </a:defRPr>
             </a:pPr>
           </a:p>
@@ -23944,7 +24692,7 @@
         <p:spPr>
           <a:xfrm>
             <a:off x="6675118" y="6428232"/>
-            <a:ext cx="4800607" cy="228601"/>
+            <a:ext cx="4800608" cy="228601"/>
           </a:xfrm>
           <a:prstGeom prst="rect">
             <a:avLst/>
@@ -24218,6 +24966,10 @@
                 <a:solidFill>
                   <a:srgbClr val="FFFFFF"/>
                 </a:solidFill>
+                <a:latin typeface="+mj-lt"/>
+                <a:ea typeface="+mj-ea"/>
+                <a:cs typeface="+mj-cs"/>
+                <a:sym typeface="Calibri"/>
               </a:defRPr>
             </a:pPr>
           </a:p>
@@ -24253,6 +25005,10 @@
                 <a:solidFill>
                   <a:srgbClr val="FFFFFF"/>
                 </a:solidFill>
+                <a:latin typeface="+mj-lt"/>
+                <a:ea typeface="+mj-ea"/>
+                <a:cs typeface="+mj-cs"/>
+                <a:sym typeface="Calibri"/>
               </a:defRPr>
             </a:pPr>
           </a:p>
@@ -24288,6 +25044,10 @@
                 <a:solidFill>
                   <a:srgbClr val="FFFFFF"/>
                 </a:solidFill>
+                <a:latin typeface="+mj-lt"/>
+                <a:ea typeface="+mj-ea"/>
+                <a:cs typeface="+mj-cs"/>
+                <a:sym typeface="Calibri"/>
               </a:defRPr>
             </a:pPr>
           </a:p>
@@ -24302,7 +25062,7 @@
         <p:spPr>
           <a:xfrm>
             <a:off x="685798" y="2414016"/>
-            <a:ext cx="100598" cy="100597"/>
+            <a:ext cx="100599" cy="100598"/>
           </a:xfrm>
           <a:prstGeom prst="rect">
             <a:avLst/>
@@ -24323,6 +25083,10 @@
                 <a:solidFill>
                   <a:srgbClr val="FFFFFF"/>
                 </a:solidFill>
+                <a:latin typeface="+mj-lt"/>
+                <a:ea typeface="+mj-ea"/>
+                <a:cs typeface="+mj-cs"/>
+                <a:sym typeface="Calibri"/>
               </a:defRPr>
             </a:pPr>
           </a:p>
@@ -24388,7 +25152,7 @@
         <p:spPr>
           <a:xfrm>
             <a:off x="685798" y="2848864"/>
-            <a:ext cx="100598" cy="100597"/>
+            <a:ext cx="100599" cy="100598"/>
           </a:xfrm>
           <a:prstGeom prst="rect">
             <a:avLst/>
@@ -24409,6 +25173,10 @@
                 <a:solidFill>
                   <a:srgbClr val="FFFFFF"/>
                 </a:solidFill>
+                <a:latin typeface="+mj-lt"/>
+                <a:ea typeface="+mj-ea"/>
+                <a:cs typeface="+mj-cs"/>
+                <a:sym typeface="Calibri"/>
               </a:defRPr>
             </a:pPr>
           </a:p>
@@ -24474,7 +25242,7 @@
         <p:spPr>
           <a:xfrm>
             <a:off x="685798" y="3283710"/>
-            <a:ext cx="100598" cy="100597"/>
+            <a:ext cx="100599" cy="100598"/>
           </a:xfrm>
           <a:prstGeom prst="rect">
             <a:avLst/>
@@ -24495,6 +25263,10 @@
                 <a:solidFill>
                   <a:srgbClr val="FFFFFF"/>
                 </a:solidFill>
+                <a:latin typeface="+mj-lt"/>
+                <a:ea typeface="+mj-ea"/>
+                <a:cs typeface="+mj-cs"/>
+                <a:sym typeface="Calibri"/>
               </a:defRPr>
             </a:pPr>
           </a:p>
@@ -24560,7 +25332,7 @@
         <p:spPr>
           <a:xfrm>
             <a:off x="685798" y="3718559"/>
-            <a:ext cx="100598" cy="100597"/>
+            <a:ext cx="100599" cy="100598"/>
           </a:xfrm>
           <a:prstGeom prst="rect">
             <a:avLst/>
@@ -24581,6 +25353,10 @@
                 <a:solidFill>
                   <a:srgbClr val="FFFFFF"/>
                 </a:solidFill>
+                <a:latin typeface="+mj-lt"/>
+                <a:ea typeface="+mj-ea"/>
+                <a:cs typeface="+mj-cs"/>
+                <a:sym typeface="Calibri"/>
               </a:defRPr>
             </a:pPr>
           </a:p>
@@ -24646,7 +25422,7 @@
         <p:spPr>
           <a:xfrm>
             <a:off x="685800" y="4153406"/>
-            <a:ext cx="10807659" cy="640093"/>
+            <a:ext cx="10807659" cy="640094"/>
           </a:xfrm>
           <a:prstGeom prst="rect">
             <a:avLst/>
@@ -24667,6 +25443,10 @@
                 <a:solidFill>
                   <a:srgbClr val="FFFFFF"/>
                 </a:solidFill>
+                <a:latin typeface="+mj-lt"/>
+                <a:ea typeface="+mj-ea"/>
+                <a:cs typeface="+mj-cs"/>
+                <a:sym typeface="Calibri"/>
               </a:defRPr>
             </a:pPr>
           </a:p>
@@ -24680,8 +25460,8 @@
         </p:nvSpPr>
         <p:spPr>
           <a:xfrm>
-            <a:off x="914393" y="4226559"/>
-            <a:ext cx="2926098" cy="215901"/>
+            <a:off x="914392" y="4226559"/>
+            <a:ext cx="2926100" cy="215901"/>
           </a:xfrm>
           <a:prstGeom prst="rect">
             <a:avLst/>
@@ -24777,7 +25557,7 @@
         <p:spPr>
           <a:xfrm>
             <a:off x="6675118" y="6428232"/>
-            <a:ext cx="4800607" cy="228601"/>
+            <a:ext cx="4800608" cy="228601"/>
           </a:xfrm>
           <a:prstGeom prst="rect">
             <a:avLst/>
@@ -25003,6 +25783,10 @@
                 <a:solidFill>
                   <a:srgbClr val="FFFFFF"/>
                 </a:solidFill>
+                <a:latin typeface="+mj-lt"/>
+                <a:ea typeface="+mj-ea"/>
+                <a:cs typeface="+mj-cs"/>
+                <a:sym typeface="Calibri"/>
               </a:defRPr>
             </a:pPr>
           </a:p>
@@ -25038,6 +25822,10 @@
                 <a:solidFill>
                   <a:srgbClr val="FFFFFF"/>
                 </a:solidFill>
+                <a:latin typeface="+mj-lt"/>
+                <a:ea typeface="+mj-ea"/>
+                <a:cs typeface="+mj-cs"/>
+                <a:sym typeface="Calibri"/>
               </a:defRPr>
             </a:pPr>
           </a:p>
@@ -25073,6 +25861,10 @@
                 <a:solidFill>
                   <a:srgbClr val="FFFFFF"/>
                 </a:solidFill>
+                <a:latin typeface="+mj-lt"/>
+                <a:ea typeface="+mj-ea"/>
+                <a:cs typeface="+mj-cs"/>
+                <a:sym typeface="Calibri"/>
               </a:defRPr>
             </a:pPr>
           </a:p>
@@ -25086,8 +25878,8 @@
         </p:nvSpPr>
         <p:spPr>
           <a:xfrm>
-            <a:off x="2889219" y="1975103"/>
-            <a:ext cx="6400822" cy="4041650"/>
+            <a:off x="2889218" y="1975103"/>
+            <a:ext cx="6400824" cy="4041650"/>
           </a:xfrm>
           <a:prstGeom prst="rect">
             <a:avLst/>
@@ -25110,6 +25902,10 @@
                 <a:solidFill>
                   <a:srgbClr val="FFFFFF"/>
                 </a:solidFill>
+                <a:latin typeface="+mj-lt"/>
+                <a:ea typeface="+mj-ea"/>
+                <a:cs typeface="+mj-cs"/>
+                <a:sym typeface="Calibri"/>
               </a:defRPr>
             </a:pPr>
           </a:p>
@@ -25153,7 +25949,7 @@
         <p:spPr>
           <a:xfrm>
             <a:off x="2889229" y="1975103"/>
-            <a:ext cx="310909" cy="54870"/>
+            <a:ext cx="310910" cy="54870"/>
           </a:xfrm>
           <a:prstGeom prst="rect">
             <a:avLst/>
@@ -25174,6 +25970,10 @@
                 <a:solidFill>
                   <a:srgbClr val="FFFFFF"/>
                 </a:solidFill>
+                <a:latin typeface="+mj-lt"/>
+                <a:ea typeface="+mj-ea"/>
+                <a:cs typeface="+mj-cs"/>
+                <a:sym typeface="Calibri"/>
               </a:defRPr>
             </a:pPr>
           </a:p>
@@ -25188,7 +25988,7 @@
         <p:spPr>
           <a:xfrm>
             <a:off x="2889229" y="1975103"/>
-            <a:ext cx="54870" cy="310909"/>
+            <a:ext cx="54870" cy="310910"/>
           </a:xfrm>
           <a:prstGeom prst="rect">
             <a:avLst/>
@@ -25209,6 +26009,10 @@
                 <a:solidFill>
                   <a:srgbClr val="FFFFFF"/>
                 </a:solidFill>
+                <a:latin typeface="+mj-lt"/>
+                <a:ea typeface="+mj-ea"/>
+                <a:cs typeface="+mj-cs"/>
+                <a:sym typeface="Calibri"/>
               </a:defRPr>
             </a:pPr>
           </a:p>
@@ -25222,10 +26026,10 @@
         </p:nvGrpSpPr>
         <p:grpSpPr>
           <a:xfrm>
-            <a:off x="2944075" y="6126463"/>
-            <a:ext cx="3986814" cy="310925"/>
-            <a:chOff x="0" y="-1"/>
-            <a:chExt cx="3986813" cy="310924"/>
+            <a:off x="2944073" y="6126461"/>
+            <a:ext cx="3986817" cy="310928"/>
+            <a:chOff x="-1" y="0"/>
+            <a:chExt cx="3986815" cy="310926"/>
           </a:xfrm>
         </p:grpSpPr>
         <p:sp>
@@ -25236,8 +26040,8 @@
           </p:nvSpPr>
           <p:spPr>
             <a:xfrm>
-              <a:off x="-1" y="-2"/>
-              <a:ext cx="3986814" cy="310926"/>
+              <a:off x="-2" y="-1"/>
+              <a:ext cx="3986817" cy="310927"/>
             </a:xfrm>
             <a:prstGeom prst="roundRect">
               <a:avLst>
@@ -25264,6 +26068,10 @@
                   <a:solidFill>
                     <a:srgbClr val="FFFFFF"/>
                   </a:solidFill>
+                  <a:latin typeface="+mj-lt"/>
+                  <a:ea typeface="+mj-ea"/>
+                  <a:cs typeface="+mj-cs"/>
+                  <a:sym typeface="Calibri"/>
                 </a:defRPr>
               </a:pPr>
             </a:p>
@@ -25277,7 +26085,7 @@
           </p:nvSpPr>
           <p:spPr>
             <a:xfrm>
-              <a:off x="310643" y="47500"/>
+              <a:off x="310643" y="47501"/>
               <a:ext cx="3365501" cy="215901"/>
             </a:xfrm>
             <a:prstGeom prst="rect">
@@ -25330,7 +26138,7 @@
         <p:spPr>
           <a:xfrm>
             <a:off x="6675118" y="6537959"/>
-            <a:ext cx="4800607" cy="228601"/>
+            <a:ext cx="4800608" cy="228601"/>
           </a:xfrm>
           <a:prstGeom prst="rect">
             <a:avLst/>
@@ -25366,6 +26174,211 @@
             <a:r>
               <a:t>»  陽春歸陽春，能跑</a:t>
             </a:r>
+          </a:p>
+        </p:txBody>
+      </p:sp>
+      <p:sp>
+        <p:nvSpPr>
+          <p:cNvPr id="346" name="TextBox 345"/>
+          <p:cNvSpPr txBox="1"/>
+          <p:nvPr/>
+        </p:nvSpPr>
+        <p:spPr>
+          <a:xfrm>
+            <a:off x="777240" y="3787721"/>
+            <a:ext cx="1920240" cy="288398"/>
+          </a:xfrm>
+          <a:prstGeom prst="rect">
+            <a:avLst/>
+          </a:prstGeom>
+          <a:ln w="12700">
+            <a:miter lim="400000"/>
+          </a:ln>
+          <a:extLst>
+            <a:ext uri="{C572A759-6A51-4108-AA02-DFA0A04FC94B}">
+              <ma14:wrappingTextBoxFlag xmlns:ma14="http://schemas.microsoft.com/office/mac/drawingml/2011/main" val="1"/>
+            </a:ext>
+          </a:extLst>
+        </p:spPr>
+        <p:txBody>
+          <a:bodyPr lIns="0" tIns="0" rIns="0" bIns="0" anchor="ctr">
+            <a:spAutoFit/>
+          </a:bodyPr>
+          <a:lstStyle>
+            <a:lvl1pPr>
+              <a:defRPr b="1" sz="1600" u="sng">
+                <a:solidFill>
+                  <a:srgbClr val="0000FF"/>
+                </a:solidFill>
+                <a:uFill>
+                  <a:solidFill>
+                    <a:srgbClr val="0000FF"/>
+                  </a:solidFill>
+                </a:uFill>
+                <a:latin typeface="Menlo Regular"/>
+                <a:ea typeface="Menlo Regular"/>
+                <a:cs typeface="Menlo Regular"/>
+                <a:sym typeface="Menlo Regular"/>
+                <a:hlinkClick r:id="rId3" invalidUrl="" action="" tgtFrame="" tooltip="" history="1" highlightClick="0" endSnd="0"/>
+              </a:defRPr>
+            </a:lvl1pPr>
+          </a:lstStyle>
+          <a:p>
+            <a:pPr>
+              <a:defRPr>
+                <a:solidFill>
+                  <a:srgbClr val="22D3EE"/>
+                </a:solidFill>
+                <a:uFillTx/>
+              </a:defRPr>
+            </a:pPr>
+            <a:r>
+              <a:rPr>
+                <a:solidFill>
+                  <a:srgbClr val="0000FF"/>
+                </a:solidFill>
+                <a:uFill>
+                  <a:solidFill>
+                    <a:srgbClr val="0000FF"/>
+                  </a:solidFill>
+                </a:uFill>
+                <a:hlinkClick r:id="rId3" invalidUrl="" action="" tgtFrame="" tooltip="" history="1" highlightClick="0" endSnd="0"/>
+              </a:rPr>
+              <a:t>看成品 ↗</a:t>
+            </a:r>
+          </a:p>
+        </p:txBody>
+      </p:sp>
+      <p:sp>
+        <p:nvSpPr>
+          <p:cNvPr id="347" name="Connector 346"/>
+          <p:cNvSpPr/>
+          <p:nvPr/>
+        </p:nvSpPr>
+        <p:spPr>
+          <a:xfrm>
+            <a:off x="777239" y="3566159"/>
+            <a:ext cx="822962" cy="1"/>
+          </a:xfrm>
+          <a:prstGeom prst="line">
+            <a:avLst/>
+          </a:prstGeom>
+          <a:ln w="19050">
+            <a:solidFill>
+              <a:srgbClr val="22D3EE"/>
+            </a:solidFill>
+          </a:ln>
+        </p:spPr>
+        <p:txBody>
+          <a:bodyPr lIns="45718" tIns="45718" rIns="45718" bIns="45718"/>
+          <a:lstStyle/>
+          <a:p>
+            <a:pPr/>
+          </a:p>
+        </p:txBody>
+      </p:sp>
+      <p:sp>
+        <p:nvSpPr>
+          <p:cNvPr id="348" name="Oval 347"/>
+          <p:cNvSpPr/>
+          <p:nvPr/>
+        </p:nvSpPr>
+        <p:spPr>
+          <a:xfrm>
+            <a:off x="749808" y="3538728"/>
+            <a:ext cx="54865" cy="54865"/>
+          </a:xfrm>
+          <a:prstGeom prst="ellipse">
+            <a:avLst/>
+          </a:prstGeom>
+          <a:solidFill>
+            <a:srgbClr val="F5A524"/>
+          </a:solidFill>
+          <a:ln w="12700">
+            <a:miter lim="400000"/>
+          </a:ln>
+        </p:spPr>
+        <p:txBody>
+          <a:bodyPr lIns="45718" tIns="45718" rIns="45718" bIns="45718" anchor="ctr"/>
+          <a:lstStyle/>
+          <a:p>
+            <a:pPr algn="ctr">
+              <a:defRPr>
+                <a:solidFill>
+                  <a:srgbClr val="FFFFFF"/>
+                </a:solidFill>
+              </a:defRPr>
+            </a:pPr>
+          </a:p>
+        </p:txBody>
+      </p:sp>
+      <p:sp>
+        <p:nvSpPr>
+          <p:cNvPr id="349" name="Oval 348"/>
+          <p:cNvSpPr/>
+          <p:nvPr/>
+        </p:nvSpPr>
+        <p:spPr>
+          <a:xfrm>
+            <a:off x="1161288" y="3538728"/>
+            <a:ext cx="54865" cy="54865"/>
+          </a:xfrm>
+          <a:prstGeom prst="ellipse">
+            <a:avLst/>
+          </a:prstGeom>
+          <a:solidFill>
+            <a:srgbClr val="F5A524"/>
+          </a:solidFill>
+          <a:ln w="12700">
+            <a:miter lim="400000"/>
+          </a:ln>
+        </p:spPr>
+        <p:txBody>
+          <a:bodyPr lIns="45718" tIns="45718" rIns="45718" bIns="45718" anchor="ctr"/>
+          <a:lstStyle/>
+          <a:p>
+            <a:pPr algn="ctr">
+              <a:defRPr>
+                <a:solidFill>
+                  <a:srgbClr val="FFFFFF"/>
+                </a:solidFill>
+              </a:defRPr>
+            </a:pPr>
+          </a:p>
+        </p:txBody>
+      </p:sp>
+      <p:sp>
+        <p:nvSpPr>
+          <p:cNvPr id="350" name="Oval 349"/>
+          <p:cNvSpPr/>
+          <p:nvPr/>
+        </p:nvSpPr>
+        <p:spPr>
+          <a:xfrm>
+            <a:off x="1572767" y="3538728"/>
+            <a:ext cx="54865" cy="54865"/>
+          </a:xfrm>
+          <a:prstGeom prst="ellipse">
+            <a:avLst/>
+          </a:prstGeom>
+          <a:solidFill>
+            <a:srgbClr val="F5A524"/>
+          </a:solidFill>
+          <a:ln w="12700">
+            <a:miter lim="400000"/>
+          </a:ln>
+        </p:spPr>
+        <p:txBody>
+          <a:bodyPr lIns="45718" tIns="45718" rIns="45718" bIns="45718" anchor="ctr"/>
+          <a:lstStyle/>
+          <a:p>
+            <a:pPr algn="ctr">
+              <a:defRPr>
+                <a:solidFill>
+                  <a:srgbClr val="FFFFFF"/>
+                </a:solidFill>
+              </a:defRPr>
+            </a:pPr>
           </a:p>
         </p:txBody>
       </p:sp>
@@ -25633,10 +26646,10 @@
             </a:solidFill>
             <a:effectLst/>
             <a:uFillTx/>
-            <a:latin typeface="+mj-lt"/>
-            <a:ea typeface="+mj-ea"/>
-            <a:cs typeface="+mj-cs"/>
-            <a:sym typeface="Calibri"/>
+            <a:latin typeface="+mn-lt"/>
+            <a:ea typeface="+mn-ea"/>
+            <a:cs typeface="+mn-cs"/>
+            <a:sym typeface="Helvetica"/>
           </a:defRPr>
         </a:defPPr>
         <a:lvl1pPr marL="0" marR="0" indent="0" algn="l" defTabSz="914400" rtl="0" fontAlgn="auto" latinLnBrk="1" hangingPunct="0">
@@ -26210,10 +27223,10 @@
             </a:solidFill>
             <a:effectLst/>
             <a:uFillTx/>
-            <a:latin typeface="+mj-lt"/>
-            <a:ea typeface="+mj-ea"/>
-            <a:cs typeface="+mj-cs"/>
-            <a:sym typeface="Calibri"/>
+            <a:latin typeface="+mn-lt"/>
+            <a:ea typeface="+mn-ea"/>
+            <a:cs typeface="+mn-cs"/>
+            <a:sym typeface="Helvetica"/>
           </a:defRPr>
         </a:defPPr>
         <a:lvl1pPr marL="0" marR="0" indent="0" algn="l" defTabSz="914400" rtl="0" fontAlgn="auto" latinLnBrk="1" hangingPunct="0">
@@ -26717,10 +27730,10 @@
             </a:solidFill>
             <a:effectLst/>
             <a:uFillTx/>
-            <a:latin typeface="+mj-lt"/>
-            <a:ea typeface="+mj-ea"/>
-            <a:cs typeface="+mj-cs"/>
-            <a:sym typeface="Calibri"/>
+            <a:latin typeface="+mn-lt"/>
+            <a:ea typeface="+mn-ea"/>
+            <a:cs typeface="+mn-cs"/>
+            <a:sym typeface="Helvetica"/>
           </a:defRPr>
         </a:defPPr>
         <a:lvl1pPr marL="0" marR="0" indent="0" algn="l" defTabSz="914400" rtl="0" fontAlgn="auto" latinLnBrk="1" hangingPunct="0">
@@ -27294,10 +28307,10 @@
             </a:solidFill>
             <a:effectLst/>
             <a:uFillTx/>
-            <a:latin typeface="+mj-lt"/>
-            <a:ea typeface="+mj-ea"/>
-            <a:cs typeface="+mj-cs"/>
-            <a:sym typeface="Calibri"/>
+            <a:latin typeface="+mn-lt"/>
+            <a:ea typeface="+mn-ea"/>
+            <a:cs typeface="+mn-cs"/>
+            <a:sym typeface="Helvetica"/>
           </a:defRPr>
         </a:defPPr>
         <a:lvl1pPr marL="0" marR="0" indent="0" algn="l" defTabSz="914400" rtl="0" fontAlgn="auto" latinLnBrk="1" hangingPunct="0">
